--- a/ВКР.pptx
+++ b/ВКР.pptx
@@ -212,7 +212,7 @@
           <a:p>
             <a:fld id="{31713541-B05E-4552-95DD-0156478D5135}" type="datetimeFigureOut">
               <a:rPr lang="ru-RU" smtClean="0"/>
-              <a:t>12.05.2026</a:t>
+              <a:t>13.05.2026</a:t>
             </a:fld>
             <a:endParaRPr lang="ru-RU"/>
           </a:p>
@@ -519,7 +519,7 @@
           <a:p>
             <a:fld id="{ABD338A3-B5FA-4892-8782-04A8FAC2DE2D}" type="datetime1">
               <a:rPr lang="ru-RU" smtClean="0"/>
-              <a:t>12.05.2026</a:t>
+              <a:t>13.05.2026</a:t>
             </a:fld>
             <a:endParaRPr lang="ru-RU"/>
           </a:p>
@@ -940,7 +940,7 @@
           <a:p>
             <a:fld id="{E45DF212-0581-4804-9196-08E59AD85A60}" type="datetime1">
               <a:rPr lang="ru-RU" smtClean="0"/>
-              <a:t>12.05.2026</a:t>
+              <a:t>13.05.2026</a:t>
             </a:fld>
             <a:endParaRPr lang="ru-RU"/>
           </a:p>
@@ -1151,7 +1151,7 @@
           <a:p>
             <a:fld id="{85A33102-27BA-4101-BD19-C265B43D1861}" type="datetime1">
               <a:rPr lang="ru-RU" smtClean="0"/>
-              <a:t>12.05.2026</a:t>
+              <a:t>13.05.2026</a:t>
             </a:fld>
             <a:endParaRPr lang="ru-RU"/>
           </a:p>
@@ -1387,7 +1387,7 @@
           <a:p>
             <a:fld id="{FA39DC75-0073-477D-B85F-B87BD2D9AA66}" type="datetime1">
               <a:rPr lang="ru-RU" smtClean="0"/>
-              <a:t>12.05.2026</a:t>
+              <a:t>13.05.2026</a:t>
             </a:fld>
             <a:endParaRPr lang="ru-RU"/>
           </a:p>
@@ -1677,7 +1677,7 @@
           <a:p>
             <a:fld id="{3826988C-DC8F-439B-AB31-15A4297BC55F}" type="datetime1">
               <a:rPr lang="ru-RU" smtClean="0"/>
-              <a:t>12.05.2026</a:t>
+              <a:t>13.05.2026</a:t>
             </a:fld>
             <a:endParaRPr lang="ru-RU"/>
           </a:p>
@@ -1945,7 +1945,7 @@
           <a:p>
             <a:fld id="{1FA422C7-A0AF-4B73-A3E0-92773191928A}" type="datetime1">
               <a:rPr lang="ru-RU" smtClean="0"/>
-              <a:t>12.05.2026</a:t>
+              <a:t>13.05.2026</a:t>
             </a:fld>
             <a:endParaRPr lang="ru-RU"/>
           </a:p>
@@ -2360,7 +2360,7 @@
           <a:p>
             <a:fld id="{AE075EF7-06F9-47F2-ABB5-15A865F5A607}" type="datetime1">
               <a:rPr lang="ru-RU" smtClean="0"/>
-              <a:t>12.05.2026</a:t>
+              <a:t>13.05.2026</a:t>
             </a:fld>
             <a:endParaRPr lang="ru-RU"/>
           </a:p>
@@ -2504,7 +2504,7 @@
           <a:p>
             <a:fld id="{18133A35-A3AC-4FD5-9F62-E2E842F797D6}" type="datetime1">
               <a:rPr lang="ru-RU" smtClean="0"/>
-              <a:t>12.05.2026</a:t>
+              <a:t>13.05.2026</a:t>
             </a:fld>
             <a:endParaRPr lang="ru-RU"/>
           </a:p>
@@ -2620,7 +2620,7 @@
           <a:p>
             <a:fld id="{C75FB44B-5874-4EB6-914B-68491120A420}" type="datetime1">
               <a:rPr lang="ru-RU" smtClean="0"/>
-              <a:t>12.05.2026</a:t>
+              <a:t>13.05.2026</a:t>
             </a:fld>
             <a:endParaRPr lang="ru-RU"/>
           </a:p>
@@ -2934,7 +2934,7 @@
           <a:p>
             <a:fld id="{DC59103B-4E77-49D0-9E40-D0F96ACD7E42}" type="datetime1">
               <a:rPr lang="ru-RU" smtClean="0"/>
-              <a:t>12.05.2026</a:t>
+              <a:t>13.05.2026</a:t>
             </a:fld>
             <a:endParaRPr lang="ru-RU"/>
           </a:p>
@@ -3225,7 +3225,7 @@
           <a:p>
             <a:fld id="{7F0F4974-916B-4771-921F-D6B7309972A3}" type="datetime1">
               <a:rPr lang="ru-RU" smtClean="0"/>
-              <a:t>12.05.2026</a:t>
+              <a:t>13.05.2026</a:t>
             </a:fld>
             <a:endParaRPr lang="ru-RU"/>
           </a:p>
@@ -3501,7 +3501,7 @@
           <a:p>
             <a:fld id="{2732E4CB-F021-4DE4-87F8-062D97973001}" type="datetime1">
               <a:rPr lang="ru-RU" smtClean="0"/>
-              <a:t>12.05.2026</a:t>
+              <a:t>13.05.2026</a:t>
             </a:fld>
             <a:endParaRPr lang="ru-RU" dirty="0"/>
           </a:p>
@@ -5580,8 +5580,8 @@
           </a:p>
         </p:txBody>
       </p:sp>
-      <mc:AlternateContent xmlns:mc="http://schemas.openxmlformats.org/markup-compatibility/2006">
-        <mc:Choice xmlns:a14="http://schemas.microsoft.com/office/drawing/2010/main" Requires="a14">
+      <mc:AlternateContent xmlns:mc="http://schemas.openxmlformats.org/markup-compatibility/2006" xmlns:a14="http://schemas.microsoft.com/office/drawing/2010/main">
+        <mc:Choice Requires="a14">
           <p:graphicFrame>
             <p:nvGraphicFramePr>
               <p:cNvPr id="9" name="Таблица 8">
@@ -5718,6 +5718,7 @@
                         <a:bodyPr/>
                         <a:lstStyle/>
                         <a:p>
+                          <a:pPr/>
                           <a14:m>
                             <m:oMathPara xmlns:m="http://schemas.openxmlformats.org/officeDocument/2006/math">
                               <m:oMathParaPr>
@@ -5796,6 +5797,7 @@
                         <a:bodyPr/>
                         <a:lstStyle/>
                         <a:p>
+                          <a:pPr/>
                           <a14:m>
                             <m:oMathPara xmlns:m="http://schemas.openxmlformats.org/officeDocument/2006/math">
                               <m:oMathParaPr>
@@ -5932,6 +5934,7 @@
                         <a:bodyPr/>
                         <a:lstStyle/>
                         <a:p>
+                          <a:pPr/>
                           <a14:m>
                             <m:oMathPara xmlns:m="http://schemas.openxmlformats.org/officeDocument/2006/math">
                               <m:oMathParaPr>
@@ -6010,6 +6013,7 @@
                         <a:bodyPr/>
                         <a:lstStyle/>
                         <a:p>
+                          <a:pPr/>
                           <a14:m>
                             <m:oMathPara xmlns:m="http://schemas.openxmlformats.org/officeDocument/2006/math">
                               <m:oMathParaPr>
@@ -6110,6 +6114,7 @@
                         <a:bodyPr/>
                         <a:lstStyle/>
                         <a:p>
+                          <a:pPr/>
                           <a14:m>
                             <m:oMathPara xmlns:m="http://schemas.openxmlformats.org/officeDocument/2006/math">
                               <m:oMathParaPr>
@@ -6195,6 +6200,7 @@
                         <a:bodyPr/>
                         <a:lstStyle/>
                         <a:p>
+                          <a:pPr/>
                           <a14:m>
                             <m:oMathPara xmlns:m="http://schemas.openxmlformats.org/officeDocument/2006/math">
                               <m:oMathParaPr>
@@ -6272,7 +6278,7 @@
             </a:graphic>
           </p:graphicFrame>
         </mc:Choice>
-        <mc:Fallback>
+        <mc:Fallback xmlns="">
           <p:graphicFrame>
             <p:nvGraphicFramePr>
               <p:cNvPr id="9" name="Таблица 8">
@@ -6774,8 +6780,8 @@
           </a:p>
         </p:txBody>
       </p:sp>
-      <mc:AlternateContent xmlns:mc="http://schemas.openxmlformats.org/markup-compatibility/2006">
-        <mc:Choice xmlns:a14="http://schemas.microsoft.com/office/drawing/2010/main" Requires="a14">
+      <mc:AlternateContent xmlns:mc="http://schemas.openxmlformats.org/markup-compatibility/2006" xmlns:a14="http://schemas.microsoft.com/office/drawing/2010/main">
+        <mc:Choice Requires="a14">
           <p:graphicFrame>
             <p:nvGraphicFramePr>
               <p:cNvPr id="6" name="Таблица 5">
@@ -7077,6 +7083,7 @@
                         <a:bodyPr/>
                         <a:lstStyle/>
                         <a:p>
+                          <a:pPr/>
                           <a14:m>
                             <m:oMathPara xmlns:m="http://schemas.openxmlformats.org/officeDocument/2006/math">
                               <m:oMathParaPr>
@@ -7141,6 +7148,7 @@
                         <a:bodyPr/>
                         <a:lstStyle/>
                         <a:p>
+                          <a:pPr/>
                           <a14:m>
                             <m:oMathPara xmlns:m="http://schemas.openxmlformats.org/officeDocument/2006/math">
                               <m:oMathParaPr>
@@ -7211,7 +7219,7 @@
             </a:graphic>
           </p:graphicFrame>
         </mc:Choice>
-        <mc:Fallback>
+        <mc:Fallback xmlns="">
           <p:graphicFrame>
             <p:nvGraphicFramePr>
               <p:cNvPr id="6" name="Таблица 5">
@@ -7913,8 +7921,8 @@
           </a:p>
         </p:txBody>
       </p:sp>
-      <mc:AlternateContent xmlns:mc="http://schemas.openxmlformats.org/markup-compatibility/2006">
-        <mc:Choice xmlns:a14="http://schemas.microsoft.com/office/drawing/2010/main" Requires="a14">
+      <mc:AlternateContent xmlns:mc="http://schemas.openxmlformats.org/markup-compatibility/2006" xmlns:a14="http://schemas.microsoft.com/office/drawing/2010/main">
+        <mc:Choice Requires="a14">
           <p:sp>
             <p:nvSpPr>
               <p:cNvPr id="3" name="Объект 2">
@@ -7990,13 +7998,17 @@
                       <m:rPr>
                         <m:sty m:val="p"/>
                       </m:rPr>
-                      <a:rPr lang="en-US" sz="1600" b="0" i="0"/>
+                      <a:rPr lang="en-US" sz="1600" b="0" i="0">
+                        <a:latin typeface="Cambria Math" panose="02040503050406030204" pitchFamily="18" charset="0"/>
+                      </a:rPr>
                       <m:t>M</m:t>
                     </m:r>
                     <m:d>
                       <m:dPr>
                         <m:ctrlPr>
-                          <a:rPr lang="ru-RU" sz="1600"/>
+                          <a:rPr lang="ru-RU" sz="1600" i="1">
+                            <a:latin typeface="Cambria Math" panose="02040503050406030204" pitchFamily="18" charset="0"/>
+                          </a:rPr>
                         </m:ctrlPr>
                       </m:dPr>
                       <m:e>
@@ -8004,19 +8016,25 @@
                           <m:rPr>
                             <m:sty m:val="p"/>
                           </m:rPr>
-                          <a:rPr lang="en-US" sz="1600" b="0" i="0"/>
+                          <a:rPr lang="en-US" sz="1600" b="0" i="0">
+                            <a:latin typeface="Cambria Math" panose="02040503050406030204" pitchFamily="18" charset="0"/>
+                          </a:rPr>
                           <m:t>n</m:t>
                         </m:r>
                       </m:e>
                     </m:d>
                     <m:r>
-                      <a:rPr lang="en-US" sz="1600" b="0" i="0"/>
+                      <a:rPr lang="en-US" sz="1600" b="0" i="0">
+                        <a:latin typeface="Cambria Math" panose="02040503050406030204" pitchFamily="18" charset="0"/>
+                      </a:rPr>
                       <m:t>=</m:t>
                     </m:r>
                     <m:f>
                       <m:fPr>
                         <m:ctrlPr>
-                          <a:rPr lang="ru-RU" sz="1600"/>
+                          <a:rPr lang="ru-RU" sz="1600" i="1">
+                            <a:latin typeface="Cambria Math" panose="02040503050406030204" pitchFamily="18" charset="0"/>
+                          </a:rPr>
                         </m:ctrlPr>
                       </m:fPr>
                       <m:num>
@@ -8024,24 +8042,32 @@
                           <m:rPr>
                             <m:sty m:val="p"/>
                           </m:rPr>
-                          <a:rPr lang="en-US" sz="1600" b="0" i="0"/>
+                          <a:rPr lang="en-US" sz="1600" b="0" i="0">
+                            <a:latin typeface="Cambria Math" panose="02040503050406030204" pitchFamily="18" charset="0"/>
+                          </a:rPr>
                           <m:t>n</m:t>
                         </m:r>
                         <m:r>
-                          <a:rPr lang="en-US" sz="1600" b="0" i="0"/>
+                          <a:rPr lang="en-US" sz="1600" b="0" i="0">
+                            <a:latin typeface="Cambria Math" panose="02040503050406030204" pitchFamily="18" charset="0"/>
+                          </a:rPr>
                           <m:t> </m:t>
                         </m:r>
                         <m:r>
                           <m:rPr>
                             <m:sty m:val="p"/>
                           </m:rPr>
-                          <a:rPr lang="en-US" sz="1600" b="0" i="0"/>
+                          <a:rPr lang="en-US" sz="1600" b="0" i="0">
+                            <a:latin typeface="Cambria Math" panose="02040503050406030204" pitchFamily="18" charset="0"/>
+                          </a:rPr>
                           <m:t>lo</m:t>
                         </m:r>
                         <m:sSub>
                           <m:sSubPr>
                             <m:ctrlPr>
-                              <a:rPr lang="ru-RU" sz="1600"/>
+                              <a:rPr lang="ru-RU" sz="1600" i="1">
+                                <a:latin typeface="Cambria Math" panose="02040503050406030204" pitchFamily="18" charset="0"/>
+                              </a:rPr>
                             </m:ctrlPr>
                           </m:sSubPr>
                           <m:e>
@@ -8049,13 +8075,17 @@
                               <m:rPr>
                                 <m:sty m:val="p"/>
                               </m:rPr>
-                              <a:rPr lang="en-US" sz="1600" b="0" i="0"/>
+                              <a:rPr lang="en-US" sz="1600" b="0" i="0">
+                                <a:latin typeface="Cambria Math" panose="02040503050406030204" pitchFamily="18" charset="0"/>
+                              </a:rPr>
                               <m:t>g</m:t>
                             </m:r>
                           </m:e>
                           <m:sub>
                             <m:r>
-                              <a:rPr lang="en-US" sz="1600" b="0" i="0"/>
+                              <a:rPr lang="en-US" sz="1600" b="0" i="0">
+                                <a:latin typeface="Cambria Math" panose="02040503050406030204" pitchFamily="18" charset="0"/>
+                              </a:rPr>
                               <m:t>2</m:t>
                             </m:r>
                           </m:sub>
@@ -8064,25 +8094,33 @@
                           <m:rPr>
                             <m:sty m:val="p"/>
                           </m:rPr>
-                          <a:rPr lang="en-US" sz="1600" b="0" i="0"/>
+                          <a:rPr lang="en-US" sz="1600" b="0" i="0">
+                            <a:latin typeface="Cambria Math" panose="02040503050406030204" pitchFamily="18" charset="0"/>
+                          </a:rPr>
                           <m:t>n</m:t>
                         </m:r>
                       </m:num>
                       <m:den>
                         <m:r>
-                          <a:rPr lang="en-US" sz="1600" b="0" i="0"/>
+                          <a:rPr lang="en-US" sz="1600" b="0" i="0">
+                            <a:latin typeface="Cambria Math" panose="02040503050406030204" pitchFamily="18" charset="0"/>
+                          </a:rPr>
                           <m:t>2</m:t>
                         </m:r>
                       </m:den>
                     </m:f>
                     <m:r>
-                      <a:rPr lang="en-US" sz="1600" b="0" i="0"/>
+                      <a:rPr lang="en-US" sz="1600" b="0" i="0">
+                        <a:latin typeface="Cambria Math" panose="02040503050406030204" pitchFamily="18" charset="0"/>
+                      </a:rPr>
                       <m:t>−</m:t>
                     </m:r>
                     <m:f>
                       <m:fPr>
                         <m:ctrlPr>
-                          <a:rPr lang="ru-RU" sz="1600"/>
+                          <a:rPr lang="ru-RU" sz="1600" i="1">
+                            <a:latin typeface="Cambria Math" panose="02040503050406030204" pitchFamily="18" charset="0"/>
+                          </a:rPr>
                         </m:ctrlPr>
                       </m:fPr>
                       <m:num>
@@ -8090,19 +8128,25 @@
                           <m:rPr>
                             <m:sty m:val="p"/>
                           </m:rPr>
-                          <a:rPr lang="en-US" sz="1600" b="0" i="0"/>
+                          <a:rPr lang="en-US" sz="1600" b="0" i="0">
+                            <a:latin typeface="Cambria Math" panose="02040503050406030204" pitchFamily="18" charset="0"/>
+                          </a:rPr>
                           <m:t>n</m:t>
                         </m:r>
                       </m:num>
                       <m:den>
                         <m:r>
-                          <a:rPr lang="en-US" sz="1600" b="0" i="0"/>
+                          <a:rPr lang="en-US" sz="1600" b="0" i="0">
+                            <a:latin typeface="Cambria Math" panose="02040503050406030204" pitchFamily="18" charset="0"/>
+                          </a:rPr>
                           <m:t>2</m:t>
                         </m:r>
                       </m:den>
                     </m:f>
                     <m:r>
-                      <a:rPr lang="en-US" sz="1600" b="0" i="0"/>
+                      <a:rPr lang="en-US" sz="1600" b="0" i="0">
+                        <a:latin typeface="Cambria Math" panose="02040503050406030204" pitchFamily="18" charset="0"/>
+                      </a:rPr>
                       <m:t>+ 1</m:t>
                     </m:r>
                   </m:oMath>
@@ -8725,7 +8769,7 @@
             </p:txBody>
           </p:sp>
         </mc:Choice>
-        <mc:Fallback>
+        <mc:Fallback xmlns="">
           <p:sp>
             <p:nvSpPr>
               <p:cNvPr id="3" name="Объект 2">
@@ -9271,8 +9315,8 @@
           </a:p>
         </p:txBody>
       </p:sp>
-      <mc:AlternateContent xmlns:mc="http://schemas.openxmlformats.org/markup-compatibility/2006">
-        <mc:Choice xmlns:a14="http://schemas.microsoft.com/office/drawing/2010/main" Requires="a14">
+      <mc:AlternateContent xmlns:mc="http://schemas.openxmlformats.org/markup-compatibility/2006" xmlns:a14="http://schemas.microsoft.com/office/drawing/2010/main">
+        <mc:Choice Requires="a14">
           <p:sp>
             <p:nvSpPr>
               <p:cNvPr id="3" name="Объект 2">
@@ -9814,7 +9858,7 @@
             </p:txBody>
           </p:sp>
         </mc:Choice>
-        <mc:Fallback>
+        <mc:Fallback xmlns="">
           <p:sp>
             <p:nvSpPr>
               <p:cNvPr id="3" name="Объект 2">
@@ -9998,7 +10042,7 @@
             </p:spPr>
             <p:txBody>
               <a:bodyPr>
-                <a:normAutofit lnSpcReduction="10000"/>
+                <a:normAutofit fontScale="92500"/>
               </a:bodyPr>
               <a:lstStyle/>
               <a:p>
@@ -10099,7 +10143,50 @@
                     <a:ea typeface="Calibri" panose="020F0502020204030204" pitchFamily="34" charset="0"/>
                     <a:cs typeface="Times New Roman" panose="02020603050405020304" pitchFamily="18" charset="0"/>
                   </a:rPr>
-                  <a:t>	1) Рекурсивно отсортировать левую половину длины n/2.</a:t>
+                  <a:t>	1) Рекурсивно отсортировать левую половину длины </a:t>
+                </a:r>
+                <a14:m>
+                  <m:oMath xmlns:m="http://schemas.openxmlformats.org/officeDocument/2006/math">
+                    <m:f>
+                      <m:fPr>
+                        <m:ctrlPr>
+                          <a:rPr lang="ru-RU" sz="1200" i="1" kern="100" dirty="0" smtClean="0">
+                            <a:latin typeface="Cambria Math" panose="02040503050406030204" pitchFamily="18" charset="0"/>
+                            <a:ea typeface="Calibri" panose="020F0502020204030204" pitchFamily="34" charset="0"/>
+                            <a:cs typeface="Times New Roman" panose="02020603050405020304" pitchFamily="18" charset="0"/>
+                          </a:rPr>
+                        </m:ctrlPr>
+                      </m:fPr>
+                      <m:num>
+                        <m:r>
+                          <a:rPr lang="ru-RU" sz="1200" i="1" kern="100" dirty="0" smtClean="0">
+                            <a:latin typeface="Cambria Math" panose="02040503050406030204" pitchFamily="18" charset="0"/>
+                            <a:ea typeface="Calibri" panose="020F0502020204030204" pitchFamily="34" charset="0"/>
+                            <a:cs typeface="Times New Roman" panose="02020603050405020304" pitchFamily="18" charset="0"/>
+                          </a:rPr>
+                          <m:t>𝑛</m:t>
+                        </m:r>
+                      </m:num>
+                      <m:den>
+                        <m:r>
+                          <a:rPr lang="ru-RU" sz="1200" i="1" kern="100" dirty="0" smtClean="0">
+                            <a:latin typeface="Cambria Math" panose="02040503050406030204" pitchFamily="18" charset="0"/>
+                            <a:ea typeface="Calibri" panose="020F0502020204030204" pitchFamily="34" charset="0"/>
+                            <a:cs typeface="Times New Roman" panose="02020603050405020304" pitchFamily="18" charset="0"/>
+                          </a:rPr>
+                          <m:t>2</m:t>
+                        </m:r>
+                      </m:den>
+                    </m:f>
+                  </m:oMath>
+                </a14:m>
+                <a:r>
+                  <a:rPr lang="ru-RU" sz="1200" kern="100" dirty="0">
+                    <a:latin typeface="Times New Roman" panose="02020603050405020304" pitchFamily="18" charset="0"/>
+                    <a:ea typeface="Calibri" panose="020F0502020204030204" pitchFamily="34" charset="0"/>
+                    <a:cs typeface="Times New Roman" panose="02020603050405020304" pitchFamily="18" charset="0"/>
+                  </a:rPr>
+                  <a:t>.</a:t>
                 </a:r>
               </a:p>
               <a:p>
@@ -10778,7 +10865,7 @@
               <a:blipFill>
                 <a:blip r:embed="rId2"/>
                 <a:stretch>
-                  <a:fillRect l="-57"/>
+                  <a:fillRect/>
                 </a:stretch>
               </a:blipFill>
             </p:spPr>
@@ -10915,8 +11002,8 @@
           </a:p>
         </p:txBody>
       </p:sp>
-      <mc:AlternateContent xmlns:mc="http://schemas.openxmlformats.org/markup-compatibility/2006">
-        <mc:Choice xmlns:a14="http://schemas.microsoft.com/office/drawing/2010/main" Requires="a14">
+      <mc:AlternateContent xmlns:mc="http://schemas.openxmlformats.org/markup-compatibility/2006" xmlns:a14="http://schemas.microsoft.com/office/drawing/2010/main">
+        <mc:Choice Requires="a14">
           <p:sp>
             <p:nvSpPr>
               <p:cNvPr id="3" name="Объект 2">
@@ -11905,7 +11992,7 @@
             </p:txBody>
           </p:sp>
         </mc:Choice>
-        <mc:Fallback>
+        <mc:Fallback xmlns="">
           <p:sp>
             <p:nvSpPr>
               <p:cNvPr id="3" name="Объект 2">
@@ -12684,9 +12771,10 @@
                       <m:d>
                         <m:dPr>
                           <m:ctrlPr>
-                            <a:rPr lang="ru-RU" sz="1200" i="1" smtClean="0">
+                            <a:rPr lang="en-US" sz="1800" b="0" i="1" smtClean="0">
                               <a:effectLst/>
                               <a:latin typeface="Cambria Math" panose="02040503050406030204" pitchFamily="18" charset="0"/>
+                              <a:cs typeface="Times New Roman" panose="02020603050405020304" pitchFamily="18" charset="0"/>
                             </a:rPr>
                           </m:ctrlPr>
                         </m:dPr>
@@ -12695,7 +12783,6 @@
                             <m:fPr>
                               <m:ctrlPr>
                                 <a:rPr lang="ru-RU" sz="1200" i="1">
-                                  <a:effectLst/>
                                   <a:latin typeface="Cambria Math" panose="02040503050406030204" pitchFamily="18" charset="0"/>
                                 </a:rPr>
                               </m:ctrlPr>
@@ -12703,7 +12790,6 @@
                             <m:num>
                               <m:r>
                                 <a:rPr lang="en-US" sz="1800" i="1">
-                                  <a:effectLst/>
                                   <a:latin typeface="Cambria Math" panose="02040503050406030204" pitchFamily="18" charset="0"/>
                                   <a:ea typeface="Times New Roman" panose="02020603050405020304" pitchFamily="18" charset="0"/>
                                   <a:cs typeface="Times New Roman" panose="02020603050405020304" pitchFamily="18" charset="0"/>
@@ -12714,7 +12800,6 @@
                             <m:den>
                               <m:r>
                                 <a:rPr lang="en-US" sz="1800" i="1">
-                                  <a:effectLst/>
                                   <a:latin typeface="Cambria Math" panose="02040503050406030204" pitchFamily="18" charset="0"/>
                                   <a:ea typeface="Times New Roman" panose="02020603050405020304" pitchFamily="18" charset="0"/>
                                   <a:cs typeface="Times New Roman" panose="02020603050405020304" pitchFamily="18" charset="0"/>
@@ -13460,7 +13545,7 @@
               <a:blipFill>
                 <a:blip r:embed="rId2"/>
                 <a:stretch>
-                  <a:fillRect l="-348" t="-980" r="-638" b="-1541"/>
+                  <a:fillRect l="-362" t="-581" r="-603" b="-1744"/>
                 </a:stretch>
               </a:blipFill>
             </p:spPr>
@@ -13595,8 +13680,8 @@
           </a:p>
         </p:txBody>
       </p:sp>
-      <mc:AlternateContent xmlns:mc="http://schemas.openxmlformats.org/markup-compatibility/2006">
-        <mc:Choice xmlns:a14="http://schemas.microsoft.com/office/drawing/2010/main" Requires="a14">
+      <mc:AlternateContent xmlns:mc="http://schemas.openxmlformats.org/markup-compatibility/2006" xmlns:a14="http://schemas.microsoft.com/office/drawing/2010/main">
+        <mc:Choice Requires="a14">
           <p:sp>
             <p:nvSpPr>
               <p:cNvPr id="3" name="Объект 2">
@@ -13910,7 +13995,7 @@
             </p:txBody>
           </p:sp>
         </mc:Choice>
-        <mc:Fallback>
+        <mc:Fallback xmlns="">
           <p:sp>
             <p:nvSpPr>
               <p:cNvPr id="3" name="Объект 2">

--- a/ВКР.pptx
+++ b/ВКР.pptx
@@ -212,7 +212,7 @@
           <a:p>
             <a:fld id="{31713541-B05E-4552-95DD-0156478D5135}" type="datetimeFigureOut">
               <a:rPr lang="ru-RU" smtClean="0"/>
-              <a:t>13.05.2026</a:t>
+              <a:t>14.05.2026</a:t>
             </a:fld>
             <a:endParaRPr lang="ru-RU"/>
           </a:p>
@@ -519,7 +519,7 @@
           <a:p>
             <a:fld id="{ABD338A3-B5FA-4892-8782-04A8FAC2DE2D}" type="datetime1">
               <a:rPr lang="ru-RU" smtClean="0"/>
-              <a:t>13.05.2026</a:t>
+              <a:t>14.05.2026</a:t>
             </a:fld>
             <a:endParaRPr lang="ru-RU"/>
           </a:p>
@@ -940,7 +940,7 @@
           <a:p>
             <a:fld id="{E45DF212-0581-4804-9196-08E59AD85A60}" type="datetime1">
               <a:rPr lang="ru-RU" smtClean="0"/>
-              <a:t>13.05.2026</a:t>
+              <a:t>14.05.2026</a:t>
             </a:fld>
             <a:endParaRPr lang="ru-RU"/>
           </a:p>
@@ -1151,7 +1151,7 @@
           <a:p>
             <a:fld id="{85A33102-27BA-4101-BD19-C265B43D1861}" type="datetime1">
               <a:rPr lang="ru-RU" smtClean="0"/>
-              <a:t>13.05.2026</a:t>
+              <a:t>14.05.2026</a:t>
             </a:fld>
             <a:endParaRPr lang="ru-RU"/>
           </a:p>
@@ -1387,7 +1387,7 @@
           <a:p>
             <a:fld id="{FA39DC75-0073-477D-B85F-B87BD2D9AA66}" type="datetime1">
               <a:rPr lang="ru-RU" smtClean="0"/>
-              <a:t>13.05.2026</a:t>
+              <a:t>14.05.2026</a:t>
             </a:fld>
             <a:endParaRPr lang="ru-RU"/>
           </a:p>
@@ -1677,7 +1677,7 @@
           <a:p>
             <a:fld id="{3826988C-DC8F-439B-AB31-15A4297BC55F}" type="datetime1">
               <a:rPr lang="ru-RU" smtClean="0"/>
-              <a:t>13.05.2026</a:t>
+              <a:t>14.05.2026</a:t>
             </a:fld>
             <a:endParaRPr lang="ru-RU"/>
           </a:p>
@@ -1945,7 +1945,7 @@
           <a:p>
             <a:fld id="{1FA422C7-A0AF-4B73-A3E0-92773191928A}" type="datetime1">
               <a:rPr lang="ru-RU" smtClean="0"/>
-              <a:t>13.05.2026</a:t>
+              <a:t>14.05.2026</a:t>
             </a:fld>
             <a:endParaRPr lang="ru-RU"/>
           </a:p>
@@ -2360,7 +2360,7 @@
           <a:p>
             <a:fld id="{AE075EF7-06F9-47F2-ABB5-15A865F5A607}" type="datetime1">
               <a:rPr lang="ru-RU" smtClean="0"/>
-              <a:t>13.05.2026</a:t>
+              <a:t>14.05.2026</a:t>
             </a:fld>
             <a:endParaRPr lang="ru-RU"/>
           </a:p>
@@ -2504,7 +2504,7 @@
           <a:p>
             <a:fld id="{18133A35-A3AC-4FD5-9F62-E2E842F797D6}" type="datetime1">
               <a:rPr lang="ru-RU" smtClean="0"/>
-              <a:t>13.05.2026</a:t>
+              <a:t>14.05.2026</a:t>
             </a:fld>
             <a:endParaRPr lang="ru-RU"/>
           </a:p>
@@ -2620,7 +2620,7 @@
           <a:p>
             <a:fld id="{C75FB44B-5874-4EB6-914B-68491120A420}" type="datetime1">
               <a:rPr lang="ru-RU" smtClean="0"/>
-              <a:t>13.05.2026</a:t>
+              <a:t>14.05.2026</a:t>
             </a:fld>
             <a:endParaRPr lang="ru-RU"/>
           </a:p>
@@ -2934,7 +2934,7 @@
           <a:p>
             <a:fld id="{DC59103B-4E77-49D0-9E40-D0F96ACD7E42}" type="datetime1">
               <a:rPr lang="ru-RU" smtClean="0"/>
-              <a:t>13.05.2026</a:t>
+              <a:t>14.05.2026</a:t>
             </a:fld>
             <a:endParaRPr lang="ru-RU"/>
           </a:p>
@@ -3225,7 +3225,7 @@
           <a:p>
             <a:fld id="{7F0F4974-916B-4771-921F-D6B7309972A3}" type="datetime1">
               <a:rPr lang="ru-RU" smtClean="0"/>
-              <a:t>13.05.2026</a:t>
+              <a:t>14.05.2026</a:t>
             </a:fld>
             <a:endParaRPr lang="ru-RU"/>
           </a:p>
@@ -3501,7 +3501,7 @@
           <a:p>
             <a:fld id="{2732E4CB-F021-4DE4-87F8-062D97973001}" type="datetime1">
               <a:rPr lang="ru-RU" smtClean="0"/>
-              <a:t>13.05.2026</a:t>
+              <a:t>14.05.2026</a:t>
             </a:fld>
             <a:endParaRPr lang="ru-RU" dirty="0"/>
           </a:p>
@@ -4550,869 +4550,2102 @@
           </a:p>
         </p:txBody>
       </p:sp>
-      <p:graphicFrame>
-        <p:nvGraphicFramePr>
-          <p:cNvPr id="11" name="Объект 10">
-            <a:extLst>
-              <a:ext uri="{FF2B5EF4-FFF2-40B4-BE49-F238E27FC236}">
-                <a16:creationId xmlns:a16="http://schemas.microsoft.com/office/drawing/2014/main" id="{3486DF08-C118-CE32-DF9F-1101F9970D6D}"/>
-              </a:ext>
-            </a:extLst>
-          </p:cNvPr>
-          <p:cNvGraphicFramePr>
-            <a:graphicFrameLocks noGrp="1"/>
-          </p:cNvGraphicFramePr>
-          <p:nvPr>
-            <p:ph idx="1"/>
-            <p:extLst>
-              <p:ext uri="{D42A27DB-BD31-4B8C-83A1-F6EECF244321}">
-                <p14:modId xmlns:p14="http://schemas.microsoft.com/office/powerpoint/2010/main" val="2273703654"/>
-              </p:ext>
-            </p:extLst>
-          </p:nvPr>
-        </p:nvGraphicFramePr>
-        <p:xfrm>
-          <a:off x="567559" y="1753126"/>
-          <a:ext cx="10786240" cy="3188479"/>
-        </p:xfrm>
-        <a:graphic>
-          <a:graphicData uri="http://schemas.openxmlformats.org/drawingml/2006/table">
-            <a:tbl>
-              <a:tblPr firstRow="1" firstCol="1" bandRow="1">
-                <a:tableStyleId>{5C22544A-7EE6-4342-B048-85BDC9FD1C3A}</a:tableStyleId>
-              </a:tblPr>
-              <a:tblGrid>
-                <a:gridCol w="2696560">
-                  <a:extLst>
-                    <a:ext uri="{9D8B030D-6E8A-4147-A177-3AD203B41FA5}">
-                      <a16:colId xmlns:a16="http://schemas.microsoft.com/office/drawing/2014/main" val="1611344132"/>
-                    </a:ext>
-                  </a:extLst>
-                </a:gridCol>
-                <a:gridCol w="2696560">
-                  <a:extLst>
-                    <a:ext uri="{9D8B030D-6E8A-4147-A177-3AD203B41FA5}">
-                      <a16:colId xmlns:a16="http://schemas.microsoft.com/office/drawing/2014/main" val="503660173"/>
-                    </a:ext>
-                  </a:extLst>
-                </a:gridCol>
-                <a:gridCol w="2696560">
-                  <a:extLst>
-                    <a:ext uri="{9D8B030D-6E8A-4147-A177-3AD203B41FA5}">
-                      <a16:colId xmlns:a16="http://schemas.microsoft.com/office/drawing/2014/main" val="1941540570"/>
-                    </a:ext>
-                  </a:extLst>
-                </a:gridCol>
-                <a:gridCol w="2696560">
-                  <a:extLst>
-                    <a:ext uri="{9D8B030D-6E8A-4147-A177-3AD203B41FA5}">
-                      <a16:colId xmlns:a16="http://schemas.microsoft.com/office/drawing/2014/main" val="2122764893"/>
-                    </a:ext>
-                  </a:extLst>
-                </a:gridCol>
-              </a:tblGrid>
-              <a:tr h="452992">
-                <a:tc>
-                  <a:txBody>
-                    <a:bodyPr/>
-                    <a:lstStyle/>
-                    <a:p>
-                      <a:pPr algn="ctr">
-                        <a:lnSpc>
-                          <a:spcPct val="150000"/>
-                        </a:lnSpc>
-                        <a:spcAft>
-                          <a:spcPts val="1000"/>
-                        </a:spcAft>
-                      </a:pPr>
-                      <a:r>
-                        <a:rPr lang="ru-RU" sz="1200" dirty="0">
-                          <a:effectLst/>
-                        </a:rPr>
-                        <a:t>Алгоритм</a:t>
-                      </a:r>
-                      <a:endParaRPr lang="ru-RU" sz="1400" dirty="0">
-                        <a:effectLst/>
-                        <a:latin typeface="Times New Roman" panose="02020603050405020304" pitchFamily="18" charset="0"/>
-                        <a:ea typeface="Times New Roman" panose="02020603050405020304" pitchFamily="18" charset="0"/>
-                        <a:cs typeface="Times New Roman" panose="02020603050405020304" pitchFamily="18" charset="0"/>
-                      </a:endParaRPr>
-                    </a:p>
-                  </a:txBody>
-                  <a:tcPr marL="9525" marR="9525" marT="9525" marB="9525" anchor="ctr"/>
-                </a:tc>
-                <a:tc>
-                  <a:txBody>
-                    <a:bodyPr/>
-                    <a:lstStyle/>
-                    <a:p>
-                      <a:pPr algn="ctr">
-                        <a:lnSpc>
-                          <a:spcPct val="150000"/>
-                        </a:lnSpc>
-                        <a:spcAft>
-                          <a:spcPts val="1000"/>
-                        </a:spcAft>
-                      </a:pPr>
-                      <a:r>
-                        <a:rPr lang="ru-RU" sz="1200" dirty="0">
-                          <a:effectLst/>
-                        </a:rPr>
-                        <a:t>Нарушенное условие</a:t>
-                      </a:r>
-                      <a:endParaRPr lang="ru-RU" sz="1400" dirty="0">
-                        <a:effectLst/>
-                        <a:latin typeface="Times New Roman" panose="02020603050405020304" pitchFamily="18" charset="0"/>
-                        <a:ea typeface="Times New Roman" panose="02020603050405020304" pitchFamily="18" charset="0"/>
-                        <a:cs typeface="Times New Roman" panose="02020603050405020304" pitchFamily="18" charset="0"/>
-                      </a:endParaRPr>
-                    </a:p>
-                  </a:txBody>
-                  <a:tcPr marL="9525" marR="9525" marT="9525" marB="9525" anchor="ctr"/>
-                </a:tc>
-                <a:tc>
-                  <a:txBody>
-                    <a:bodyPr/>
-                    <a:lstStyle/>
-                    <a:p>
-                      <a:pPr algn="ctr">
-                        <a:lnSpc>
-                          <a:spcPct val="150000"/>
-                        </a:lnSpc>
-                        <a:spcAft>
-                          <a:spcPts val="1000"/>
-                        </a:spcAft>
-                      </a:pPr>
-                      <a:r>
-                        <a:rPr lang="ru-RU" sz="1200" dirty="0">
-                          <a:effectLst/>
-                        </a:rPr>
-                        <a:t>Причина</a:t>
-                      </a:r>
-                      <a:endParaRPr lang="ru-RU" sz="1400" dirty="0">
-                        <a:effectLst/>
-                        <a:latin typeface="Times New Roman" panose="02020603050405020304" pitchFamily="18" charset="0"/>
-                        <a:ea typeface="Times New Roman" panose="02020603050405020304" pitchFamily="18" charset="0"/>
-                        <a:cs typeface="Times New Roman" panose="02020603050405020304" pitchFamily="18" charset="0"/>
-                      </a:endParaRPr>
-                    </a:p>
-                  </a:txBody>
-                  <a:tcPr marL="9525" marR="9525" marT="9525" marB="9525" anchor="ctr"/>
-                </a:tc>
-                <a:tc>
-                  <a:txBody>
-                    <a:bodyPr/>
-                    <a:lstStyle/>
-                    <a:p>
-                      <a:pPr algn="ctr">
-                        <a:lnSpc>
-                          <a:spcPct val="150000"/>
-                        </a:lnSpc>
-                        <a:spcAft>
-                          <a:spcPts val="1000"/>
-                        </a:spcAft>
-                      </a:pPr>
-                      <a:r>
-                        <a:rPr lang="ru-RU" sz="1200" dirty="0">
-                          <a:effectLst/>
-                        </a:rPr>
-                        <a:t>Альтернативный метод</a:t>
-                      </a:r>
-                      <a:endParaRPr lang="ru-RU" sz="1400" dirty="0">
-                        <a:effectLst/>
-                        <a:latin typeface="Times New Roman" panose="02020603050405020304" pitchFamily="18" charset="0"/>
-                        <a:ea typeface="Times New Roman" panose="02020603050405020304" pitchFamily="18" charset="0"/>
-                        <a:cs typeface="Times New Roman" panose="02020603050405020304" pitchFamily="18" charset="0"/>
-                      </a:endParaRPr>
-                    </a:p>
-                  </a:txBody>
-                  <a:tcPr marL="9525" marR="9525" marT="9525" marB="9525" anchor="ctr"/>
-                </a:tc>
+      <mc:AlternateContent xmlns:mc="http://schemas.openxmlformats.org/markup-compatibility/2006">
+        <mc:Choice xmlns:a14="http://schemas.microsoft.com/office/drawing/2010/main" Requires="a14">
+          <p:graphicFrame>
+            <p:nvGraphicFramePr>
+              <p:cNvPr id="11" name="Объект 10">
                 <a:extLst>
-                  <a:ext uri="{0D108BD9-81ED-4DB2-BD59-A6C34878D82A}">
-                    <a16:rowId xmlns:a16="http://schemas.microsoft.com/office/drawing/2014/main" val="3990475179"/>
+                  <a:ext uri="{FF2B5EF4-FFF2-40B4-BE49-F238E27FC236}">
+                    <a16:creationId xmlns:a16="http://schemas.microsoft.com/office/drawing/2014/main" id="{3486DF08-C118-CE32-DF9F-1101F9970D6D}"/>
                   </a:ext>
                 </a:extLst>
-              </a:tr>
-              <a:tr h="452992">
-                <a:tc>
-                  <a:txBody>
-                    <a:bodyPr/>
-                    <a:lstStyle/>
-                    <a:p>
-                      <a:pPr algn="ctr">
-                        <a:lnSpc>
-                          <a:spcPct val="150000"/>
-                        </a:lnSpc>
-                        <a:spcAft>
-                          <a:spcPts val="1000"/>
-                        </a:spcAft>
-                      </a:pPr>
-                      <a:r>
-                        <a:rPr lang="ru-RU" sz="1200" dirty="0">
-                          <a:effectLst/>
-                        </a:rPr>
-                        <a:t>Quick </a:t>
-                      </a:r>
-                      <a:r>
-                        <a:rPr lang="ru-RU" sz="1200" dirty="0" err="1">
-                          <a:effectLst/>
-                        </a:rPr>
-                        <a:t>Sort</a:t>
-                      </a:r>
-                      <a:r>
-                        <a:rPr lang="ru-RU" sz="1200" dirty="0">
-                          <a:effectLst/>
-                        </a:rPr>
-                        <a:t>, средний случай</a:t>
-                      </a:r>
-                      <a:endParaRPr lang="ru-RU" sz="1400" dirty="0">
-                        <a:effectLst/>
-                        <a:latin typeface="Times New Roman" panose="02020603050405020304" pitchFamily="18" charset="0"/>
-                        <a:ea typeface="Times New Roman" panose="02020603050405020304" pitchFamily="18" charset="0"/>
-                        <a:cs typeface="Times New Roman" panose="02020603050405020304" pitchFamily="18" charset="0"/>
-                      </a:endParaRPr>
-                    </a:p>
-                  </a:txBody>
-                  <a:tcPr marL="9525" marR="9525" marT="9525" marB="9525" anchor="ctr"/>
-                </a:tc>
-                <a:tc>
-                  <a:txBody>
-                    <a:bodyPr/>
-                    <a:lstStyle/>
-                    <a:p>
-                      <a:pPr algn="ctr">
-                        <a:lnSpc>
-                          <a:spcPct val="150000"/>
-                        </a:lnSpc>
-                        <a:spcAft>
-                          <a:spcPts val="1000"/>
-                        </a:spcAft>
-                      </a:pPr>
-                      <a:r>
-                        <a:rPr lang="ru-RU" sz="1200" dirty="0">
-                          <a:effectLst/>
-                        </a:rPr>
-                        <a:t>B</a:t>
-                      </a:r>
-                      <a:endParaRPr lang="ru-RU" sz="1400" dirty="0">
-                        <a:effectLst/>
-                        <a:latin typeface="Times New Roman" panose="02020603050405020304" pitchFamily="18" charset="0"/>
-                        <a:ea typeface="Times New Roman" panose="02020603050405020304" pitchFamily="18" charset="0"/>
-                        <a:cs typeface="Times New Roman" panose="02020603050405020304" pitchFamily="18" charset="0"/>
-                      </a:endParaRPr>
-                    </a:p>
-                  </a:txBody>
-                  <a:tcPr marL="9525" marR="9525" marT="9525" marB="9525" anchor="ctr"/>
-                </a:tc>
-                <a:tc>
-                  <a:txBody>
-                    <a:bodyPr/>
-                    <a:lstStyle/>
-                    <a:p>
-                      <a:pPr algn="ctr">
-                        <a:lnSpc>
-                          <a:spcPct val="150000"/>
-                        </a:lnSpc>
-                        <a:spcAft>
-                          <a:spcPts val="1000"/>
-                        </a:spcAft>
-                      </a:pPr>
-                      <a:r>
-                        <a:rPr lang="ru-RU" sz="1200">
-                          <a:effectLst/>
-                        </a:rPr>
-                        <a:t>случайный размер подзадач</a:t>
-                      </a:r>
-                      <a:endParaRPr lang="ru-RU" sz="1400">
-                        <a:effectLst/>
-                        <a:latin typeface="Times New Roman" panose="02020603050405020304" pitchFamily="18" charset="0"/>
-                        <a:ea typeface="Times New Roman" panose="02020603050405020304" pitchFamily="18" charset="0"/>
-                        <a:cs typeface="Times New Roman" panose="02020603050405020304" pitchFamily="18" charset="0"/>
-                      </a:endParaRPr>
-                    </a:p>
-                  </a:txBody>
-                  <a:tcPr marL="9525" marR="9525" marT="9525" marB="9525" anchor="ctr"/>
-                </a:tc>
-                <a:tc>
-                  <a:txBody>
-                    <a:bodyPr/>
-                    <a:lstStyle/>
-                    <a:p>
-                      <a:pPr algn="ctr">
-                        <a:lnSpc>
-                          <a:spcPct val="150000"/>
-                        </a:lnSpc>
-                        <a:spcAft>
-                          <a:spcPts val="1000"/>
-                        </a:spcAft>
-                      </a:pPr>
-                      <a:r>
-                        <a:rPr lang="ru-RU" sz="1200">
-                          <a:effectLst/>
-                        </a:rPr>
-                        <a:t>вероятностный анализ</a:t>
-                      </a:r>
-                      <a:endParaRPr lang="ru-RU" sz="1400">
-                        <a:effectLst/>
-                        <a:latin typeface="Times New Roman" panose="02020603050405020304" pitchFamily="18" charset="0"/>
-                        <a:ea typeface="Times New Roman" panose="02020603050405020304" pitchFamily="18" charset="0"/>
-                        <a:cs typeface="Times New Roman" panose="02020603050405020304" pitchFamily="18" charset="0"/>
-                      </a:endParaRPr>
-                    </a:p>
-                  </a:txBody>
-                  <a:tcPr marL="9525" marR="9525" marT="9525" marB="9525" anchor="ctr"/>
-                </a:tc>
+              </p:cNvPr>
+              <p:cNvGraphicFramePr>
+                <a:graphicFrameLocks noGrp="1"/>
+              </p:cNvGraphicFramePr>
+              <p:nvPr>
+                <p:ph idx="1"/>
+                <p:extLst>
+                  <p:ext uri="{D42A27DB-BD31-4B8C-83A1-F6EECF244321}">
+                    <p14:modId xmlns:p14="http://schemas.microsoft.com/office/powerpoint/2010/main" val="2047347247"/>
+                  </p:ext>
+                </p:extLst>
+              </p:nvPr>
+            </p:nvGraphicFramePr>
+            <p:xfrm>
+              <a:off x="838200" y="1380149"/>
+              <a:ext cx="10786240" cy="4506156"/>
+            </p:xfrm>
+            <a:graphic>
+              <a:graphicData uri="http://schemas.openxmlformats.org/drawingml/2006/table">
+                <a:tbl>
+                  <a:tblPr firstRow="1" firstCol="1" bandRow="1">
+                    <a:tableStyleId>{5C22544A-7EE6-4342-B048-85BDC9FD1C3A}</a:tableStyleId>
+                  </a:tblPr>
+                  <a:tblGrid>
+                    <a:gridCol w="2696560">
+                      <a:extLst>
+                        <a:ext uri="{9D8B030D-6E8A-4147-A177-3AD203B41FA5}">
+                          <a16:colId xmlns:a16="http://schemas.microsoft.com/office/drawing/2014/main" val="1611344132"/>
+                        </a:ext>
+                      </a:extLst>
+                    </a:gridCol>
+                    <a:gridCol w="1616885">
+                      <a:extLst>
+                        <a:ext uri="{9D8B030D-6E8A-4147-A177-3AD203B41FA5}">
+                          <a16:colId xmlns:a16="http://schemas.microsoft.com/office/drawing/2014/main" val="503660173"/>
+                        </a:ext>
+                      </a:extLst>
+                    </a:gridCol>
+                    <a:gridCol w="2201392">
+                      <a:extLst>
+                        <a:ext uri="{9D8B030D-6E8A-4147-A177-3AD203B41FA5}">
+                          <a16:colId xmlns:a16="http://schemas.microsoft.com/office/drawing/2014/main" val="1941540570"/>
+                        </a:ext>
+                      </a:extLst>
+                    </a:gridCol>
+                    <a:gridCol w="4271403">
+                      <a:extLst>
+                        <a:ext uri="{9D8B030D-6E8A-4147-A177-3AD203B41FA5}">
+                          <a16:colId xmlns:a16="http://schemas.microsoft.com/office/drawing/2014/main" val="2122764893"/>
+                        </a:ext>
+                      </a:extLst>
+                    </a:gridCol>
+                  </a:tblGrid>
+                  <a:tr h="452992">
+                    <a:tc>
+                      <a:txBody>
+                        <a:bodyPr/>
+                        <a:lstStyle/>
+                        <a:p>
+                          <a:pPr algn="ctr">
+                            <a:lnSpc>
+                              <a:spcPct val="150000"/>
+                            </a:lnSpc>
+                            <a:spcAft>
+                              <a:spcPts val="1000"/>
+                            </a:spcAft>
+                          </a:pPr>
+                          <a:r>
+                            <a:rPr lang="ru-RU" sz="1200" dirty="0">
+                              <a:effectLst/>
+                            </a:rPr>
+                            <a:t>Алгоритм</a:t>
+                          </a:r>
+                          <a:endParaRPr lang="ru-RU" sz="1400" dirty="0">
+                            <a:effectLst/>
+                            <a:latin typeface="Times New Roman" panose="02020603050405020304" pitchFamily="18" charset="0"/>
+                            <a:ea typeface="Times New Roman" panose="02020603050405020304" pitchFamily="18" charset="0"/>
+                            <a:cs typeface="Times New Roman" panose="02020603050405020304" pitchFamily="18" charset="0"/>
+                          </a:endParaRPr>
+                        </a:p>
+                      </a:txBody>
+                      <a:tcPr marL="9525" marR="9525" marT="9525" marB="9525" anchor="ctr"/>
+                    </a:tc>
+                    <a:tc>
+                      <a:txBody>
+                        <a:bodyPr/>
+                        <a:lstStyle/>
+                        <a:p>
+                          <a:pPr algn="ctr">
+                            <a:lnSpc>
+                              <a:spcPct val="150000"/>
+                            </a:lnSpc>
+                            <a:spcAft>
+                              <a:spcPts val="1000"/>
+                            </a:spcAft>
+                          </a:pPr>
+                          <a:r>
+                            <a:rPr lang="ru-RU" sz="1200" dirty="0">
+                              <a:effectLst/>
+                            </a:rPr>
+                            <a:t>Нарушенное условие</a:t>
+                          </a:r>
+                          <a:endParaRPr lang="ru-RU" sz="1400" dirty="0">
+                            <a:effectLst/>
+                            <a:latin typeface="Times New Roman" panose="02020603050405020304" pitchFamily="18" charset="0"/>
+                            <a:ea typeface="Times New Roman" panose="02020603050405020304" pitchFamily="18" charset="0"/>
+                            <a:cs typeface="Times New Roman" panose="02020603050405020304" pitchFamily="18" charset="0"/>
+                          </a:endParaRPr>
+                        </a:p>
+                      </a:txBody>
+                      <a:tcPr marL="9525" marR="9525" marT="9525" marB="9525" anchor="ctr"/>
+                    </a:tc>
+                    <a:tc>
+                      <a:txBody>
+                        <a:bodyPr/>
+                        <a:lstStyle/>
+                        <a:p>
+                          <a:pPr algn="ctr">
+                            <a:lnSpc>
+                              <a:spcPct val="150000"/>
+                            </a:lnSpc>
+                            <a:spcAft>
+                              <a:spcPts val="1000"/>
+                            </a:spcAft>
+                          </a:pPr>
+                          <a:r>
+                            <a:rPr lang="ru-RU" sz="1200" dirty="0">
+                              <a:effectLst/>
+                            </a:rPr>
+                            <a:t>Причина</a:t>
+                          </a:r>
+                          <a:endParaRPr lang="ru-RU" sz="1400" dirty="0">
+                            <a:effectLst/>
+                            <a:latin typeface="Times New Roman" panose="02020603050405020304" pitchFamily="18" charset="0"/>
+                            <a:ea typeface="Times New Roman" panose="02020603050405020304" pitchFamily="18" charset="0"/>
+                            <a:cs typeface="Times New Roman" panose="02020603050405020304" pitchFamily="18" charset="0"/>
+                          </a:endParaRPr>
+                        </a:p>
+                      </a:txBody>
+                      <a:tcPr marL="9525" marR="9525" marT="9525" marB="9525" anchor="ctr"/>
+                    </a:tc>
+                    <a:tc>
+                      <a:txBody>
+                        <a:bodyPr/>
+                        <a:lstStyle/>
+                        <a:p>
+                          <a:pPr algn="ctr">
+                            <a:lnSpc>
+                              <a:spcPct val="150000"/>
+                            </a:lnSpc>
+                            <a:spcAft>
+                              <a:spcPts val="1000"/>
+                            </a:spcAft>
+                          </a:pPr>
+                          <a:r>
+                            <a:rPr lang="ru-RU" sz="1200" dirty="0">
+                              <a:effectLst/>
+                            </a:rPr>
+                            <a:t>Альтернативный метод / как определить асимптотику</a:t>
+                          </a:r>
+                          <a:endParaRPr lang="ru-RU" sz="1400" dirty="0">
+                            <a:effectLst/>
+                            <a:latin typeface="Times New Roman" panose="02020603050405020304" pitchFamily="18" charset="0"/>
+                            <a:ea typeface="Times New Roman" panose="02020603050405020304" pitchFamily="18" charset="0"/>
+                            <a:cs typeface="Times New Roman" panose="02020603050405020304" pitchFamily="18" charset="0"/>
+                          </a:endParaRPr>
+                        </a:p>
+                      </a:txBody>
+                      <a:tcPr marL="9525" marR="9525" marT="9525" marB="9525" anchor="ctr"/>
+                    </a:tc>
+                    <a:extLst>
+                      <a:ext uri="{0D108BD9-81ED-4DB2-BD59-A6C34878D82A}">
+                        <a16:rowId xmlns:a16="http://schemas.microsoft.com/office/drawing/2014/main" val="3990475179"/>
+                      </a:ext>
+                    </a:extLst>
+                  </a:tr>
+                  <a:tr h="452992">
+                    <a:tc>
+                      <a:txBody>
+                        <a:bodyPr/>
+                        <a:lstStyle/>
+                        <a:p>
+                          <a:pPr algn="ctr">
+                            <a:lnSpc>
+                              <a:spcPct val="150000"/>
+                            </a:lnSpc>
+                            <a:spcAft>
+                              <a:spcPts val="1000"/>
+                            </a:spcAft>
+                          </a:pPr>
+                          <a:r>
+                            <a:rPr lang="ru-RU" sz="1200" dirty="0">
+                              <a:effectLst/>
+                            </a:rPr>
+                            <a:t>Quick </a:t>
+                          </a:r>
+                          <a:r>
+                            <a:rPr lang="ru-RU" sz="1200" dirty="0" err="1">
+                              <a:effectLst/>
+                            </a:rPr>
+                            <a:t>Sort</a:t>
+                          </a:r>
+                          <a:r>
+                            <a:rPr lang="ru-RU" sz="1200" dirty="0">
+                              <a:effectLst/>
+                            </a:rPr>
+                            <a:t>, средний случай</a:t>
+                          </a:r>
+                          <a:endParaRPr lang="ru-RU" sz="1400" dirty="0">
+                            <a:effectLst/>
+                            <a:latin typeface="Times New Roman" panose="02020603050405020304" pitchFamily="18" charset="0"/>
+                            <a:ea typeface="Times New Roman" panose="02020603050405020304" pitchFamily="18" charset="0"/>
+                            <a:cs typeface="Times New Roman" panose="02020603050405020304" pitchFamily="18" charset="0"/>
+                          </a:endParaRPr>
+                        </a:p>
+                      </a:txBody>
+                      <a:tcPr marL="9525" marR="9525" marT="9525" marB="9525" anchor="ctr"/>
+                    </a:tc>
+                    <a:tc>
+                      <a:txBody>
+                        <a:bodyPr/>
+                        <a:lstStyle/>
+                        <a:p>
+                          <a:pPr algn="ctr">
+                            <a:lnSpc>
+                              <a:spcPct val="150000"/>
+                            </a:lnSpc>
+                            <a:spcAft>
+                              <a:spcPts val="1000"/>
+                            </a:spcAft>
+                          </a:pPr>
+                          <a:r>
+                            <a:rPr lang="ru-RU" sz="1200" dirty="0">
+                              <a:effectLst/>
+                            </a:rPr>
+                            <a:t>B</a:t>
+                          </a:r>
+                          <a:endParaRPr lang="ru-RU" sz="1400" dirty="0">
+                            <a:effectLst/>
+                            <a:latin typeface="Times New Roman" panose="02020603050405020304" pitchFamily="18" charset="0"/>
+                            <a:ea typeface="Times New Roman" panose="02020603050405020304" pitchFamily="18" charset="0"/>
+                            <a:cs typeface="Times New Roman" panose="02020603050405020304" pitchFamily="18" charset="0"/>
+                          </a:endParaRPr>
+                        </a:p>
+                      </a:txBody>
+                      <a:tcPr marL="9525" marR="9525" marT="9525" marB="9525" anchor="ctr"/>
+                    </a:tc>
+                    <a:tc>
+                      <a:txBody>
+                        <a:bodyPr/>
+                        <a:lstStyle/>
+                        <a:p>
+                          <a:pPr algn="ctr">
+                            <a:lnSpc>
+                              <a:spcPct val="150000"/>
+                            </a:lnSpc>
+                            <a:spcAft>
+                              <a:spcPts val="1000"/>
+                            </a:spcAft>
+                          </a:pPr>
+                          <a:r>
+                            <a:rPr lang="ru-RU" sz="1200" dirty="0">
+                              <a:effectLst/>
+                            </a:rPr>
+                            <a:t>случайный размер подзадач</a:t>
+                          </a:r>
+                          <a:endParaRPr lang="ru-RU" sz="1400" dirty="0">
+                            <a:effectLst/>
+                            <a:latin typeface="Times New Roman" panose="02020603050405020304" pitchFamily="18" charset="0"/>
+                            <a:ea typeface="Times New Roman" panose="02020603050405020304" pitchFamily="18" charset="0"/>
+                            <a:cs typeface="Times New Roman" panose="02020603050405020304" pitchFamily="18" charset="0"/>
+                          </a:endParaRPr>
+                        </a:p>
+                      </a:txBody>
+                      <a:tcPr marL="9525" marR="9525" marT="9525" marB="9525" anchor="ctr"/>
+                    </a:tc>
+                    <a:tc>
+                      <a:txBody>
+                        <a:bodyPr/>
+                        <a:lstStyle/>
+                        <a:p>
+                          <a:pPr algn="ctr">
+                            <a:lnSpc>
+                              <a:spcPct val="150000"/>
+                            </a:lnSpc>
+                            <a:spcAft>
+                              <a:spcPts val="1000"/>
+                            </a:spcAft>
+                          </a:pPr>
+                          <a:r>
+                            <a:rPr lang="ru-RU" sz="1200" dirty="0">
+                              <a:effectLst/>
+                            </a:rPr>
+                            <a:t>Вероятностный анализ: перейти к матожиданию, получить рекуррентность</a:t>
+                          </a:r>
+                          <a:r>
+                            <a:rPr lang="ru-RU" sz="1200" baseline="0" dirty="0">
+                              <a:effectLst/>
+                            </a:rPr>
+                            <a:t> вида</a:t>
+                          </a:r>
+                          <a:r>
+                            <a:rPr lang="en-US" sz="1200" baseline="0" dirty="0">
+                              <a:effectLst/>
+                            </a:rPr>
+                            <a:t>:</a:t>
+                          </a:r>
+                          <a:endParaRPr lang="ru-RU" sz="1200" i="1" kern="1200" dirty="0">
+                            <a:solidFill>
+                              <a:schemeClr val="dk1"/>
+                            </a:solidFill>
+                            <a:effectLst/>
+                            <a:latin typeface="+mn-lt"/>
+                            <a:ea typeface="+mn-ea"/>
+                            <a:cs typeface="+mn-cs"/>
+                          </a:endParaRPr>
+                        </a:p>
+                        <a:p>
+                          <a:pPr algn="ctr">
+                            <a:lnSpc>
+                              <a:spcPct val="150000"/>
+                            </a:lnSpc>
+                            <a:spcAft>
+                              <a:spcPts val="1000"/>
+                            </a:spcAft>
+                          </a:pPr>
+                          <a14:m>
+                            <m:oMathPara xmlns:m="http://schemas.openxmlformats.org/officeDocument/2006/math">
+                              <m:oMathParaPr>
+                                <m:jc m:val="centerGroup"/>
+                              </m:oMathParaPr>
+                              <m:oMath xmlns:m="http://schemas.openxmlformats.org/officeDocument/2006/math">
+                                <m:r>
+                                  <a:rPr lang="en-US" sz="1200" i="1" kern="1200" smtClean="0">
+                                    <a:solidFill>
+                                      <a:schemeClr val="dk1"/>
+                                    </a:solidFill>
+                                    <a:effectLst/>
+                                    <a:latin typeface="+mn-lt"/>
+                                    <a:ea typeface="+mn-ea"/>
+                                    <a:cs typeface="+mn-cs"/>
+                                  </a:rPr>
+                                  <m:t>𝑇</m:t>
+                                </m:r>
+                                <m:d>
+                                  <m:dPr>
+                                    <m:ctrlPr>
+                                      <a:rPr lang="ru-RU" sz="1200" i="1" kern="1200">
+                                        <a:solidFill>
+                                          <a:schemeClr val="dk1"/>
+                                        </a:solidFill>
+                                        <a:effectLst/>
+                                        <a:latin typeface="+mn-lt"/>
+                                        <a:ea typeface="+mn-ea"/>
+                                        <a:cs typeface="+mn-cs"/>
+                                      </a:rPr>
+                                    </m:ctrlPr>
+                                  </m:dPr>
+                                  <m:e>
+                                    <m:r>
+                                      <a:rPr lang="en-US" sz="1200" i="1" kern="1200">
+                                        <a:solidFill>
+                                          <a:schemeClr val="dk1"/>
+                                        </a:solidFill>
+                                        <a:effectLst/>
+                                        <a:latin typeface="+mn-lt"/>
+                                        <a:ea typeface="+mn-ea"/>
+                                        <a:cs typeface="+mn-cs"/>
+                                      </a:rPr>
+                                      <m:t>𝑛</m:t>
+                                    </m:r>
+                                  </m:e>
+                                </m:d>
+                                <m:r>
+                                  <a:rPr lang="en-US" sz="1200" i="1" kern="1200">
+                                    <a:solidFill>
+                                      <a:schemeClr val="dk1"/>
+                                    </a:solidFill>
+                                    <a:effectLst/>
+                                    <a:latin typeface="+mn-lt"/>
+                                    <a:ea typeface="+mn-ea"/>
+                                    <a:cs typeface="+mn-cs"/>
+                                  </a:rPr>
+                                  <m:t>= </m:t>
+                                </m:r>
+                                <m:d>
+                                  <m:dPr>
+                                    <m:ctrlPr>
+                                      <a:rPr lang="ru-RU" sz="1200" i="1" kern="1200">
+                                        <a:solidFill>
+                                          <a:schemeClr val="dk1"/>
+                                        </a:solidFill>
+                                        <a:effectLst/>
+                                        <a:latin typeface="+mn-lt"/>
+                                        <a:ea typeface="+mn-ea"/>
+                                        <a:cs typeface="+mn-cs"/>
+                                      </a:rPr>
+                                    </m:ctrlPr>
+                                  </m:dPr>
+                                  <m:e>
+                                    <m:r>
+                                      <a:rPr lang="en-US" sz="1200" i="1" kern="1200">
+                                        <a:solidFill>
+                                          <a:schemeClr val="dk1"/>
+                                        </a:solidFill>
+                                        <a:effectLst/>
+                                        <a:latin typeface="+mn-lt"/>
+                                        <a:ea typeface="+mn-ea"/>
+                                        <a:cs typeface="+mn-cs"/>
+                                      </a:rPr>
+                                      <m:t>𝑛</m:t>
+                                    </m:r>
+                                    <m:r>
+                                      <a:rPr lang="en-US" sz="1200" i="1" kern="1200">
+                                        <a:solidFill>
+                                          <a:schemeClr val="dk1"/>
+                                        </a:solidFill>
+                                        <a:effectLst/>
+                                        <a:latin typeface="+mn-lt"/>
+                                        <a:ea typeface="+mn-ea"/>
+                                        <a:cs typeface="+mn-cs"/>
+                                      </a:rPr>
+                                      <m:t>−1</m:t>
+                                    </m:r>
+                                  </m:e>
+                                </m:d>
+                                <m:r>
+                                  <a:rPr lang="en-US" sz="1200" i="1" kern="1200">
+                                    <a:solidFill>
+                                      <a:schemeClr val="dk1"/>
+                                    </a:solidFill>
+                                    <a:effectLst/>
+                                    <a:latin typeface="+mn-lt"/>
+                                    <a:ea typeface="+mn-ea"/>
+                                    <a:cs typeface="+mn-cs"/>
+                                  </a:rPr>
+                                  <m:t>+</m:t>
+                                </m:r>
+                                <m:f>
+                                  <m:fPr>
+                                    <m:ctrlPr>
+                                      <a:rPr lang="ru-RU" sz="1200" i="1" kern="1200">
+                                        <a:solidFill>
+                                          <a:schemeClr val="dk1"/>
+                                        </a:solidFill>
+                                        <a:effectLst/>
+                                        <a:latin typeface="+mn-lt"/>
+                                        <a:ea typeface="+mn-ea"/>
+                                        <a:cs typeface="+mn-cs"/>
+                                      </a:rPr>
+                                    </m:ctrlPr>
+                                  </m:fPr>
+                                  <m:num>
+                                    <m:r>
+                                      <a:rPr lang="en-US" sz="1200" i="1" kern="1200">
+                                        <a:solidFill>
+                                          <a:schemeClr val="dk1"/>
+                                        </a:solidFill>
+                                        <a:effectLst/>
+                                        <a:latin typeface="+mn-lt"/>
+                                        <a:ea typeface="+mn-ea"/>
+                                        <a:cs typeface="+mn-cs"/>
+                                      </a:rPr>
+                                      <m:t>2</m:t>
+                                    </m:r>
+                                  </m:num>
+                                  <m:den>
+                                    <m:r>
+                                      <a:rPr lang="en-US" sz="1200" i="1" kern="1200">
+                                        <a:solidFill>
+                                          <a:schemeClr val="dk1"/>
+                                        </a:solidFill>
+                                        <a:effectLst/>
+                                        <a:latin typeface="+mn-lt"/>
+                                        <a:ea typeface="+mn-ea"/>
+                                        <a:cs typeface="+mn-cs"/>
+                                      </a:rPr>
+                                      <m:t>𝑛</m:t>
+                                    </m:r>
+                                  </m:den>
+                                </m:f>
+                                <m:nary>
+                                  <m:naryPr>
+                                    <m:chr m:val="∑"/>
+                                    <m:limLoc m:val="undOvr"/>
+                                    <m:grow m:val="on"/>
+                                    <m:ctrlPr>
+                                      <a:rPr lang="ru-RU" sz="1200" i="1" kern="1200">
+                                        <a:solidFill>
+                                          <a:schemeClr val="dk1"/>
+                                        </a:solidFill>
+                                        <a:effectLst/>
+                                        <a:latin typeface="+mn-lt"/>
+                                        <a:ea typeface="+mn-ea"/>
+                                        <a:cs typeface="+mn-cs"/>
+                                      </a:rPr>
+                                    </m:ctrlPr>
+                                  </m:naryPr>
+                                  <m:sub>
+                                    <m:r>
+                                      <a:rPr lang="en-US" sz="1200" i="1" kern="1200">
+                                        <a:solidFill>
+                                          <a:schemeClr val="dk1"/>
+                                        </a:solidFill>
+                                        <a:effectLst/>
+                                        <a:latin typeface="+mn-lt"/>
+                                        <a:ea typeface="+mn-ea"/>
+                                        <a:cs typeface="+mn-cs"/>
+                                      </a:rPr>
+                                      <m:t>𝑘</m:t>
+                                    </m:r>
+                                    <m:r>
+                                      <a:rPr lang="en-US" sz="1200" i="1" kern="1200">
+                                        <a:solidFill>
+                                          <a:schemeClr val="dk1"/>
+                                        </a:solidFill>
+                                        <a:effectLst/>
+                                        <a:latin typeface="+mn-lt"/>
+                                        <a:ea typeface="+mn-ea"/>
+                                        <a:cs typeface="+mn-cs"/>
+                                      </a:rPr>
+                                      <m:t>=0</m:t>
+                                    </m:r>
+                                  </m:sub>
+                                  <m:sup>
+                                    <m:r>
+                                      <a:rPr lang="en-US" sz="1200" i="1" kern="1200">
+                                        <a:solidFill>
+                                          <a:schemeClr val="dk1"/>
+                                        </a:solidFill>
+                                        <a:effectLst/>
+                                        <a:latin typeface="+mn-lt"/>
+                                        <a:ea typeface="+mn-ea"/>
+                                        <a:cs typeface="+mn-cs"/>
+                                      </a:rPr>
+                                      <m:t>𝑛</m:t>
+                                    </m:r>
+                                    <m:r>
+                                      <a:rPr lang="en-US" sz="1200" i="1" kern="1200">
+                                        <a:solidFill>
+                                          <a:schemeClr val="dk1"/>
+                                        </a:solidFill>
+                                        <a:effectLst/>
+                                        <a:latin typeface="+mn-lt"/>
+                                        <a:ea typeface="+mn-ea"/>
+                                        <a:cs typeface="+mn-cs"/>
+                                      </a:rPr>
+                                      <m:t>−1</m:t>
+                                    </m:r>
+                                  </m:sup>
+                                  <m:e>
+                                    <m:r>
+                                      <a:rPr lang="en-US" sz="1200" i="1" kern="1200">
+                                        <a:solidFill>
+                                          <a:schemeClr val="dk1"/>
+                                        </a:solidFill>
+                                        <a:effectLst/>
+                                        <a:latin typeface="+mn-lt"/>
+                                        <a:ea typeface="+mn-ea"/>
+                                        <a:cs typeface="+mn-cs"/>
+                                      </a:rPr>
+                                      <m:t>𝑇</m:t>
+                                    </m:r>
+                                    <m:d>
+                                      <m:dPr>
+                                        <m:ctrlPr>
+                                          <a:rPr lang="ru-RU" sz="1200" i="1" kern="1200">
+                                            <a:solidFill>
+                                              <a:schemeClr val="dk1"/>
+                                            </a:solidFill>
+                                            <a:effectLst/>
+                                            <a:latin typeface="+mn-lt"/>
+                                            <a:ea typeface="+mn-ea"/>
+                                            <a:cs typeface="+mn-cs"/>
+                                          </a:rPr>
+                                        </m:ctrlPr>
+                                      </m:dPr>
+                                      <m:e>
+                                        <m:r>
+                                          <a:rPr lang="en-US" sz="1200" i="1" kern="1200">
+                                            <a:solidFill>
+                                              <a:schemeClr val="dk1"/>
+                                            </a:solidFill>
+                                            <a:effectLst/>
+                                            <a:latin typeface="+mn-lt"/>
+                                            <a:ea typeface="+mn-ea"/>
+                                            <a:cs typeface="+mn-cs"/>
+                                          </a:rPr>
+                                          <m:t>𝑘</m:t>
+                                        </m:r>
+                                      </m:e>
+                                    </m:d>
+                                  </m:e>
+                                </m:nary>
+                              </m:oMath>
+                            </m:oMathPara>
+                          </a14:m>
+                          <a:endParaRPr lang="ru-RU" sz="1200" dirty="0">
+                            <a:effectLst/>
+                            <a:latin typeface="Times New Roman" panose="02020603050405020304" pitchFamily="18" charset="0"/>
+                            <a:ea typeface="Times New Roman" panose="02020603050405020304" pitchFamily="18" charset="0"/>
+                            <a:cs typeface="Times New Roman" panose="02020603050405020304" pitchFamily="18" charset="0"/>
+                          </a:endParaRPr>
+                        </a:p>
+                      </a:txBody>
+                      <a:tcPr marL="9525" marR="9525" marT="9525" marB="9525" anchor="ctr"/>
+                    </a:tc>
+                    <a:extLst>
+                      <a:ext uri="{0D108BD9-81ED-4DB2-BD59-A6C34878D82A}">
+                        <a16:rowId xmlns:a16="http://schemas.microsoft.com/office/drawing/2014/main" val="1889969963"/>
+                      </a:ext>
+                    </a:extLst>
+                  </a:tr>
+                  <a:tr h="452992">
+                    <a:tc>
+                      <a:txBody>
+                        <a:bodyPr/>
+                        <a:lstStyle/>
+                        <a:p>
+                          <a:pPr algn="ctr">
+                            <a:lnSpc>
+                              <a:spcPct val="150000"/>
+                            </a:lnSpc>
+                            <a:spcAft>
+                              <a:spcPts val="1000"/>
+                            </a:spcAft>
+                          </a:pPr>
+                          <a:r>
+                            <a:rPr lang="ru-RU" sz="1200" dirty="0" err="1">
+                              <a:effectLst/>
+                            </a:rPr>
+                            <a:t>Heap</a:t>
+                          </a:r>
+                          <a:r>
+                            <a:rPr lang="ru-RU" sz="1200" dirty="0">
+                              <a:effectLst/>
+                            </a:rPr>
+                            <a:t> </a:t>
+                          </a:r>
+                          <a:r>
+                            <a:rPr lang="ru-RU" sz="1200" dirty="0" err="1">
+                              <a:effectLst/>
+                            </a:rPr>
+                            <a:t>Sort</a:t>
+                          </a:r>
+                          <a:endParaRPr lang="ru-RU" sz="1400" dirty="0">
+                            <a:effectLst/>
+                            <a:latin typeface="Times New Roman" panose="02020603050405020304" pitchFamily="18" charset="0"/>
+                            <a:ea typeface="Times New Roman" panose="02020603050405020304" pitchFamily="18" charset="0"/>
+                            <a:cs typeface="Times New Roman" panose="02020603050405020304" pitchFamily="18" charset="0"/>
+                          </a:endParaRPr>
+                        </a:p>
+                      </a:txBody>
+                      <a:tcPr marL="9525" marR="9525" marT="9525" marB="9525" anchor="ctr"/>
+                    </a:tc>
+                    <a:tc>
+                      <a:txBody>
+                        <a:bodyPr/>
+                        <a:lstStyle/>
+                        <a:p>
+                          <a:pPr algn="ctr">
+                            <a:lnSpc>
+                              <a:spcPct val="150000"/>
+                            </a:lnSpc>
+                            <a:spcAft>
+                              <a:spcPts val="1000"/>
+                            </a:spcAft>
+                          </a:pPr>
+                          <a:r>
+                            <a:rPr lang="ru-RU" sz="1200" dirty="0">
+                              <a:effectLst/>
+                            </a:rPr>
+                            <a:t>A</a:t>
+                          </a:r>
+                          <a:endParaRPr lang="ru-RU" sz="1400" dirty="0">
+                            <a:effectLst/>
+                            <a:latin typeface="Times New Roman" panose="02020603050405020304" pitchFamily="18" charset="0"/>
+                            <a:ea typeface="Times New Roman" panose="02020603050405020304" pitchFamily="18" charset="0"/>
+                            <a:cs typeface="Times New Roman" panose="02020603050405020304" pitchFamily="18" charset="0"/>
+                          </a:endParaRPr>
+                        </a:p>
+                      </a:txBody>
+                      <a:tcPr marL="9525" marR="9525" marT="9525" marB="9525" anchor="ctr"/>
+                    </a:tc>
+                    <a:tc>
+                      <a:txBody>
+                        <a:bodyPr/>
+                        <a:lstStyle/>
+                        <a:p>
+                          <a:pPr algn="ctr">
+                            <a:lnSpc>
+                              <a:spcPct val="150000"/>
+                            </a:lnSpc>
+                            <a:spcAft>
+                              <a:spcPts val="1000"/>
+                            </a:spcAft>
+                          </a:pPr>
+                          <a:r>
+                            <a:rPr lang="ru-RU" sz="1200">
+                              <a:effectLst/>
+                            </a:rPr>
+                            <a:t>нет рекурсивной структуры сортировки</a:t>
+                          </a:r>
+                          <a:endParaRPr lang="ru-RU" sz="1400">
+                            <a:effectLst/>
+                            <a:latin typeface="Times New Roman" panose="02020603050405020304" pitchFamily="18" charset="0"/>
+                            <a:ea typeface="Times New Roman" panose="02020603050405020304" pitchFamily="18" charset="0"/>
+                            <a:cs typeface="Times New Roman" panose="02020603050405020304" pitchFamily="18" charset="0"/>
+                          </a:endParaRPr>
+                        </a:p>
+                      </a:txBody>
+                      <a:tcPr marL="9525" marR="9525" marT="9525" marB="9525" anchor="ctr"/>
+                    </a:tc>
+                    <a:tc>
+                      <a:txBody>
+                        <a:bodyPr/>
+                        <a:lstStyle/>
+                        <a:p>
+                          <a:pPr algn="ctr">
+                            <a:lnSpc>
+                              <a:spcPct val="150000"/>
+                            </a:lnSpc>
+                            <a:spcAft>
+                              <a:spcPts val="1000"/>
+                            </a:spcAft>
+                          </a:pPr>
+                          <a:r>
+                            <a:rPr lang="ru-RU" sz="1200" dirty="0">
+                              <a:effectLst/>
+                            </a:rPr>
+                            <a:t>Прямое суммирование: оценить построение кучи как </a:t>
+                          </a:r>
+                          <a14:m>
+                            <m:oMath xmlns:m="http://schemas.openxmlformats.org/officeDocument/2006/math">
+                              <m:r>
+                                <a:rPr lang="ru-RU" sz="1200" i="1" dirty="0" smtClean="0">
+                                  <a:effectLst/>
+                                  <a:latin typeface="Cambria Math" panose="02040503050406030204" pitchFamily="18" charset="0"/>
+                                </a:rPr>
+                                <m:t>𝑂</m:t>
+                              </m:r>
+                              <m:r>
+                                <a:rPr lang="ru-RU" sz="1200" i="1" dirty="0" smtClean="0">
+                                  <a:effectLst/>
+                                  <a:latin typeface="Cambria Math" panose="02040503050406030204" pitchFamily="18" charset="0"/>
+                                </a:rPr>
+                                <m:t>(</m:t>
+                              </m:r>
+                              <m:r>
+                                <a:rPr lang="ru-RU" sz="1200" i="1" dirty="0" smtClean="0">
+                                  <a:effectLst/>
+                                  <a:latin typeface="Cambria Math" panose="02040503050406030204" pitchFamily="18" charset="0"/>
+                                </a:rPr>
+                                <m:t>𝑛</m:t>
+                              </m:r>
+                              <m:r>
+                                <a:rPr lang="ru-RU" sz="1200" i="1" dirty="0" smtClean="0">
+                                  <a:effectLst/>
+                                  <a:latin typeface="Cambria Math" panose="02040503050406030204" pitchFamily="18" charset="0"/>
+                                </a:rPr>
+                                <m:t>)</m:t>
+                              </m:r>
+                            </m:oMath>
+                          </a14:m>
+                          <a:r>
+                            <a:rPr lang="ru-RU" sz="1200" dirty="0">
+                              <a:effectLst/>
+                            </a:rPr>
+                            <a:t> и просуммировать</a:t>
+                          </a:r>
+                          <a:r>
+                            <a:rPr lang="en-US" sz="1200" dirty="0">
+                              <a:effectLst/>
+                            </a:rPr>
+                            <a:t> c</a:t>
+                          </a:r>
+                          <a:r>
+                            <a:rPr lang="ru-RU" sz="1200" dirty="0">
+                              <a:effectLst/>
+                            </a:rPr>
+                            <a:t> стоимостью извлечений</a:t>
+                          </a:r>
+                          <a:endParaRPr lang="ru-RU" sz="1200" dirty="0">
+                            <a:effectLst/>
+                            <a:latin typeface="Times New Roman" panose="02020603050405020304" pitchFamily="18" charset="0"/>
+                            <a:ea typeface="Times New Roman" panose="02020603050405020304" pitchFamily="18" charset="0"/>
+                            <a:cs typeface="Times New Roman" panose="02020603050405020304" pitchFamily="18" charset="0"/>
+                          </a:endParaRPr>
+                        </a:p>
+                      </a:txBody>
+                      <a:tcPr marL="9525" marR="9525" marT="9525" marB="9525" anchor="ctr"/>
+                    </a:tc>
+                    <a:extLst>
+                      <a:ext uri="{0D108BD9-81ED-4DB2-BD59-A6C34878D82A}">
+                        <a16:rowId xmlns:a16="http://schemas.microsoft.com/office/drawing/2014/main" val="594100534"/>
+                      </a:ext>
+                    </a:extLst>
+                  </a:tr>
+                  <a:tr h="923519">
+                    <a:tc>
+                      <a:txBody>
+                        <a:bodyPr/>
+                        <a:lstStyle/>
+                        <a:p>
+                          <a:pPr algn="ctr">
+                            <a:lnSpc>
+                              <a:spcPct val="150000"/>
+                            </a:lnSpc>
+                            <a:spcAft>
+                              <a:spcPts val="1000"/>
+                            </a:spcAft>
+                          </a:pPr>
+                          <a:r>
+                            <a:rPr lang="ru-RU" sz="1200" dirty="0" err="1">
+                              <a:effectLst/>
+                            </a:rPr>
+                            <a:t>Shellsort</a:t>
+                          </a:r>
+                          <a:endParaRPr lang="ru-RU" sz="1400" dirty="0">
+                            <a:effectLst/>
+                            <a:latin typeface="Times New Roman" panose="02020603050405020304" pitchFamily="18" charset="0"/>
+                            <a:ea typeface="Times New Roman" panose="02020603050405020304" pitchFamily="18" charset="0"/>
+                            <a:cs typeface="Times New Roman" panose="02020603050405020304" pitchFamily="18" charset="0"/>
+                          </a:endParaRPr>
+                        </a:p>
+                      </a:txBody>
+                      <a:tcPr marL="9525" marR="9525" marT="9525" marB="9525" anchor="ctr"/>
+                    </a:tc>
+                    <a:tc>
+                      <a:txBody>
+                        <a:bodyPr/>
+                        <a:lstStyle/>
+                        <a:p>
+                          <a:pPr algn="ctr">
+                            <a:lnSpc>
+                              <a:spcPct val="150000"/>
+                            </a:lnSpc>
+                            <a:spcAft>
+                              <a:spcPts val="1000"/>
+                            </a:spcAft>
+                          </a:pPr>
+                          <a:r>
+                            <a:rPr lang="ru-RU" sz="1200" dirty="0">
+                              <a:effectLst/>
+                            </a:rPr>
+                            <a:t>A, B, C</a:t>
+                          </a:r>
+                          <a:endParaRPr lang="ru-RU" sz="1400" dirty="0">
+                            <a:effectLst/>
+                            <a:latin typeface="Times New Roman" panose="02020603050405020304" pitchFamily="18" charset="0"/>
+                            <a:ea typeface="Times New Roman" panose="02020603050405020304" pitchFamily="18" charset="0"/>
+                            <a:cs typeface="Times New Roman" panose="02020603050405020304" pitchFamily="18" charset="0"/>
+                          </a:endParaRPr>
+                        </a:p>
+                      </a:txBody>
+                      <a:tcPr marL="9525" marR="9525" marT="9525" marB="9525" anchor="ctr"/>
+                    </a:tc>
+                    <a:tc>
+                      <a:txBody>
+                        <a:bodyPr/>
+                        <a:lstStyle/>
+                        <a:p>
+                          <a:pPr algn="ctr">
+                            <a:lnSpc>
+                              <a:spcPct val="150000"/>
+                            </a:lnSpc>
+                            <a:spcAft>
+                              <a:spcPts val="1000"/>
+                            </a:spcAft>
+                          </a:pPr>
+                          <a:r>
+                            <a:rPr lang="ru-RU" sz="1200" dirty="0">
+                              <a:effectLst/>
+                            </a:rPr>
+                            <a:t>зависимость от последовательности шагов и входа</a:t>
+                          </a:r>
+                          <a:endParaRPr lang="ru-RU" sz="1400" dirty="0">
+                            <a:effectLst/>
+                            <a:latin typeface="Times New Roman" panose="02020603050405020304" pitchFamily="18" charset="0"/>
+                            <a:ea typeface="Times New Roman" panose="02020603050405020304" pitchFamily="18" charset="0"/>
+                            <a:cs typeface="Times New Roman" panose="02020603050405020304" pitchFamily="18" charset="0"/>
+                          </a:endParaRPr>
+                        </a:p>
+                      </a:txBody>
+                      <a:tcPr marL="9525" marR="9525" marT="9525" marB="9525" anchor="ctr"/>
+                    </a:tc>
+                    <a:tc>
+                      <a:txBody>
+                        <a:bodyPr/>
+                        <a:lstStyle/>
+                        <a:p>
+                          <a:pPr algn="ctr">
+                            <a:lnSpc>
+                              <a:spcPct val="150000"/>
+                            </a:lnSpc>
+                            <a:spcAft>
+                              <a:spcPts val="1000"/>
+                            </a:spcAft>
+                          </a:pPr>
+                          <a:r>
+                            <a:rPr lang="ru-RU" sz="1200" dirty="0">
+                              <a:effectLst/>
+                            </a:rPr>
+                            <a:t>Подсчёт инверсий по проходам; результат зависит от шагов</a:t>
+                          </a:r>
+                          <a:endParaRPr lang="ru-RU" sz="1400" dirty="0">
+                            <a:effectLst/>
+                            <a:latin typeface="Times New Roman" panose="02020603050405020304" pitchFamily="18" charset="0"/>
+                            <a:ea typeface="Times New Roman" panose="02020603050405020304" pitchFamily="18" charset="0"/>
+                            <a:cs typeface="Times New Roman" panose="02020603050405020304" pitchFamily="18" charset="0"/>
+                          </a:endParaRPr>
+                        </a:p>
+                      </a:txBody>
+                      <a:tcPr marL="9525" marR="9525" marT="9525" marB="9525" anchor="ctr"/>
+                    </a:tc>
+                    <a:extLst>
+                      <a:ext uri="{0D108BD9-81ED-4DB2-BD59-A6C34878D82A}">
+                        <a16:rowId xmlns:a16="http://schemas.microsoft.com/office/drawing/2014/main" val="3146335872"/>
+                      </a:ext>
+                    </a:extLst>
+                  </a:tr>
+                  <a:tr h="452992">
+                    <a:tc>
+                      <a:txBody>
+                        <a:bodyPr/>
+                        <a:lstStyle/>
+                        <a:p>
+                          <a:pPr algn="ctr">
+                            <a:lnSpc>
+                              <a:spcPct val="150000"/>
+                            </a:lnSpc>
+                            <a:spcAft>
+                              <a:spcPts val="1000"/>
+                            </a:spcAft>
+                          </a:pPr>
+                          <a:r>
+                            <a:rPr lang="ru-RU" sz="1200">
+                              <a:effectLst/>
+                            </a:rPr>
+                            <a:t>Tim Sort</a:t>
+                          </a:r>
+                          <a:endParaRPr lang="ru-RU" sz="1400">
+                            <a:effectLst/>
+                            <a:latin typeface="Times New Roman" panose="02020603050405020304" pitchFamily="18" charset="0"/>
+                            <a:ea typeface="Times New Roman" panose="02020603050405020304" pitchFamily="18" charset="0"/>
+                            <a:cs typeface="Times New Roman" panose="02020603050405020304" pitchFamily="18" charset="0"/>
+                          </a:endParaRPr>
+                        </a:p>
+                      </a:txBody>
+                      <a:tcPr marL="9525" marR="9525" marT="9525" marB="9525" anchor="ctr"/>
+                    </a:tc>
+                    <a:tc>
+                      <a:txBody>
+                        <a:bodyPr/>
+                        <a:lstStyle/>
+                        <a:p>
+                          <a:pPr algn="ctr">
+                            <a:lnSpc>
+                              <a:spcPct val="150000"/>
+                            </a:lnSpc>
+                            <a:spcAft>
+                              <a:spcPts val="1000"/>
+                            </a:spcAft>
+                          </a:pPr>
+                          <a:r>
+                            <a:rPr lang="ru-RU" sz="1200">
+                              <a:effectLst/>
+                            </a:rPr>
+                            <a:t>B, C</a:t>
+                          </a:r>
+                          <a:endParaRPr lang="ru-RU" sz="1400">
+                            <a:effectLst/>
+                            <a:latin typeface="Times New Roman" panose="02020603050405020304" pitchFamily="18" charset="0"/>
+                            <a:ea typeface="Times New Roman" panose="02020603050405020304" pitchFamily="18" charset="0"/>
+                            <a:cs typeface="Times New Roman" panose="02020603050405020304" pitchFamily="18" charset="0"/>
+                          </a:endParaRPr>
+                        </a:p>
+                      </a:txBody>
+                      <a:tcPr marL="9525" marR="9525" marT="9525" marB="9525" anchor="ctr"/>
+                    </a:tc>
+                    <a:tc>
+                      <a:txBody>
+                        <a:bodyPr/>
+                        <a:lstStyle/>
+                        <a:p>
+                          <a:pPr algn="ctr">
+                            <a:lnSpc>
+                              <a:spcPct val="150000"/>
+                            </a:lnSpc>
+                            <a:spcAft>
+                              <a:spcPts val="1000"/>
+                            </a:spcAft>
+                          </a:pPr>
+                          <a:r>
+                            <a:rPr lang="ru-RU" sz="1200" dirty="0">
+                              <a:effectLst/>
+                            </a:rPr>
+                            <a:t>адаптивные серии и стратегия слияния</a:t>
+                          </a:r>
+                          <a:endParaRPr lang="ru-RU" sz="1400" dirty="0">
+                            <a:effectLst/>
+                            <a:latin typeface="Times New Roman" panose="02020603050405020304" pitchFamily="18" charset="0"/>
+                            <a:ea typeface="Times New Roman" panose="02020603050405020304" pitchFamily="18" charset="0"/>
+                            <a:cs typeface="Times New Roman" panose="02020603050405020304" pitchFamily="18" charset="0"/>
+                          </a:endParaRPr>
+                        </a:p>
+                      </a:txBody>
+                      <a:tcPr marL="9525" marR="9525" marT="9525" marB="9525" anchor="ctr"/>
+                    </a:tc>
+                    <a:tc>
+                      <a:txBody>
+                        <a:bodyPr/>
+                        <a:lstStyle/>
+                        <a:p>
+                          <a:pPr algn="ctr">
+                            <a:lnSpc>
+                              <a:spcPct val="150000"/>
+                            </a:lnSpc>
+                            <a:spcAft>
+                              <a:spcPts val="1000"/>
+                            </a:spcAft>
+                          </a:pPr>
+                          <a:r>
+                            <a:rPr lang="ru-RU" sz="1200" dirty="0">
+                              <a:effectLst/>
+                            </a:rPr>
+                            <a:t>Амортизированная стоимость слияний серий</a:t>
+                          </a:r>
+                          <a:r>
+                            <a:rPr lang="en-US" sz="1200" dirty="0">
+                              <a:effectLst/>
+                            </a:rPr>
+                            <a:t>(</a:t>
+                          </a:r>
+                          <a:r>
+                            <a:rPr lang="ru-RU" sz="1200" dirty="0" err="1">
+                              <a:effectLst/>
+                            </a:rPr>
+                            <a:t>Кормен</a:t>
+                          </a:r>
+                          <a:r>
+                            <a:rPr lang="en-US" sz="1200" dirty="0">
+                              <a:effectLst/>
+                            </a:rPr>
+                            <a:t>)</a:t>
+                          </a:r>
+                          <a:endParaRPr lang="ru-RU" sz="1400" dirty="0">
+                            <a:effectLst/>
+                            <a:latin typeface="Times New Roman" panose="02020603050405020304" pitchFamily="18" charset="0"/>
+                            <a:ea typeface="Times New Roman" panose="02020603050405020304" pitchFamily="18" charset="0"/>
+                            <a:cs typeface="Times New Roman" panose="02020603050405020304" pitchFamily="18" charset="0"/>
+                          </a:endParaRPr>
+                        </a:p>
+                      </a:txBody>
+                      <a:tcPr marL="9525" marR="9525" marT="9525" marB="9525" anchor="ctr"/>
+                    </a:tc>
+                    <a:extLst>
+                      <a:ext uri="{0D108BD9-81ED-4DB2-BD59-A6C34878D82A}">
+                        <a16:rowId xmlns:a16="http://schemas.microsoft.com/office/drawing/2014/main" val="948559538"/>
+                      </a:ext>
+                    </a:extLst>
+                  </a:tr>
+                  <a:tr h="452992">
+                    <a:tc>
+                      <a:txBody>
+                        <a:bodyPr/>
+                        <a:lstStyle/>
+                        <a:p>
+                          <a:pPr algn="ctr">
+                            <a:lnSpc>
+                              <a:spcPct val="150000"/>
+                            </a:lnSpc>
+                            <a:spcAft>
+                              <a:spcPts val="1000"/>
+                            </a:spcAft>
+                          </a:pPr>
+                          <a:r>
+                            <a:rPr lang="ru-RU" sz="1200" dirty="0" err="1">
+                              <a:effectLst/>
+                            </a:rPr>
+                            <a:t>Bubble</a:t>
+                          </a:r>
+                          <a:r>
+                            <a:rPr lang="ru-RU" sz="1200" dirty="0">
+                              <a:effectLst/>
+                            </a:rPr>
+                            <a:t> </a:t>
+                          </a:r>
+                          <a:r>
+                            <a:rPr lang="ru-RU" sz="1200" dirty="0" err="1">
+                              <a:effectLst/>
+                            </a:rPr>
+                            <a:t>Sort</a:t>
+                          </a:r>
+                          <a:r>
+                            <a:rPr lang="ru-RU" sz="1200" dirty="0">
+                              <a:effectLst/>
+                            </a:rPr>
+                            <a:t>, </a:t>
+                          </a:r>
+                          <a:r>
+                            <a:rPr lang="ru-RU" sz="1200" dirty="0" err="1">
+                              <a:effectLst/>
+                            </a:rPr>
+                            <a:t>Selection</a:t>
+                          </a:r>
+                          <a:r>
+                            <a:rPr lang="ru-RU" sz="1200" dirty="0">
+                              <a:effectLst/>
+                            </a:rPr>
+                            <a:t> </a:t>
+                          </a:r>
+                          <a:r>
+                            <a:rPr lang="ru-RU" sz="1200" dirty="0" err="1">
+                              <a:effectLst/>
+                            </a:rPr>
+                            <a:t>Sort</a:t>
+                          </a:r>
+                          <a:endParaRPr lang="ru-RU" sz="1400" dirty="0">
+                            <a:effectLst/>
+                            <a:latin typeface="Times New Roman" panose="02020603050405020304" pitchFamily="18" charset="0"/>
+                            <a:ea typeface="Times New Roman" panose="02020603050405020304" pitchFamily="18" charset="0"/>
+                            <a:cs typeface="Times New Roman" panose="02020603050405020304" pitchFamily="18" charset="0"/>
+                          </a:endParaRPr>
+                        </a:p>
+                      </a:txBody>
+                      <a:tcPr marL="9525" marR="9525" marT="9525" marB="9525" anchor="ctr"/>
+                    </a:tc>
+                    <a:tc>
+                      <a:txBody>
+                        <a:bodyPr/>
+                        <a:lstStyle/>
+                        <a:p>
+                          <a:pPr algn="ctr">
+                            <a:lnSpc>
+                              <a:spcPct val="150000"/>
+                            </a:lnSpc>
+                            <a:spcAft>
+                              <a:spcPts val="1000"/>
+                            </a:spcAft>
+                          </a:pPr>
+                          <a:r>
+                            <a:rPr lang="ru-RU" sz="1200" dirty="0">
+                              <a:effectLst/>
+                            </a:rPr>
+                            <a:t>A</a:t>
+                          </a:r>
+                          <a:endParaRPr lang="ru-RU" sz="1400" dirty="0">
+                            <a:effectLst/>
+                            <a:latin typeface="Times New Roman" panose="02020603050405020304" pitchFamily="18" charset="0"/>
+                            <a:ea typeface="Times New Roman" panose="02020603050405020304" pitchFamily="18" charset="0"/>
+                            <a:cs typeface="Times New Roman" panose="02020603050405020304" pitchFamily="18" charset="0"/>
+                          </a:endParaRPr>
+                        </a:p>
+                      </a:txBody>
+                      <a:tcPr marL="9525" marR="9525" marT="9525" marB="9525" anchor="ctr"/>
+                    </a:tc>
+                    <a:tc>
+                      <a:txBody>
+                        <a:bodyPr/>
+                        <a:lstStyle/>
+                        <a:p>
+                          <a:pPr algn="ctr">
+                            <a:lnSpc>
+                              <a:spcPct val="150000"/>
+                            </a:lnSpc>
+                            <a:spcAft>
+                              <a:spcPts val="1000"/>
+                            </a:spcAft>
+                          </a:pPr>
+                          <a:r>
+                            <a:rPr lang="ru-RU" sz="1200">
+                              <a:effectLst/>
+                            </a:rPr>
+                            <a:t>итеративная структура</a:t>
+                          </a:r>
+                          <a:endParaRPr lang="ru-RU" sz="1400">
+                            <a:effectLst/>
+                            <a:latin typeface="Times New Roman" panose="02020603050405020304" pitchFamily="18" charset="0"/>
+                            <a:ea typeface="Times New Roman" panose="02020603050405020304" pitchFamily="18" charset="0"/>
+                            <a:cs typeface="Times New Roman" panose="02020603050405020304" pitchFamily="18" charset="0"/>
+                          </a:endParaRPr>
+                        </a:p>
+                      </a:txBody>
+                      <a:tcPr marL="9525" marR="9525" marT="9525" marB="9525" anchor="ctr"/>
+                    </a:tc>
+                    <a:tc>
+                      <a:txBody>
+                        <a:bodyPr/>
+                        <a:lstStyle/>
+                        <a:p>
+                          <a:pPr algn="ctr">
+                            <a:lnSpc>
+                              <a:spcPct val="150000"/>
+                            </a:lnSpc>
+                            <a:spcAft>
+                              <a:spcPts val="1000"/>
+                            </a:spcAft>
+                          </a:pPr>
+                          <a:r>
+                            <a:rPr lang="ru-RU" sz="1200" dirty="0">
+                              <a:effectLst/>
+                            </a:rPr>
+                            <a:t>Прямой подсчёт: просуммировать сравнения по проходам</a:t>
+                          </a:r>
+                          <a:endParaRPr lang="ru-RU" sz="1400" dirty="0">
+                            <a:effectLst/>
+                            <a:latin typeface="Times New Roman" panose="02020603050405020304" pitchFamily="18" charset="0"/>
+                            <a:ea typeface="Times New Roman" panose="02020603050405020304" pitchFamily="18" charset="0"/>
+                            <a:cs typeface="Times New Roman" panose="02020603050405020304" pitchFamily="18" charset="0"/>
+                          </a:endParaRPr>
+                        </a:p>
+                      </a:txBody>
+                      <a:tcPr marL="9525" marR="9525" marT="9525" marB="9525" anchor="ctr"/>
+                    </a:tc>
+                    <a:extLst>
+                      <a:ext uri="{0D108BD9-81ED-4DB2-BD59-A6C34878D82A}">
+                        <a16:rowId xmlns:a16="http://schemas.microsoft.com/office/drawing/2014/main" val="2986890903"/>
+                      </a:ext>
+                    </a:extLst>
+                  </a:tr>
+                </a:tbl>
+              </a:graphicData>
+            </a:graphic>
+          </p:graphicFrame>
+        </mc:Choice>
+        <mc:Fallback>
+          <p:graphicFrame>
+            <p:nvGraphicFramePr>
+              <p:cNvPr id="11" name="Объект 10">
                 <a:extLst>
-                  <a:ext uri="{0D108BD9-81ED-4DB2-BD59-A6C34878D82A}">
-                    <a16:rowId xmlns:a16="http://schemas.microsoft.com/office/drawing/2014/main" val="1889969963"/>
+                  <a:ext uri="{FF2B5EF4-FFF2-40B4-BE49-F238E27FC236}">
+                    <a16:creationId xmlns:a16="http://schemas.microsoft.com/office/drawing/2014/main" id="{3486DF08-C118-CE32-DF9F-1101F9970D6D}"/>
                   </a:ext>
                 </a:extLst>
-              </a:tr>
-              <a:tr h="452992">
-                <a:tc>
-                  <a:txBody>
-                    <a:bodyPr/>
-                    <a:lstStyle/>
-                    <a:p>
-                      <a:pPr algn="ctr">
-                        <a:lnSpc>
-                          <a:spcPct val="150000"/>
-                        </a:lnSpc>
-                        <a:spcAft>
-                          <a:spcPts val="1000"/>
-                        </a:spcAft>
-                      </a:pPr>
-                      <a:r>
-                        <a:rPr lang="ru-RU" sz="1200" dirty="0" err="1">
-                          <a:effectLst/>
-                        </a:rPr>
-                        <a:t>Heap</a:t>
-                      </a:r>
-                      <a:r>
-                        <a:rPr lang="ru-RU" sz="1200" dirty="0">
-                          <a:effectLst/>
-                        </a:rPr>
-                        <a:t> </a:t>
-                      </a:r>
-                      <a:r>
-                        <a:rPr lang="ru-RU" sz="1200" dirty="0" err="1">
-                          <a:effectLst/>
-                        </a:rPr>
-                        <a:t>Sort</a:t>
-                      </a:r>
-                      <a:endParaRPr lang="ru-RU" sz="1400" dirty="0">
-                        <a:effectLst/>
-                        <a:latin typeface="Times New Roman" panose="02020603050405020304" pitchFamily="18" charset="0"/>
-                        <a:ea typeface="Times New Roman" panose="02020603050405020304" pitchFamily="18" charset="0"/>
-                        <a:cs typeface="Times New Roman" panose="02020603050405020304" pitchFamily="18" charset="0"/>
-                      </a:endParaRPr>
-                    </a:p>
-                  </a:txBody>
-                  <a:tcPr marL="9525" marR="9525" marT="9525" marB="9525" anchor="ctr"/>
-                </a:tc>
-                <a:tc>
-                  <a:txBody>
-                    <a:bodyPr/>
-                    <a:lstStyle/>
-                    <a:p>
-                      <a:pPr algn="ctr">
-                        <a:lnSpc>
-                          <a:spcPct val="150000"/>
-                        </a:lnSpc>
-                        <a:spcAft>
-                          <a:spcPts val="1000"/>
-                        </a:spcAft>
-                      </a:pPr>
-                      <a:r>
-                        <a:rPr lang="ru-RU" sz="1200" dirty="0">
-                          <a:effectLst/>
-                        </a:rPr>
-                        <a:t>A</a:t>
-                      </a:r>
-                      <a:endParaRPr lang="ru-RU" sz="1400" dirty="0">
-                        <a:effectLst/>
-                        <a:latin typeface="Times New Roman" panose="02020603050405020304" pitchFamily="18" charset="0"/>
-                        <a:ea typeface="Times New Roman" panose="02020603050405020304" pitchFamily="18" charset="0"/>
-                        <a:cs typeface="Times New Roman" panose="02020603050405020304" pitchFamily="18" charset="0"/>
-                      </a:endParaRPr>
-                    </a:p>
-                  </a:txBody>
-                  <a:tcPr marL="9525" marR="9525" marT="9525" marB="9525" anchor="ctr"/>
-                </a:tc>
-                <a:tc>
-                  <a:txBody>
-                    <a:bodyPr/>
-                    <a:lstStyle/>
-                    <a:p>
-                      <a:pPr algn="ctr">
-                        <a:lnSpc>
-                          <a:spcPct val="150000"/>
-                        </a:lnSpc>
-                        <a:spcAft>
-                          <a:spcPts val="1000"/>
-                        </a:spcAft>
-                      </a:pPr>
-                      <a:r>
-                        <a:rPr lang="ru-RU" sz="1200">
-                          <a:effectLst/>
-                        </a:rPr>
-                        <a:t>нет рекурсивной структуры сортировки</a:t>
-                      </a:r>
-                      <a:endParaRPr lang="ru-RU" sz="1400">
-                        <a:effectLst/>
-                        <a:latin typeface="Times New Roman" panose="02020603050405020304" pitchFamily="18" charset="0"/>
-                        <a:ea typeface="Times New Roman" panose="02020603050405020304" pitchFamily="18" charset="0"/>
-                        <a:cs typeface="Times New Roman" panose="02020603050405020304" pitchFamily="18" charset="0"/>
-                      </a:endParaRPr>
-                    </a:p>
-                  </a:txBody>
-                  <a:tcPr marL="9525" marR="9525" marT="9525" marB="9525" anchor="ctr"/>
-                </a:tc>
-                <a:tc>
-                  <a:txBody>
-                    <a:bodyPr/>
-                    <a:lstStyle/>
-                    <a:p>
-                      <a:pPr algn="ctr">
-                        <a:lnSpc>
-                          <a:spcPct val="150000"/>
-                        </a:lnSpc>
-                        <a:spcAft>
-                          <a:spcPts val="1000"/>
-                        </a:spcAft>
-                      </a:pPr>
-                      <a:r>
-                        <a:rPr lang="ru-RU" sz="1200">
-                          <a:effectLst/>
-                        </a:rPr>
-                        <a:t>прямое суммирование</a:t>
-                      </a:r>
-                      <a:endParaRPr lang="ru-RU" sz="1400">
-                        <a:effectLst/>
-                        <a:latin typeface="Times New Roman" panose="02020603050405020304" pitchFamily="18" charset="0"/>
-                        <a:ea typeface="Times New Roman" panose="02020603050405020304" pitchFamily="18" charset="0"/>
-                        <a:cs typeface="Times New Roman" panose="02020603050405020304" pitchFamily="18" charset="0"/>
-                      </a:endParaRPr>
-                    </a:p>
-                  </a:txBody>
-                  <a:tcPr marL="9525" marR="9525" marT="9525" marB="9525" anchor="ctr"/>
-                </a:tc>
-                <a:extLst>
-                  <a:ext uri="{0D108BD9-81ED-4DB2-BD59-A6C34878D82A}">
-                    <a16:rowId xmlns:a16="http://schemas.microsoft.com/office/drawing/2014/main" val="594100534"/>
-                  </a:ext>
-                </a:extLst>
-              </a:tr>
-              <a:tr h="923519">
-                <a:tc>
-                  <a:txBody>
-                    <a:bodyPr/>
-                    <a:lstStyle/>
-                    <a:p>
-                      <a:pPr algn="ctr">
-                        <a:lnSpc>
-                          <a:spcPct val="150000"/>
-                        </a:lnSpc>
-                        <a:spcAft>
-                          <a:spcPts val="1000"/>
-                        </a:spcAft>
-                      </a:pPr>
-                      <a:r>
-                        <a:rPr lang="ru-RU" sz="1200" dirty="0" err="1">
-                          <a:effectLst/>
-                        </a:rPr>
-                        <a:t>Shellsort</a:t>
-                      </a:r>
-                      <a:endParaRPr lang="ru-RU" sz="1400" dirty="0">
-                        <a:effectLst/>
-                        <a:latin typeface="Times New Roman" panose="02020603050405020304" pitchFamily="18" charset="0"/>
-                        <a:ea typeface="Times New Roman" panose="02020603050405020304" pitchFamily="18" charset="0"/>
-                        <a:cs typeface="Times New Roman" panose="02020603050405020304" pitchFamily="18" charset="0"/>
-                      </a:endParaRPr>
-                    </a:p>
-                  </a:txBody>
-                  <a:tcPr marL="9525" marR="9525" marT="9525" marB="9525" anchor="ctr"/>
-                </a:tc>
-                <a:tc>
-                  <a:txBody>
-                    <a:bodyPr/>
-                    <a:lstStyle/>
-                    <a:p>
-                      <a:pPr algn="ctr">
-                        <a:lnSpc>
-                          <a:spcPct val="150000"/>
-                        </a:lnSpc>
-                        <a:spcAft>
-                          <a:spcPts val="1000"/>
-                        </a:spcAft>
-                      </a:pPr>
-                      <a:r>
-                        <a:rPr lang="ru-RU" sz="1200" dirty="0">
-                          <a:effectLst/>
-                        </a:rPr>
-                        <a:t>A, B, C</a:t>
-                      </a:r>
-                      <a:endParaRPr lang="ru-RU" sz="1400" dirty="0">
-                        <a:effectLst/>
-                        <a:latin typeface="Times New Roman" panose="02020603050405020304" pitchFamily="18" charset="0"/>
-                        <a:ea typeface="Times New Roman" panose="02020603050405020304" pitchFamily="18" charset="0"/>
-                        <a:cs typeface="Times New Roman" panose="02020603050405020304" pitchFamily="18" charset="0"/>
-                      </a:endParaRPr>
-                    </a:p>
-                  </a:txBody>
-                  <a:tcPr marL="9525" marR="9525" marT="9525" marB="9525" anchor="ctr"/>
-                </a:tc>
-                <a:tc>
-                  <a:txBody>
-                    <a:bodyPr/>
-                    <a:lstStyle/>
-                    <a:p>
-                      <a:pPr algn="ctr">
-                        <a:lnSpc>
-                          <a:spcPct val="150000"/>
-                        </a:lnSpc>
-                        <a:spcAft>
-                          <a:spcPts val="1000"/>
-                        </a:spcAft>
-                      </a:pPr>
-                      <a:r>
-                        <a:rPr lang="ru-RU" sz="1200" dirty="0">
-                          <a:effectLst/>
-                        </a:rPr>
-                        <a:t>зависимость от последовательности шагов и входа</a:t>
-                      </a:r>
-                      <a:endParaRPr lang="ru-RU" sz="1400" dirty="0">
-                        <a:effectLst/>
-                        <a:latin typeface="Times New Roman" panose="02020603050405020304" pitchFamily="18" charset="0"/>
-                        <a:ea typeface="Times New Roman" panose="02020603050405020304" pitchFamily="18" charset="0"/>
-                        <a:cs typeface="Times New Roman" panose="02020603050405020304" pitchFamily="18" charset="0"/>
-                      </a:endParaRPr>
-                    </a:p>
-                  </a:txBody>
-                  <a:tcPr marL="9525" marR="9525" marT="9525" marB="9525" anchor="ctr"/>
-                </a:tc>
-                <a:tc>
-                  <a:txBody>
-                    <a:bodyPr/>
-                    <a:lstStyle/>
-                    <a:p>
-                      <a:pPr algn="ctr">
-                        <a:lnSpc>
-                          <a:spcPct val="150000"/>
-                        </a:lnSpc>
-                        <a:spcAft>
-                          <a:spcPts val="1000"/>
-                        </a:spcAft>
-                      </a:pPr>
-                      <a:r>
-                        <a:rPr lang="ru-RU" sz="1200">
-                          <a:effectLst/>
-                        </a:rPr>
-                        <a:t>комбинаторный анализ</a:t>
-                      </a:r>
-                      <a:endParaRPr lang="ru-RU" sz="1400">
-                        <a:effectLst/>
-                        <a:latin typeface="Times New Roman" panose="02020603050405020304" pitchFamily="18" charset="0"/>
-                        <a:ea typeface="Times New Roman" panose="02020603050405020304" pitchFamily="18" charset="0"/>
-                        <a:cs typeface="Times New Roman" panose="02020603050405020304" pitchFamily="18" charset="0"/>
-                      </a:endParaRPr>
-                    </a:p>
-                  </a:txBody>
-                  <a:tcPr marL="9525" marR="9525" marT="9525" marB="9525" anchor="ctr"/>
-                </a:tc>
-                <a:extLst>
-                  <a:ext uri="{0D108BD9-81ED-4DB2-BD59-A6C34878D82A}">
-                    <a16:rowId xmlns:a16="http://schemas.microsoft.com/office/drawing/2014/main" val="3146335872"/>
-                  </a:ext>
-                </a:extLst>
-              </a:tr>
-              <a:tr h="452992">
-                <a:tc>
-                  <a:txBody>
-                    <a:bodyPr/>
-                    <a:lstStyle/>
-                    <a:p>
-                      <a:pPr algn="ctr">
-                        <a:lnSpc>
-                          <a:spcPct val="150000"/>
-                        </a:lnSpc>
-                        <a:spcAft>
-                          <a:spcPts val="1000"/>
-                        </a:spcAft>
-                      </a:pPr>
-                      <a:r>
-                        <a:rPr lang="ru-RU" sz="1200">
-                          <a:effectLst/>
-                        </a:rPr>
-                        <a:t>Tim Sort</a:t>
-                      </a:r>
-                      <a:endParaRPr lang="ru-RU" sz="1400">
-                        <a:effectLst/>
-                        <a:latin typeface="Times New Roman" panose="02020603050405020304" pitchFamily="18" charset="0"/>
-                        <a:ea typeface="Times New Roman" panose="02020603050405020304" pitchFamily="18" charset="0"/>
-                        <a:cs typeface="Times New Roman" panose="02020603050405020304" pitchFamily="18" charset="0"/>
-                      </a:endParaRPr>
-                    </a:p>
-                  </a:txBody>
-                  <a:tcPr marL="9525" marR="9525" marT="9525" marB="9525" anchor="ctr"/>
-                </a:tc>
-                <a:tc>
-                  <a:txBody>
-                    <a:bodyPr/>
-                    <a:lstStyle/>
-                    <a:p>
-                      <a:pPr algn="ctr">
-                        <a:lnSpc>
-                          <a:spcPct val="150000"/>
-                        </a:lnSpc>
-                        <a:spcAft>
-                          <a:spcPts val="1000"/>
-                        </a:spcAft>
-                      </a:pPr>
-                      <a:r>
-                        <a:rPr lang="ru-RU" sz="1200">
-                          <a:effectLst/>
-                        </a:rPr>
-                        <a:t>B, C</a:t>
-                      </a:r>
-                      <a:endParaRPr lang="ru-RU" sz="1400">
-                        <a:effectLst/>
-                        <a:latin typeface="Times New Roman" panose="02020603050405020304" pitchFamily="18" charset="0"/>
-                        <a:ea typeface="Times New Roman" panose="02020603050405020304" pitchFamily="18" charset="0"/>
-                        <a:cs typeface="Times New Roman" panose="02020603050405020304" pitchFamily="18" charset="0"/>
-                      </a:endParaRPr>
-                    </a:p>
-                  </a:txBody>
-                  <a:tcPr marL="9525" marR="9525" marT="9525" marB="9525" anchor="ctr"/>
-                </a:tc>
-                <a:tc>
-                  <a:txBody>
-                    <a:bodyPr/>
-                    <a:lstStyle/>
-                    <a:p>
-                      <a:pPr algn="ctr">
-                        <a:lnSpc>
-                          <a:spcPct val="150000"/>
-                        </a:lnSpc>
-                        <a:spcAft>
-                          <a:spcPts val="1000"/>
-                        </a:spcAft>
-                      </a:pPr>
-                      <a:r>
-                        <a:rPr lang="ru-RU" sz="1200" dirty="0">
-                          <a:effectLst/>
-                        </a:rPr>
-                        <a:t>адаптивные серии и стратегия слияния</a:t>
-                      </a:r>
-                      <a:endParaRPr lang="ru-RU" sz="1400" dirty="0">
-                        <a:effectLst/>
-                        <a:latin typeface="Times New Roman" panose="02020603050405020304" pitchFamily="18" charset="0"/>
-                        <a:ea typeface="Times New Roman" panose="02020603050405020304" pitchFamily="18" charset="0"/>
-                        <a:cs typeface="Times New Roman" panose="02020603050405020304" pitchFamily="18" charset="0"/>
-                      </a:endParaRPr>
-                    </a:p>
-                  </a:txBody>
-                  <a:tcPr marL="9525" marR="9525" marT="9525" marB="9525" anchor="ctr"/>
-                </a:tc>
-                <a:tc>
-                  <a:txBody>
-                    <a:bodyPr/>
-                    <a:lstStyle/>
-                    <a:p>
-                      <a:pPr algn="ctr">
-                        <a:lnSpc>
-                          <a:spcPct val="150000"/>
-                        </a:lnSpc>
-                        <a:spcAft>
-                          <a:spcPts val="1000"/>
-                        </a:spcAft>
-                      </a:pPr>
-                      <a:r>
-                        <a:rPr lang="ru-RU" sz="1200">
-                          <a:effectLst/>
-                        </a:rPr>
-                        <a:t>амортизированный анализ</a:t>
-                      </a:r>
-                      <a:endParaRPr lang="ru-RU" sz="1400">
-                        <a:effectLst/>
-                        <a:latin typeface="Times New Roman" panose="02020603050405020304" pitchFamily="18" charset="0"/>
-                        <a:ea typeface="Times New Roman" panose="02020603050405020304" pitchFamily="18" charset="0"/>
-                        <a:cs typeface="Times New Roman" panose="02020603050405020304" pitchFamily="18" charset="0"/>
-                      </a:endParaRPr>
-                    </a:p>
-                  </a:txBody>
-                  <a:tcPr marL="9525" marR="9525" marT="9525" marB="9525" anchor="ctr"/>
-                </a:tc>
-                <a:extLst>
-                  <a:ext uri="{0D108BD9-81ED-4DB2-BD59-A6C34878D82A}">
-                    <a16:rowId xmlns:a16="http://schemas.microsoft.com/office/drawing/2014/main" val="948559538"/>
-                  </a:ext>
-                </a:extLst>
-              </a:tr>
-              <a:tr h="452992">
-                <a:tc>
-                  <a:txBody>
-                    <a:bodyPr/>
-                    <a:lstStyle/>
-                    <a:p>
-                      <a:pPr algn="ctr">
-                        <a:lnSpc>
-                          <a:spcPct val="150000"/>
-                        </a:lnSpc>
-                        <a:spcAft>
-                          <a:spcPts val="1000"/>
-                        </a:spcAft>
-                      </a:pPr>
-                      <a:r>
-                        <a:rPr lang="ru-RU" sz="1200" dirty="0" err="1">
-                          <a:effectLst/>
-                        </a:rPr>
-                        <a:t>Bubble</a:t>
-                      </a:r>
-                      <a:r>
-                        <a:rPr lang="ru-RU" sz="1200" dirty="0">
-                          <a:effectLst/>
-                        </a:rPr>
-                        <a:t> </a:t>
-                      </a:r>
-                      <a:r>
-                        <a:rPr lang="ru-RU" sz="1200" dirty="0" err="1">
-                          <a:effectLst/>
-                        </a:rPr>
-                        <a:t>Sort</a:t>
-                      </a:r>
-                      <a:r>
-                        <a:rPr lang="ru-RU" sz="1200" dirty="0">
-                          <a:effectLst/>
-                        </a:rPr>
-                        <a:t>, </a:t>
-                      </a:r>
-                      <a:r>
-                        <a:rPr lang="ru-RU" sz="1200" dirty="0" err="1">
-                          <a:effectLst/>
-                        </a:rPr>
-                        <a:t>Selection</a:t>
-                      </a:r>
-                      <a:r>
-                        <a:rPr lang="ru-RU" sz="1200" dirty="0">
-                          <a:effectLst/>
-                        </a:rPr>
-                        <a:t> </a:t>
-                      </a:r>
-                      <a:r>
-                        <a:rPr lang="ru-RU" sz="1200" dirty="0" err="1">
-                          <a:effectLst/>
-                        </a:rPr>
-                        <a:t>Sort</a:t>
-                      </a:r>
-                      <a:endParaRPr lang="ru-RU" sz="1400" dirty="0">
-                        <a:effectLst/>
-                        <a:latin typeface="Times New Roman" panose="02020603050405020304" pitchFamily="18" charset="0"/>
-                        <a:ea typeface="Times New Roman" panose="02020603050405020304" pitchFamily="18" charset="0"/>
-                        <a:cs typeface="Times New Roman" panose="02020603050405020304" pitchFamily="18" charset="0"/>
-                      </a:endParaRPr>
-                    </a:p>
-                  </a:txBody>
-                  <a:tcPr marL="9525" marR="9525" marT="9525" marB="9525" anchor="ctr"/>
-                </a:tc>
-                <a:tc>
-                  <a:txBody>
-                    <a:bodyPr/>
-                    <a:lstStyle/>
-                    <a:p>
-                      <a:pPr algn="ctr">
-                        <a:lnSpc>
-                          <a:spcPct val="150000"/>
-                        </a:lnSpc>
-                        <a:spcAft>
-                          <a:spcPts val="1000"/>
-                        </a:spcAft>
-                      </a:pPr>
-                      <a:r>
-                        <a:rPr lang="ru-RU" sz="1200" dirty="0">
-                          <a:effectLst/>
-                        </a:rPr>
-                        <a:t>A</a:t>
-                      </a:r>
-                      <a:endParaRPr lang="ru-RU" sz="1400" dirty="0">
-                        <a:effectLst/>
-                        <a:latin typeface="Times New Roman" panose="02020603050405020304" pitchFamily="18" charset="0"/>
-                        <a:ea typeface="Times New Roman" panose="02020603050405020304" pitchFamily="18" charset="0"/>
-                        <a:cs typeface="Times New Roman" panose="02020603050405020304" pitchFamily="18" charset="0"/>
-                      </a:endParaRPr>
-                    </a:p>
-                  </a:txBody>
-                  <a:tcPr marL="9525" marR="9525" marT="9525" marB="9525" anchor="ctr"/>
-                </a:tc>
-                <a:tc>
-                  <a:txBody>
-                    <a:bodyPr/>
-                    <a:lstStyle/>
-                    <a:p>
-                      <a:pPr algn="ctr">
-                        <a:lnSpc>
-                          <a:spcPct val="150000"/>
-                        </a:lnSpc>
-                        <a:spcAft>
-                          <a:spcPts val="1000"/>
-                        </a:spcAft>
-                      </a:pPr>
-                      <a:r>
-                        <a:rPr lang="ru-RU" sz="1200">
-                          <a:effectLst/>
-                        </a:rPr>
-                        <a:t>итеративная структура</a:t>
-                      </a:r>
-                      <a:endParaRPr lang="ru-RU" sz="1400">
-                        <a:effectLst/>
-                        <a:latin typeface="Times New Roman" panose="02020603050405020304" pitchFamily="18" charset="0"/>
-                        <a:ea typeface="Times New Roman" panose="02020603050405020304" pitchFamily="18" charset="0"/>
-                        <a:cs typeface="Times New Roman" panose="02020603050405020304" pitchFamily="18" charset="0"/>
-                      </a:endParaRPr>
-                    </a:p>
-                  </a:txBody>
-                  <a:tcPr marL="9525" marR="9525" marT="9525" marB="9525" anchor="ctr"/>
-                </a:tc>
-                <a:tc>
-                  <a:txBody>
-                    <a:bodyPr/>
-                    <a:lstStyle/>
-                    <a:p>
-                      <a:pPr algn="ctr">
-                        <a:lnSpc>
-                          <a:spcPct val="150000"/>
-                        </a:lnSpc>
-                        <a:spcAft>
-                          <a:spcPts val="1000"/>
-                        </a:spcAft>
-                      </a:pPr>
-                      <a:r>
-                        <a:rPr lang="ru-RU" sz="1200" dirty="0">
-                          <a:effectLst/>
-                        </a:rPr>
-                        <a:t>прямой подсчёт</a:t>
-                      </a:r>
-                      <a:endParaRPr lang="ru-RU" sz="1400" dirty="0">
-                        <a:effectLst/>
-                        <a:latin typeface="Times New Roman" panose="02020603050405020304" pitchFamily="18" charset="0"/>
-                        <a:ea typeface="Times New Roman" panose="02020603050405020304" pitchFamily="18" charset="0"/>
-                        <a:cs typeface="Times New Roman" panose="02020603050405020304" pitchFamily="18" charset="0"/>
-                      </a:endParaRPr>
-                    </a:p>
-                  </a:txBody>
-                  <a:tcPr marL="9525" marR="9525" marT="9525" marB="9525" anchor="ctr"/>
-                </a:tc>
-                <a:extLst>
-                  <a:ext uri="{0D108BD9-81ED-4DB2-BD59-A6C34878D82A}">
-                    <a16:rowId xmlns:a16="http://schemas.microsoft.com/office/drawing/2014/main" val="2986890903"/>
-                  </a:ext>
-                </a:extLst>
-              </a:tr>
-            </a:tbl>
-          </a:graphicData>
-        </a:graphic>
-      </p:graphicFrame>
+              </p:cNvPr>
+              <p:cNvGraphicFramePr>
+                <a:graphicFrameLocks noGrp="1"/>
+              </p:cNvGraphicFramePr>
+              <p:nvPr>
+                <p:ph idx="1"/>
+                <p:extLst>
+                  <p:ext uri="{D42A27DB-BD31-4B8C-83A1-F6EECF244321}">
+                    <p14:modId xmlns:p14="http://schemas.microsoft.com/office/powerpoint/2010/main" val="2047347247"/>
+                  </p:ext>
+                </p:extLst>
+              </p:nvPr>
+            </p:nvGraphicFramePr>
+            <p:xfrm>
+              <a:off x="838200" y="1380149"/>
+              <a:ext cx="10786240" cy="4506156"/>
+            </p:xfrm>
+            <a:graphic>
+              <a:graphicData uri="http://schemas.openxmlformats.org/drawingml/2006/table">
+                <a:tbl>
+                  <a:tblPr firstRow="1" firstCol="1" bandRow="1">
+                    <a:tableStyleId>{5C22544A-7EE6-4342-B048-85BDC9FD1C3A}</a:tableStyleId>
+                  </a:tblPr>
+                  <a:tblGrid>
+                    <a:gridCol w="2696560">
+                      <a:extLst>
+                        <a:ext uri="{9D8B030D-6E8A-4147-A177-3AD203B41FA5}">
+                          <a16:colId xmlns:a16="http://schemas.microsoft.com/office/drawing/2014/main" val="1611344132"/>
+                        </a:ext>
+                      </a:extLst>
+                    </a:gridCol>
+                    <a:gridCol w="1616885">
+                      <a:extLst>
+                        <a:ext uri="{9D8B030D-6E8A-4147-A177-3AD203B41FA5}">
+                          <a16:colId xmlns:a16="http://schemas.microsoft.com/office/drawing/2014/main" val="503660173"/>
+                        </a:ext>
+                      </a:extLst>
+                    </a:gridCol>
+                    <a:gridCol w="2201392">
+                      <a:extLst>
+                        <a:ext uri="{9D8B030D-6E8A-4147-A177-3AD203B41FA5}">
+                          <a16:colId xmlns:a16="http://schemas.microsoft.com/office/drawing/2014/main" val="1941540570"/>
+                        </a:ext>
+                      </a:extLst>
+                    </a:gridCol>
+                    <a:gridCol w="4271403">
+                      <a:extLst>
+                        <a:ext uri="{9D8B030D-6E8A-4147-A177-3AD203B41FA5}">
+                          <a16:colId xmlns:a16="http://schemas.microsoft.com/office/drawing/2014/main" val="2122764893"/>
+                        </a:ext>
+                      </a:extLst>
+                    </a:gridCol>
+                  </a:tblGrid>
+                  <a:tr h="452992">
+                    <a:tc>
+                      <a:txBody>
+                        <a:bodyPr/>
+                        <a:lstStyle/>
+                        <a:p>
+                          <a:pPr algn="ctr">
+                            <a:lnSpc>
+                              <a:spcPct val="150000"/>
+                            </a:lnSpc>
+                            <a:spcAft>
+                              <a:spcPts val="1000"/>
+                            </a:spcAft>
+                          </a:pPr>
+                          <a:r>
+                            <a:rPr lang="ru-RU" sz="1200" dirty="0">
+                              <a:effectLst/>
+                            </a:rPr>
+                            <a:t>Алгоритм</a:t>
+                          </a:r>
+                          <a:endParaRPr lang="ru-RU" sz="1400" dirty="0">
+                            <a:effectLst/>
+                            <a:latin typeface="Times New Roman" panose="02020603050405020304" pitchFamily="18" charset="0"/>
+                            <a:ea typeface="Times New Roman" panose="02020603050405020304" pitchFamily="18" charset="0"/>
+                            <a:cs typeface="Times New Roman" panose="02020603050405020304" pitchFamily="18" charset="0"/>
+                          </a:endParaRPr>
+                        </a:p>
+                      </a:txBody>
+                      <a:tcPr marL="9525" marR="9525" marT="9525" marB="9525" anchor="ctr"/>
+                    </a:tc>
+                    <a:tc>
+                      <a:txBody>
+                        <a:bodyPr/>
+                        <a:lstStyle/>
+                        <a:p>
+                          <a:pPr algn="ctr">
+                            <a:lnSpc>
+                              <a:spcPct val="150000"/>
+                            </a:lnSpc>
+                            <a:spcAft>
+                              <a:spcPts val="1000"/>
+                            </a:spcAft>
+                          </a:pPr>
+                          <a:r>
+                            <a:rPr lang="ru-RU" sz="1200" dirty="0">
+                              <a:effectLst/>
+                            </a:rPr>
+                            <a:t>Нарушенное условие</a:t>
+                          </a:r>
+                          <a:endParaRPr lang="ru-RU" sz="1400" dirty="0">
+                            <a:effectLst/>
+                            <a:latin typeface="Times New Roman" panose="02020603050405020304" pitchFamily="18" charset="0"/>
+                            <a:ea typeface="Times New Roman" panose="02020603050405020304" pitchFamily="18" charset="0"/>
+                            <a:cs typeface="Times New Roman" panose="02020603050405020304" pitchFamily="18" charset="0"/>
+                          </a:endParaRPr>
+                        </a:p>
+                      </a:txBody>
+                      <a:tcPr marL="9525" marR="9525" marT="9525" marB="9525" anchor="ctr"/>
+                    </a:tc>
+                    <a:tc>
+                      <a:txBody>
+                        <a:bodyPr/>
+                        <a:lstStyle/>
+                        <a:p>
+                          <a:pPr algn="ctr">
+                            <a:lnSpc>
+                              <a:spcPct val="150000"/>
+                            </a:lnSpc>
+                            <a:spcAft>
+                              <a:spcPts val="1000"/>
+                            </a:spcAft>
+                          </a:pPr>
+                          <a:r>
+                            <a:rPr lang="ru-RU" sz="1200" dirty="0">
+                              <a:effectLst/>
+                            </a:rPr>
+                            <a:t>Причина</a:t>
+                          </a:r>
+                          <a:endParaRPr lang="ru-RU" sz="1400" dirty="0">
+                            <a:effectLst/>
+                            <a:latin typeface="Times New Roman" panose="02020603050405020304" pitchFamily="18" charset="0"/>
+                            <a:ea typeface="Times New Roman" panose="02020603050405020304" pitchFamily="18" charset="0"/>
+                            <a:cs typeface="Times New Roman" panose="02020603050405020304" pitchFamily="18" charset="0"/>
+                          </a:endParaRPr>
+                        </a:p>
+                      </a:txBody>
+                      <a:tcPr marL="9525" marR="9525" marT="9525" marB="9525" anchor="ctr"/>
+                    </a:tc>
+                    <a:tc>
+                      <a:txBody>
+                        <a:bodyPr/>
+                        <a:lstStyle/>
+                        <a:p>
+                          <a:pPr algn="ctr">
+                            <a:lnSpc>
+                              <a:spcPct val="150000"/>
+                            </a:lnSpc>
+                            <a:spcAft>
+                              <a:spcPts val="1000"/>
+                            </a:spcAft>
+                          </a:pPr>
+                          <a:r>
+                            <a:rPr lang="ru-RU" sz="1200" dirty="0">
+                              <a:effectLst/>
+                            </a:rPr>
+                            <a:t>Альтернативный метод / как определить асимптотику</a:t>
+                          </a:r>
+                          <a:endParaRPr lang="ru-RU" sz="1400" dirty="0">
+                            <a:effectLst/>
+                            <a:latin typeface="Times New Roman" panose="02020603050405020304" pitchFamily="18" charset="0"/>
+                            <a:ea typeface="Times New Roman" panose="02020603050405020304" pitchFamily="18" charset="0"/>
+                            <a:cs typeface="Times New Roman" panose="02020603050405020304" pitchFamily="18" charset="0"/>
+                          </a:endParaRPr>
+                        </a:p>
+                      </a:txBody>
+                      <a:tcPr marL="9525" marR="9525" marT="9525" marB="9525" anchor="ctr"/>
+                    </a:tc>
+                    <a:extLst>
+                      <a:ext uri="{0D108BD9-81ED-4DB2-BD59-A6C34878D82A}">
+                        <a16:rowId xmlns:a16="http://schemas.microsoft.com/office/drawing/2014/main" val="3990475179"/>
+                      </a:ext>
+                    </a:extLst>
+                  </a:tr>
+                  <a:tr h="1599819">
+                    <a:tc>
+                      <a:txBody>
+                        <a:bodyPr/>
+                        <a:lstStyle/>
+                        <a:p>
+                          <a:pPr algn="ctr">
+                            <a:lnSpc>
+                              <a:spcPct val="150000"/>
+                            </a:lnSpc>
+                            <a:spcAft>
+                              <a:spcPts val="1000"/>
+                            </a:spcAft>
+                          </a:pPr>
+                          <a:r>
+                            <a:rPr lang="ru-RU" sz="1200" dirty="0">
+                              <a:effectLst/>
+                            </a:rPr>
+                            <a:t>Quick </a:t>
+                          </a:r>
+                          <a:r>
+                            <a:rPr lang="ru-RU" sz="1200" dirty="0" err="1">
+                              <a:effectLst/>
+                            </a:rPr>
+                            <a:t>Sort</a:t>
+                          </a:r>
+                          <a:r>
+                            <a:rPr lang="ru-RU" sz="1200" dirty="0">
+                              <a:effectLst/>
+                            </a:rPr>
+                            <a:t>, средний случай</a:t>
+                          </a:r>
+                          <a:endParaRPr lang="ru-RU" sz="1400" dirty="0">
+                            <a:effectLst/>
+                            <a:latin typeface="Times New Roman" panose="02020603050405020304" pitchFamily="18" charset="0"/>
+                            <a:ea typeface="Times New Roman" panose="02020603050405020304" pitchFamily="18" charset="0"/>
+                            <a:cs typeface="Times New Roman" panose="02020603050405020304" pitchFamily="18" charset="0"/>
+                          </a:endParaRPr>
+                        </a:p>
+                      </a:txBody>
+                      <a:tcPr marL="9525" marR="9525" marT="9525" marB="9525" anchor="ctr"/>
+                    </a:tc>
+                    <a:tc>
+                      <a:txBody>
+                        <a:bodyPr/>
+                        <a:lstStyle/>
+                        <a:p>
+                          <a:pPr algn="ctr">
+                            <a:lnSpc>
+                              <a:spcPct val="150000"/>
+                            </a:lnSpc>
+                            <a:spcAft>
+                              <a:spcPts val="1000"/>
+                            </a:spcAft>
+                          </a:pPr>
+                          <a:r>
+                            <a:rPr lang="ru-RU" sz="1200" dirty="0">
+                              <a:effectLst/>
+                            </a:rPr>
+                            <a:t>B</a:t>
+                          </a:r>
+                          <a:endParaRPr lang="ru-RU" sz="1400" dirty="0">
+                            <a:effectLst/>
+                            <a:latin typeface="Times New Roman" panose="02020603050405020304" pitchFamily="18" charset="0"/>
+                            <a:ea typeface="Times New Roman" panose="02020603050405020304" pitchFamily="18" charset="0"/>
+                            <a:cs typeface="Times New Roman" panose="02020603050405020304" pitchFamily="18" charset="0"/>
+                          </a:endParaRPr>
+                        </a:p>
+                      </a:txBody>
+                      <a:tcPr marL="9525" marR="9525" marT="9525" marB="9525" anchor="ctr"/>
+                    </a:tc>
+                    <a:tc>
+                      <a:txBody>
+                        <a:bodyPr/>
+                        <a:lstStyle/>
+                        <a:p>
+                          <a:pPr algn="ctr">
+                            <a:lnSpc>
+                              <a:spcPct val="150000"/>
+                            </a:lnSpc>
+                            <a:spcAft>
+                              <a:spcPts val="1000"/>
+                            </a:spcAft>
+                          </a:pPr>
+                          <a:r>
+                            <a:rPr lang="ru-RU" sz="1200" dirty="0">
+                              <a:effectLst/>
+                            </a:rPr>
+                            <a:t>случайный размер подзадач</a:t>
+                          </a:r>
+                          <a:endParaRPr lang="ru-RU" sz="1400" dirty="0">
+                            <a:effectLst/>
+                            <a:latin typeface="Times New Roman" panose="02020603050405020304" pitchFamily="18" charset="0"/>
+                            <a:ea typeface="Times New Roman" panose="02020603050405020304" pitchFamily="18" charset="0"/>
+                            <a:cs typeface="Times New Roman" panose="02020603050405020304" pitchFamily="18" charset="0"/>
+                          </a:endParaRPr>
+                        </a:p>
+                      </a:txBody>
+                      <a:tcPr marL="9525" marR="9525" marT="9525" marB="9525" anchor="ctr"/>
+                    </a:tc>
+                    <a:tc>
+                      <a:txBody>
+                        <a:bodyPr/>
+                        <a:lstStyle/>
+                        <a:p>
+                          <a:endParaRPr lang="ru-RU"/>
+                        </a:p>
+                      </a:txBody>
+                      <a:tcPr marL="9525" marR="9525" marT="9525" marB="9525" anchor="ctr">
+                        <a:blipFill>
+                          <a:blip r:embed="rId2"/>
+                          <a:stretch>
+                            <a:fillRect l="-152639" t="-28517" r="-713" b="-153992"/>
+                          </a:stretch>
+                        </a:blipFill>
+                      </a:tcPr>
+                    </a:tc>
+                    <a:extLst>
+                      <a:ext uri="{0D108BD9-81ED-4DB2-BD59-A6C34878D82A}">
+                        <a16:rowId xmlns:a16="http://schemas.microsoft.com/office/drawing/2014/main" val="1889969963"/>
+                      </a:ext>
+                    </a:extLst>
+                  </a:tr>
+                  <a:tr h="538417">
+                    <a:tc>
+                      <a:txBody>
+                        <a:bodyPr/>
+                        <a:lstStyle/>
+                        <a:p>
+                          <a:pPr algn="ctr">
+                            <a:lnSpc>
+                              <a:spcPct val="150000"/>
+                            </a:lnSpc>
+                            <a:spcAft>
+                              <a:spcPts val="1000"/>
+                            </a:spcAft>
+                          </a:pPr>
+                          <a:r>
+                            <a:rPr lang="ru-RU" sz="1200" dirty="0" err="1">
+                              <a:effectLst/>
+                            </a:rPr>
+                            <a:t>Heap</a:t>
+                          </a:r>
+                          <a:r>
+                            <a:rPr lang="ru-RU" sz="1200" dirty="0">
+                              <a:effectLst/>
+                            </a:rPr>
+                            <a:t> </a:t>
+                          </a:r>
+                          <a:r>
+                            <a:rPr lang="ru-RU" sz="1200" dirty="0" err="1">
+                              <a:effectLst/>
+                            </a:rPr>
+                            <a:t>Sort</a:t>
+                          </a:r>
+                          <a:endParaRPr lang="ru-RU" sz="1400" dirty="0">
+                            <a:effectLst/>
+                            <a:latin typeface="Times New Roman" panose="02020603050405020304" pitchFamily="18" charset="0"/>
+                            <a:ea typeface="Times New Roman" panose="02020603050405020304" pitchFamily="18" charset="0"/>
+                            <a:cs typeface="Times New Roman" panose="02020603050405020304" pitchFamily="18" charset="0"/>
+                          </a:endParaRPr>
+                        </a:p>
+                      </a:txBody>
+                      <a:tcPr marL="9525" marR="9525" marT="9525" marB="9525" anchor="ctr"/>
+                    </a:tc>
+                    <a:tc>
+                      <a:txBody>
+                        <a:bodyPr/>
+                        <a:lstStyle/>
+                        <a:p>
+                          <a:pPr algn="ctr">
+                            <a:lnSpc>
+                              <a:spcPct val="150000"/>
+                            </a:lnSpc>
+                            <a:spcAft>
+                              <a:spcPts val="1000"/>
+                            </a:spcAft>
+                          </a:pPr>
+                          <a:r>
+                            <a:rPr lang="ru-RU" sz="1200" dirty="0">
+                              <a:effectLst/>
+                            </a:rPr>
+                            <a:t>A</a:t>
+                          </a:r>
+                          <a:endParaRPr lang="ru-RU" sz="1400" dirty="0">
+                            <a:effectLst/>
+                            <a:latin typeface="Times New Roman" panose="02020603050405020304" pitchFamily="18" charset="0"/>
+                            <a:ea typeface="Times New Roman" panose="02020603050405020304" pitchFamily="18" charset="0"/>
+                            <a:cs typeface="Times New Roman" panose="02020603050405020304" pitchFamily="18" charset="0"/>
+                          </a:endParaRPr>
+                        </a:p>
+                      </a:txBody>
+                      <a:tcPr marL="9525" marR="9525" marT="9525" marB="9525" anchor="ctr"/>
+                    </a:tc>
+                    <a:tc>
+                      <a:txBody>
+                        <a:bodyPr/>
+                        <a:lstStyle/>
+                        <a:p>
+                          <a:pPr algn="ctr">
+                            <a:lnSpc>
+                              <a:spcPct val="150000"/>
+                            </a:lnSpc>
+                            <a:spcAft>
+                              <a:spcPts val="1000"/>
+                            </a:spcAft>
+                          </a:pPr>
+                          <a:r>
+                            <a:rPr lang="ru-RU" sz="1200">
+                              <a:effectLst/>
+                            </a:rPr>
+                            <a:t>нет рекурсивной структуры сортировки</a:t>
+                          </a:r>
+                          <a:endParaRPr lang="ru-RU" sz="1400">
+                            <a:effectLst/>
+                            <a:latin typeface="Times New Roman" panose="02020603050405020304" pitchFamily="18" charset="0"/>
+                            <a:ea typeface="Times New Roman" panose="02020603050405020304" pitchFamily="18" charset="0"/>
+                            <a:cs typeface="Times New Roman" panose="02020603050405020304" pitchFamily="18" charset="0"/>
+                          </a:endParaRPr>
+                        </a:p>
+                      </a:txBody>
+                      <a:tcPr marL="9525" marR="9525" marT="9525" marB="9525" anchor="ctr"/>
+                    </a:tc>
+                    <a:tc>
+                      <a:txBody>
+                        <a:bodyPr/>
+                        <a:lstStyle/>
+                        <a:p>
+                          <a:endParaRPr lang="ru-RU"/>
+                        </a:p>
+                      </a:txBody>
+                      <a:tcPr marL="9525" marR="9525" marT="9525" marB="9525" anchor="ctr">
+                        <a:blipFill>
+                          <a:blip r:embed="rId2"/>
+                          <a:stretch>
+                            <a:fillRect l="-152639" t="-379775" r="-713" b="-355056"/>
+                          </a:stretch>
+                        </a:blipFill>
+                      </a:tcPr>
+                    </a:tc>
+                    <a:extLst>
+                      <a:ext uri="{0D108BD9-81ED-4DB2-BD59-A6C34878D82A}">
+                        <a16:rowId xmlns:a16="http://schemas.microsoft.com/office/drawing/2014/main" val="594100534"/>
+                      </a:ext>
+                    </a:extLst>
+                  </a:tr>
+                  <a:tr h="923519">
+                    <a:tc>
+                      <a:txBody>
+                        <a:bodyPr/>
+                        <a:lstStyle/>
+                        <a:p>
+                          <a:pPr algn="ctr">
+                            <a:lnSpc>
+                              <a:spcPct val="150000"/>
+                            </a:lnSpc>
+                            <a:spcAft>
+                              <a:spcPts val="1000"/>
+                            </a:spcAft>
+                          </a:pPr>
+                          <a:r>
+                            <a:rPr lang="ru-RU" sz="1200" dirty="0" err="1">
+                              <a:effectLst/>
+                            </a:rPr>
+                            <a:t>Shellsort</a:t>
+                          </a:r>
+                          <a:endParaRPr lang="ru-RU" sz="1400" dirty="0">
+                            <a:effectLst/>
+                            <a:latin typeface="Times New Roman" panose="02020603050405020304" pitchFamily="18" charset="0"/>
+                            <a:ea typeface="Times New Roman" panose="02020603050405020304" pitchFamily="18" charset="0"/>
+                            <a:cs typeface="Times New Roman" panose="02020603050405020304" pitchFamily="18" charset="0"/>
+                          </a:endParaRPr>
+                        </a:p>
+                      </a:txBody>
+                      <a:tcPr marL="9525" marR="9525" marT="9525" marB="9525" anchor="ctr"/>
+                    </a:tc>
+                    <a:tc>
+                      <a:txBody>
+                        <a:bodyPr/>
+                        <a:lstStyle/>
+                        <a:p>
+                          <a:pPr algn="ctr">
+                            <a:lnSpc>
+                              <a:spcPct val="150000"/>
+                            </a:lnSpc>
+                            <a:spcAft>
+                              <a:spcPts val="1000"/>
+                            </a:spcAft>
+                          </a:pPr>
+                          <a:r>
+                            <a:rPr lang="ru-RU" sz="1200" dirty="0">
+                              <a:effectLst/>
+                            </a:rPr>
+                            <a:t>A, B, C</a:t>
+                          </a:r>
+                          <a:endParaRPr lang="ru-RU" sz="1400" dirty="0">
+                            <a:effectLst/>
+                            <a:latin typeface="Times New Roman" panose="02020603050405020304" pitchFamily="18" charset="0"/>
+                            <a:ea typeface="Times New Roman" panose="02020603050405020304" pitchFamily="18" charset="0"/>
+                            <a:cs typeface="Times New Roman" panose="02020603050405020304" pitchFamily="18" charset="0"/>
+                          </a:endParaRPr>
+                        </a:p>
+                      </a:txBody>
+                      <a:tcPr marL="9525" marR="9525" marT="9525" marB="9525" anchor="ctr"/>
+                    </a:tc>
+                    <a:tc>
+                      <a:txBody>
+                        <a:bodyPr/>
+                        <a:lstStyle/>
+                        <a:p>
+                          <a:pPr algn="ctr">
+                            <a:lnSpc>
+                              <a:spcPct val="150000"/>
+                            </a:lnSpc>
+                            <a:spcAft>
+                              <a:spcPts val="1000"/>
+                            </a:spcAft>
+                          </a:pPr>
+                          <a:r>
+                            <a:rPr lang="ru-RU" sz="1200" dirty="0">
+                              <a:effectLst/>
+                            </a:rPr>
+                            <a:t>зависимость от последовательности шагов и входа</a:t>
+                          </a:r>
+                          <a:endParaRPr lang="ru-RU" sz="1400" dirty="0">
+                            <a:effectLst/>
+                            <a:latin typeface="Times New Roman" panose="02020603050405020304" pitchFamily="18" charset="0"/>
+                            <a:ea typeface="Times New Roman" panose="02020603050405020304" pitchFamily="18" charset="0"/>
+                            <a:cs typeface="Times New Roman" panose="02020603050405020304" pitchFamily="18" charset="0"/>
+                          </a:endParaRPr>
+                        </a:p>
+                      </a:txBody>
+                      <a:tcPr marL="9525" marR="9525" marT="9525" marB="9525" anchor="ctr"/>
+                    </a:tc>
+                    <a:tc>
+                      <a:txBody>
+                        <a:bodyPr/>
+                        <a:lstStyle/>
+                        <a:p>
+                          <a:pPr algn="ctr">
+                            <a:lnSpc>
+                              <a:spcPct val="150000"/>
+                            </a:lnSpc>
+                            <a:spcAft>
+                              <a:spcPts val="1000"/>
+                            </a:spcAft>
+                          </a:pPr>
+                          <a:r>
+                            <a:rPr lang="ru-RU" sz="1200" dirty="0">
+                              <a:effectLst/>
+                            </a:rPr>
+                            <a:t>Подсчёт инверсий по проходам; результат зависит от шагов</a:t>
+                          </a:r>
+                          <a:endParaRPr lang="ru-RU" sz="1400" dirty="0">
+                            <a:effectLst/>
+                            <a:latin typeface="Times New Roman" panose="02020603050405020304" pitchFamily="18" charset="0"/>
+                            <a:ea typeface="Times New Roman" panose="02020603050405020304" pitchFamily="18" charset="0"/>
+                            <a:cs typeface="Times New Roman" panose="02020603050405020304" pitchFamily="18" charset="0"/>
+                          </a:endParaRPr>
+                        </a:p>
+                      </a:txBody>
+                      <a:tcPr marL="9525" marR="9525" marT="9525" marB="9525" anchor="ctr"/>
+                    </a:tc>
+                    <a:extLst>
+                      <a:ext uri="{0D108BD9-81ED-4DB2-BD59-A6C34878D82A}">
+                        <a16:rowId xmlns:a16="http://schemas.microsoft.com/office/drawing/2014/main" val="3146335872"/>
+                      </a:ext>
+                    </a:extLst>
+                  </a:tr>
+                  <a:tr h="538417">
+                    <a:tc>
+                      <a:txBody>
+                        <a:bodyPr/>
+                        <a:lstStyle/>
+                        <a:p>
+                          <a:pPr algn="ctr">
+                            <a:lnSpc>
+                              <a:spcPct val="150000"/>
+                            </a:lnSpc>
+                            <a:spcAft>
+                              <a:spcPts val="1000"/>
+                            </a:spcAft>
+                          </a:pPr>
+                          <a:r>
+                            <a:rPr lang="ru-RU" sz="1200">
+                              <a:effectLst/>
+                            </a:rPr>
+                            <a:t>Tim Sort</a:t>
+                          </a:r>
+                          <a:endParaRPr lang="ru-RU" sz="1400">
+                            <a:effectLst/>
+                            <a:latin typeface="Times New Roman" panose="02020603050405020304" pitchFamily="18" charset="0"/>
+                            <a:ea typeface="Times New Roman" panose="02020603050405020304" pitchFamily="18" charset="0"/>
+                            <a:cs typeface="Times New Roman" panose="02020603050405020304" pitchFamily="18" charset="0"/>
+                          </a:endParaRPr>
+                        </a:p>
+                      </a:txBody>
+                      <a:tcPr marL="9525" marR="9525" marT="9525" marB="9525" anchor="ctr"/>
+                    </a:tc>
+                    <a:tc>
+                      <a:txBody>
+                        <a:bodyPr/>
+                        <a:lstStyle/>
+                        <a:p>
+                          <a:pPr algn="ctr">
+                            <a:lnSpc>
+                              <a:spcPct val="150000"/>
+                            </a:lnSpc>
+                            <a:spcAft>
+                              <a:spcPts val="1000"/>
+                            </a:spcAft>
+                          </a:pPr>
+                          <a:r>
+                            <a:rPr lang="ru-RU" sz="1200">
+                              <a:effectLst/>
+                            </a:rPr>
+                            <a:t>B, C</a:t>
+                          </a:r>
+                          <a:endParaRPr lang="ru-RU" sz="1400">
+                            <a:effectLst/>
+                            <a:latin typeface="Times New Roman" panose="02020603050405020304" pitchFamily="18" charset="0"/>
+                            <a:ea typeface="Times New Roman" panose="02020603050405020304" pitchFamily="18" charset="0"/>
+                            <a:cs typeface="Times New Roman" panose="02020603050405020304" pitchFamily="18" charset="0"/>
+                          </a:endParaRPr>
+                        </a:p>
+                      </a:txBody>
+                      <a:tcPr marL="9525" marR="9525" marT="9525" marB="9525" anchor="ctr"/>
+                    </a:tc>
+                    <a:tc>
+                      <a:txBody>
+                        <a:bodyPr/>
+                        <a:lstStyle/>
+                        <a:p>
+                          <a:pPr algn="ctr">
+                            <a:lnSpc>
+                              <a:spcPct val="150000"/>
+                            </a:lnSpc>
+                            <a:spcAft>
+                              <a:spcPts val="1000"/>
+                            </a:spcAft>
+                          </a:pPr>
+                          <a:r>
+                            <a:rPr lang="ru-RU" sz="1200" dirty="0">
+                              <a:effectLst/>
+                            </a:rPr>
+                            <a:t>адаптивные серии и стратегия слияния</a:t>
+                          </a:r>
+                          <a:endParaRPr lang="ru-RU" sz="1400" dirty="0">
+                            <a:effectLst/>
+                            <a:latin typeface="Times New Roman" panose="02020603050405020304" pitchFamily="18" charset="0"/>
+                            <a:ea typeface="Times New Roman" panose="02020603050405020304" pitchFamily="18" charset="0"/>
+                            <a:cs typeface="Times New Roman" panose="02020603050405020304" pitchFamily="18" charset="0"/>
+                          </a:endParaRPr>
+                        </a:p>
+                      </a:txBody>
+                      <a:tcPr marL="9525" marR="9525" marT="9525" marB="9525" anchor="ctr"/>
+                    </a:tc>
+                    <a:tc>
+                      <a:txBody>
+                        <a:bodyPr/>
+                        <a:lstStyle/>
+                        <a:p>
+                          <a:pPr algn="ctr">
+                            <a:lnSpc>
+                              <a:spcPct val="150000"/>
+                            </a:lnSpc>
+                            <a:spcAft>
+                              <a:spcPts val="1000"/>
+                            </a:spcAft>
+                          </a:pPr>
+                          <a:r>
+                            <a:rPr lang="ru-RU" sz="1200" dirty="0">
+                              <a:effectLst/>
+                            </a:rPr>
+                            <a:t>Амортизированная стоимость слияний серий</a:t>
+                          </a:r>
+                          <a:r>
+                            <a:rPr lang="en-US" sz="1200" dirty="0">
+                              <a:effectLst/>
+                            </a:rPr>
+                            <a:t>(</a:t>
+                          </a:r>
+                          <a:r>
+                            <a:rPr lang="ru-RU" sz="1200" dirty="0" err="1">
+                              <a:effectLst/>
+                            </a:rPr>
+                            <a:t>Кормен</a:t>
+                          </a:r>
+                          <a:r>
+                            <a:rPr lang="en-US" sz="1200" dirty="0">
+                              <a:effectLst/>
+                            </a:rPr>
+                            <a:t>)</a:t>
+                          </a:r>
+                          <a:endParaRPr lang="ru-RU" sz="1400" dirty="0">
+                            <a:effectLst/>
+                            <a:latin typeface="Times New Roman" panose="02020603050405020304" pitchFamily="18" charset="0"/>
+                            <a:ea typeface="Times New Roman" panose="02020603050405020304" pitchFamily="18" charset="0"/>
+                            <a:cs typeface="Times New Roman" panose="02020603050405020304" pitchFamily="18" charset="0"/>
+                          </a:endParaRPr>
+                        </a:p>
+                      </a:txBody>
+                      <a:tcPr marL="9525" marR="9525" marT="9525" marB="9525" anchor="ctr"/>
+                    </a:tc>
+                    <a:extLst>
+                      <a:ext uri="{0D108BD9-81ED-4DB2-BD59-A6C34878D82A}">
+                        <a16:rowId xmlns:a16="http://schemas.microsoft.com/office/drawing/2014/main" val="948559538"/>
+                      </a:ext>
+                    </a:extLst>
+                  </a:tr>
+                  <a:tr h="452992">
+                    <a:tc>
+                      <a:txBody>
+                        <a:bodyPr/>
+                        <a:lstStyle/>
+                        <a:p>
+                          <a:pPr algn="ctr">
+                            <a:lnSpc>
+                              <a:spcPct val="150000"/>
+                            </a:lnSpc>
+                            <a:spcAft>
+                              <a:spcPts val="1000"/>
+                            </a:spcAft>
+                          </a:pPr>
+                          <a:r>
+                            <a:rPr lang="ru-RU" sz="1200" dirty="0" err="1">
+                              <a:effectLst/>
+                            </a:rPr>
+                            <a:t>Bubble</a:t>
+                          </a:r>
+                          <a:r>
+                            <a:rPr lang="ru-RU" sz="1200" dirty="0">
+                              <a:effectLst/>
+                            </a:rPr>
+                            <a:t> </a:t>
+                          </a:r>
+                          <a:r>
+                            <a:rPr lang="ru-RU" sz="1200" dirty="0" err="1">
+                              <a:effectLst/>
+                            </a:rPr>
+                            <a:t>Sort</a:t>
+                          </a:r>
+                          <a:r>
+                            <a:rPr lang="ru-RU" sz="1200" dirty="0">
+                              <a:effectLst/>
+                            </a:rPr>
+                            <a:t>, </a:t>
+                          </a:r>
+                          <a:r>
+                            <a:rPr lang="ru-RU" sz="1200" dirty="0" err="1">
+                              <a:effectLst/>
+                            </a:rPr>
+                            <a:t>Selection</a:t>
+                          </a:r>
+                          <a:r>
+                            <a:rPr lang="ru-RU" sz="1200" dirty="0">
+                              <a:effectLst/>
+                            </a:rPr>
+                            <a:t> </a:t>
+                          </a:r>
+                          <a:r>
+                            <a:rPr lang="ru-RU" sz="1200" dirty="0" err="1">
+                              <a:effectLst/>
+                            </a:rPr>
+                            <a:t>Sort</a:t>
+                          </a:r>
+                          <a:endParaRPr lang="ru-RU" sz="1400" dirty="0">
+                            <a:effectLst/>
+                            <a:latin typeface="Times New Roman" panose="02020603050405020304" pitchFamily="18" charset="0"/>
+                            <a:ea typeface="Times New Roman" panose="02020603050405020304" pitchFamily="18" charset="0"/>
+                            <a:cs typeface="Times New Roman" panose="02020603050405020304" pitchFamily="18" charset="0"/>
+                          </a:endParaRPr>
+                        </a:p>
+                      </a:txBody>
+                      <a:tcPr marL="9525" marR="9525" marT="9525" marB="9525" anchor="ctr"/>
+                    </a:tc>
+                    <a:tc>
+                      <a:txBody>
+                        <a:bodyPr/>
+                        <a:lstStyle/>
+                        <a:p>
+                          <a:pPr algn="ctr">
+                            <a:lnSpc>
+                              <a:spcPct val="150000"/>
+                            </a:lnSpc>
+                            <a:spcAft>
+                              <a:spcPts val="1000"/>
+                            </a:spcAft>
+                          </a:pPr>
+                          <a:r>
+                            <a:rPr lang="ru-RU" sz="1200" dirty="0">
+                              <a:effectLst/>
+                            </a:rPr>
+                            <a:t>A</a:t>
+                          </a:r>
+                          <a:endParaRPr lang="ru-RU" sz="1400" dirty="0">
+                            <a:effectLst/>
+                            <a:latin typeface="Times New Roman" panose="02020603050405020304" pitchFamily="18" charset="0"/>
+                            <a:ea typeface="Times New Roman" panose="02020603050405020304" pitchFamily="18" charset="0"/>
+                            <a:cs typeface="Times New Roman" panose="02020603050405020304" pitchFamily="18" charset="0"/>
+                          </a:endParaRPr>
+                        </a:p>
+                      </a:txBody>
+                      <a:tcPr marL="9525" marR="9525" marT="9525" marB="9525" anchor="ctr"/>
+                    </a:tc>
+                    <a:tc>
+                      <a:txBody>
+                        <a:bodyPr/>
+                        <a:lstStyle/>
+                        <a:p>
+                          <a:pPr algn="ctr">
+                            <a:lnSpc>
+                              <a:spcPct val="150000"/>
+                            </a:lnSpc>
+                            <a:spcAft>
+                              <a:spcPts val="1000"/>
+                            </a:spcAft>
+                          </a:pPr>
+                          <a:r>
+                            <a:rPr lang="ru-RU" sz="1200">
+                              <a:effectLst/>
+                            </a:rPr>
+                            <a:t>итеративная структура</a:t>
+                          </a:r>
+                          <a:endParaRPr lang="ru-RU" sz="1400">
+                            <a:effectLst/>
+                            <a:latin typeface="Times New Roman" panose="02020603050405020304" pitchFamily="18" charset="0"/>
+                            <a:ea typeface="Times New Roman" panose="02020603050405020304" pitchFamily="18" charset="0"/>
+                            <a:cs typeface="Times New Roman" panose="02020603050405020304" pitchFamily="18" charset="0"/>
+                          </a:endParaRPr>
+                        </a:p>
+                      </a:txBody>
+                      <a:tcPr marL="9525" marR="9525" marT="9525" marB="9525" anchor="ctr"/>
+                    </a:tc>
+                    <a:tc>
+                      <a:txBody>
+                        <a:bodyPr/>
+                        <a:lstStyle/>
+                        <a:p>
+                          <a:pPr algn="ctr">
+                            <a:lnSpc>
+                              <a:spcPct val="150000"/>
+                            </a:lnSpc>
+                            <a:spcAft>
+                              <a:spcPts val="1000"/>
+                            </a:spcAft>
+                          </a:pPr>
+                          <a:r>
+                            <a:rPr lang="ru-RU" sz="1200" dirty="0">
+                              <a:effectLst/>
+                            </a:rPr>
+                            <a:t>Прямой подсчёт: просуммировать сравнения по проходам</a:t>
+                          </a:r>
+                          <a:endParaRPr lang="ru-RU" sz="1400" dirty="0">
+                            <a:effectLst/>
+                            <a:latin typeface="Times New Roman" panose="02020603050405020304" pitchFamily="18" charset="0"/>
+                            <a:ea typeface="Times New Roman" panose="02020603050405020304" pitchFamily="18" charset="0"/>
+                            <a:cs typeface="Times New Roman" panose="02020603050405020304" pitchFamily="18" charset="0"/>
+                          </a:endParaRPr>
+                        </a:p>
+                      </a:txBody>
+                      <a:tcPr marL="9525" marR="9525" marT="9525" marB="9525" anchor="ctr"/>
+                    </a:tc>
+                    <a:extLst>
+                      <a:ext uri="{0D108BD9-81ED-4DB2-BD59-A6C34878D82A}">
+                        <a16:rowId xmlns:a16="http://schemas.microsoft.com/office/drawing/2014/main" val="2986890903"/>
+                      </a:ext>
+                    </a:extLst>
+                  </a:tr>
+                </a:tbl>
+              </a:graphicData>
+            </a:graphic>
+          </p:graphicFrame>
+        </mc:Fallback>
+      </mc:AlternateContent>
     </p:spTree>
     <p:extLst>
       <p:ext uri="{BB962C8B-B14F-4D97-AF65-F5344CB8AC3E}">
@@ -5466,7 +6699,7 @@
           <a:p>
             <a:r>
               <a:rPr lang="ru-RU" dirty="0"/>
-              <a:t>Бонусные алгоритмы которые анализируемы этим подходом</a:t>
+              <a:t>Дополнительные алгоритмы которые анализируемы этим подходом</a:t>
             </a:r>
           </a:p>
         </p:txBody>
@@ -5580,8 +6813,8 @@
           </a:p>
         </p:txBody>
       </p:sp>
-      <mc:AlternateContent xmlns:mc="http://schemas.openxmlformats.org/markup-compatibility/2006" xmlns:a14="http://schemas.microsoft.com/office/drawing/2010/main">
-        <mc:Choice Requires="a14">
+      <mc:AlternateContent xmlns:mc="http://schemas.openxmlformats.org/markup-compatibility/2006">
+        <mc:Choice xmlns:a14="http://schemas.microsoft.com/office/drawing/2010/main" Requires="a14">
           <p:graphicFrame>
             <p:nvGraphicFramePr>
               <p:cNvPr id="9" name="Таблица 8">
@@ -5597,14 +6830,14 @@
               <p:nvPr>
                 <p:extLst>
                   <p:ext uri="{D42A27DB-BD31-4B8C-83A1-F6EECF244321}">
-                    <p14:modId xmlns:p14="http://schemas.microsoft.com/office/powerpoint/2010/main" val="1675218220"/>
+                    <p14:modId xmlns:p14="http://schemas.microsoft.com/office/powerpoint/2010/main" val="3323325760"/>
                   </p:ext>
                 </p:extLst>
               </p:nvPr>
             </p:nvGraphicFramePr>
             <p:xfrm>
               <a:off x="838200" y="3086894"/>
-              <a:ext cx="10515600" cy="1901316"/>
+              <a:ext cx="10515600" cy="2204880"/>
             </p:xfrm>
             <a:graphic>
               <a:graphicData uri="http://schemas.openxmlformats.org/drawingml/2006/table">
@@ -5658,12 +6891,12 @@
                         <a:lstStyle/>
                         <a:p>
                           <a:r>
-                            <a:rPr lang="ru-RU">
+                            <a:rPr lang="ru-RU" dirty="0">
                               <a:effectLst/>
                             </a:rPr>
                             <a:t>Рекуррентность</a:t>
                           </a:r>
-                          <a:endParaRPr lang="ru-RU"/>
+                          <a:endParaRPr lang="ru-RU" dirty="0"/>
                         </a:p>
                       </a:txBody>
                       <a:tcPr anchor="ctr"/>
@@ -5674,12 +6907,12 @@
                         <a:lstStyle/>
                         <a:p>
                           <a:r>
-                            <a:rPr lang="ru-RU">
+                            <a:rPr lang="ru-RU" dirty="0">
                               <a:effectLst/>
                             </a:rPr>
                             <a:t>Асимптотика</a:t>
                           </a:r>
-                          <a:endParaRPr lang="ru-RU"/>
+                          <a:endParaRPr lang="ru-RU" dirty="0"/>
                         </a:p>
                       </a:txBody>
                       <a:tcPr anchor="ctr"/>
@@ -5732,26 +6965,31 @@
                                   </a:rPr>
                                   <m:t>𝑇</m:t>
                                 </m:r>
+                                <m:d>
+                                  <m:dPr>
+                                    <m:ctrlPr>
+                                      <a:rPr lang="en-US" i="1" dirty="0" smtClean="0">
+                                        <a:effectLst/>
+                                        <a:latin typeface="Cambria Math" panose="02040503050406030204" pitchFamily="18" charset="0"/>
+                                      </a:rPr>
+                                    </m:ctrlPr>
+                                  </m:dPr>
+                                  <m:e>
+                                    <m:r>
+                                      <a:rPr lang="en-US" i="1" dirty="0" smtClean="0">
+                                        <a:effectLst/>
+                                        <a:latin typeface="Cambria Math" panose="02040503050406030204" pitchFamily="18" charset="0"/>
+                                      </a:rPr>
+                                      <m:t>𝑛</m:t>
+                                    </m:r>
+                                  </m:e>
+                                </m:d>
                                 <m:r>
                                   <a:rPr lang="en-US" i="1" dirty="0" smtClean="0">
                                     <a:effectLst/>
                                     <a:latin typeface="Cambria Math" panose="02040503050406030204" pitchFamily="18" charset="0"/>
                                   </a:rPr>
-                                  <m:t>(</m:t>
-                                </m:r>
-                                <m:r>
-                                  <a:rPr lang="en-US" i="1" dirty="0" smtClean="0">
-                                    <a:effectLst/>
-                                    <a:latin typeface="Cambria Math" panose="02040503050406030204" pitchFamily="18" charset="0"/>
-                                  </a:rPr>
-                                  <m:t>𝑛</m:t>
-                                </m:r>
-                                <m:r>
-                                  <a:rPr lang="en-US" i="1" dirty="0" smtClean="0">
-                                    <a:effectLst/>
-                                    <a:latin typeface="Cambria Math" panose="02040503050406030204" pitchFamily="18" charset="0"/>
-                                  </a:rPr>
-                                  <m:t>)=3</m:t>
+                                  <m:t>=3</m:t>
                                 </m:r>
                                 <m:r>
                                   <a:rPr lang="en-US" i="1" dirty="0">
@@ -5760,29 +6998,67 @@
                                   </a:rPr>
                                   <m:t>𝑇</m:t>
                                 </m:r>
+                                <m:d>
+                                  <m:dPr>
+                                    <m:ctrlPr>
+                                      <a:rPr lang="en-US" i="1" dirty="0">
+                                        <a:effectLst/>
+                                        <a:latin typeface="Cambria Math" panose="02040503050406030204" pitchFamily="18" charset="0"/>
+                                      </a:rPr>
+                                    </m:ctrlPr>
+                                  </m:dPr>
+                                  <m:e>
+                                    <m:f>
+                                      <m:fPr>
+                                        <m:ctrlPr>
+                                          <a:rPr lang="en-US" i="1" dirty="0">
+                                            <a:effectLst/>
+                                            <a:latin typeface="Cambria Math" panose="02040503050406030204" pitchFamily="18" charset="0"/>
+                                          </a:rPr>
+                                        </m:ctrlPr>
+                                      </m:fPr>
+                                      <m:num>
+                                        <m:r>
+                                          <a:rPr lang="en-US" i="1" dirty="0">
+                                            <a:latin typeface="Cambria Math" panose="02040503050406030204" pitchFamily="18" charset="0"/>
+                                          </a:rPr>
+                                          <m:t>𝑛</m:t>
+                                        </m:r>
+                                      </m:num>
+                                      <m:den>
+                                        <m:r>
+                                          <a:rPr lang="en-US" i="1" dirty="0">
+                                            <a:latin typeface="Cambria Math" panose="02040503050406030204" pitchFamily="18" charset="0"/>
+                                          </a:rPr>
+                                          <m:t>2</m:t>
+                                        </m:r>
+                                      </m:den>
+                                    </m:f>
+                                  </m:e>
+                                </m:d>
                                 <m:r>
                                   <a:rPr lang="en-US" i="1" dirty="0">
                                     <a:latin typeface="Cambria Math" panose="02040503050406030204" pitchFamily="18" charset="0"/>
                                   </a:rPr>
-                                  <m:t>(</m:t>
+                                  <m:t>+</m:t>
                                 </m:r>
                                 <m:r>
-                                  <a:rPr lang="en-US" i="1" dirty="0">
+                                  <a:rPr lang="en-US" b="0" i="1" dirty="0" smtClean="0">
+                                    <a:latin typeface="Cambria Math" panose="02040503050406030204" pitchFamily="18" charset="0"/>
+                                  </a:rPr>
+                                  <m:t>𝑐</m:t>
+                                </m:r>
+                                <m:r>
+                                  <a:rPr lang="en-US" b="0" i="1" dirty="0" smtClean="0">
+                                    <a:latin typeface="Cambria Math" panose="02040503050406030204" pitchFamily="18" charset="0"/>
+                                  </a:rPr>
+                                  <m:t>·</m:t>
+                                </m:r>
+                                <m:r>
+                                  <a:rPr lang="en-US" b="0" i="1" dirty="0" smtClean="0">
                                     <a:latin typeface="Cambria Math" panose="02040503050406030204" pitchFamily="18" charset="0"/>
                                   </a:rPr>
                                   <m:t>𝑛</m:t>
-                                </m:r>
-                                <m:r>
-                                  <a:rPr lang="en-US" i="1" dirty="0">
-                                    <a:latin typeface="Cambria Math" panose="02040503050406030204" pitchFamily="18" charset="0"/>
-                                  </a:rPr>
-                                  <m:t>/2)+</m:t>
-                                </m:r>
-                                <m:r>
-                                  <a:rPr lang="en-US" i="1" dirty="0" err="1">
-                                    <a:latin typeface="Cambria Math" panose="02040503050406030204" pitchFamily="18" charset="0"/>
-                                  </a:rPr>
-                                  <m:t>𝑐𝑛</m:t>
                                 </m:r>
                               </m:oMath>
                             </m:oMathPara>
@@ -5948,57 +7224,102 @@
                                   </a:rPr>
                                   <m:t>𝑇</m:t>
                                 </m:r>
+                                <m:d>
+                                  <m:dPr>
+                                    <m:ctrlPr>
+                                      <a:rPr lang="en-US" i="1" dirty="0" smtClean="0">
+                                        <a:effectLst/>
+                                        <a:latin typeface="Cambria Math" panose="02040503050406030204" pitchFamily="18" charset="0"/>
+                                      </a:rPr>
+                                    </m:ctrlPr>
+                                  </m:dPr>
+                                  <m:e>
+                                    <m:r>
+                                      <a:rPr lang="en-US" i="1" dirty="0" smtClean="0">
+                                        <a:effectLst/>
+                                        <a:latin typeface="Cambria Math" panose="02040503050406030204" pitchFamily="18" charset="0"/>
+                                      </a:rPr>
+                                      <m:t>𝑛</m:t>
+                                    </m:r>
+                                  </m:e>
+                                </m:d>
                                 <m:r>
                                   <a:rPr lang="en-US" i="1" dirty="0" smtClean="0">
                                     <a:effectLst/>
                                     <a:latin typeface="Cambria Math" panose="02040503050406030204" pitchFamily="18" charset="0"/>
                                   </a:rPr>
-                                  <m:t>(</m:t>
+                                  <m:t>=5</m:t>
                                 </m:r>
                                 <m:r>
-                                  <a:rPr lang="en-US" i="1" dirty="0" smtClean="0">
-                                    <a:effectLst/>
-                                    <a:latin typeface="Cambria Math" panose="02040503050406030204" pitchFamily="18" charset="0"/>
-                                  </a:rPr>
-                                  <m:t>𝑛</m:t>
-                                </m:r>
-                                <m:r>
-                                  <a:rPr lang="en-US" i="1" dirty="0" smtClean="0">
-                                    <a:effectLst/>
-                                    <a:latin typeface="Cambria Math" panose="02040503050406030204" pitchFamily="18" charset="0"/>
-                                  </a:rPr>
-                                  <m:t>)=5</m:t>
-                                </m:r>
-                                <m:r>
-                                  <a:rPr lang="en-US" i="1" dirty="0">
+                                  <a:rPr lang="en-US" b="0" i="1" dirty="0" smtClean="0">
                                     <a:effectLst/>
                                     <a:latin typeface="Cambria Math" panose="02040503050406030204" pitchFamily="18" charset="0"/>
                                   </a:rPr>
                                   <m:t>𝑇</m:t>
                                 </m:r>
+                                <m:d>
+                                  <m:dPr>
+                                    <m:ctrlPr>
+                                      <a:rPr lang="en-US" b="0" i="1" dirty="0" smtClean="0">
+                                        <a:effectLst/>
+                                        <a:latin typeface="Cambria Math" panose="02040503050406030204" pitchFamily="18" charset="0"/>
+                                      </a:rPr>
+                                    </m:ctrlPr>
+                                  </m:dPr>
+                                  <m:e>
+                                    <m:f>
+                                      <m:fPr>
+                                        <m:ctrlPr>
+                                          <a:rPr lang="en-US" b="0" i="1" dirty="0" smtClean="0">
+                                            <a:effectLst/>
+                                            <a:latin typeface="Cambria Math" panose="02040503050406030204" pitchFamily="18" charset="0"/>
+                                          </a:rPr>
+                                        </m:ctrlPr>
+                                      </m:fPr>
+                                      <m:num>
+                                        <m:r>
+                                          <a:rPr lang="en-US" b="0" i="1" dirty="0" smtClean="0">
+                                            <a:effectLst/>
+                                            <a:latin typeface="Cambria Math" panose="02040503050406030204" pitchFamily="18" charset="0"/>
+                                          </a:rPr>
+                                          <m:t>𝑛</m:t>
+                                        </m:r>
+                                      </m:num>
+                                      <m:den>
+                                        <m:r>
+                                          <a:rPr lang="en-US" b="0" i="1" dirty="0" smtClean="0">
+                                            <a:effectLst/>
+                                            <a:latin typeface="Cambria Math" panose="02040503050406030204" pitchFamily="18" charset="0"/>
+                                          </a:rPr>
+                                          <m:t>3</m:t>
+                                        </m:r>
+                                      </m:den>
+                                    </m:f>
+                                  </m:e>
+                                </m:d>
                                 <m:r>
                                   <a:rPr lang="en-US" i="1" dirty="0">
                                     <a:latin typeface="Cambria Math" panose="02040503050406030204" pitchFamily="18" charset="0"/>
                                   </a:rPr>
-                                  <m:t>(</m:t>
+                                  <m:t>+</m:t>
                                 </m:r>
                                 <m:r>
-                                  <a:rPr lang="en-US" i="1" dirty="0">
+                                  <a:rPr lang="en-US" b="0" i="1" dirty="0" smtClean="0">
+                                    <a:latin typeface="Cambria Math" panose="02040503050406030204" pitchFamily="18" charset="0"/>
+                                  </a:rPr>
+                                  <m:t>𝑐</m:t>
+                                </m:r>
+                                <m:r>
+                                  <a:rPr lang="en-US" b="0" i="1" dirty="0" smtClean="0">
+                                    <a:latin typeface="Cambria Math" panose="02040503050406030204" pitchFamily="18" charset="0"/>
+                                  </a:rPr>
+                                  <m:t>·</m:t>
+                                </m:r>
+                                <m:r>
+                                  <a:rPr lang="en-US" b="0" i="1" dirty="0" smtClean="0">
                                     <a:latin typeface="Cambria Math" panose="02040503050406030204" pitchFamily="18" charset="0"/>
                                   </a:rPr>
                                   <m:t>𝑛</m:t>
-                                </m:r>
-                                <m:r>
-                                  <a:rPr lang="en-US" i="1" dirty="0">
-                                    <a:latin typeface="Cambria Math" panose="02040503050406030204" pitchFamily="18" charset="0"/>
-                                  </a:rPr>
-                                  <m:t>/3)+</m:t>
-                                </m:r>
-                                <m:r>
-                                  <a:rPr lang="en-US" i="1" dirty="0" err="1">
-                                    <a:latin typeface="Cambria Math" panose="02040503050406030204" pitchFamily="18" charset="0"/>
-                                  </a:rPr>
-                                  <m:t>𝑐𝑛</m:t>
                                 </m:r>
                               </m:oMath>
                             </m:oMathPara>
@@ -6128,26 +7449,31 @@
                                   </a:rPr>
                                   <m:t>𝑇</m:t>
                                 </m:r>
+                                <m:d>
+                                  <m:dPr>
+                                    <m:ctrlPr>
+                                      <a:rPr lang="en-US" i="1" dirty="0" smtClean="0">
+                                        <a:effectLst/>
+                                        <a:latin typeface="Cambria Math" panose="02040503050406030204" pitchFamily="18" charset="0"/>
+                                      </a:rPr>
+                                    </m:ctrlPr>
+                                  </m:dPr>
+                                  <m:e>
+                                    <m:r>
+                                      <a:rPr lang="en-US" i="1" dirty="0" smtClean="0">
+                                        <a:effectLst/>
+                                        <a:latin typeface="Cambria Math" panose="02040503050406030204" pitchFamily="18" charset="0"/>
+                                      </a:rPr>
+                                      <m:t>𝑛</m:t>
+                                    </m:r>
+                                  </m:e>
+                                </m:d>
                                 <m:r>
                                   <a:rPr lang="en-US" i="1" dirty="0" smtClean="0">
                                     <a:effectLst/>
                                     <a:latin typeface="Cambria Math" panose="02040503050406030204" pitchFamily="18" charset="0"/>
                                   </a:rPr>
-                                  <m:t>(</m:t>
-                                </m:r>
-                                <m:r>
-                                  <a:rPr lang="en-US" i="1" dirty="0" smtClean="0">
-                                    <a:effectLst/>
-                                    <a:latin typeface="Cambria Math" panose="02040503050406030204" pitchFamily="18" charset="0"/>
-                                  </a:rPr>
-                                  <m:t>𝑛</m:t>
-                                </m:r>
-                                <m:r>
-                                  <a:rPr lang="en-US" i="1" dirty="0" smtClean="0">
-                                    <a:effectLst/>
-                                    <a:latin typeface="Cambria Math" panose="02040503050406030204" pitchFamily="18" charset="0"/>
-                                  </a:rPr>
-                                  <m:t>)=7</m:t>
+                                  <m:t>=7</m:t>
                                 </m:r>
                                 <m:r>
                                   <a:rPr lang="en-US" i="1" dirty="0">
@@ -6156,37 +7482,88 @@
                                   </a:rPr>
                                   <m:t>𝑇</m:t>
                                 </m:r>
+                                <m:d>
+                                  <m:dPr>
+                                    <m:ctrlPr>
+                                      <a:rPr lang="en-US" i="1" dirty="0">
+                                        <a:effectLst/>
+                                        <a:latin typeface="Cambria Math" panose="02040503050406030204" pitchFamily="18" charset="0"/>
+                                      </a:rPr>
+                                    </m:ctrlPr>
+                                  </m:dPr>
+                                  <m:e>
+                                    <m:f>
+                                      <m:fPr>
+                                        <m:ctrlPr>
+                                          <a:rPr lang="en-US" i="1" dirty="0">
+                                            <a:effectLst/>
+                                            <a:latin typeface="Cambria Math" panose="02040503050406030204" pitchFamily="18" charset="0"/>
+                                          </a:rPr>
+                                        </m:ctrlPr>
+                                      </m:fPr>
+                                      <m:num>
+                                        <m:r>
+                                          <a:rPr lang="en-US" i="1" dirty="0">
+                                            <a:latin typeface="Cambria Math" panose="02040503050406030204" pitchFamily="18" charset="0"/>
+                                          </a:rPr>
+                                          <m:t>𝑛</m:t>
+                                        </m:r>
+                                      </m:num>
+                                      <m:den>
+                                        <m:r>
+                                          <a:rPr lang="en-US" i="1" dirty="0">
+                                            <a:latin typeface="Cambria Math" panose="02040503050406030204" pitchFamily="18" charset="0"/>
+                                          </a:rPr>
+                                          <m:t>2</m:t>
+                                        </m:r>
+                                      </m:den>
+                                    </m:f>
+                                  </m:e>
+                                </m:d>
                                 <m:r>
                                   <a:rPr lang="en-US" i="1" dirty="0">
                                     <a:latin typeface="Cambria Math" panose="02040503050406030204" pitchFamily="18" charset="0"/>
                                   </a:rPr>
-                                  <m:t>(</m:t>
+                                  <m:t>+</m:t>
                                 </m:r>
                                 <m:r>
                                   <a:rPr lang="en-US" i="1" dirty="0">
                                     <a:latin typeface="Cambria Math" panose="02040503050406030204" pitchFamily="18" charset="0"/>
                                   </a:rPr>
-                                  <m:t>𝑛</m:t>
+                                  <m:t>𝑐</m:t>
                                 </m:r>
-                                <m:r>
-                                  <a:rPr lang="en-US" i="1" dirty="0">
-                                    <a:latin typeface="Cambria Math" panose="02040503050406030204" pitchFamily="18" charset="0"/>
-                                  </a:rPr>
-                                  <m:t>/2)+</m:t>
-                                </m:r>
-                                <m:r>
-                                  <a:rPr lang="en-US" i="1" dirty="0">
-                                    <a:latin typeface="Cambria Math" panose="02040503050406030204" pitchFamily="18" charset="0"/>
-                                  </a:rPr>
-                                  <m:t>𝑐𝑛</m:t>
-                                </m:r>
-                                <m:r>
-                                  <a:rPr lang="en-US" i="1" dirty="0">
-                                    <a:effectLst/>
-                                    <a:latin typeface="Cambria Math" panose="02040503050406030204" pitchFamily="18" charset="0"/>
-                                  </a:rPr>
-                                  <m:t>2</m:t>
-                                </m:r>
+                                <m:sSup>
+                                  <m:sSupPr>
+                                    <m:ctrlPr>
+                                      <a:rPr lang="en-US" b="0" i="1" dirty="0" smtClean="0">
+                                        <a:latin typeface="Cambria Math" panose="02040503050406030204" pitchFamily="18" charset="0"/>
+                                      </a:rPr>
+                                    </m:ctrlPr>
+                                  </m:sSupPr>
+                                  <m:e>
+                                    <m:r>
+                                      <a:rPr lang="en-US" b="0" i="1" dirty="0" smtClean="0">
+                                        <a:latin typeface="Cambria Math" panose="02040503050406030204" pitchFamily="18" charset="0"/>
+                                      </a:rPr>
+                                      <m:t>·</m:t>
+                                    </m:r>
+                                    <m:r>
+                                      <a:rPr lang="en-US" i="1" dirty="0">
+                                        <a:latin typeface="Cambria Math" panose="02040503050406030204" pitchFamily="18" charset="0"/>
+                                      </a:rPr>
+                                      <m:t>𝑛</m:t>
+                                    </m:r>
+                                  </m:e>
+                                  <m:sup>
+                                    <m:r>
+                                      <a:rPr lang="en-US" i="1" dirty="0">
+                                        <a:effectLst/>
+                                        <a:latin typeface="Cambria Math" panose="02040503050406030204" pitchFamily="18" charset="0"/>
+                                      </a:rPr>
+                                      <m:t>2</m:t>
+                                    </m:r>
+                                  </m:sup>
+                                </m:sSup>
                               </m:oMath>
                             </m:oMathPara>
                           </a14:m>
@@ -6278,7 +7655,7 @@
             </a:graphic>
           </p:graphicFrame>
         </mc:Choice>
-        <mc:Fallback xmlns="">
+        <mc:Fallback>
           <p:graphicFrame>
             <p:nvGraphicFramePr>
               <p:cNvPr id="9" name="Таблица 8">
@@ -6294,14 +7671,14 @@
               <p:nvPr>
                 <p:extLst>
                   <p:ext uri="{D42A27DB-BD31-4B8C-83A1-F6EECF244321}">
-                    <p14:modId xmlns:p14="http://schemas.microsoft.com/office/powerpoint/2010/main" val="1675218220"/>
+                    <p14:modId xmlns:p14="http://schemas.microsoft.com/office/powerpoint/2010/main" val="3323325760"/>
                   </p:ext>
                 </p:extLst>
               </p:nvPr>
             </p:nvGraphicFramePr>
             <p:xfrm>
               <a:off x="838200" y="3086894"/>
-              <a:ext cx="10515600" cy="1901316"/>
+              <a:ext cx="10515600" cy="2204880"/>
             </p:xfrm>
             <a:graphic>
               <a:graphicData uri="http://schemas.openxmlformats.org/drawingml/2006/table">
@@ -6355,12 +7732,12 @@
                         <a:lstStyle/>
                         <a:p>
                           <a:r>
-                            <a:rPr lang="ru-RU">
+                            <a:rPr lang="ru-RU" dirty="0">
                               <a:effectLst/>
                             </a:rPr>
                             <a:t>Рекуррентность</a:t>
                           </a:r>
-                          <a:endParaRPr lang="ru-RU"/>
+                          <a:endParaRPr lang="ru-RU" dirty="0"/>
                         </a:p>
                       </a:txBody>
                       <a:tcPr anchor="ctr"/>
@@ -6371,12 +7748,12 @@
                         <a:lstStyle/>
                         <a:p>
                           <a:r>
-                            <a:rPr lang="ru-RU">
+                            <a:rPr lang="ru-RU" dirty="0">
                               <a:effectLst/>
                             </a:rPr>
                             <a:t>Асимптотика</a:t>
                           </a:r>
-                          <a:endParaRPr lang="ru-RU"/>
+                          <a:endParaRPr lang="ru-RU" dirty="0"/>
                         </a:p>
                       </a:txBody>
                       <a:tcPr anchor="ctr"/>
@@ -6387,7 +7764,7 @@
                       </a:ext>
                     </a:extLst>
                   </a:tr>
-                  <a:tr h="475329">
+                  <a:tr h="576517">
                     <a:tc>
                       <a:txBody>
                         <a:bodyPr/>
@@ -6422,7 +7799,7 @@
                         <a:blipFill>
                           <a:blip r:embed="rId2"/>
                           <a:stretch>
-                            <a:fillRect l="-100000" t="-100000" r="-100521" b="-205063"/>
+                            <a:fillRect l="-100000" t="-83158" r="-100521" b="-202105"/>
                           </a:stretch>
                         </a:blipFill>
                       </a:tcPr>
@@ -6439,7 +7816,7 @@
                         <a:blipFill>
                           <a:blip r:embed="rId2"/>
                           <a:stretch>
-                            <a:fillRect l="-200348" t="-100000" r="-696" b="-205063"/>
+                            <a:fillRect l="-200348" t="-83158" r="-696" b="-202105"/>
                           </a:stretch>
                         </a:blipFill>
                       </a:tcPr>
@@ -6450,7 +7827,7 @@
                       </a:ext>
                     </a:extLst>
                   </a:tr>
-                  <a:tr h="475329">
+                  <a:tr h="576517">
                     <a:tc>
                       <a:txBody>
                         <a:bodyPr/>
@@ -6521,7 +7898,7 @@
                         <a:blipFill>
                           <a:blip r:embed="rId2"/>
                           <a:stretch>
-                            <a:fillRect l="-100000" t="-202564" r="-100521" b="-107692"/>
+                            <a:fillRect l="-100000" t="-183158" r="-100521" b="-102105"/>
                           </a:stretch>
                         </a:blipFill>
                       </a:tcPr>
@@ -6538,7 +7915,7 @@
                         <a:blipFill>
                           <a:blip r:embed="rId2"/>
                           <a:stretch>
-                            <a:fillRect l="-200348" t="-202564" r="-696" b="-107692"/>
+                            <a:fillRect l="-200348" t="-183158" r="-696" b="-102105"/>
                           </a:stretch>
                         </a:blipFill>
                       </a:tcPr>
@@ -6549,7 +7926,7 @@
                       </a:ext>
                     </a:extLst>
                   </a:tr>
-                  <a:tr h="475329">
+                  <a:tr h="576517">
                     <a:tc>
                       <a:txBody>
                         <a:bodyPr/>
@@ -6584,7 +7961,7 @@
                         <a:blipFill>
                           <a:blip r:embed="rId2"/>
                           <a:stretch>
-                            <a:fillRect l="-100000" t="-302564" r="-100521" b="-7692"/>
+                            <a:fillRect l="-100000" t="-283158" r="-100521" b="-2105"/>
                           </a:stretch>
                         </a:blipFill>
                       </a:tcPr>
@@ -6601,7 +7978,7 @@
                         <a:blipFill>
                           <a:blip r:embed="rId2"/>
                           <a:stretch>
-                            <a:fillRect l="-200348" t="-302564" r="-696" b="-7692"/>
+                            <a:fillRect l="-200348" t="-283158" r="-696" b="-2105"/>
                           </a:stretch>
                         </a:blipFill>
                       </a:tcPr>
@@ -6780,8 +8157,8 @@
           </a:p>
         </p:txBody>
       </p:sp>
-      <mc:AlternateContent xmlns:mc="http://schemas.openxmlformats.org/markup-compatibility/2006" xmlns:a14="http://schemas.microsoft.com/office/drawing/2010/main">
-        <mc:Choice Requires="a14">
+      <mc:AlternateContent xmlns:mc="http://schemas.openxmlformats.org/markup-compatibility/2006">
+        <mc:Choice xmlns:a14="http://schemas.microsoft.com/office/drawing/2010/main" Requires="a14">
           <p:graphicFrame>
             <p:nvGraphicFramePr>
               <p:cNvPr id="6" name="Таблица 5">
@@ -6797,14 +8174,14 @@
               <p:nvPr>
                 <p:extLst>
                   <p:ext uri="{D42A27DB-BD31-4B8C-83A1-F6EECF244321}">
-                    <p14:modId xmlns:p14="http://schemas.microsoft.com/office/powerpoint/2010/main" val="2762342786"/>
+                    <p14:modId xmlns:p14="http://schemas.microsoft.com/office/powerpoint/2010/main" val="2411234283"/>
                   </p:ext>
                 </p:extLst>
               </p:nvPr>
             </p:nvGraphicFramePr>
             <p:xfrm>
               <a:off x="838200" y="2949734"/>
-              <a:ext cx="10515600" cy="2103120"/>
+              <a:ext cx="10515600" cy="2194370"/>
             </p:xfrm>
             <a:graphic>
               <a:graphicData uri="http://schemas.openxmlformats.org/drawingml/2006/table">
@@ -6929,12 +8306,12 @@
                         <a:lstStyle/>
                         <a:p>
                           <a:r>
-                            <a:rPr lang="ru-RU">
+                            <a:rPr lang="ru-RU" dirty="0">
                               <a:effectLst/>
                             </a:rPr>
                             <a:t>чётные / нечётные коэффициенты</a:t>
                           </a:r>
-                          <a:endParaRPr lang="ru-RU"/>
+                          <a:endParaRPr lang="ru-RU" dirty="0"/>
                         </a:p>
                       </a:txBody>
                       <a:tcPr anchor="ctr"/>
@@ -6968,15 +8345,41 @@
                         <a:lstStyle/>
                         <a:p>
                           <a:r>
-                            <a:rPr lang="ru-RU">
+                            <a:rPr lang="ru-RU" dirty="0">
                               <a:effectLst/>
                             </a:rPr>
-                            <a:t>две подзадачи </a:t>
+                            <a:t>две подзадачи размера </a:t>
                           </a:r>
-                          <a:r>
-                            <a:rPr lang="en-US"/>
-                            <a:t>n/2</a:t>
-                          </a:r>
+                          <a14:m>
+                            <m:oMath xmlns:m="http://schemas.openxmlformats.org/officeDocument/2006/math">
+                              <m:f>
+                                <m:fPr>
+                                  <m:ctrlPr>
+                                    <a:rPr lang="en-US" i="1" dirty="0" smtClean="0">
+                                      <a:latin typeface="Cambria Math" panose="02040503050406030204" pitchFamily="18" charset="0"/>
+                                    </a:rPr>
+                                  </m:ctrlPr>
+                                </m:fPr>
+                                <m:num>
+                                  <m:r>
+                                    <a:rPr lang="en-US" i="1" dirty="0" smtClean="0">
+                                      <a:latin typeface="Cambria Math" panose="02040503050406030204" pitchFamily="18" charset="0"/>
+                                    </a:rPr>
+                                    <m:t>𝑛</m:t>
+                                  </m:r>
+                                </m:num>
+                                <m:den>
+                                  <m:r>
+                                    <a:rPr lang="en-US" i="1" dirty="0" smtClean="0">
+                                      <a:latin typeface="Cambria Math" panose="02040503050406030204" pitchFamily="18" charset="0"/>
+                                    </a:rPr>
+                                    <m:t>2</m:t>
+                                  </m:r>
+                                </m:den>
+                              </m:f>
+                            </m:oMath>
+                          </a14:m>
+                          <a:endParaRPr lang="en-US" dirty="0"/>
                         </a:p>
                       </a:txBody>
                       <a:tcPr anchor="ctr"/>
@@ -6987,15 +8390,53 @@
                         <a:lstStyle/>
                         <a:p>
                           <a:r>
-                            <a:rPr lang="ru-RU">
+                            <a:rPr lang="ru-RU" dirty="0">
                               <a:effectLst/>
                             </a:rPr>
-                            <a:t>две подзадачи </a:t>
+                            <a:t>две подзадачи</a:t>
                           </a:r>
                           <a:r>
-                            <a:rPr lang="en-US"/>
-                            <a:t>n/2</a:t>
+                            <a:rPr lang="en-US" dirty="0">
+                              <a:effectLst/>
+                            </a:rPr>
+                            <a:t> </a:t>
                           </a:r>
+                          <a:r>
+                            <a:rPr lang="ru-RU" dirty="0">
+                              <a:effectLst/>
+                            </a:rPr>
+                            <a:t>размера </a:t>
+                          </a:r>
+                          <a14:m>
+                            <m:oMath xmlns:m="http://schemas.openxmlformats.org/officeDocument/2006/math">
+                              <m:f>
+                                <m:fPr>
+                                  <m:ctrlPr>
+                                    <a:rPr lang="en-US" i="1" dirty="0" smtClean="0">
+                                      <a:latin typeface="Cambria Math" panose="02040503050406030204" pitchFamily="18" charset="0"/>
+                                    </a:rPr>
+                                  </m:ctrlPr>
+                                </m:fPr>
+                                <m:num>
+                                  <m:r>
+                                    <a:rPr lang="en-US" i="1" dirty="0" smtClean="0">
+                                      <a:latin typeface="Cambria Math" panose="02040503050406030204" pitchFamily="18" charset="0"/>
+                                    </a:rPr>
+                                    <m:t>𝑛</m:t>
+                                  </m:r>
+                                </m:num>
+                                <m:den>
+                                  <m:r>
+                                    <a:rPr lang="en-US" i="1" dirty="0" smtClean="0">
+                                      <a:latin typeface="Cambria Math" panose="02040503050406030204" pitchFamily="18" charset="0"/>
+                                    </a:rPr>
+                                    <m:t>2</m:t>
+                                  </m:r>
+                                </m:den>
+                              </m:f>
+                            </m:oMath>
+                          </a14:m>
+                          <a:endParaRPr lang="en-US" dirty="0"/>
                         </a:p>
                       </a:txBody>
                       <a:tcPr anchor="ctr"/>
@@ -7029,12 +8470,12 @@
                         <a:lstStyle/>
                         <a:p>
                           <a:r>
-                            <a:rPr lang="ru-RU">
+                            <a:rPr lang="ru-RU" dirty="0">
                               <a:effectLst/>
                             </a:rPr>
                             <a:t>компараторы</a:t>
                           </a:r>
-                          <a:endParaRPr lang="ru-RU"/>
+                          <a:endParaRPr lang="ru-RU" dirty="0"/>
                         </a:p>
                       </a:txBody>
                       <a:tcPr anchor="ctr"/>
@@ -7045,12 +8486,12 @@
                         <a:lstStyle/>
                         <a:p>
                           <a:r>
-                            <a:rPr lang="ru-RU">
+                            <a:rPr lang="ru-RU" dirty="0">
                               <a:effectLst/>
                             </a:rPr>
                             <a:t>операции «бабочки»</a:t>
                           </a:r>
-                          <a:endParaRPr lang="ru-RU"/>
+                          <a:endParaRPr lang="ru-RU" dirty="0"/>
                         </a:p>
                       </a:txBody>
                       <a:tcPr anchor="ctr"/>
@@ -7087,7 +8528,7 @@
                           <a14:m>
                             <m:oMathPara xmlns:m="http://schemas.openxmlformats.org/officeDocument/2006/math">
                               <m:oMathParaPr>
-                                <m:jc m:val="centerGroup"/>
+                                <m:jc m:val="left"/>
                               </m:oMathParaPr>
                               <m:oMath xmlns:m="http://schemas.openxmlformats.org/officeDocument/2006/math">
                                 <m:r>
@@ -7101,35 +8542,34 @@
                                   <m:t>Θ</m:t>
                                 </m:r>
                                 <m:r>
-                                  <a:rPr lang="el-GR" i="1" dirty="0">
+                                  <a:rPr lang="el-GR" i="1" dirty="0" smtClean="0">
                                     <a:effectLst/>
                                     <a:latin typeface="Cambria Math" panose="02040503050406030204" pitchFamily="18" charset="0"/>
                                   </a:rPr>
                                   <m:t>(</m:t>
                                 </m:r>
                                 <m:r>
-                                  <a:rPr lang="en-US" i="1" dirty="0" err="1">
+                                  <a:rPr lang="en-US" i="1" dirty="0" smtClean="0">
                                     <a:effectLst/>
                                     <a:latin typeface="Cambria Math" panose="02040503050406030204" pitchFamily="18" charset="0"/>
                                   </a:rPr>
                                   <m:t>𝑛</m:t>
                                 </m:r>
                                 <m:r>
-                                  <a:rPr lang="ru-RU" b="0" i="1" dirty="0" smtClean="0">
-                                    <a:effectLst/>
+                                  <a:rPr lang="en-US" b="0" i="1" dirty="0" smtClean="0">
                                     <a:latin typeface="Cambria Math" panose="02040503050406030204" pitchFamily="18" charset="0"/>
                                   </a:rPr>
-                                  <m:t> </m:t>
+                                  <m:t>·</m:t>
                                 </m:r>
                                 <m:r>
-                                  <a:rPr lang="en-US" i="1" dirty="0" err="1">
+                                  <a:rPr lang="en-US" i="1" dirty="0" smtClean="0">
                                     <a:effectLst/>
                                     <a:latin typeface="Cambria Math" panose="02040503050406030204" pitchFamily="18" charset="0"/>
                                   </a:rPr>
                                   <m:t>𝑙𝑜𝑔𝑛</m:t>
                                 </m:r>
                                 <m:r>
-                                  <a:rPr lang="en-US" i="1" dirty="0">
+                                  <a:rPr lang="en-US" i="1" dirty="0" smtClean="0">
                                     <a:effectLst/>
                                     <a:latin typeface="Cambria Math" panose="02040503050406030204" pitchFamily="18" charset="0"/>
                                   </a:rPr>
@@ -7152,7 +8592,7 @@
                           <a14:m>
                             <m:oMathPara xmlns:m="http://schemas.openxmlformats.org/officeDocument/2006/math">
                               <m:oMathParaPr>
-                                <m:jc m:val="centerGroup"/>
+                                <m:jc m:val="left"/>
                               </m:oMathParaPr>
                               <m:oMath xmlns:m="http://schemas.openxmlformats.org/officeDocument/2006/math">
                                 <m:r>
@@ -7166,35 +8606,34 @@
                                   <m:t>Θ</m:t>
                                 </m:r>
                                 <m:r>
-                                  <a:rPr lang="el-GR" i="1" dirty="0">
+                                  <a:rPr lang="el-GR" i="1" dirty="0" smtClean="0">
                                     <a:effectLst/>
                                     <a:latin typeface="Cambria Math" panose="02040503050406030204" pitchFamily="18" charset="0"/>
                                   </a:rPr>
                                   <m:t>(</m:t>
                                 </m:r>
                                 <m:r>
-                                  <a:rPr lang="en-US" i="1" dirty="0" err="1">
+                                  <a:rPr lang="en-US" i="1" dirty="0" smtClean="0">
                                     <a:effectLst/>
                                     <a:latin typeface="Cambria Math" panose="02040503050406030204" pitchFamily="18" charset="0"/>
                                   </a:rPr>
                                   <m:t>𝑛</m:t>
                                 </m:r>
                                 <m:r>
-                                  <a:rPr lang="ru-RU" b="0" i="1" dirty="0" smtClean="0">
-                                    <a:effectLst/>
+                                  <a:rPr lang="en-US" b="0" i="1" dirty="0" smtClean="0">
                                     <a:latin typeface="Cambria Math" panose="02040503050406030204" pitchFamily="18" charset="0"/>
                                   </a:rPr>
-                                  <m:t> </m:t>
+                                  <m:t>·</m:t>
                                 </m:r>
                                 <m:r>
-                                  <a:rPr lang="en-US" i="1" dirty="0" err="1">
+                                  <a:rPr lang="en-US" i="1" dirty="0" smtClean="0">
                                     <a:effectLst/>
                                     <a:latin typeface="Cambria Math" panose="02040503050406030204" pitchFamily="18" charset="0"/>
                                   </a:rPr>
                                   <m:t>𝑙𝑜𝑔𝑛</m:t>
                                 </m:r>
                                 <m:r>
-                                  <a:rPr lang="en-US" i="1" dirty="0">
+                                  <a:rPr lang="en-US" i="1" dirty="0" smtClean="0">
                                     <a:effectLst/>
                                     <a:latin typeface="Cambria Math" panose="02040503050406030204" pitchFamily="18" charset="0"/>
                                   </a:rPr>
@@ -7219,7 +8658,7 @@
             </a:graphic>
           </p:graphicFrame>
         </mc:Choice>
-        <mc:Fallback xmlns="">
+        <mc:Fallback>
           <p:graphicFrame>
             <p:nvGraphicFramePr>
               <p:cNvPr id="6" name="Таблица 5">
@@ -7235,14 +8674,14 @@
               <p:nvPr>
                 <p:extLst>
                   <p:ext uri="{D42A27DB-BD31-4B8C-83A1-F6EECF244321}">
-                    <p14:modId xmlns:p14="http://schemas.microsoft.com/office/powerpoint/2010/main" val="2762342786"/>
+                    <p14:modId xmlns:p14="http://schemas.microsoft.com/office/powerpoint/2010/main" val="2411234283"/>
                   </p:ext>
                 </p:extLst>
               </p:nvPr>
             </p:nvGraphicFramePr>
             <p:xfrm>
               <a:off x="838200" y="2949734"/>
-              <a:ext cx="10515600" cy="2103120"/>
+              <a:ext cx="10515600" cy="2194370"/>
             </p:xfrm>
             <a:graphic>
               <a:graphicData uri="http://schemas.openxmlformats.org/drawingml/2006/table">
@@ -7367,12 +8806,12 @@
                         <a:lstStyle/>
                         <a:p>
                           <a:r>
-                            <a:rPr lang="ru-RU">
+                            <a:rPr lang="ru-RU" dirty="0">
                               <a:effectLst/>
                             </a:rPr>
                             <a:t>чётные / нечётные коэффициенты</a:t>
                           </a:r>
-                          <a:endParaRPr lang="ru-RU"/>
+                          <a:endParaRPr lang="ru-RU" dirty="0"/>
                         </a:p>
                       </a:txBody>
                       <a:tcPr anchor="ctr"/>
@@ -7383,7 +8822,7 @@
                       </a:ext>
                     </a:extLst>
                   </a:tr>
-                  <a:tr h="365760">
+                  <a:tr h="457010">
                     <a:tc>
                       <a:txBody>
                         <a:bodyPr/>
@@ -7405,38 +8844,34 @@
                         <a:bodyPr/>
                         <a:lstStyle/>
                         <a:p>
-                          <a:r>
-                            <a:rPr lang="ru-RU">
-                              <a:effectLst/>
-                            </a:rPr>
-                            <a:t>две подзадачи </a:t>
-                          </a:r>
-                          <a:r>
-                            <a:rPr lang="en-US"/>
-                            <a:t>n/2</a:t>
-                          </a:r>
+                          <a:endParaRPr lang="ru-RU"/>
                         </a:p>
                       </a:txBody>
-                      <a:tcPr anchor="ctr"/>
+                      <a:tcPr anchor="ctr">
+                        <a:blipFill>
+                          <a:blip r:embed="rId2"/>
+                          <a:stretch>
+                            <a:fillRect l="-100000" t="-223684" r="-100521" b="-178947"/>
+                          </a:stretch>
+                        </a:blipFill>
+                      </a:tcPr>
                     </a:tc>
                     <a:tc>
                       <a:txBody>
                         <a:bodyPr/>
                         <a:lstStyle/>
                         <a:p>
-                          <a:r>
-                            <a:rPr lang="ru-RU">
-                              <a:effectLst/>
-                            </a:rPr>
-                            <a:t>две подзадачи </a:t>
-                          </a:r>
-                          <a:r>
-                            <a:rPr lang="en-US"/>
-                            <a:t>n/2</a:t>
-                          </a:r>
+                          <a:endParaRPr lang="ru-RU"/>
                         </a:p>
                       </a:txBody>
-                      <a:tcPr anchor="ctr"/>
+                      <a:tcPr anchor="ctr">
+                        <a:blipFill>
+                          <a:blip r:embed="rId2"/>
+                          <a:stretch>
+                            <a:fillRect l="-200348" t="-223684" r="-696" b="-178947"/>
+                          </a:stretch>
+                        </a:blipFill>
+                      </a:tcPr>
                     </a:tc>
                     <a:extLst>
                       <a:ext uri="{0D108BD9-81ED-4DB2-BD59-A6C34878D82A}">
@@ -7467,12 +8902,12 @@
                         <a:lstStyle/>
                         <a:p>
                           <a:r>
-                            <a:rPr lang="ru-RU">
+                            <a:rPr lang="ru-RU" dirty="0">
                               <a:effectLst/>
                             </a:rPr>
                             <a:t>компараторы</a:t>
                           </a:r>
-                          <a:endParaRPr lang="ru-RU"/>
+                          <a:endParaRPr lang="ru-RU" dirty="0"/>
                         </a:p>
                       </a:txBody>
                       <a:tcPr anchor="ctr"/>
@@ -7483,12 +8918,12 @@
                         <a:lstStyle/>
                         <a:p>
                           <a:r>
-                            <a:rPr lang="ru-RU">
+                            <a:rPr lang="ru-RU" dirty="0">
                               <a:effectLst/>
                             </a:rPr>
                             <a:t>операции «бабочки»</a:t>
                           </a:r>
-                          <a:endParaRPr lang="ru-RU"/>
+                          <a:endParaRPr lang="ru-RU" dirty="0"/>
                         </a:p>
                       </a:txBody>
                       <a:tcPr anchor="ctr"/>
@@ -7528,7 +8963,7 @@
                         <a:blipFill>
                           <a:blip r:embed="rId2"/>
                           <a:stretch>
-                            <a:fillRect l="-100000" t="-485000" r="-100521" b="-26667"/>
+                            <a:fillRect l="-100000" t="-510000" r="-100521" b="-26667"/>
                           </a:stretch>
                         </a:blipFill>
                       </a:tcPr>
@@ -7545,7 +8980,7 @@
                         <a:blipFill>
                           <a:blip r:embed="rId2"/>
                           <a:stretch>
-                            <a:fillRect l="-200348" t="-485000" r="-696" b="-26667"/>
+                            <a:fillRect l="-200348" t="-510000" r="-696" b="-26667"/>
                           </a:stretch>
                         </a:blipFill>
                       </a:tcPr>
@@ -9106,15 +10541,7 @@
               <a:buNone/>
             </a:pPr>
             <a:r>
-              <a:rPr lang="en-US" sz="1800" b="1" kern="100" dirty="0">
-                <a:effectLst/>
-                <a:latin typeface="Times New Roman" panose="02020603050405020304" pitchFamily="18" charset="0"/>
-                <a:ea typeface="Calibri" panose="020F0502020204030204" pitchFamily="34" charset="0"/>
-              </a:rPr>
-              <a:t>	</a:t>
-            </a:r>
-            <a:r>
-              <a:rPr lang="ru-RU" sz="1600" b="1" kern="100" dirty="0">
+              <a:rPr lang="ru-RU" sz="1800" b="1" kern="100" dirty="0">
                 <a:effectLst/>
                 <a:latin typeface="Times New Roman" panose="02020603050405020304" pitchFamily="18" charset="0"/>
                 <a:ea typeface="Calibri" panose="020F0502020204030204" pitchFamily="34" charset="0"/>
@@ -9122,22 +10549,72 @@
               <a:t>Актуальность темы </a:t>
             </a:r>
             <a:r>
-              <a:rPr lang="ru-RU" sz="1600" kern="100" dirty="0">
-                <a:effectLst/>
-                <a:latin typeface="Times New Roman" panose="02020603050405020304" pitchFamily="18" charset="0"/>
-                <a:ea typeface="Calibri" panose="020F0502020204030204" pitchFamily="34" charset="0"/>
-              </a:rPr>
-              <a:t>определяется следующими обстоятельствами</a:t>
-            </a:r>
-            <a:r>
-              <a:rPr lang="en-US" sz="1600" kern="100" dirty="0">
+              <a:rPr lang="en-US" sz="1800" kern="100" dirty="0">
                 <a:effectLst/>
                 <a:latin typeface="Times New Roman" panose="02020603050405020304" pitchFamily="18" charset="0"/>
                 <a:ea typeface="Calibri" panose="020F0502020204030204" pitchFamily="34" charset="0"/>
               </a:rPr>
               <a:t>:</a:t>
             </a:r>
-            <a:endParaRPr lang="ru-RU" sz="1600" kern="100" dirty="0">
+          </a:p>
+          <a:p>
+            <a:pPr marL="0" indent="0">
+              <a:buNone/>
+            </a:pPr>
+            <a:r>
+              <a:rPr lang="en-US" sz="1800" dirty="0">
+                <a:latin typeface="Times New Roman" panose="02020603050405020304" pitchFamily="18" charset="0"/>
+                <a:cs typeface="Times New Roman" panose="02020603050405020304" pitchFamily="18" charset="0"/>
+              </a:rPr>
+              <a:t>1.</a:t>
+            </a:r>
+            <a:r>
+              <a:rPr lang="ru-RU" sz="1800" dirty="0">
+                <a:latin typeface="Times New Roman" panose="02020603050405020304" pitchFamily="18" charset="0"/>
+                <a:cs typeface="Times New Roman" panose="02020603050405020304" pitchFamily="18" charset="0"/>
+              </a:rPr>
+              <a:t> </a:t>
+            </a:r>
+            <a:r>
+              <a:rPr lang="ru-RU" sz="1800" kern="100" dirty="0">
+                <a:latin typeface="Times New Roman" panose="02020603050405020304" pitchFamily="18" charset="0"/>
+                <a:ea typeface="Calibri" panose="020F0502020204030204" pitchFamily="34" charset="0"/>
+                <a:cs typeface="Times New Roman" panose="02020603050405020304" pitchFamily="18" charset="0"/>
+              </a:rPr>
+              <a:t>Не существует</a:t>
+            </a:r>
+            <a:r>
+              <a:rPr lang="ru-RU" sz="1800" kern="100" dirty="0">
+                <a:effectLst/>
+                <a:latin typeface="Times New Roman" panose="02020603050405020304" pitchFamily="18" charset="0"/>
+                <a:ea typeface="Calibri" panose="020F0502020204030204" pitchFamily="34" charset="0"/>
+              </a:rPr>
+              <a:t> в доступной учебной и научной литературе систематизированно</a:t>
+            </a:r>
+            <a:r>
+              <a:rPr lang="ru-RU" sz="1800" kern="100" dirty="0">
+                <a:latin typeface="Times New Roman" panose="02020603050405020304" pitchFamily="18" charset="0"/>
+                <a:ea typeface="Calibri" panose="020F0502020204030204" pitchFamily="34" charset="0"/>
+              </a:rPr>
+              <a:t>го</a:t>
+            </a:r>
+            <a:r>
+              <a:rPr lang="ru-RU" sz="1800" kern="100" dirty="0">
+                <a:effectLst/>
+                <a:latin typeface="Times New Roman" panose="02020603050405020304" pitchFamily="18" charset="0"/>
+                <a:ea typeface="Calibri" panose="020F0502020204030204" pitchFamily="34" charset="0"/>
+              </a:rPr>
+              <a:t> изложения, в котором единым методом рекуррентных соотношений анализировались бы как сортировочные сети, так и широкий класс классических алгоритмов сортировки и алгоритмы смежных прикладных областей</a:t>
+            </a:r>
+            <a:r>
+              <a:rPr lang="en-US" sz="1800" kern="100" dirty="0">
+                <a:effectLst/>
+                <a:latin typeface="Times New Roman" panose="02020603050405020304" pitchFamily="18" charset="0"/>
+                <a:ea typeface="Calibri" panose="020F0502020204030204" pitchFamily="34" charset="0"/>
+              </a:rPr>
+              <a:t>.</a:t>
+            </a:r>
+            <a:endParaRPr lang="ru-RU" sz="1800" kern="100" dirty="0">
               <a:effectLst/>
               <a:latin typeface="Times New Roman" panose="02020603050405020304" pitchFamily="18" charset="0"/>
               <a:ea typeface="Calibri" panose="020F0502020204030204" pitchFamily="34" charset="0"/>
@@ -9145,57 +10622,22 @@
           </a:p>
           <a:p>
             <a:pPr marL="0" indent="0">
-              <a:lnSpc>
-                <a:spcPct val="150000"/>
-              </a:lnSpc>
               <a:buNone/>
             </a:pPr>
             <a:r>
-              <a:rPr lang="ru-RU" sz="1600" kern="100" dirty="0">
-                <a:effectLst/>
+              <a:rPr lang="en-US" sz="1800" kern="100" dirty="0">
                 <a:latin typeface="Times New Roman" panose="02020603050405020304" pitchFamily="18" charset="0"/>
                 <a:ea typeface="Calibri" panose="020F0502020204030204" pitchFamily="34" charset="0"/>
               </a:rPr>
-              <a:t> 	</a:t>
+              <a:t>2.</a:t>
             </a:r>
             <a:r>
-              <a:rPr lang="ru-RU" sz="1600" kern="100" dirty="0">
+              <a:rPr lang="ru-RU" sz="1800" kern="100" dirty="0">
                 <a:latin typeface="Times New Roman" panose="02020603050405020304" pitchFamily="18" charset="0"/>
                 <a:ea typeface="Calibri" panose="020F0502020204030204" pitchFamily="34" charset="0"/>
-                <a:cs typeface="Times New Roman" panose="02020603050405020304" pitchFamily="18" charset="0"/>
               </a:rPr>
-              <a:t>1) Во-первых, возрастающей ролью параллельных сортировок и сортировочных сетей в современных программно-аппаратных системах: сортировка Бэтчера и родственные ей битонические схемы находят непосредственное применение в задачах, где последовательные сортировки оказываются неэффективными </a:t>
+              <a:t> Рост объёмов данных и развитие параллельных вычислительных систем повышают интерес к сортировочным сетям, так как они имеют фиксированную структуру сравнений и хорошо подходят для параллельной реализации.</a:t>
             </a:r>
-          </a:p>
-          <a:p>
-            <a:pPr marL="0" indent="0">
-              <a:lnSpc>
-                <a:spcPct val="150000"/>
-              </a:lnSpc>
-              <a:buNone/>
-            </a:pPr>
-            <a:r>
-              <a:rPr lang="ru-RU" sz="1600" kern="100" dirty="0">
-                <a:latin typeface="Times New Roman" panose="02020603050405020304" pitchFamily="18" charset="0"/>
-                <a:ea typeface="Calibri" panose="020F0502020204030204" pitchFamily="34" charset="0"/>
-                <a:cs typeface="Times New Roman" panose="02020603050405020304" pitchFamily="18" charset="0"/>
-              </a:rPr>
-              <a:t>	2) </a:t>
-            </a:r>
-            <a:r>
-              <a:rPr lang="ru-RU" sz="1600" kern="100" dirty="0">
-                <a:effectLst/>
-                <a:latin typeface="Times New Roman" panose="02020603050405020304" pitchFamily="18" charset="0"/>
-                <a:ea typeface="Calibri" panose="020F0502020204030204" pitchFamily="34" charset="0"/>
-                <a:cs typeface="Times New Roman" panose="02020603050405020304" pitchFamily="18" charset="0"/>
-              </a:rPr>
-              <a:t>Во-вторых, отсутствием в доступной учебной и научной литературе систематизированного изложения, в котором единым методом рекуррентных соотношений анализировались бы как сортировочные сети, так и широкий класс классических алгоритмов сортировки и алгоритмы смежных прикладных областей, а границы применимости самого метода были бы явно сформулированы.</a:t>
-            </a:r>
-            <a:endParaRPr lang="ru-RU" sz="1600" dirty="0">
-              <a:effectLst/>
-              <a:latin typeface="Times New Roman" panose="02020603050405020304" pitchFamily="18" charset="0"/>
-              <a:ea typeface="Times New Roman" panose="02020603050405020304" pitchFamily="18" charset="0"/>
-            </a:endParaRPr>
           </a:p>
         </p:txBody>
       </p:sp>
@@ -9315,589 +10757,251 @@
           </a:p>
         </p:txBody>
       </p:sp>
-      <mc:AlternateContent xmlns:mc="http://schemas.openxmlformats.org/markup-compatibility/2006" xmlns:a14="http://schemas.microsoft.com/office/drawing/2010/main">
-        <mc:Choice Requires="a14">
-          <p:sp>
-            <p:nvSpPr>
-              <p:cNvPr id="3" name="Объект 2">
-                <a:extLst>
-                  <a:ext uri="{FF2B5EF4-FFF2-40B4-BE49-F238E27FC236}">
-                    <a16:creationId xmlns:a16="http://schemas.microsoft.com/office/drawing/2014/main" id="{D7877F83-DD0A-C6A0-7DEB-E2545D1D0851}"/>
-                  </a:ext>
-                </a:extLst>
-              </p:cNvPr>
-              <p:cNvSpPr>
-                <a:spLocks noGrp="1"/>
-              </p:cNvSpPr>
-              <p:nvPr>
-                <p:ph idx="1"/>
-              </p:nvPr>
-            </p:nvSpPr>
-            <p:spPr/>
-            <p:txBody>
-              <a:bodyPr>
-                <a:normAutofit fontScale="62500" lnSpcReduction="20000"/>
-              </a:bodyPr>
-              <a:lstStyle/>
-              <a:p>
-                <a:pPr indent="0" algn="just">
-                  <a:lnSpc>
-                    <a:spcPct val="150000"/>
-                  </a:lnSpc>
-                  <a:spcAft>
-                    <a:spcPts val="1000"/>
-                  </a:spcAft>
-                  <a:buNone/>
-                </a:pPr>
-                <a:r>
-                  <a:rPr lang="en-US" sz="1800" b="1" kern="100" dirty="0">
-                    <a:effectLst/>
-                    <a:latin typeface="Times New Roman" panose="02020603050405020304" pitchFamily="18" charset="0"/>
-                    <a:ea typeface="Calibri" panose="020F0502020204030204" pitchFamily="34" charset="0"/>
-                    <a:cs typeface="Times New Roman" panose="02020603050405020304" pitchFamily="18" charset="0"/>
-                  </a:rPr>
-                  <a:t>	</a:t>
-                </a:r>
-                <a:r>
-                  <a:rPr lang="ru-RU" sz="1900" b="1" kern="100" dirty="0">
-                    <a:effectLst/>
-                    <a:latin typeface="Times New Roman" panose="02020603050405020304" pitchFamily="18" charset="0"/>
-                    <a:ea typeface="Calibri" panose="020F0502020204030204" pitchFamily="34" charset="0"/>
-                    <a:cs typeface="Times New Roman" panose="02020603050405020304" pitchFamily="18" charset="0"/>
-                  </a:rPr>
-                  <a:t>Цель работы — </a:t>
-                </a:r>
-                <a:r>
-                  <a:rPr lang="ru-RU" sz="1900" kern="100" dirty="0">
-                    <a:effectLst/>
-                    <a:latin typeface="Times New Roman" panose="02020603050405020304" pitchFamily="18" charset="0"/>
-                    <a:ea typeface="Calibri" panose="020F0502020204030204" pitchFamily="34" charset="0"/>
-                    <a:cs typeface="Times New Roman" panose="02020603050405020304" pitchFamily="18" charset="0"/>
-                  </a:rPr>
-                  <a:t>разработать и систематически применить единый метод асимптотического анализа, основанный на решении рекуррентных соотношений, к чётно-нечётной сортировке слиянием Бэтчера и родственным ей алгоритмам; получить точные замкнутые формулы их сложности; провести экспериментальную верификацию теоретических результатов. Для достижения поставленной цели в работе решаются следующие задачи:</a:t>
-                </a:r>
-                <a:endParaRPr lang="ru-RU" sz="1900" dirty="0">
-                  <a:effectLst/>
-                  <a:latin typeface="Times New Roman" panose="02020603050405020304" pitchFamily="18" charset="0"/>
-                  <a:ea typeface="Times New Roman" panose="02020603050405020304" pitchFamily="18" charset="0"/>
-                </a:endParaRPr>
-              </a:p>
-              <a:p>
-                <a:pPr marL="342900" lvl="0" indent="-342900" algn="just">
-                  <a:lnSpc>
-                    <a:spcPct val="150000"/>
-                  </a:lnSpc>
-                  <a:buFont typeface="+mj-lt"/>
-                  <a:buAutoNum type="arabicPeriod"/>
-                </a:pPr>
-                <a:r>
-                  <a:rPr lang="ru-RU" sz="1900" kern="100" dirty="0">
-                    <a:effectLst/>
-                    <a:latin typeface="Times New Roman" panose="02020603050405020304" pitchFamily="18" charset="0"/>
-                    <a:ea typeface="Calibri" panose="020F0502020204030204" pitchFamily="34" charset="0"/>
-                    <a:cs typeface="Times New Roman" panose="02020603050405020304" pitchFamily="18" charset="0"/>
-                  </a:rPr>
-                  <a:t>Систематизировать теоретические основы асимптотического анализа алгоритмов сортировки</a:t>
-                </a:r>
-              </a:p>
-              <a:p>
-                <a:pPr marL="342900" lvl="0" indent="-342900" algn="just">
-                  <a:lnSpc>
-                    <a:spcPct val="150000"/>
-                  </a:lnSpc>
-                  <a:buFont typeface="+mj-lt"/>
-                  <a:buAutoNum type="arabicPeriod"/>
-                </a:pPr>
-                <a:r>
-                  <a:rPr lang="ru-RU" sz="1900" kern="100" dirty="0">
-                    <a:effectLst/>
-                    <a:latin typeface="Times New Roman" panose="02020603050405020304" pitchFamily="18" charset="0"/>
-                    <a:ea typeface="Calibri" panose="020F0502020204030204" pitchFamily="34" charset="0"/>
-                    <a:cs typeface="Times New Roman" panose="02020603050405020304" pitchFamily="18" charset="0"/>
-                  </a:rPr>
-                  <a:t>Провести полный математический анализ сложности сортировки Бэтчера: записать и решить рекуррентные соотношения для числа компараторов операции слияния </a:t>
-                </a:r>
-                <a:r>
-                  <a:rPr lang="en-US" sz="1900" kern="100" dirty="0">
-                    <a:effectLst/>
-                    <a:latin typeface="Times New Roman" panose="02020603050405020304" pitchFamily="18" charset="0"/>
-                    <a:ea typeface="Calibri" panose="020F0502020204030204" pitchFamily="34" charset="0"/>
-                    <a:cs typeface="Times New Roman" panose="02020603050405020304" pitchFamily="18" charset="0"/>
-                  </a:rPr>
-                  <a:t>M</a:t>
-                </a:r>
-                <a:r>
-                  <a:rPr lang="ru-RU" sz="1900" kern="100" dirty="0">
-                    <a:effectLst/>
-                    <a:latin typeface="Times New Roman" panose="02020603050405020304" pitchFamily="18" charset="0"/>
-                    <a:ea typeface="Calibri" panose="020F0502020204030204" pitchFamily="34" charset="0"/>
-                    <a:cs typeface="Times New Roman" panose="02020603050405020304" pitchFamily="18" charset="0"/>
-                  </a:rPr>
-                  <a:t>(</a:t>
-                </a:r>
-                <a:r>
-                  <a:rPr lang="en-US" sz="1900" kern="100" dirty="0">
-                    <a:effectLst/>
-                    <a:latin typeface="Times New Roman" panose="02020603050405020304" pitchFamily="18" charset="0"/>
-                    <a:ea typeface="Calibri" panose="020F0502020204030204" pitchFamily="34" charset="0"/>
-                    <a:cs typeface="Times New Roman" panose="02020603050405020304" pitchFamily="18" charset="0"/>
-                  </a:rPr>
-                  <a:t>n</a:t>
-                </a:r>
-                <a:r>
-                  <a:rPr lang="ru-RU" sz="1900" kern="100" dirty="0">
-                    <a:effectLst/>
-                    <a:latin typeface="Times New Roman" panose="02020603050405020304" pitchFamily="18" charset="0"/>
-                    <a:ea typeface="Calibri" panose="020F0502020204030204" pitchFamily="34" charset="0"/>
-                    <a:cs typeface="Times New Roman" panose="02020603050405020304" pitchFamily="18" charset="0"/>
-                  </a:rPr>
-                  <a:t>), полной сортировки </a:t>
-                </a:r>
-                <a14:m>
-                  <m:oMath xmlns:m="http://schemas.openxmlformats.org/officeDocument/2006/math">
-                    <m:r>
-                      <a:rPr lang="en-US" sz="1900" i="1" kern="100" dirty="0" smtClean="0">
-                        <a:effectLst/>
-                        <a:latin typeface="Cambria Math" panose="02040503050406030204" pitchFamily="18" charset="0"/>
-                        <a:ea typeface="Calibri" panose="020F0502020204030204" pitchFamily="34" charset="0"/>
-                        <a:cs typeface="Times New Roman" panose="02020603050405020304" pitchFamily="18" charset="0"/>
-                      </a:rPr>
-                      <m:t>𝑆</m:t>
-                    </m:r>
-                    <m:r>
-                      <a:rPr lang="ru-RU" sz="1900" i="1" kern="100" dirty="0">
-                        <a:effectLst/>
-                        <a:latin typeface="Cambria Math" panose="02040503050406030204" pitchFamily="18" charset="0"/>
-                        <a:ea typeface="Calibri" panose="020F0502020204030204" pitchFamily="34" charset="0"/>
-                        <a:cs typeface="Times New Roman" panose="02020603050405020304" pitchFamily="18" charset="0"/>
-                      </a:rPr>
-                      <m:t>(</m:t>
-                    </m:r>
-                    <m:r>
-                      <a:rPr lang="en-US" sz="1900" i="1" kern="100" dirty="0">
-                        <a:effectLst/>
-                        <a:latin typeface="Cambria Math" panose="02040503050406030204" pitchFamily="18" charset="0"/>
-                        <a:ea typeface="Calibri" panose="020F0502020204030204" pitchFamily="34" charset="0"/>
-                        <a:cs typeface="Times New Roman" panose="02020603050405020304" pitchFamily="18" charset="0"/>
-                      </a:rPr>
-                      <m:t>𝑛</m:t>
-                    </m:r>
-                    <m:r>
-                      <a:rPr lang="ru-RU" sz="1900" i="1" kern="100" dirty="0">
-                        <a:effectLst/>
-                        <a:latin typeface="Cambria Math" panose="02040503050406030204" pitchFamily="18" charset="0"/>
-                        <a:ea typeface="Calibri" panose="020F0502020204030204" pitchFamily="34" charset="0"/>
-                        <a:cs typeface="Times New Roman" panose="02020603050405020304" pitchFamily="18" charset="0"/>
-                      </a:rPr>
-                      <m:t>)</m:t>
-                    </m:r>
-                  </m:oMath>
-                </a14:m>
-                <a:r>
-                  <a:rPr lang="ru-RU" sz="1900" kern="100" dirty="0">
-                    <a:effectLst/>
-                    <a:latin typeface="Times New Roman" panose="02020603050405020304" pitchFamily="18" charset="0"/>
-                    <a:ea typeface="Calibri" panose="020F0502020204030204" pitchFamily="34" charset="0"/>
-                    <a:cs typeface="Times New Roman" panose="02020603050405020304" pitchFamily="18" charset="0"/>
-                  </a:rPr>
-                  <a:t> и глубины сети </a:t>
-                </a:r>
-                <a14:m>
-                  <m:oMath xmlns:m="http://schemas.openxmlformats.org/officeDocument/2006/math">
-                    <m:r>
-                      <a:rPr lang="en-US" sz="1900" i="1" kern="100" dirty="0" smtClean="0">
-                        <a:effectLst/>
-                        <a:latin typeface="Cambria Math" panose="02040503050406030204" pitchFamily="18" charset="0"/>
-                        <a:ea typeface="Calibri" panose="020F0502020204030204" pitchFamily="34" charset="0"/>
-                        <a:cs typeface="Times New Roman" panose="02020603050405020304" pitchFamily="18" charset="0"/>
-                      </a:rPr>
-                      <m:t>𝑑</m:t>
-                    </m:r>
-                    <m:r>
-                      <a:rPr lang="ru-RU" sz="1900" i="1" kern="100" dirty="0" smtClean="0">
-                        <a:effectLst/>
-                        <a:latin typeface="Cambria Math" panose="02040503050406030204" pitchFamily="18" charset="0"/>
-                        <a:ea typeface="Calibri" panose="020F0502020204030204" pitchFamily="34" charset="0"/>
-                        <a:cs typeface="Times New Roman" panose="02020603050405020304" pitchFamily="18" charset="0"/>
-                      </a:rPr>
-                      <m:t>_</m:t>
-                    </m:r>
-                    <m:r>
-                      <a:rPr lang="en-US" sz="1900" i="1" kern="100" dirty="0" smtClean="0">
-                        <a:effectLst/>
-                        <a:latin typeface="Cambria Math" panose="02040503050406030204" pitchFamily="18" charset="0"/>
-                        <a:ea typeface="Calibri" panose="020F0502020204030204" pitchFamily="34" charset="0"/>
-                        <a:cs typeface="Times New Roman" panose="02020603050405020304" pitchFamily="18" charset="0"/>
-                      </a:rPr>
-                      <m:t>𝑆</m:t>
-                    </m:r>
-                    <m:r>
-                      <a:rPr lang="ru-RU" sz="1900" i="1" kern="100" dirty="0" smtClean="0">
-                        <a:effectLst/>
-                        <a:latin typeface="Cambria Math" panose="02040503050406030204" pitchFamily="18" charset="0"/>
-                        <a:ea typeface="Calibri" panose="020F0502020204030204" pitchFamily="34" charset="0"/>
-                        <a:cs typeface="Times New Roman" panose="02020603050405020304" pitchFamily="18" charset="0"/>
-                      </a:rPr>
-                      <m:t>(</m:t>
-                    </m:r>
-                    <m:r>
-                      <a:rPr lang="en-US" sz="1900" i="1" kern="100" dirty="0" smtClean="0">
-                        <a:effectLst/>
-                        <a:latin typeface="Cambria Math" panose="02040503050406030204" pitchFamily="18" charset="0"/>
-                        <a:ea typeface="Calibri" panose="020F0502020204030204" pitchFamily="34" charset="0"/>
-                        <a:cs typeface="Times New Roman" panose="02020603050405020304" pitchFamily="18" charset="0"/>
-                      </a:rPr>
-                      <m:t>𝑛</m:t>
-                    </m:r>
-                    <m:r>
-                      <a:rPr lang="ru-RU" sz="1900" i="1" kern="100" dirty="0" smtClean="0">
-                        <a:effectLst/>
-                        <a:latin typeface="Cambria Math" panose="02040503050406030204" pitchFamily="18" charset="0"/>
-                        <a:ea typeface="Calibri" panose="020F0502020204030204" pitchFamily="34" charset="0"/>
-                        <a:cs typeface="Times New Roman" panose="02020603050405020304" pitchFamily="18" charset="0"/>
-                      </a:rPr>
-                      <m:t>)</m:t>
-                    </m:r>
-                  </m:oMath>
-                </a14:m>
-                <a:r>
-                  <a:rPr lang="ru-RU" sz="1900" kern="100" dirty="0">
-                    <a:effectLst/>
-                    <a:latin typeface="Times New Roman" panose="02020603050405020304" pitchFamily="18" charset="0"/>
-                    <a:ea typeface="Calibri" panose="020F0502020204030204" pitchFamily="34" charset="0"/>
-                    <a:cs typeface="Times New Roman" panose="02020603050405020304" pitchFamily="18" charset="0"/>
-                  </a:rPr>
-                  <a:t>; получить точные замкнутые формулы и их асимптотические оценки.</a:t>
-                </a:r>
-                <a:endParaRPr lang="ru-RU" sz="1900" dirty="0">
-                  <a:effectLst/>
-                  <a:latin typeface="Times New Roman" panose="02020603050405020304" pitchFamily="18" charset="0"/>
-                  <a:ea typeface="Times New Roman" panose="02020603050405020304" pitchFamily="18" charset="0"/>
-                </a:endParaRPr>
-              </a:p>
-              <a:p>
-                <a:pPr marL="342900" lvl="0" indent="-342900" algn="just">
-                  <a:lnSpc>
-                    <a:spcPct val="150000"/>
-                  </a:lnSpc>
-                  <a:buFont typeface="+mj-lt"/>
-                  <a:buAutoNum type="arabicPeriod"/>
-                </a:pPr>
-                <a:r>
-                  <a:rPr lang="ru-RU" sz="1900" kern="100" dirty="0">
-                    <a:effectLst/>
-                    <a:latin typeface="Times New Roman" panose="02020603050405020304" pitchFamily="18" charset="0"/>
-                    <a:ea typeface="Calibri" panose="020F0502020204030204" pitchFamily="34" charset="0"/>
-                    <a:cs typeface="Times New Roman" panose="02020603050405020304" pitchFamily="18" charset="0"/>
-                  </a:rPr>
-                  <a:t>Применить тот же метод к классическим алгоритмам сортировки (</a:t>
-                </a:r>
-                <a:r>
-                  <a:rPr lang="en-US" sz="1900" kern="100" dirty="0">
-                    <a:effectLst/>
-                    <a:latin typeface="Times New Roman" panose="02020603050405020304" pitchFamily="18" charset="0"/>
-                    <a:ea typeface="Calibri" panose="020F0502020204030204" pitchFamily="34" charset="0"/>
-                    <a:cs typeface="Times New Roman" panose="02020603050405020304" pitchFamily="18" charset="0"/>
-                  </a:rPr>
-                  <a:t>Merge Sort</a:t>
-                </a:r>
-                <a:r>
-                  <a:rPr lang="ru-RU" sz="1900" kern="100" dirty="0">
-                    <a:effectLst/>
-                    <a:latin typeface="Times New Roman" panose="02020603050405020304" pitchFamily="18" charset="0"/>
-                    <a:ea typeface="Calibri" panose="020F0502020204030204" pitchFamily="34" charset="0"/>
-                    <a:cs typeface="Times New Roman" panose="02020603050405020304" pitchFamily="18" charset="0"/>
-                  </a:rPr>
-                  <a:t>, </a:t>
-                </a:r>
-                <a:r>
-                  <a:rPr lang="en-US" sz="1900" kern="100" dirty="0">
-                    <a:effectLst/>
-                    <a:latin typeface="Times New Roman" panose="02020603050405020304" pitchFamily="18" charset="0"/>
-                    <a:ea typeface="Calibri" panose="020F0502020204030204" pitchFamily="34" charset="0"/>
-                    <a:cs typeface="Times New Roman" panose="02020603050405020304" pitchFamily="18" charset="0"/>
-                  </a:rPr>
-                  <a:t>Quick Sort</a:t>
-                </a:r>
-                <a:r>
-                  <a:rPr lang="ru-RU" sz="1900" kern="100" dirty="0">
-                    <a:effectLst/>
-                    <a:latin typeface="Times New Roman" panose="02020603050405020304" pitchFamily="18" charset="0"/>
-                    <a:ea typeface="Calibri" panose="020F0502020204030204" pitchFamily="34" charset="0"/>
-                    <a:cs typeface="Times New Roman" panose="02020603050405020304" pitchFamily="18" charset="0"/>
-                  </a:rPr>
-                  <a:t>, </a:t>
-                </a:r>
-                <a:r>
-                  <a:rPr lang="en-US" sz="1900" kern="100" dirty="0" err="1">
-                    <a:effectLst/>
-                    <a:latin typeface="Times New Roman" panose="02020603050405020304" pitchFamily="18" charset="0"/>
-                    <a:ea typeface="Calibri" panose="020F0502020204030204" pitchFamily="34" charset="0"/>
-                    <a:cs typeface="Times New Roman" panose="02020603050405020304" pitchFamily="18" charset="0"/>
-                  </a:rPr>
-                  <a:t>Bitonic</a:t>
-                </a:r>
-                <a:r>
-                  <a:rPr lang="en-US" sz="1900" kern="100" dirty="0">
-                    <a:effectLst/>
-                    <a:latin typeface="Times New Roman" panose="02020603050405020304" pitchFamily="18" charset="0"/>
-                    <a:ea typeface="Calibri" panose="020F0502020204030204" pitchFamily="34" charset="0"/>
-                    <a:cs typeface="Times New Roman" panose="02020603050405020304" pitchFamily="18" charset="0"/>
-                  </a:rPr>
-                  <a:t> Sort</a:t>
-                </a:r>
-                <a:r>
-                  <a:rPr lang="ru-RU" sz="1900" kern="100" dirty="0">
-                    <a:effectLst/>
-                    <a:latin typeface="Times New Roman" panose="02020603050405020304" pitchFamily="18" charset="0"/>
-                    <a:ea typeface="Calibri" panose="020F0502020204030204" pitchFamily="34" charset="0"/>
-                    <a:cs typeface="Times New Roman" panose="02020603050405020304" pitchFamily="18" charset="0"/>
-                  </a:rPr>
-                  <a:t>, </a:t>
-                </a:r>
-                <a:r>
-                  <a:rPr lang="en-US" sz="1900" kern="100" dirty="0">
-                    <a:effectLst/>
-                    <a:latin typeface="Times New Roman" panose="02020603050405020304" pitchFamily="18" charset="0"/>
-                    <a:ea typeface="Calibri" panose="020F0502020204030204" pitchFamily="34" charset="0"/>
-                    <a:cs typeface="Times New Roman" panose="02020603050405020304" pitchFamily="18" charset="0"/>
-                  </a:rPr>
-                  <a:t>Insertion Sort</a:t>
-                </a:r>
-                <a:r>
-                  <a:rPr lang="ru-RU" sz="1900" kern="100" dirty="0">
-                    <a:effectLst/>
-                    <a:latin typeface="Times New Roman" panose="02020603050405020304" pitchFamily="18" charset="0"/>
-                    <a:ea typeface="Calibri" panose="020F0502020204030204" pitchFamily="34" charset="0"/>
-                    <a:cs typeface="Times New Roman" panose="02020603050405020304" pitchFamily="18" charset="0"/>
-                  </a:rPr>
-                  <a:t>, </a:t>
-                </a:r>
-                <a:r>
-                  <a:rPr lang="en-US" sz="1900" kern="100" dirty="0">
-                    <a:effectLst/>
-                    <a:latin typeface="Times New Roman" panose="02020603050405020304" pitchFamily="18" charset="0"/>
-                    <a:ea typeface="Calibri" panose="020F0502020204030204" pitchFamily="34" charset="0"/>
-                    <a:cs typeface="Times New Roman" panose="02020603050405020304" pitchFamily="18" charset="0"/>
-                  </a:rPr>
-                  <a:t>Heap Sort</a:t>
-                </a:r>
-                <a:r>
-                  <a:rPr lang="ru-RU" sz="1900" kern="100" dirty="0">
-                    <a:effectLst/>
-                    <a:latin typeface="Times New Roman" panose="02020603050405020304" pitchFamily="18" charset="0"/>
-                    <a:ea typeface="Calibri" panose="020F0502020204030204" pitchFamily="34" charset="0"/>
-                    <a:cs typeface="Times New Roman" panose="02020603050405020304" pitchFamily="18" charset="0"/>
-                  </a:rPr>
-                  <a:t>)</a:t>
-                </a:r>
-                <a:endParaRPr lang="ru-RU" sz="1900" dirty="0">
-                  <a:effectLst/>
-                  <a:latin typeface="Times New Roman" panose="02020603050405020304" pitchFamily="18" charset="0"/>
-                  <a:ea typeface="Times New Roman" panose="02020603050405020304" pitchFamily="18" charset="0"/>
-                </a:endParaRPr>
-              </a:p>
-              <a:p>
-                <a:pPr marL="342900" lvl="0" indent="-342900" algn="just">
-                  <a:lnSpc>
-                    <a:spcPct val="150000"/>
-                  </a:lnSpc>
-                  <a:buFont typeface="+mj-lt"/>
-                  <a:buAutoNum type="arabicPeriod"/>
-                </a:pPr>
-                <a:r>
-                  <a:rPr lang="ru-RU" sz="1900" kern="100" dirty="0">
-                    <a:effectLst/>
-                    <a:latin typeface="Times New Roman" panose="02020603050405020304" pitchFamily="18" charset="0"/>
-                    <a:ea typeface="Calibri" panose="020F0502020204030204" pitchFamily="34" charset="0"/>
-                    <a:cs typeface="Times New Roman" panose="02020603050405020304" pitchFamily="18" charset="0"/>
-                  </a:rPr>
-                  <a:t>Исследовать границы применимости метода решения рекуррентных соотношений: сформулировать необходимые условия его применения, выявить алгоритмы, для которых требуются альтернативные методы анализа (вероятностный, амортизированный, комбинаторный, прямое суммирование), и обосновать выбор этих методов.</a:t>
-                </a:r>
-                <a:endParaRPr lang="ru-RU" sz="1900" dirty="0">
-                  <a:effectLst/>
-                  <a:latin typeface="Times New Roman" panose="02020603050405020304" pitchFamily="18" charset="0"/>
-                  <a:ea typeface="Times New Roman" panose="02020603050405020304" pitchFamily="18" charset="0"/>
-                </a:endParaRPr>
-              </a:p>
-              <a:p>
-                <a:pPr marL="342900" lvl="0" indent="-342900" algn="just">
-                  <a:lnSpc>
-                    <a:spcPct val="150000"/>
-                  </a:lnSpc>
-                  <a:buFont typeface="+mj-lt"/>
-                  <a:buAutoNum type="arabicPeriod"/>
-                </a:pPr>
-                <a:r>
-                  <a:rPr lang="ru-RU" sz="1900" kern="100" dirty="0">
-                    <a:effectLst/>
-                    <a:latin typeface="Times New Roman" panose="02020603050405020304" pitchFamily="18" charset="0"/>
-                    <a:ea typeface="Calibri" panose="020F0502020204030204" pitchFamily="34" charset="0"/>
-                    <a:cs typeface="Times New Roman" panose="02020603050405020304" pitchFamily="18" charset="0"/>
-                  </a:rPr>
-                  <a:t>Распространить метод на алгоритмы, имеющие рекурсивную структуру и выявить структурные аналогии с сортировкой Бэтчера.</a:t>
-                </a:r>
-                <a:endParaRPr lang="ru-RU" sz="1900" dirty="0">
-                  <a:effectLst/>
-                  <a:latin typeface="Times New Roman" panose="02020603050405020304" pitchFamily="18" charset="0"/>
-                  <a:ea typeface="Times New Roman" panose="02020603050405020304" pitchFamily="18" charset="0"/>
-                </a:endParaRPr>
-              </a:p>
-              <a:p>
-                <a:pPr marL="342900" lvl="0" indent="-342900" algn="just">
-                  <a:lnSpc>
-                    <a:spcPct val="150000"/>
-                  </a:lnSpc>
-                  <a:spcAft>
-                    <a:spcPts val="1000"/>
-                  </a:spcAft>
-                  <a:buFont typeface="+mj-lt"/>
-                  <a:buAutoNum type="arabicPeriod"/>
-                </a:pPr>
-                <a:r>
-                  <a:rPr lang="ru-RU" sz="1900" kern="100" dirty="0">
-                    <a:effectLst/>
-                    <a:latin typeface="Times New Roman" panose="02020603050405020304" pitchFamily="18" charset="0"/>
-                    <a:ea typeface="Calibri" panose="020F0502020204030204" pitchFamily="34" charset="0"/>
-                    <a:cs typeface="Times New Roman" panose="02020603050405020304" pitchFamily="18" charset="0"/>
-                  </a:rPr>
-                  <a:t>Разработать программную реализацию рассматриваемых алгоритмов сортировки на языке </a:t>
-                </a:r>
-                <a:r>
-                  <a:rPr lang="en-US" sz="1900" kern="100" dirty="0">
-                    <a:effectLst/>
-                    <a:latin typeface="Times New Roman" panose="02020603050405020304" pitchFamily="18" charset="0"/>
-                    <a:ea typeface="Calibri" panose="020F0502020204030204" pitchFamily="34" charset="0"/>
-                    <a:cs typeface="Times New Roman" panose="02020603050405020304" pitchFamily="18" charset="0"/>
-                  </a:rPr>
-                  <a:t>Python</a:t>
-                </a:r>
-                <a:r>
-                  <a:rPr lang="ru-RU" sz="1900" kern="100" dirty="0">
-                    <a:effectLst/>
-                    <a:latin typeface="Times New Roman" panose="02020603050405020304" pitchFamily="18" charset="0"/>
-                    <a:ea typeface="Calibri" panose="020F0502020204030204" pitchFamily="34" charset="0"/>
-                    <a:cs typeface="Times New Roman" panose="02020603050405020304" pitchFamily="18" charset="0"/>
-                  </a:rPr>
-                  <a:t> с подсчётом числа сравнений; провести машинный эксперимент и экспериментально верифицировать полученные замкнутые формулы на серии размеров входа </a:t>
-                </a:r>
-                <a14:m>
-                  <m:oMath xmlns:m="http://schemas.openxmlformats.org/officeDocument/2006/math">
-                    <m:r>
-                      <a:rPr lang="en-US" sz="1900" i="1" kern="100">
-                        <a:effectLst/>
-                        <a:latin typeface="Cambria Math" panose="02040503050406030204" pitchFamily="18" charset="0"/>
-                        <a:ea typeface="Calibri" panose="020F0502020204030204" pitchFamily="34" charset="0"/>
-                        <a:cs typeface="Times New Roman" panose="02020603050405020304" pitchFamily="18" charset="0"/>
-                      </a:rPr>
-                      <m:t>𝑛</m:t>
-                    </m:r>
-                    <m:r>
-                      <a:rPr lang="ru-RU" sz="1900" i="1" kern="100">
-                        <a:effectLst/>
-                        <a:latin typeface="Cambria Math" panose="02040503050406030204" pitchFamily="18" charset="0"/>
-                        <a:ea typeface="Calibri" panose="020F0502020204030204" pitchFamily="34" charset="0"/>
-                        <a:cs typeface="Times New Roman" panose="02020603050405020304" pitchFamily="18" charset="0"/>
-                      </a:rPr>
-                      <m:t> = </m:t>
-                    </m:r>
-                    <m:sSup>
-                      <m:sSupPr>
-                        <m:ctrlPr>
-                          <a:rPr lang="ru-RU" sz="1900" i="1" kern="100">
-                            <a:effectLst/>
-                            <a:latin typeface="Cambria Math" panose="02040503050406030204" pitchFamily="18" charset="0"/>
-                            <a:ea typeface="Calibri" panose="020F0502020204030204" pitchFamily="34" charset="0"/>
-                            <a:cs typeface="Times New Roman" panose="02020603050405020304" pitchFamily="18" charset="0"/>
-                          </a:rPr>
-                        </m:ctrlPr>
-                      </m:sSupPr>
-                      <m:e>
-                        <m:r>
-                          <a:rPr lang="ru-RU" sz="1900" i="1" kern="100">
-                            <a:effectLst/>
-                            <a:latin typeface="Cambria Math" panose="02040503050406030204" pitchFamily="18" charset="0"/>
-                            <a:ea typeface="Calibri" panose="020F0502020204030204" pitchFamily="34" charset="0"/>
-                            <a:cs typeface="Times New Roman" panose="02020603050405020304" pitchFamily="18" charset="0"/>
-                          </a:rPr>
-                          <m:t>2</m:t>
-                        </m:r>
-                      </m:e>
-                      <m:sup>
-                        <m:r>
-                          <a:rPr lang="en-US" sz="1900" i="1" kern="100">
-                            <a:effectLst/>
-                            <a:latin typeface="Cambria Math" panose="02040503050406030204" pitchFamily="18" charset="0"/>
-                            <a:ea typeface="Calibri" panose="020F0502020204030204" pitchFamily="34" charset="0"/>
-                            <a:cs typeface="Times New Roman" panose="02020603050405020304" pitchFamily="18" charset="0"/>
-                          </a:rPr>
-                          <m:t>𝑘</m:t>
-                        </m:r>
-                      </m:sup>
-                    </m:sSup>
-                  </m:oMath>
-                </a14:m>
-                <a:r>
-                  <a:rPr lang="ru-RU" sz="1900" kern="100" dirty="0">
-                    <a:effectLst/>
-                    <a:latin typeface="Times New Roman" panose="02020603050405020304" pitchFamily="18" charset="0"/>
-                    <a:ea typeface="Calibri" panose="020F0502020204030204" pitchFamily="34" charset="0"/>
-                    <a:cs typeface="Times New Roman" panose="02020603050405020304" pitchFamily="18" charset="0"/>
-                  </a:rPr>
-                  <a:t>.</a:t>
-                </a:r>
-                <a:endParaRPr lang="ru-RU" sz="1900" dirty="0">
-                  <a:effectLst/>
-                  <a:latin typeface="Times New Roman" panose="02020603050405020304" pitchFamily="18" charset="0"/>
-                  <a:ea typeface="Times New Roman" panose="02020603050405020304" pitchFamily="18" charset="0"/>
-                </a:endParaRPr>
-              </a:p>
-              <a:p>
-                <a:endParaRPr lang="ru-RU" dirty="0"/>
-              </a:p>
-            </p:txBody>
-          </p:sp>
-        </mc:Choice>
-        <mc:Fallback xmlns="">
-          <p:sp>
-            <p:nvSpPr>
-              <p:cNvPr id="3" name="Объект 2">
-                <a:extLst>
-                  <a:ext uri="{FF2B5EF4-FFF2-40B4-BE49-F238E27FC236}">
-                    <a16:creationId xmlns:a16="http://schemas.microsoft.com/office/drawing/2014/main" id="{D7877F83-DD0A-C6A0-7DEB-E2545D1D0851}"/>
-                  </a:ext>
-                </a:extLst>
-              </p:cNvPr>
-              <p:cNvSpPr>
-                <a:spLocks noGrp="1" noRot="1" noChangeAspect="1" noMove="1" noResize="1" noEditPoints="1" noAdjustHandles="1" noChangeArrowheads="1" noChangeShapeType="1" noTextEdit="1"/>
-              </p:cNvSpPr>
-              <p:nvPr>
-                <p:ph idx="1"/>
-              </p:nvPr>
-            </p:nvSpPr>
-            <p:spPr>
-              <a:blipFill>
-                <a:blip r:embed="rId2"/>
-                <a:stretch>
-                  <a:fillRect/>
-                </a:stretch>
-              </a:blipFill>
-            </p:spPr>
-            <p:txBody>
-              <a:bodyPr/>
-              <a:lstStyle/>
-              <a:p>
-                <a:r>
-                  <a:rPr lang="ru-RU">
-                    <a:noFill/>
-                  </a:rPr>
-                  <a:t> </a:t>
-                </a:r>
-              </a:p>
-            </p:txBody>
-          </p:sp>
-        </mc:Fallback>
-      </mc:AlternateContent>
+      <p:sp>
+        <p:nvSpPr>
+          <p:cNvPr id="3" name="Объект 2">
+            <a:extLst>
+              <a:ext uri="{FF2B5EF4-FFF2-40B4-BE49-F238E27FC236}">
+                <a16:creationId xmlns:a16="http://schemas.microsoft.com/office/drawing/2014/main" id="{D7877F83-DD0A-C6A0-7DEB-E2545D1D0851}"/>
+              </a:ext>
+            </a:extLst>
+          </p:cNvPr>
+          <p:cNvSpPr>
+            <a:spLocks noGrp="1"/>
+          </p:cNvSpPr>
+          <p:nvPr>
+            <p:ph idx="1"/>
+          </p:nvPr>
+        </p:nvSpPr>
+        <p:spPr/>
+        <p:txBody>
+          <a:bodyPr>
+            <a:normAutofit fontScale="85000" lnSpcReduction="20000"/>
+          </a:bodyPr>
+          <a:lstStyle/>
+          <a:p>
+            <a:pPr indent="0" algn="just">
+              <a:lnSpc>
+                <a:spcPct val="150000"/>
+              </a:lnSpc>
+              <a:spcAft>
+                <a:spcPts val="1000"/>
+              </a:spcAft>
+              <a:buNone/>
+            </a:pPr>
+            <a:r>
+              <a:rPr lang="en-US" sz="1800" b="1" kern="100" dirty="0">
+                <a:effectLst/>
+                <a:latin typeface="Times New Roman" panose="02020603050405020304" pitchFamily="18" charset="0"/>
+                <a:ea typeface="Calibri" panose="020F0502020204030204" pitchFamily="34" charset="0"/>
+                <a:cs typeface="Times New Roman" panose="02020603050405020304" pitchFamily="18" charset="0"/>
+              </a:rPr>
+              <a:t>	</a:t>
+            </a:r>
+            <a:r>
+              <a:rPr lang="ru-RU" sz="1900" b="1" kern="100" dirty="0">
+                <a:effectLst/>
+                <a:latin typeface="Times New Roman" panose="02020603050405020304" pitchFamily="18" charset="0"/>
+                <a:ea typeface="Calibri" panose="020F0502020204030204" pitchFamily="34" charset="0"/>
+                <a:cs typeface="Times New Roman" panose="02020603050405020304" pitchFamily="18" charset="0"/>
+              </a:rPr>
+              <a:t>Цель работы —</a:t>
+            </a:r>
+            <a:r>
+              <a:rPr lang="en-US" sz="1900" b="1" kern="100" dirty="0">
+                <a:effectLst/>
+                <a:latin typeface="Times New Roman" panose="02020603050405020304" pitchFamily="18" charset="0"/>
+                <a:ea typeface="Calibri" panose="020F0502020204030204" pitchFamily="34" charset="0"/>
+                <a:cs typeface="Times New Roman" panose="02020603050405020304" pitchFamily="18" charset="0"/>
+              </a:rPr>
+              <a:t> </a:t>
+            </a:r>
+            <a:r>
+              <a:rPr lang="ru-RU" sz="1900" kern="100" dirty="0">
+                <a:effectLst/>
+                <a:latin typeface="Times New Roman" panose="02020603050405020304" pitchFamily="18" charset="0"/>
+                <a:ea typeface="Calibri" panose="020F0502020204030204" pitchFamily="34" charset="0"/>
+                <a:cs typeface="Times New Roman" panose="02020603050405020304" pitchFamily="18" charset="0"/>
+              </a:rPr>
+              <a:t>примен</a:t>
+            </a:r>
+            <a:r>
+              <a:rPr lang="ru-RU" sz="1900" kern="100" dirty="0">
+                <a:latin typeface="Times New Roman" panose="02020603050405020304" pitchFamily="18" charset="0"/>
+                <a:ea typeface="Calibri" panose="020F0502020204030204" pitchFamily="34" charset="0"/>
+                <a:cs typeface="Times New Roman" panose="02020603050405020304" pitchFamily="18" charset="0"/>
+              </a:rPr>
+              <a:t>ение</a:t>
+            </a:r>
+            <a:r>
+              <a:rPr lang="ru-RU" sz="1900" kern="100" dirty="0">
+                <a:effectLst/>
+                <a:latin typeface="Times New Roman" panose="02020603050405020304" pitchFamily="18" charset="0"/>
+                <a:ea typeface="Calibri" panose="020F0502020204030204" pitchFamily="34" charset="0"/>
+                <a:cs typeface="Times New Roman" panose="02020603050405020304" pitchFamily="18" charset="0"/>
+              </a:rPr>
+              <a:t> еди</a:t>
+            </a:r>
+            <a:r>
+              <a:rPr lang="ru-RU" sz="1900" kern="100" dirty="0">
+                <a:latin typeface="Times New Roman" panose="02020603050405020304" pitchFamily="18" charset="0"/>
+                <a:ea typeface="Calibri" panose="020F0502020204030204" pitchFamily="34" charset="0"/>
+                <a:cs typeface="Times New Roman" panose="02020603050405020304" pitchFamily="18" charset="0"/>
+              </a:rPr>
+              <a:t>ного</a:t>
+            </a:r>
+            <a:r>
+              <a:rPr lang="ru-RU" sz="1900" kern="100" dirty="0">
+                <a:effectLst/>
+                <a:latin typeface="Times New Roman" panose="02020603050405020304" pitchFamily="18" charset="0"/>
+                <a:ea typeface="Calibri" panose="020F0502020204030204" pitchFamily="34" charset="0"/>
+                <a:cs typeface="Times New Roman" panose="02020603050405020304" pitchFamily="18" charset="0"/>
+              </a:rPr>
+              <a:t> метода асимптотического анализа, основанного на решении рекуррентных соотношений, к чётно-нечётной сортировке слиянием Бэтчера и родственным ей алгоритмам; получить точные замкнутые формулы их сложности</a:t>
+            </a:r>
+            <a:r>
+              <a:rPr lang="en-US" sz="1900" kern="100" dirty="0">
+                <a:effectLst/>
+                <a:latin typeface="Times New Roman" panose="02020603050405020304" pitchFamily="18" charset="0"/>
+                <a:ea typeface="Calibri" panose="020F0502020204030204" pitchFamily="34" charset="0"/>
+                <a:cs typeface="Times New Roman" panose="02020603050405020304" pitchFamily="18" charset="0"/>
+              </a:rPr>
+              <a:t>.</a:t>
+            </a:r>
+            <a:r>
+              <a:rPr lang="ru-RU" sz="1900" kern="100" dirty="0">
+                <a:effectLst/>
+                <a:latin typeface="Times New Roman" panose="02020603050405020304" pitchFamily="18" charset="0"/>
+                <a:ea typeface="Calibri" panose="020F0502020204030204" pitchFamily="34" charset="0"/>
+                <a:cs typeface="Times New Roman" panose="02020603050405020304" pitchFamily="18" charset="0"/>
+              </a:rPr>
+              <a:t> Для достижения поставленной цели в работе решаются следующие задачи:</a:t>
+            </a:r>
+            <a:endParaRPr lang="ru-RU" sz="1900" dirty="0">
+              <a:effectLst/>
+              <a:latin typeface="Times New Roman" panose="02020603050405020304" pitchFamily="18" charset="0"/>
+              <a:ea typeface="Times New Roman" panose="02020603050405020304" pitchFamily="18" charset="0"/>
+            </a:endParaRPr>
+          </a:p>
+          <a:p>
+            <a:pPr marL="342900" lvl="0" indent="-342900" algn="just">
+              <a:lnSpc>
+                <a:spcPct val="150000"/>
+              </a:lnSpc>
+              <a:buFont typeface="+mj-lt"/>
+              <a:buAutoNum type="arabicPeriod"/>
+            </a:pPr>
+            <a:r>
+              <a:rPr lang="ru-RU" sz="1900" kern="100" dirty="0">
+                <a:effectLst/>
+                <a:latin typeface="Times New Roman" panose="02020603050405020304" pitchFamily="18" charset="0"/>
+                <a:ea typeface="Calibri" panose="020F0502020204030204" pitchFamily="34" charset="0"/>
+                <a:cs typeface="Times New Roman" panose="02020603050405020304" pitchFamily="18" charset="0"/>
+              </a:rPr>
+              <a:t>Систематизация методов анализа.</a:t>
+            </a:r>
+          </a:p>
+          <a:p>
+            <a:pPr marL="342900" lvl="0" indent="-342900" algn="just">
+              <a:lnSpc>
+                <a:spcPct val="150000"/>
+              </a:lnSpc>
+              <a:buFont typeface="+mj-lt"/>
+              <a:buAutoNum type="arabicPeriod"/>
+            </a:pPr>
+            <a:r>
+              <a:rPr lang="ru-RU" sz="1900" kern="100" dirty="0">
+                <a:latin typeface="Times New Roman" panose="02020603050405020304" pitchFamily="18" charset="0"/>
+                <a:ea typeface="Calibri" panose="020F0502020204030204" pitchFamily="34" charset="0"/>
+                <a:cs typeface="Times New Roman" panose="02020603050405020304" pitchFamily="18" charset="0"/>
+              </a:rPr>
+              <a:t>Получение рекуррентного соотношения</a:t>
+            </a:r>
+            <a:r>
+              <a:rPr lang="ru-RU" sz="1900" kern="100" dirty="0">
+                <a:effectLst/>
+                <a:latin typeface="Times New Roman" panose="02020603050405020304" pitchFamily="18" charset="0"/>
+                <a:ea typeface="Calibri" panose="020F0502020204030204" pitchFamily="34" charset="0"/>
+                <a:cs typeface="Times New Roman" panose="02020603050405020304" pitchFamily="18" charset="0"/>
+              </a:rPr>
+              <a:t> для сортировки Бэтчера.</a:t>
+            </a:r>
+          </a:p>
+          <a:p>
+            <a:pPr marL="342900" lvl="0" indent="-342900" algn="just">
+              <a:lnSpc>
+                <a:spcPct val="150000"/>
+              </a:lnSpc>
+              <a:buFont typeface="+mj-lt"/>
+              <a:buAutoNum type="arabicPeriod"/>
+            </a:pPr>
+            <a:r>
+              <a:rPr lang="ru-RU" sz="1900" kern="100" dirty="0">
+                <a:effectLst/>
+                <a:latin typeface="Times New Roman" panose="02020603050405020304" pitchFamily="18" charset="0"/>
+                <a:ea typeface="Calibri" panose="020F0502020204030204" pitchFamily="34" charset="0"/>
+                <a:cs typeface="Times New Roman" panose="02020603050405020304" pitchFamily="18" charset="0"/>
+              </a:rPr>
+              <a:t>Сравнение с классическими сортировками.</a:t>
+            </a:r>
+          </a:p>
+          <a:p>
+            <a:pPr marL="342900" lvl="0" indent="-342900" algn="just">
+              <a:lnSpc>
+                <a:spcPct val="150000"/>
+              </a:lnSpc>
+              <a:buFont typeface="+mj-lt"/>
+              <a:buAutoNum type="arabicPeriod"/>
+            </a:pPr>
+            <a:r>
+              <a:rPr lang="ru-RU" sz="1900" kern="100" dirty="0">
+                <a:effectLst/>
+                <a:latin typeface="Times New Roman" panose="02020603050405020304" pitchFamily="18" charset="0"/>
+                <a:ea typeface="Calibri" panose="020F0502020204030204" pitchFamily="34" charset="0"/>
+                <a:cs typeface="Times New Roman" panose="02020603050405020304" pitchFamily="18" charset="0"/>
+              </a:rPr>
+              <a:t>Определение границ применимости метода.</a:t>
+            </a:r>
+          </a:p>
+          <a:p>
+            <a:pPr marL="342900" lvl="0" indent="-342900" algn="just">
+              <a:lnSpc>
+                <a:spcPct val="150000"/>
+              </a:lnSpc>
+              <a:buFont typeface="+mj-lt"/>
+              <a:buAutoNum type="arabicPeriod"/>
+            </a:pPr>
+            <a:r>
+              <a:rPr lang="ru-RU" sz="1900" kern="100" dirty="0">
+                <a:effectLst/>
+                <a:latin typeface="Times New Roman" panose="02020603050405020304" pitchFamily="18" charset="0"/>
+                <a:ea typeface="Calibri" panose="020F0502020204030204" pitchFamily="34" charset="0"/>
+                <a:cs typeface="Times New Roman" panose="02020603050405020304" pitchFamily="18" charset="0"/>
+              </a:rPr>
+              <a:t>Расширение подхода на криптографические алгоритмы.</a:t>
+            </a:r>
+          </a:p>
+          <a:p>
+            <a:pPr marL="342900" lvl="0" indent="-342900" algn="just">
+              <a:lnSpc>
+                <a:spcPct val="150000"/>
+              </a:lnSpc>
+              <a:buFont typeface="+mj-lt"/>
+              <a:buAutoNum type="arabicPeriod"/>
+            </a:pPr>
+            <a:r>
+              <a:rPr lang="ru-RU" sz="1900" kern="100" dirty="0">
+                <a:effectLst/>
+                <a:latin typeface="Times New Roman" panose="02020603050405020304" pitchFamily="18" charset="0"/>
+                <a:ea typeface="Calibri" panose="020F0502020204030204" pitchFamily="34" charset="0"/>
+                <a:cs typeface="Times New Roman" panose="02020603050405020304" pitchFamily="18" charset="0"/>
+              </a:rPr>
+              <a:t>Экспериментальная проверка формул.</a:t>
+            </a:r>
+            <a:endParaRPr lang="ru-RU" dirty="0"/>
+          </a:p>
+        </p:txBody>
+      </p:sp>
       <p:sp>
         <p:nvSpPr>
           <p:cNvPr id="4" name="Нижний колонтитул 3">
@@ -10042,7 +11146,7 @@
             </p:spPr>
             <p:txBody>
               <a:bodyPr>
-                <a:normAutofit fontScale="92500"/>
+                <a:normAutofit/>
               </a:bodyPr>
               <a:lstStyle/>
               <a:p>
@@ -10053,7 +11157,7 @@
                   <a:buNone/>
                 </a:pPr>
                 <a:r>
-                  <a:rPr lang="en-US" sz="1100" kern="100" dirty="0">
+                  <a:rPr lang="en-US" sz="1200" kern="100" dirty="0">
                     <a:latin typeface="Times New Roman" panose="02020603050405020304" pitchFamily="18" charset="0"/>
                     <a:ea typeface="Calibri" panose="020F0502020204030204" pitchFamily="34" charset="0"/>
                     <a:cs typeface="Times New Roman" panose="02020603050405020304" pitchFamily="18" charset="0"/>
@@ -10066,7 +11170,27 @@
                     <a:ea typeface="Calibri" panose="020F0502020204030204" pitchFamily="34" charset="0"/>
                     <a:cs typeface="Times New Roman" panose="02020603050405020304" pitchFamily="18" charset="0"/>
                   </a:rPr>
-                  <a:t>Это один из классических примеров сортировочной сети: для каждого n задаётся фиксированная последовательность компараторов (пары индексов). Порядок сравнений не зависит от значений ключей, поэтому число сравнений одинаково в лучшем, среднем и худшем случаях — удобно для параллельной и аппаратной реализации и для строгого анализа.</a:t>
+                  <a:t>Это один из классических примеров сортировочной сети: для каждого </a:t>
+                </a:r>
+                <a14:m>
+                  <m:oMath xmlns:m="http://schemas.openxmlformats.org/officeDocument/2006/math">
+                    <m:r>
+                      <a:rPr lang="ru-RU" sz="1200" i="1" kern="100" dirty="0" smtClean="0">
+                        <a:latin typeface="Cambria Math" panose="02040503050406030204" pitchFamily="18" charset="0"/>
+                        <a:ea typeface="Calibri" panose="020F0502020204030204" pitchFamily="34" charset="0"/>
+                        <a:cs typeface="Times New Roman" panose="02020603050405020304" pitchFamily="18" charset="0"/>
+                      </a:rPr>
+                      <m:t>𝑛</m:t>
+                    </m:r>
+                  </m:oMath>
+                </a14:m>
+                <a:r>
+                  <a:rPr lang="ru-RU" sz="1200" kern="100" dirty="0">
+                    <a:latin typeface="Times New Roman" panose="02020603050405020304" pitchFamily="18" charset="0"/>
+                    <a:ea typeface="Calibri" panose="020F0502020204030204" pitchFamily="34" charset="0"/>
+                    <a:cs typeface="Times New Roman" panose="02020603050405020304" pitchFamily="18" charset="0"/>
+                  </a:rPr>
+                  <a:t> задаётся фиксированная последовательность компараторов (пары индексов). Порядок сравнений не зависит от значений ключей, поэтому число сравнений одинаково в лучшем, среднем и худшем случаях — удобно для параллельной и аппаратной реализации и для строгого анализа.</a:t>
                 </a:r>
                 <a:r>
                   <a:rPr lang="en-US" sz="1200" kern="100" dirty="0">
@@ -10143,7 +11267,23 @@
                     <a:ea typeface="Calibri" panose="020F0502020204030204" pitchFamily="34" charset="0"/>
                     <a:cs typeface="Times New Roman" panose="02020603050405020304" pitchFamily="18" charset="0"/>
                   </a:rPr>
-                  <a:t>	1) Рекурсивно отсортировать левую половину длины </a:t>
+                  <a:t>1</a:t>
+                </a:r>
+                <a:r>
+                  <a:rPr lang="en-US" sz="1200" kern="100" dirty="0">
+                    <a:latin typeface="Times New Roman" panose="02020603050405020304" pitchFamily="18" charset="0"/>
+                    <a:ea typeface="Calibri" panose="020F0502020204030204" pitchFamily="34" charset="0"/>
+                    <a:cs typeface="Times New Roman" panose="02020603050405020304" pitchFamily="18" charset="0"/>
+                  </a:rPr>
+                  <a:t>.</a:t>
+                </a:r>
+                <a:r>
+                  <a:rPr lang="ru-RU" sz="1200" kern="100" dirty="0">
+                    <a:latin typeface="Times New Roman" panose="02020603050405020304" pitchFamily="18" charset="0"/>
+                    <a:ea typeface="Calibri" panose="020F0502020204030204" pitchFamily="34" charset="0"/>
+                    <a:cs typeface="Times New Roman" panose="02020603050405020304" pitchFamily="18" charset="0"/>
+                  </a:rPr>
+                  <a:t> Рекурсивно отсортировать левую половину длины </a:t>
                 </a:r>
                 <a14:m>
                   <m:oMath xmlns:m="http://schemas.openxmlformats.org/officeDocument/2006/math">
@@ -10199,7 +11339,66 @@
                     <a:ea typeface="Calibri" panose="020F0502020204030204" pitchFamily="34" charset="0"/>
                     <a:cs typeface="Times New Roman" panose="02020603050405020304" pitchFamily="18" charset="0"/>
                   </a:rPr>
-                  <a:t>	2) Рекурсивно отсортировать правую половину длины n/2.</a:t>
+                  <a:t>2</a:t>
+                </a:r>
+                <a:r>
+                  <a:rPr lang="en-US" sz="1200" kern="100" dirty="0">
+                    <a:latin typeface="Times New Roman" panose="02020603050405020304" pitchFamily="18" charset="0"/>
+                    <a:ea typeface="Calibri" panose="020F0502020204030204" pitchFamily="34" charset="0"/>
+                    <a:cs typeface="Times New Roman" panose="02020603050405020304" pitchFamily="18" charset="0"/>
+                  </a:rPr>
+                  <a:t>.</a:t>
+                </a:r>
+                <a:r>
+                  <a:rPr lang="ru-RU" sz="1200" kern="100" dirty="0">
+                    <a:latin typeface="Times New Roman" panose="02020603050405020304" pitchFamily="18" charset="0"/>
+                    <a:ea typeface="Calibri" panose="020F0502020204030204" pitchFamily="34" charset="0"/>
+                    <a:cs typeface="Times New Roman" panose="02020603050405020304" pitchFamily="18" charset="0"/>
+                  </a:rPr>
+                  <a:t> Рекурсивно отсортировать правую половину длины </a:t>
+                </a:r>
+                <a14:m>
+                  <m:oMath xmlns:m="http://schemas.openxmlformats.org/officeDocument/2006/math">
+                    <m:f>
+                      <m:fPr>
+                        <m:ctrlPr>
+                          <a:rPr lang="ru-RU" sz="1200" i="1" kern="100" dirty="0" smtClean="0">
+                            <a:latin typeface="Cambria Math" panose="02040503050406030204" pitchFamily="18" charset="0"/>
+                            <a:ea typeface="Calibri" panose="020F0502020204030204" pitchFamily="34" charset="0"/>
+                            <a:cs typeface="Times New Roman" panose="02020603050405020304" pitchFamily="18" charset="0"/>
+                          </a:rPr>
+                        </m:ctrlPr>
+                      </m:fPr>
+                      <m:num>
+                        <m:r>
+                          <a:rPr lang="ru-RU" sz="1200" i="1" kern="100" dirty="0" smtClean="0">
+                            <a:latin typeface="Cambria Math" panose="02040503050406030204" pitchFamily="18" charset="0"/>
+                            <a:ea typeface="Calibri" panose="020F0502020204030204" pitchFamily="34" charset="0"/>
+                            <a:cs typeface="Times New Roman" panose="02020603050405020304" pitchFamily="18" charset="0"/>
+                          </a:rPr>
+                          <m:t>𝑛</m:t>
+                        </m:r>
+                      </m:num>
+                      <m:den>
+                        <m:r>
+                          <a:rPr lang="ru-RU" sz="1200" i="1" kern="100" dirty="0" smtClean="0">
+                            <a:latin typeface="Cambria Math" panose="02040503050406030204" pitchFamily="18" charset="0"/>
+                            <a:ea typeface="Calibri" panose="020F0502020204030204" pitchFamily="34" charset="0"/>
+                            <a:cs typeface="Times New Roman" panose="02020603050405020304" pitchFamily="18" charset="0"/>
+                          </a:rPr>
+                          <m:t>2</m:t>
+                        </m:r>
+                      </m:den>
+                    </m:f>
+                  </m:oMath>
+                </a14:m>
+                <a:r>
+                  <a:rPr lang="ru-RU" sz="1200" kern="100" dirty="0">
+                    <a:latin typeface="Times New Roman" panose="02020603050405020304" pitchFamily="18" charset="0"/>
+                    <a:ea typeface="Calibri" panose="020F0502020204030204" pitchFamily="34" charset="0"/>
+                    <a:cs typeface="Times New Roman" panose="02020603050405020304" pitchFamily="18" charset="0"/>
+                  </a:rPr>
+                  <a:t>.</a:t>
                 </a:r>
               </a:p>
               <a:p>
@@ -10212,7 +11411,23 @@
                     <a:ea typeface="Calibri" panose="020F0502020204030204" pitchFamily="34" charset="0"/>
                     <a:cs typeface="Times New Roman" panose="02020603050405020304" pitchFamily="18" charset="0"/>
                   </a:rPr>
-                  <a:t>	3) К двум уже отсортированным под-массивам применить операцию </a:t>
+                  <a:t>3</a:t>
+                </a:r>
+                <a:r>
+                  <a:rPr lang="en-US" sz="1200" kern="100" dirty="0">
+                    <a:latin typeface="Times New Roman" panose="02020603050405020304" pitchFamily="18" charset="0"/>
+                    <a:ea typeface="Calibri" panose="020F0502020204030204" pitchFamily="34" charset="0"/>
+                    <a:cs typeface="Times New Roman" panose="02020603050405020304" pitchFamily="18" charset="0"/>
+                  </a:rPr>
+                  <a:t>.</a:t>
+                </a:r>
+                <a:r>
+                  <a:rPr lang="ru-RU" sz="1200" kern="100" dirty="0">
+                    <a:latin typeface="Times New Roman" panose="02020603050405020304" pitchFamily="18" charset="0"/>
+                    <a:ea typeface="Calibri" panose="020F0502020204030204" pitchFamily="34" charset="0"/>
+                    <a:cs typeface="Times New Roman" panose="02020603050405020304" pitchFamily="18" charset="0"/>
+                  </a:rPr>
+                  <a:t> К двум уже отсортированным под-массивам применить операцию </a:t>
                 </a:r>
                 <a:r>
                   <a:rPr lang="ru-RU" sz="1200" kern="100" dirty="0" err="1">
@@ -10246,11 +11461,6 @@
                   </a:rPr>
                   <a:t> (чётно‑нечётное слияние).</a:t>
                 </a:r>
-              </a:p>
-              <a:p>
-                <a:pPr marL="0" indent="0">
-                  <a:buNone/>
-                </a:pPr>
                 <a:r>
                   <a:rPr lang="en-US" sz="1200" kern="100" dirty="0">
                     <a:latin typeface="Times New Roman" panose="02020603050405020304" pitchFamily="18" charset="0"/>
@@ -10264,14 +11474,16 @@
                 <a:pPr marL="0" indent="0">
                   <a:buNone/>
                 </a:pPr>
-                <a:r>
-                  <a:rPr lang="en-US" sz="1200" kern="100" dirty="0">
-                    <a:latin typeface="Times New Roman" panose="02020603050405020304" pitchFamily="18" charset="0"/>
-                    <a:ea typeface="Calibri" panose="020F0502020204030204" pitchFamily="34" charset="0"/>
-                    <a:cs typeface="Times New Roman" panose="02020603050405020304" pitchFamily="18" charset="0"/>
-                  </a:rPr>
-                  <a:t>	</a:t>
-                </a:r>
+                <a:endParaRPr lang="en-US" sz="1200" kern="100" dirty="0">
+                  <a:latin typeface="Times New Roman" panose="02020603050405020304" pitchFamily="18" charset="0"/>
+                  <a:ea typeface="Calibri" panose="020F0502020204030204" pitchFamily="34" charset="0"/>
+                  <a:cs typeface="Times New Roman" panose="02020603050405020304" pitchFamily="18" charset="0"/>
+                </a:endParaRPr>
+              </a:p>
+              <a:p>
+                <a:pPr marL="0" indent="0">
+                  <a:buNone/>
+                </a:pPr>
                 <a:r>
                   <a:rPr lang="ru-RU" sz="1200" kern="100" dirty="0">
                     <a:latin typeface="Times New Roman" panose="02020603050405020304" pitchFamily="18" charset="0"/>
@@ -10310,7 +11522,27 @@
                     <a:ea typeface="Calibri" panose="020F0502020204030204" pitchFamily="34" charset="0"/>
                     <a:cs typeface="Times New Roman" panose="02020603050405020304" pitchFamily="18" charset="0"/>
                   </a:rPr>
-                  <a:t> (слияние двух отсортированных половин одного массива длины n) устроена таким образом:</a:t>
+                  <a:t> (слияние двух отсортированных половин одного массива длины </a:t>
+                </a:r>
+                <a14:m>
+                  <m:oMath xmlns:m="http://schemas.openxmlformats.org/officeDocument/2006/math">
+                    <m:r>
+                      <a:rPr lang="ru-RU" sz="1200" i="1" kern="100" dirty="0" smtClean="0">
+                        <a:latin typeface="Cambria Math" panose="02040503050406030204" pitchFamily="18" charset="0"/>
+                        <a:ea typeface="Calibri" panose="020F0502020204030204" pitchFamily="34" charset="0"/>
+                        <a:cs typeface="Times New Roman" panose="02020603050405020304" pitchFamily="18" charset="0"/>
+                      </a:rPr>
+                      <m:t>𝑛</m:t>
+                    </m:r>
+                  </m:oMath>
+                </a14:m>
+                <a:r>
+                  <a:rPr lang="ru-RU" sz="1200" kern="100" dirty="0">
+                    <a:latin typeface="Times New Roman" panose="02020603050405020304" pitchFamily="18" charset="0"/>
+                    <a:ea typeface="Calibri" panose="020F0502020204030204" pitchFamily="34" charset="0"/>
+                    <a:cs typeface="Times New Roman" panose="02020603050405020304" pitchFamily="18" charset="0"/>
+                  </a:rPr>
+                  <a:t>) устроена таким образом:</a:t>
                 </a:r>
               </a:p>
               <a:p>
@@ -10323,7 +11555,7 @@
                     <a:ea typeface="Calibri" panose="020F0502020204030204" pitchFamily="34" charset="0"/>
                     <a:cs typeface="Times New Roman" panose="02020603050405020304" pitchFamily="18" charset="0"/>
                   </a:rPr>
-                  <a:t>	</a:t>
+                  <a:t>1</a:t>
                 </a:r>
                 <a:r>
                   <a:rPr lang="en-US" sz="1200" kern="100" dirty="0">
@@ -10331,7 +11563,7 @@
                     <a:ea typeface="Calibri" panose="020F0502020204030204" pitchFamily="34" charset="0"/>
                     <a:cs typeface="Times New Roman" panose="02020603050405020304" pitchFamily="18" charset="0"/>
                   </a:rPr>
-                  <a:t>	</a:t>
+                  <a:t>.</a:t>
                 </a:r>
                 <a:r>
                   <a:rPr lang="ru-RU" sz="1200" kern="100" dirty="0">
@@ -10339,49 +11571,123 @@
                     <a:ea typeface="Calibri" panose="020F0502020204030204" pitchFamily="34" charset="0"/>
                     <a:cs typeface="Times New Roman" panose="02020603050405020304" pitchFamily="18" charset="0"/>
                   </a:rPr>
-                  <a:t>1) при n=2 выполняется одно сравнение </a:t>
+                  <a:t> при </a:t>
                 </a:r>
                 <a14:m>
                   <m:oMath xmlns:m="http://schemas.openxmlformats.org/officeDocument/2006/math">
                     <m:r>
-                      <a:rPr lang="ru-RU" sz="1200" kern="100">
+                      <a:rPr lang="ru-RU" sz="1200" i="1" kern="100" dirty="0" smtClean="0">
+                        <a:latin typeface="Cambria Math" panose="02040503050406030204" pitchFamily="18" charset="0"/>
+                        <a:ea typeface="Calibri" panose="020F0502020204030204" pitchFamily="34" charset="0"/>
+                        <a:cs typeface="Times New Roman" panose="02020603050405020304" pitchFamily="18" charset="0"/>
+                      </a:rPr>
+                      <m:t>𝑛</m:t>
+                    </m:r>
+                    <m:r>
+                      <a:rPr lang="ru-RU" sz="1200" i="1" kern="100" dirty="0" smtClean="0">
+                        <a:latin typeface="Cambria Math" panose="02040503050406030204" pitchFamily="18" charset="0"/>
+                        <a:ea typeface="Calibri" panose="020F0502020204030204" pitchFamily="34" charset="0"/>
+                        <a:cs typeface="Times New Roman" panose="02020603050405020304" pitchFamily="18" charset="0"/>
+                      </a:rPr>
+                      <m:t>=2</m:t>
+                    </m:r>
+                  </m:oMath>
+                </a14:m>
+                <a:r>
+                  <a:rPr lang="ru-RU" sz="1200" kern="100" dirty="0">
+                    <a:latin typeface="Times New Roman" panose="02020603050405020304" pitchFamily="18" charset="0"/>
+                    <a:ea typeface="Calibri" panose="020F0502020204030204" pitchFamily="34" charset="0"/>
+                    <a:cs typeface="Times New Roman" panose="02020603050405020304" pitchFamily="18" charset="0"/>
+                  </a:rPr>
+                  <a:t> выполняется одно сравнение </a:t>
+                </a:r>
+                <a14:m>
+                  <m:oMath xmlns:m="http://schemas.openxmlformats.org/officeDocument/2006/math">
+                    <m:r>
+                      <a:rPr lang="ru-RU" sz="1200" kern="100" smtClean="0">
                         <a:latin typeface="Cambria Math" panose="02040503050406030204" pitchFamily="18" charset="0"/>
                         <a:ea typeface="Calibri" panose="020F0502020204030204" pitchFamily="34" charset="0"/>
                         <a:cs typeface="Times New Roman" panose="02020603050405020304" pitchFamily="18" charset="0"/>
                       </a:rPr>
                       <m:t>(</m:t>
                     </m:r>
+                    <m:sSub>
+                      <m:sSubPr>
+                        <m:ctrlPr>
+                          <a:rPr lang="en-US" sz="1200" i="1" kern="100" dirty="0" smtClean="0">
+                            <a:latin typeface="Cambria Math" panose="02040503050406030204" pitchFamily="18" charset="0"/>
+                            <a:ea typeface="Calibri" panose="020F0502020204030204" pitchFamily="34" charset="0"/>
+                            <a:cs typeface="Times New Roman" panose="02020603050405020304" pitchFamily="18" charset="0"/>
+                          </a:rPr>
+                        </m:ctrlPr>
+                      </m:sSubPr>
+                      <m:e>
+                        <m:r>
+                          <a:rPr lang="ru-RU" sz="1200" b="0" i="1" kern="100" dirty="0" smtClean="0">
+                            <a:latin typeface="Cambria Math" panose="02040503050406030204" pitchFamily="18" charset="0"/>
+                            <a:ea typeface="Calibri" panose="020F0502020204030204" pitchFamily="34" charset="0"/>
+                            <a:cs typeface="Times New Roman" panose="02020603050405020304" pitchFamily="18" charset="0"/>
+                          </a:rPr>
+                          <m:t>𝑎</m:t>
+                        </m:r>
+                      </m:e>
+                      <m:sub>
+                        <m:r>
+                          <a:rPr lang="ru-RU" sz="1200" b="0" i="1" kern="100" dirty="0" smtClean="0">
+                            <a:latin typeface="Cambria Math" panose="02040503050406030204" pitchFamily="18" charset="0"/>
+                            <a:ea typeface="Calibri" panose="020F0502020204030204" pitchFamily="34" charset="0"/>
+                            <a:cs typeface="Times New Roman" panose="02020603050405020304" pitchFamily="18" charset="0"/>
+                          </a:rPr>
+                          <m:t>0</m:t>
+                        </m:r>
+                      </m:sub>
+                    </m:sSub>
                     <m:r>
-                      <a:rPr lang="ru-RU" sz="1200" kern="100">
+                      <a:rPr lang="ru-RU" sz="1200" b="0" i="1" kern="100" dirty="0" smtClean="0">
                         <a:latin typeface="Cambria Math" panose="02040503050406030204" pitchFamily="18" charset="0"/>
                         <a:ea typeface="Calibri" panose="020F0502020204030204" pitchFamily="34" charset="0"/>
                         <a:cs typeface="Times New Roman" panose="02020603050405020304" pitchFamily="18" charset="0"/>
                       </a:rPr>
-                      <m:t>𝑎</m:t>
+                      <m:t>​,</m:t>
                     </m:r>
+                    <m:sSub>
+                      <m:sSubPr>
+                        <m:ctrlPr>
+                          <a:rPr lang="en-US" sz="1200" i="1" kern="100" dirty="0" smtClean="0">
+                            <a:latin typeface="Cambria Math" panose="02040503050406030204" pitchFamily="18" charset="0"/>
+                            <a:ea typeface="Calibri" panose="020F0502020204030204" pitchFamily="34" charset="0"/>
+                            <a:cs typeface="Times New Roman" panose="02020603050405020304" pitchFamily="18" charset="0"/>
+                          </a:rPr>
+                        </m:ctrlPr>
+                      </m:sSubPr>
+                      <m:e>
+                        <m:r>
+                          <a:rPr lang="ru-RU" sz="1200" b="0" i="1" kern="100" dirty="0" smtClean="0">
+                            <a:latin typeface="Cambria Math" panose="02040503050406030204" pitchFamily="18" charset="0"/>
+                            <a:ea typeface="Calibri" panose="020F0502020204030204" pitchFamily="34" charset="0"/>
+                            <a:cs typeface="Times New Roman" panose="02020603050405020304" pitchFamily="18" charset="0"/>
+                          </a:rPr>
+                          <m:t>𝑎</m:t>
+                        </m:r>
+                      </m:e>
+                      <m:sub>
+                        <m:r>
+                          <a:rPr lang="ru-RU" sz="1200" b="0" i="1" kern="100" dirty="0" smtClean="0">
+                            <a:latin typeface="Cambria Math" panose="02040503050406030204" pitchFamily="18" charset="0"/>
+                            <a:ea typeface="Calibri" panose="020F0502020204030204" pitchFamily="34" charset="0"/>
+                            <a:cs typeface="Times New Roman" panose="02020603050405020304" pitchFamily="18" charset="0"/>
+                          </a:rPr>
+                          <m:t>1</m:t>
+                        </m:r>
+                      </m:sub>
+                    </m:sSub>
                     <m:r>
-                      <a:rPr lang="ru-RU" sz="1200" kern="100">
+                      <a:rPr lang="ru-RU" sz="1200" kern="100" smtClean="0">
                         <a:latin typeface="Cambria Math" panose="02040503050406030204" pitchFamily="18" charset="0"/>
                         <a:ea typeface="Calibri" panose="020F0502020204030204" pitchFamily="34" charset="0"/>
                         <a:cs typeface="Times New Roman" panose="02020603050405020304" pitchFamily="18" charset="0"/>
                       </a:rPr>
-                      <m:t>0​,</m:t>
-                    </m:r>
-                    <m:r>
-                      <a:rPr lang="ru-RU" sz="1200" kern="100">
-                        <a:latin typeface="Cambria Math" panose="02040503050406030204" pitchFamily="18" charset="0"/>
-                        <a:ea typeface="Calibri" panose="020F0502020204030204" pitchFamily="34" charset="0"/>
-                        <a:cs typeface="Times New Roman" panose="02020603050405020304" pitchFamily="18" charset="0"/>
-                      </a:rPr>
-                      <m:t>𝑎</m:t>
-                    </m:r>
-                    <m:r>
-                      <a:rPr lang="ru-RU" sz="1200" kern="100">
-                        <a:latin typeface="Cambria Math" panose="02040503050406030204" pitchFamily="18" charset="0"/>
-                        <a:ea typeface="Calibri" panose="020F0502020204030204" pitchFamily="34" charset="0"/>
-                        <a:cs typeface="Times New Roman" panose="02020603050405020304" pitchFamily="18" charset="0"/>
-                      </a:rPr>
-                      <m:t>1​)</m:t>
+                      <m:t>​)</m:t>
                     </m:r>
                   </m:oMath>
                 </a14:m>
@@ -10408,7 +11714,7 @@
                     <a:ea typeface="Calibri" panose="020F0502020204030204" pitchFamily="34" charset="0"/>
                     <a:cs typeface="Times New Roman" panose="02020603050405020304" pitchFamily="18" charset="0"/>
                   </a:rPr>
-                  <a:t>		</a:t>
+                  <a:t>2</a:t>
                 </a:r>
                 <a:r>
                   <a:rPr lang="en-US" sz="1200" kern="100" dirty="0">
@@ -10416,7 +11722,7 @@
                     <a:ea typeface="Calibri" panose="020F0502020204030204" pitchFamily="34" charset="0"/>
                     <a:cs typeface="Times New Roman" panose="02020603050405020304" pitchFamily="18" charset="0"/>
                   </a:rPr>
-                  <a:t>	</a:t>
+                  <a:t>.</a:t>
                 </a:r>
                 <a:r>
                   <a:rPr lang="ru-RU" sz="1200" kern="100" dirty="0">
@@ -10424,11 +11730,39 @@
                     <a:ea typeface="Calibri" panose="020F0502020204030204" pitchFamily="34" charset="0"/>
                     <a:cs typeface="Times New Roman" panose="02020603050405020304" pitchFamily="18" charset="0"/>
                   </a:rPr>
-                  <a:t>2) при n&gt;2:</a:t>
+                  <a:t> при </a:t>
+                </a:r>
+                <a14:m>
+                  <m:oMath xmlns:m="http://schemas.openxmlformats.org/officeDocument/2006/math">
+                    <m:r>
+                      <a:rPr lang="ru-RU" sz="1200" i="1" kern="100" dirty="0" smtClean="0">
+                        <a:latin typeface="Cambria Math" panose="02040503050406030204" pitchFamily="18" charset="0"/>
+                        <a:ea typeface="Calibri" panose="020F0502020204030204" pitchFamily="34" charset="0"/>
+                        <a:cs typeface="Times New Roman" panose="02020603050405020304" pitchFamily="18" charset="0"/>
+                      </a:rPr>
+                      <m:t>𝑛</m:t>
+                    </m:r>
+                    <m:r>
+                      <a:rPr lang="ru-RU" sz="1200" i="1" kern="100" dirty="0" smtClean="0">
+                        <a:latin typeface="Cambria Math" panose="02040503050406030204" pitchFamily="18" charset="0"/>
+                        <a:ea typeface="Calibri" panose="020F0502020204030204" pitchFamily="34" charset="0"/>
+                        <a:cs typeface="Times New Roman" panose="02020603050405020304" pitchFamily="18" charset="0"/>
+                      </a:rPr>
+                      <m:t>&gt;2</m:t>
+                    </m:r>
+                  </m:oMath>
+                </a14:m>
+                <a:r>
+                  <a:rPr lang="ru-RU" sz="1200" kern="100" dirty="0">
+                    <a:latin typeface="Times New Roman" panose="02020603050405020304" pitchFamily="18" charset="0"/>
+                    <a:ea typeface="Calibri" panose="020F0502020204030204" pitchFamily="34" charset="0"/>
+                    <a:cs typeface="Times New Roman" panose="02020603050405020304" pitchFamily="18" charset="0"/>
+                  </a:rPr>
+                  <a:t>:</a:t>
                 </a:r>
               </a:p>
               <a:p>
-                <a:pPr marL="2571750" lvl="5" indent="-285750" algn="just">
+                <a:pPr marL="742950" lvl="1" indent="-285750" algn="just">
                   <a:lnSpc>
                     <a:spcPct val="150000"/>
                   </a:lnSpc>
@@ -10490,7 +11824,7 @@
                 <a14:m>
                   <m:oMath xmlns:m="http://schemas.openxmlformats.org/officeDocument/2006/math">
                     <m:r>
-                      <a:rPr lang="ru-RU" sz="1200" kern="100">
+                      <a:rPr lang="ru-RU" sz="1200" i="1" kern="100">
                         <a:latin typeface="Cambria Math" panose="02040503050406030204" pitchFamily="18" charset="0"/>
                         <a:ea typeface="Calibri" panose="020F0502020204030204" pitchFamily="34" charset="0"/>
                         <a:cs typeface="Times New Roman" panose="02020603050405020304" pitchFamily="18" charset="0"/>
@@ -10498,7 +11832,7 @@
                       <m:t>𝑎</m:t>
                     </m:r>
                     <m:r>
-                      <a:rPr lang="ru-RU" sz="1200" kern="100">
+                      <a:rPr lang="ru-RU" sz="1200" i="1" kern="100">
                         <a:latin typeface="Cambria Math" panose="02040503050406030204" pitchFamily="18" charset="0"/>
                         <a:ea typeface="Calibri" panose="020F0502020204030204" pitchFamily="34" charset="0"/>
                         <a:cs typeface="Times New Roman" panose="02020603050405020304" pitchFamily="18" charset="0"/>
@@ -10506,7 +11840,7 @@
                       <m:t>₀, </m:t>
                     </m:r>
                     <m:r>
-                      <a:rPr lang="ru-RU" sz="1200" kern="100">
+                      <a:rPr lang="ru-RU" sz="1200" i="1" kern="100">
                         <a:latin typeface="Cambria Math" panose="02040503050406030204" pitchFamily="18" charset="0"/>
                         <a:ea typeface="Calibri" panose="020F0502020204030204" pitchFamily="34" charset="0"/>
                         <a:cs typeface="Times New Roman" panose="02020603050405020304" pitchFamily="18" charset="0"/>
@@ -10514,7 +11848,7 @@
                       <m:t>𝑎</m:t>
                     </m:r>
                     <m:r>
-                      <a:rPr lang="ru-RU" sz="1200" kern="100">
+                      <a:rPr lang="ru-RU" sz="1200" i="1" kern="100">
                         <a:latin typeface="Cambria Math" panose="02040503050406030204" pitchFamily="18" charset="0"/>
                         <a:ea typeface="Calibri" panose="020F0502020204030204" pitchFamily="34" charset="0"/>
                         <a:cs typeface="Times New Roman" panose="02020603050405020304" pitchFamily="18" charset="0"/>
@@ -10522,7 +11856,7 @@
                       <m:t>₂, </m:t>
                     </m:r>
                     <m:r>
-                      <a:rPr lang="ru-RU" sz="1200" kern="100">
+                      <a:rPr lang="ru-RU" sz="1200" i="1" kern="100">
                         <a:latin typeface="Cambria Math" panose="02040503050406030204" pitchFamily="18" charset="0"/>
                         <a:ea typeface="Calibri" panose="020F0502020204030204" pitchFamily="34" charset="0"/>
                         <a:cs typeface="Times New Roman" panose="02020603050405020304" pitchFamily="18" charset="0"/>
@@ -10530,7 +11864,7 @@
                       <m:t>𝑎</m:t>
                     </m:r>
                     <m:r>
-                      <a:rPr lang="ru-RU" sz="1200" kern="100">
+                      <a:rPr lang="ru-RU" sz="1200" i="1" kern="100">
                         <a:latin typeface="Cambria Math" panose="02040503050406030204" pitchFamily="18" charset="0"/>
                         <a:ea typeface="Calibri" panose="020F0502020204030204" pitchFamily="34" charset="0"/>
                         <a:cs typeface="Times New Roman" panose="02020603050405020304" pitchFamily="18" charset="0"/>
@@ -10538,7 +11872,7 @@
                       <m:t>₄, …, </m:t>
                     </m:r>
                     <m:r>
-                      <a:rPr lang="ru-RU" sz="1200" kern="100">
+                      <a:rPr lang="ru-RU" sz="1200" i="1" kern="100">
                         <a:latin typeface="Cambria Math" panose="02040503050406030204" pitchFamily="18" charset="0"/>
                         <a:ea typeface="Calibri" panose="020F0502020204030204" pitchFamily="34" charset="0"/>
                         <a:cs typeface="Times New Roman" panose="02020603050405020304" pitchFamily="18" charset="0"/>
@@ -10546,7 +11880,7 @@
                       <m:t>𝑎</m:t>
                     </m:r>
                     <m:r>
-                      <a:rPr lang="ru-RU" sz="1200" kern="100">
+                      <a:rPr lang="ru-RU" sz="1200" i="1" kern="100">
                         <a:latin typeface="Cambria Math" panose="02040503050406030204" pitchFamily="18" charset="0"/>
                         <a:ea typeface="Calibri" panose="020F0502020204030204" pitchFamily="34" charset="0"/>
                         <a:cs typeface="Times New Roman" panose="02020603050405020304" pitchFamily="18" charset="0"/>
@@ -10556,16 +11890,24 @@
                   </m:oMath>
                 </a14:m>
                 <a:r>
+                  <a:rPr lang="ru-RU" sz="1200" i="1" kern="100" dirty="0">
+                    <a:latin typeface="Times New Roman" panose="02020603050405020304" pitchFamily="18" charset="0"/>
+                    <a:ea typeface="Calibri" panose="020F0502020204030204" pitchFamily="34" charset="0"/>
+                    <a:cs typeface="Times New Roman" panose="02020603050405020304" pitchFamily="18" charset="0"/>
+                  </a:rPr>
+                  <a:t>​</a:t>
+                </a:r>
+                <a:r>
                   <a:rPr lang="ru-RU" sz="1200" kern="100" dirty="0">
                     <a:latin typeface="Times New Roman" panose="02020603050405020304" pitchFamily="18" charset="0"/>
                     <a:ea typeface="Calibri" panose="020F0502020204030204" pitchFamily="34" charset="0"/>
                     <a:cs typeface="Times New Roman" panose="02020603050405020304" pitchFamily="18" charset="0"/>
                   </a:rPr>
-                  <a:t>​;</a:t>
+                  <a:t>;</a:t>
                 </a:r>
               </a:p>
               <a:p>
-                <a:pPr marL="2571750" lvl="5" indent="-285750" algn="just">
+                <a:pPr marL="742950" lvl="1" indent="-285750" algn="just">
                   <a:lnSpc>
                     <a:spcPct val="150000"/>
                   </a:lnSpc>
@@ -10627,18 +11969,15 @@
                 <a14:m>
                   <m:oMath xmlns:m="http://schemas.openxmlformats.org/officeDocument/2006/math">
                     <m:r>
-                      <m:rPr>
-                        <m:sty m:val="p"/>
-                      </m:rPr>
-                      <a:rPr lang="ru-RU" sz="1200" kern="100">
+                      <a:rPr lang="ru-RU" sz="1200" b="0" i="1" kern="100">
                         <a:latin typeface="Cambria Math" panose="02040503050406030204" pitchFamily="18" charset="0"/>
                         <a:ea typeface="Calibri" panose="020F0502020204030204" pitchFamily="34" charset="0"/>
                         <a:cs typeface="Times New Roman" panose="02020603050405020304" pitchFamily="18" charset="0"/>
                       </a:rPr>
-                      <m:t>a</m:t>
+                      <m:t>𝑎</m:t>
                     </m:r>
                     <m:r>
-                      <a:rPr lang="ru-RU" sz="1200" kern="100">
+                      <a:rPr lang="ru-RU" sz="1200" b="0" i="1" kern="100">
                         <a:latin typeface="Cambria Math" panose="02040503050406030204" pitchFamily="18" charset="0"/>
                         <a:ea typeface="Calibri" panose="020F0502020204030204" pitchFamily="34" charset="0"/>
                         <a:cs typeface="Times New Roman" panose="02020603050405020304" pitchFamily="18" charset="0"/>
@@ -10646,18 +11985,15 @@
                       <m:t>₁, </m:t>
                     </m:r>
                     <m:r>
-                      <m:rPr>
-                        <m:sty m:val="p"/>
-                      </m:rPr>
-                      <a:rPr lang="ru-RU" sz="1200" kern="100">
+                      <a:rPr lang="ru-RU" sz="1200" b="0" i="1" kern="100">
                         <a:latin typeface="Cambria Math" panose="02040503050406030204" pitchFamily="18" charset="0"/>
                         <a:ea typeface="Calibri" panose="020F0502020204030204" pitchFamily="34" charset="0"/>
                         <a:cs typeface="Times New Roman" panose="02020603050405020304" pitchFamily="18" charset="0"/>
                       </a:rPr>
-                      <m:t>a</m:t>
+                      <m:t>𝑎</m:t>
                     </m:r>
                     <m:r>
-                      <a:rPr lang="ru-RU" sz="1200" kern="100">
+                      <a:rPr lang="ru-RU" sz="1200" b="0" i="1" kern="100">
                         <a:latin typeface="Cambria Math" panose="02040503050406030204" pitchFamily="18" charset="0"/>
                         <a:ea typeface="Calibri" panose="020F0502020204030204" pitchFamily="34" charset="0"/>
                         <a:cs typeface="Times New Roman" panose="02020603050405020304" pitchFamily="18" charset="0"/>
@@ -10665,18 +12001,15 @@
                       <m:t>₃, </m:t>
                     </m:r>
                     <m:r>
-                      <m:rPr>
-                        <m:sty m:val="p"/>
-                      </m:rPr>
-                      <a:rPr lang="ru-RU" sz="1200" kern="100">
+                      <a:rPr lang="ru-RU" sz="1200" b="0" i="1" kern="100">
                         <a:latin typeface="Cambria Math" panose="02040503050406030204" pitchFamily="18" charset="0"/>
                         <a:ea typeface="Calibri" panose="020F0502020204030204" pitchFamily="34" charset="0"/>
                         <a:cs typeface="Times New Roman" panose="02020603050405020304" pitchFamily="18" charset="0"/>
                       </a:rPr>
-                      <m:t>a</m:t>
+                      <m:t>𝑎</m:t>
                     </m:r>
                     <m:r>
-                      <a:rPr lang="ru-RU" sz="1200" kern="100">
+                      <a:rPr lang="ru-RU" sz="1200" b="0" i="1" kern="100">
                         <a:latin typeface="Cambria Math" panose="02040503050406030204" pitchFamily="18" charset="0"/>
                         <a:ea typeface="Calibri" panose="020F0502020204030204" pitchFamily="34" charset="0"/>
                         <a:cs typeface="Times New Roman" panose="02020603050405020304" pitchFamily="18" charset="0"/>
@@ -10684,18 +12017,15 @@
                       <m:t>₅, …, </m:t>
                     </m:r>
                     <m:r>
-                      <m:rPr>
-                        <m:sty m:val="p"/>
-                      </m:rPr>
-                      <a:rPr lang="ru-RU" sz="1200" kern="100">
+                      <a:rPr lang="ru-RU" sz="1200" b="0" i="1" kern="100">
                         <a:latin typeface="Cambria Math" panose="02040503050406030204" pitchFamily="18" charset="0"/>
                         <a:ea typeface="Calibri" panose="020F0502020204030204" pitchFamily="34" charset="0"/>
                         <a:cs typeface="Times New Roman" panose="02020603050405020304" pitchFamily="18" charset="0"/>
                       </a:rPr>
-                      <m:t>a</m:t>
+                      <m:t>𝑎</m:t>
                     </m:r>
                     <m:r>
-                      <a:rPr lang="ru-RU" sz="1200" kern="100">
+                      <a:rPr lang="ru-RU" sz="1200" b="0" i="1" kern="100">
                         <a:latin typeface="Cambria Math" panose="02040503050406030204" pitchFamily="18" charset="0"/>
                         <a:ea typeface="Calibri" panose="020F0502020204030204" pitchFamily="34" charset="0"/>
                         <a:cs typeface="Times New Roman" panose="02020603050405020304" pitchFamily="18" charset="0"/>
@@ -10705,16 +12035,24 @@
                   </m:oMath>
                 </a14:m>
                 <a:r>
+                  <a:rPr lang="ru-RU" sz="1200" i="1" kern="100" dirty="0">
+                    <a:latin typeface="Times New Roman" panose="02020603050405020304" pitchFamily="18" charset="0"/>
+                    <a:ea typeface="Calibri" panose="020F0502020204030204" pitchFamily="34" charset="0"/>
+                    <a:cs typeface="Times New Roman" panose="02020603050405020304" pitchFamily="18" charset="0"/>
+                  </a:rPr>
+                  <a:t>​</a:t>
+                </a:r>
+                <a:r>
                   <a:rPr lang="ru-RU" sz="1200" kern="100" dirty="0">
                     <a:latin typeface="Times New Roman" panose="02020603050405020304" pitchFamily="18" charset="0"/>
                     <a:ea typeface="Calibri" panose="020F0502020204030204" pitchFamily="34" charset="0"/>
                     <a:cs typeface="Times New Roman" panose="02020603050405020304" pitchFamily="18" charset="0"/>
                   </a:rPr>
-                  <a:t>​;</a:t>
+                  <a:t>;</a:t>
                 </a:r>
               </a:p>
               <a:p>
-                <a:pPr marL="2571750" lvl="5" indent="-285750" algn="just">
+                <a:pPr marL="742950" lvl="1" indent="-285750" algn="just">
                   <a:lnSpc>
                     <a:spcPct val="150000"/>
                   </a:lnSpc>
@@ -10733,59 +12071,129 @@
                 <a14:m>
                   <m:oMath xmlns:m="http://schemas.openxmlformats.org/officeDocument/2006/math">
                     <m:r>
-                      <a:rPr lang="ru-RU" sz="1200" kern="100">
+                      <a:rPr lang="ru-RU" sz="1200" i="1" kern="100">
                         <a:latin typeface="Cambria Math" panose="02040503050406030204" pitchFamily="18" charset="0"/>
                         <a:ea typeface="Calibri" panose="020F0502020204030204" pitchFamily="34" charset="0"/>
                         <a:cs typeface="Times New Roman" panose="02020603050405020304" pitchFamily="18" charset="0"/>
                       </a:rPr>
                       <m:t>(</m:t>
                     </m:r>
+                    <m:sSub>
+                      <m:sSubPr>
+                        <m:ctrlPr>
+                          <a:rPr lang="en-US" sz="1200" b="0" i="1" kern="100" smtClean="0">
+                            <a:latin typeface="Cambria Math" panose="02040503050406030204" pitchFamily="18" charset="0"/>
+                            <a:ea typeface="Calibri" panose="020F0502020204030204" pitchFamily="34" charset="0"/>
+                            <a:cs typeface="Times New Roman" panose="02020603050405020304" pitchFamily="18" charset="0"/>
+                          </a:rPr>
+                        </m:ctrlPr>
+                      </m:sSubPr>
+                      <m:e>
+                        <m:r>
+                          <a:rPr lang="ru-RU" sz="1200" i="1" kern="100">
+                            <a:latin typeface="Cambria Math" panose="02040503050406030204" pitchFamily="18" charset="0"/>
+                            <a:ea typeface="Calibri" panose="020F0502020204030204" pitchFamily="34" charset="0"/>
+                            <a:cs typeface="Times New Roman" panose="02020603050405020304" pitchFamily="18" charset="0"/>
+                          </a:rPr>
+                          <m:t>𝑎</m:t>
+                        </m:r>
+                      </m:e>
+                      <m:sub>
+                        <m:r>
+                          <a:rPr lang="en-US" sz="1200" b="0" i="1" kern="100" smtClean="0">
+                            <a:latin typeface="Cambria Math" panose="02040503050406030204" pitchFamily="18" charset="0"/>
+                            <a:ea typeface="Calibri" panose="020F0502020204030204" pitchFamily="34" charset="0"/>
+                            <a:cs typeface="Times New Roman" panose="02020603050405020304" pitchFamily="18" charset="0"/>
+                          </a:rPr>
+                          <m:t>𝑖</m:t>
+                        </m:r>
+                      </m:sub>
+                    </m:sSub>
                     <m:r>
-                      <a:rPr lang="ru-RU" sz="1200" kern="100">
+                      <a:rPr lang="ru-RU" sz="1200" i="1" kern="100">
                         <a:latin typeface="Cambria Math" panose="02040503050406030204" pitchFamily="18" charset="0"/>
                         <a:ea typeface="Calibri" panose="020F0502020204030204" pitchFamily="34" charset="0"/>
                         <a:cs typeface="Times New Roman" panose="02020603050405020304" pitchFamily="18" charset="0"/>
                       </a:rPr>
-                      <m:t>𝑎</m:t>
+                      <m:t>, </m:t>
                     </m:r>
+                    <m:sSub>
+                      <m:sSubPr>
+                        <m:ctrlPr>
+                          <a:rPr lang="en-US" sz="1200" b="0" i="1" kern="100" smtClean="0">
+                            <a:latin typeface="Cambria Math" panose="02040503050406030204" pitchFamily="18" charset="0"/>
+                            <a:ea typeface="Calibri" panose="020F0502020204030204" pitchFamily="34" charset="0"/>
+                            <a:cs typeface="Times New Roman" panose="02020603050405020304" pitchFamily="18" charset="0"/>
+                          </a:rPr>
+                        </m:ctrlPr>
+                      </m:sSubPr>
+                      <m:e>
+                        <m:r>
+                          <a:rPr lang="en-US" sz="1200" b="0" i="1" kern="100" smtClean="0">
+                            <a:latin typeface="Cambria Math" panose="02040503050406030204" pitchFamily="18" charset="0"/>
+                            <a:ea typeface="Calibri" panose="020F0502020204030204" pitchFamily="34" charset="0"/>
+                            <a:cs typeface="Times New Roman" panose="02020603050405020304" pitchFamily="18" charset="0"/>
+                          </a:rPr>
+                          <m:t> </m:t>
+                        </m:r>
+                        <m:r>
+                          <a:rPr lang="ru-RU" sz="1200" i="1" kern="100">
+                            <a:latin typeface="Cambria Math" panose="02040503050406030204" pitchFamily="18" charset="0"/>
+                            <a:ea typeface="Calibri" panose="020F0502020204030204" pitchFamily="34" charset="0"/>
+                            <a:cs typeface="Times New Roman" panose="02020603050405020304" pitchFamily="18" charset="0"/>
+                          </a:rPr>
+                          <m:t>𝑎</m:t>
+                        </m:r>
+                      </m:e>
+                      <m:sub>
+                        <m:r>
+                          <a:rPr lang="en-US" sz="1200" b="0" i="1" kern="100" smtClean="0">
+                            <a:latin typeface="Cambria Math" panose="02040503050406030204" pitchFamily="18" charset="0"/>
+                            <a:ea typeface="Calibri" panose="020F0502020204030204" pitchFamily="34" charset="0"/>
+                            <a:cs typeface="Times New Roman" panose="02020603050405020304" pitchFamily="18" charset="0"/>
+                          </a:rPr>
+                          <m:t>𝑖</m:t>
+                        </m:r>
+                        <m:r>
+                          <a:rPr lang="en-US" sz="1200" b="0" i="1" kern="100" smtClean="0">
+                            <a:latin typeface="Cambria Math" panose="02040503050406030204" pitchFamily="18" charset="0"/>
+                            <a:ea typeface="Calibri" panose="020F0502020204030204" pitchFamily="34" charset="0"/>
+                            <a:cs typeface="Times New Roman" panose="02020603050405020304" pitchFamily="18" charset="0"/>
+                          </a:rPr>
+                          <m:t>+1</m:t>
+                        </m:r>
+                      </m:sub>
+                    </m:sSub>
                     <m:r>
-                      <a:rPr lang="ru-RU" sz="1200" kern="100">
+                      <a:rPr lang="ru-RU" sz="1200" i="1" kern="100">
                         <a:latin typeface="Cambria Math" panose="02040503050406030204" pitchFamily="18" charset="0"/>
                         <a:ea typeface="Calibri" panose="020F0502020204030204" pitchFamily="34" charset="0"/>
                         <a:cs typeface="Times New Roman" panose="02020603050405020304" pitchFamily="18" charset="0"/>
                       </a:rPr>
-                      <m:t>ᵢ, </m:t>
-                    </m:r>
-                    <m:r>
-                      <a:rPr lang="ru-RU" sz="1200" kern="100">
-                        <a:latin typeface="Cambria Math" panose="02040503050406030204" pitchFamily="18" charset="0"/>
-                        <a:ea typeface="Calibri" panose="020F0502020204030204" pitchFamily="34" charset="0"/>
-                        <a:cs typeface="Times New Roman" panose="02020603050405020304" pitchFamily="18" charset="0"/>
-                      </a:rPr>
-                      <m:t>𝑎</m:t>
-                    </m:r>
-                    <m:r>
-                      <a:rPr lang="ru-RU" sz="1200" kern="100">
-                        <a:latin typeface="Cambria Math" panose="02040503050406030204" pitchFamily="18" charset="0"/>
-                        <a:ea typeface="Calibri" panose="020F0502020204030204" pitchFamily="34" charset="0"/>
-                        <a:cs typeface="Times New Roman" panose="02020603050405020304" pitchFamily="18" charset="0"/>
-                      </a:rPr>
-                      <m:t>ᵢ₊₁) </m:t>
+                      <m:t>) </m:t>
                     </m:r>
                   </m:oMath>
                 </a14:m>
+                <a:r>
+                  <a:rPr lang="ru-RU" sz="1200" i="1" kern="100" dirty="0">
+                    <a:latin typeface="Times New Roman" panose="02020603050405020304" pitchFamily="18" charset="0"/>
+                    <a:ea typeface="Calibri" panose="020F0502020204030204" pitchFamily="34" charset="0"/>
+                    <a:cs typeface="Times New Roman" panose="02020603050405020304" pitchFamily="18" charset="0"/>
+                  </a:rPr>
+                  <a:t> </a:t>
+                </a:r>
                 <a:r>
                   <a:rPr lang="ru-RU" sz="1200" kern="100" dirty="0">
                     <a:latin typeface="Times New Roman" panose="02020603050405020304" pitchFamily="18" charset="0"/>
                     <a:ea typeface="Calibri" panose="020F0502020204030204" pitchFamily="34" charset="0"/>
                     <a:cs typeface="Times New Roman" panose="02020603050405020304" pitchFamily="18" charset="0"/>
                   </a:rPr>
-                  <a:t> для всех нечётных </a:t>
+                  <a:t>для всех нечётных </a:t>
                 </a:r>
                 <a14:m>
                   <m:oMath xmlns:m="http://schemas.openxmlformats.org/officeDocument/2006/math">
                     <m:r>
-                      <a:rPr lang="ru-RU" sz="1200" kern="100">
+                      <a:rPr lang="ru-RU" sz="1200" i="1" kern="100" dirty="0" smtClean="0">
                         <a:latin typeface="Cambria Math" panose="02040503050406030204" pitchFamily="18" charset="0"/>
                         <a:ea typeface="Calibri" panose="020F0502020204030204" pitchFamily="34" charset="0"/>
                         <a:cs typeface="Times New Roman" panose="02020603050405020304" pitchFamily="18" charset="0"/>
@@ -10793,7 +12201,7 @@
                       <m:t>𝑖</m:t>
                     </m:r>
                     <m:r>
-                      <a:rPr lang="ru-RU" sz="1200" kern="100">
+                      <a:rPr lang="ru-RU" sz="1200" i="1" kern="100" dirty="0" smtClean="0">
                         <a:latin typeface="Cambria Math" panose="02040503050406030204" pitchFamily="18" charset="0"/>
                         <a:ea typeface="Calibri" panose="020F0502020204030204" pitchFamily="34" charset="0"/>
                         <a:cs typeface="Times New Roman" panose="02020603050405020304" pitchFamily="18" charset="0"/>
@@ -10801,7 +12209,7 @@
                       <m:t>=1,3,5,…,</m:t>
                     </m:r>
                     <m:r>
-                      <a:rPr lang="ru-RU" sz="1200" kern="100">
+                      <a:rPr lang="ru-RU" sz="1200" i="1" kern="100" dirty="0" smtClean="0">
                         <a:latin typeface="Cambria Math" panose="02040503050406030204" pitchFamily="18" charset="0"/>
                         <a:ea typeface="Calibri" panose="020F0502020204030204" pitchFamily="34" charset="0"/>
                         <a:cs typeface="Times New Roman" panose="02020603050405020304" pitchFamily="18" charset="0"/>
@@ -10809,7 +12217,7 @@
                       <m:t>𝑛</m:t>
                     </m:r>
                     <m:r>
-                      <a:rPr lang="ru-RU" sz="1200" kern="100">
+                      <a:rPr lang="ru-RU" sz="1200" i="1" kern="100" dirty="0" smtClean="0">
                         <a:latin typeface="Cambria Math" panose="02040503050406030204" pitchFamily="18" charset="0"/>
                         <a:ea typeface="Calibri" panose="020F0502020204030204" pitchFamily="34" charset="0"/>
                         <a:cs typeface="Times New Roman" panose="02020603050405020304" pitchFamily="18" charset="0"/>
@@ -10819,7 +12227,7 @@
                   </m:oMath>
                 </a14:m>
                 <a:r>
-                  <a:rPr lang="ru-RU" sz="1200" kern="100" dirty="0">
+                  <a:rPr lang="ru-RU" sz="1800" kern="100" dirty="0">
                     <a:latin typeface="Times New Roman" panose="02020603050405020304" pitchFamily="18" charset="0"/>
                     <a:ea typeface="Calibri" panose="020F0502020204030204" pitchFamily="34" charset="0"/>
                     <a:cs typeface="Times New Roman" panose="02020603050405020304" pitchFamily="18" charset="0"/>
@@ -10865,7 +12273,7 @@
               <a:blipFill>
                 <a:blip r:embed="rId2"/>
                 <a:stretch>
-                  <a:fillRect/>
+                  <a:fillRect l="-57" b="-625"/>
                 </a:stretch>
               </a:blipFill>
             </p:spPr>
@@ -11002,8 +12410,8 @@
           </a:p>
         </p:txBody>
       </p:sp>
-      <mc:AlternateContent xmlns:mc="http://schemas.openxmlformats.org/markup-compatibility/2006" xmlns:a14="http://schemas.microsoft.com/office/drawing/2010/main">
-        <mc:Choice Requires="a14">
+      <mc:AlternateContent xmlns:mc="http://schemas.openxmlformats.org/markup-compatibility/2006">
+        <mc:Choice xmlns:a14="http://schemas.microsoft.com/office/drawing/2010/main" Requires="a14">
           <p:sp>
             <p:nvSpPr>
               <p:cNvPr id="3" name="Объект 2">
@@ -11025,7 +12433,7 @@
               <a:bodyPr/>
               <a:lstStyle/>
               <a:p>
-                <a:pPr marL="742950" lvl="1" indent="-285750" algn="just">
+                <a:pPr marL="742950" lvl="1" indent="-285750">
                   <a:lnSpc>
                     <a:spcPct val="150000"/>
                   </a:lnSpc>
@@ -11118,29 +12526,105 @@
                       </m:den>
                     </m:f>
                     <m:r>
-                      <a:rPr lang="ru-RU" sz="1800" i="1">
-                        <a:effectLst/>
+                      <a:rPr lang="en-US" sz="1800" i="1" dirty="0">
                         <a:latin typeface="Cambria Math" panose="02040503050406030204" pitchFamily="18" charset="0"/>
-                        <a:ea typeface="Times New Roman" panose="02020603050405020304" pitchFamily="18" charset="0"/>
                       </a:rPr>
-                      <m:t>(</m:t>
+                      <m:t>·</m:t>
                     </m:r>
+                    <m:d>
+                      <m:dPr>
+                        <m:ctrlPr>
+                          <a:rPr lang="ru-RU" sz="1800" i="1">
+                            <a:effectLst/>
+                            <a:latin typeface="Cambria Math" panose="02040503050406030204" pitchFamily="18" charset="0"/>
+                            <a:ea typeface="Times New Roman" panose="02020603050405020304" pitchFamily="18" charset="0"/>
+                          </a:rPr>
+                        </m:ctrlPr>
+                      </m:dPr>
+                      <m:e>
+                        <m:func>
+                          <m:funcPr>
+                            <m:ctrlPr>
+                              <a:rPr lang="en-US" sz="1800" b="0" i="1" smtClean="0">
+                                <a:effectLst/>
+                                <a:latin typeface="Cambria Math" panose="02040503050406030204" pitchFamily="18" charset="0"/>
+                                <a:ea typeface="Times New Roman" panose="02020603050405020304" pitchFamily="18" charset="0"/>
+                              </a:rPr>
+                            </m:ctrlPr>
+                          </m:funcPr>
+                          <m:fName>
+                            <m:sSub>
+                              <m:sSubPr>
+                                <m:ctrlPr>
+                                  <a:rPr lang="en-US" sz="1800" b="0" i="1" smtClean="0">
+                                    <a:effectLst/>
+                                    <a:latin typeface="Cambria Math" panose="02040503050406030204" pitchFamily="18" charset="0"/>
+                                    <a:ea typeface="Times New Roman" panose="02020603050405020304" pitchFamily="18" charset="0"/>
+                                  </a:rPr>
+                                </m:ctrlPr>
+                              </m:sSubPr>
+                              <m:e>
+                                <m:r>
+                                  <a:rPr lang="ru-RU" sz="1800" i="1">
+                                    <a:effectLst/>
+                                    <a:latin typeface="Cambria Math" panose="02040503050406030204" pitchFamily="18" charset="0"/>
+                                    <a:ea typeface="Times New Roman" panose="02020603050405020304" pitchFamily="18" charset="0"/>
+                                  </a:rPr>
+                                  <m:t>𝑙𝑜𝑔</m:t>
+                                </m:r>
+                              </m:e>
+                              <m:sub>
+                                <m:r>
+                                  <a:rPr lang="en-US" sz="1800" b="0" i="1" smtClean="0">
+                                    <a:effectLst/>
+                                    <a:latin typeface="Cambria Math" panose="02040503050406030204" pitchFamily="18" charset="0"/>
+                                    <a:ea typeface="Times New Roman" panose="02020603050405020304" pitchFamily="18" charset="0"/>
+                                  </a:rPr>
+                                  <m:t>2</m:t>
+                                </m:r>
+                              </m:sub>
+                            </m:sSub>
+                          </m:fName>
+                          <m:e>
+                            <m:r>
+                              <a:rPr lang="en-US" sz="1800" b="0" i="1" smtClean="0">
+                                <a:effectLst/>
+                                <a:latin typeface="Cambria Math" panose="02040503050406030204" pitchFamily="18" charset="0"/>
+                                <a:ea typeface="Times New Roman" panose="02020603050405020304" pitchFamily="18" charset="0"/>
+                              </a:rPr>
+                              <m:t>𝑛</m:t>
+                            </m:r>
+                          </m:e>
+                        </m:func>
+                        <m:r>
+                          <a:rPr lang="ru-RU" sz="1800" i="1">
+                            <a:effectLst/>
+                            <a:latin typeface="Cambria Math" panose="02040503050406030204" pitchFamily="18" charset="0"/>
+                            <a:ea typeface="Times New Roman" panose="02020603050405020304" pitchFamily="18" charset="0"/>
+                          </a:rPr>
+                          <m:t>−1</m:t>
+                        </m:r>
+                      </m:e>
+                    </m:d>
                     <m:r>
                       <a:rPr lang="ru-RU" sz="1800" i="1">
                         <a:effectLst/>
                         <a:latin typeface="Cambria Math" panose="02040503050406030204" pitchFamily="18" charset="0"/>
                         <a:ea typeface="Times New Roman" panose="02020603050405020304" pitchFamily="18" charset="0"/>
                       </a:rPr>
-                      <m:t>𝑙𝑜𝑔</m:t>
+                      <m:t>+1,</m:t>
                     </m:r>
-                    <m:r>
-                      <a:rPr lang="ru-RU" sz="1800" i="1" smtClean="0">
-                        <a:effectLst/>
-                        <a:latin typeface="Cambria Math" panose="02040503050406030204" pitchFamily="18" charset="0"/>
-                        <a:ea typeface="Times New Roman" panose="02020603050405020304" pitchFamily="18" charset="0"/>
-                      </a:rPr>
-                      <m:t>₂</m:t>
-                    </m:r>
+                  </m:oMath>
+                </a14:m>
+                <a:br>
+                  <a:rPr lang="en-US" sz="1800" i="1" dirty="0">
+                    <a:effectLst/>
+                    <a:latin typeface="Cambria Math" panose="02040503050406030204" pitchFamily="18" charset="0"/>
+                    <a:ea typeface="Times New Roman" panose="02020603050405020304" pitchFamily="18" charset="0"/>
+                  </a:rPr>
+                </a:br>
+                <a14:m>
+                  <m:oMath xmlns:m="http://schemas.openxmlformats.org/officeDocument/2006/math">
                     <m:r>
                       <a:rPr lang="ru-RU" sz="1800" i="1">
                         <a:effectLst/>
@@ -11148,22 +12632,6 @@
                         <a:ea typeface="Times New Roman" panose="02020603050405020304" pitchFamily="18" charset="0"/>
                       </a:rPr>
                       <m:t> </m:t>
-                    </m:r>
-                    <m:r>
-                      <a:rPr lang="ru-RU" sz="1800" i="1">
-                        <a:effectLst/>
-                        <a:latin typeface="Cambria Math" panose="02040503050406030204" pitchFamily="18" charset="0"/>
-                        <a:ea typeface="Times New Roman" panose="02020603050405020304" pitchFamily="18" charset="0"/>
-                      </a:rPr>
-                      <m:t>𝑛</m:t>
-                    </m:r>
-                    <m:r>
-                      <a:rPr lang="ru-RU" sz="1800" i="1">
-                        <a:effectLst/>
-                        <a:latin typeface="Cambria Math" panose="02040503050406030204" pitchFamily="18" charset="0"/>
-                        <a:ea typeface="Times New Roman" panose="02020603050405020304" pitchFamily="18" charset="0"/>
-                      </a:rPr>
-                      <m:t>−1)+1, </m:t>
                     </m:r>
                   </m:oMath>
                 </a14:m>
@@ -11240,7 +12708,21 @@
                         <a:latin typeface="Cambria Math" panose="02040503050406030204" pitchFamily="18" charset="0"/>
                         <a:ea typeface="Times New Roman" panose="02020603050405020304" pitchFamily="18" charset="0"/>
                       </a:rPr>
-                      <m:t>𝑛𝑙𝑜𝑔𝑛</m:t>
+                      <m:t>𝑛</m:t>
+                    </m:r>
+                    <m:r>
+                      <a:rPr lang="en-US" sz="1800" i="1" dirty="0">
+                        <a:latin typeface="Cambria Math" panose="02040503050406030204" pitchFamily="18" charset="0"/>
+                      </a:rPr>
+                      <m:t>·</m:t>
+                    </m:r>
+                    <m:r>
+                      <a:rPr lang="ru-RU" sz="1800" i="1">
+                        <a:effectLst/>
+                        <a:latin typeface="Cambria Math" panose="02040503050406030204" pitchFamily="18" charset="0"/>
+                        <a:ea typeface="Times New Roman" panose="02020603050405020304" pitchFamily="18" charset="0"/>
+                      </a:rPr>
+                      <m:t>𝑙𝑜𝑔𝑛</m:t>
                     </m:r>
                     <m:r>
                       <a:rPr lang="ru-RU" sz="1800" b="1" i="1">
@@ -11260,14 +12742,14 @@
                     </m:r>
                   </m:oMath>
                 </a14:m>
-                <a:endParaRPr lang="ru-RU" sz="1800" dirty="0">
+                <a:endParaRPr lang="ru-RU" sz="1800" i="1" dirty="0">
                   <a:effectLst/>
                   <a:latin typeface="Times New Roman" panose="02020603050405020304" pitchFamily="18" charset="0"/>
                   <a:ea typeface="Times New Roman" panose="02020603050405020304" pitchFamily="18" charset="0"/>
                 </a:endParaRPr>
               </a:p>
               <a:p>
-                <a:pPr marL="742950" lvl="1" indent="-285750" algn="just">
+                <a:pPr marL="742950" lvl="1" indent="-285750">
                   <a:lnSpc>
                     <a:spcPct val="150000"/>
                   </a:lnSpc>
@@ -11361,47 +12843,68 @@
                             <a:latin typeface="Cambria Math" panose="02040503050406030204" pitchFamily="18" charset="0"/>
                             <a:ea typeface="Times New Roman" panose="02020603050405020304" pitchFamily="18" charset="0"/>
                           </a:rPr>
-                          <m:t>𝑛𝑙𝑜</m:t>
+                          <m:t>𝑛</m:t>
                         </m:r>
-                        <m:sSup>
-                          <m:sSupPr>
+                        <m:r>
+                          <a:rPr lang="en-US" sz="1800" i="1" dirty="0">
+                            <a:latin typeface="Cambria Math" panose="02040503050406030204" pitchFamily="18" charset="0"/>
+                          </a:rPr>
+                          <m:t>·</m:t>
+                        </m:r>
+                        <m:func>
+                          <m:funcPr>
                             <m:ctrlPr>
-                              <a:rPr lang="ru-RU" sz="1800" i="1">
+                              <a:rPr lang="en-US" sz="1800" b="0" i="1" smtClean="0">
                                 <a:effectLst/>
                                 <a:latin typeface="Cambria Math" panose="02040503050406030204" pitchFamily="18" charset="0"/>
                                 <a:ea typeface="Times New Roman" panose="02020603050405020304" pitchFamily="18" charset="0"/>
                               </a:rPr>
                             </m:ctrlPr>
-                          </m:sSupPr>
+                          </m:funcPr>
+                          <m:fName>
+                            <m:sSub>
+                              <m:sSubPr>
+                                <m:ctrlPr>
+                                  <a:rPr lang="en-US" sz="1800" b="0" i="1" smtClean="0">
+                                    <a:effectLst/>
+                                    <a:latin typeface="Cambria Math" panose="02040503050406030204" pitchFamily="18" charset="0"/>
+                                    <a:ea typeface="Times New Roman" panose="02020603050405020304" pitchFamily="18" charset="0"/>
+                                  </a:rPr>
+                                </m:ctrlPr>
+                              </m:sSubPr>
+                              <m:e>
+                                <m:r>
+                                  <a:rPr lang="ru-RU" sz="1800" i="1">
+                                    <a:effectLst/>
+                                    <a:latin typeface="Cambria Math" panose="02040503050406030204" pitchFamily="18" charset="0"/>
+                                    <a:ea typeface="Times New Roman" panose="02020603050405020304" pitchFamily="18" charset="0"/>
+                                  </a:rPr>
+                                  <m:t>𝑙𝑜𝑔</m:t>
+                                </m:r>
+                              </m:e>
+                              <m:sub>
+                                <m:r>
+                                  <a:rPr lang="en-US" sz="1800" b="0" i="1" smtClean="0">
+                                    <a:effectLst/>
+                                    <a:latin typeface="Cambria Math" panose="02040503050406030204" pitchFamily="18" charset="0"/>
+                                    <a:ea typeface="Times New Roman" panose="02020603050405020304" pitchFamily="18" charset="0"/>
+                                  </a:rPr>
+                                  <m:t>2</m:t>
+                                </m:r>
+                              </m:sub>
+                            </m:sSub>
+                          </m:fName>
                           <m:e>
                             <m:r>
-                              <a:rPr lang="ru-RU" sz="1800" i="1">
+                              <a:rPr lang="en-US" sz="1800" b="0" i="1" smtClean="0">
                                 <a:effectLst/>
                                 <a:latin typeface="Cambria Math" panose="02040503050406030204" pitchFamily="18" charset="0"/>
                                 <a:ea typeface="Times New Roman" panose="02020603050405020304" pitchFamily="18" charset="0"/>
                               </a:rPr>
-                              <m:t>𝑔</m:t>
+                              <m:t>𝑛</m:t>
                             </m:r>
                           </m:e>
-                          <m:sup>
-                            <m:r>
-                              <a:rPr lang="ru-RU" sz="1800" i="1">
-                                <a:effectLst/>
-                                <a:latin typeface="Cambria Math" panose="02040503050406030204" pitchFamily="18" charset="0"/>
-                                <a:ea typeface="Times New Roman" panose="02020603050405020304" pitchFamily="18" charset="0"/>
-                              </a:rPr>
-                              <m:t>2</m:t>
-                            </m:r>
-                          </m:sup>
-                        </m:sSup>
-                        <m:r>
-                          <a:rPr lang="ru-RU" sz="1800" i="1">
-                            <a:effectLst/>
-                            <a:latin typeface="Cambria Math" panose="02040503050406030204" pitchFamily="18" charset="0"/>
-                            <a:ea typeface="Times New Roman" panose="02020603050405020304" pitchFamily="18" charset="0"/>
-                          </a:rPr>
-                          <m:t>𝑛</m:t>
-                        </m:r>
+                        </m:func>
                         <m:d>
                           <m:dPr>
                             <m:ctrlPr>
@@ -11413,53 +12916,63 @@
                             </m:ctrlPr>
                           </m:dPr>
                           <m:e>
-                            <m:r>
-                              <a:rPr lang="ru-RU" sz="1800" i="1">
-                                <a:effectLst/>
-                                <a:latin typeface="Cambria Math" panose="02040503050406030204" pitchFamily="18" charset="0"/>
-                                <a:ea typeface="Times New Roman" panose="02020603050405020304" pitchFamily="18" charset="0"/>
-                              </a:rPr>
-                              <m:t>𝑙𝑜</m:t>
-                            </m:r>
-                            <m:sSup>
-                              <m:sSupPr>
+                            <m:func>
+                              <m:funcPr>
                                 <m:ctrlPr>
-                                  <a:rPr lang="ru-RU" sz="1800" i="1">
+                                  <a:rPr lang="en-US" sz="1800" b="0" i="1" smtClean="0">
                                     <a:effectLst/>
                                     <a:latin typeface="Cambria Math" panose="02040503050406030204" pitchFamily="18" charset="0"/>
                                     <a:ea typeface="Times New Roman" panose="02020603050405020304" pitchFamily="18" charset="0"/>
                                   </a:rPr>
                                 </m:ctrlPr>
-                              </m:sSupPr>
+                              </m:funcPr>
+                              <m:fName>
+                                <m:sSub>
+                                  <m:sSubPr>
+                                    <m:ctrlPr>
+                                      <a:rPr lang="en-US" sz="1800" b="0" i="1" smtClean="0">
+                                        <a:effectLst/>
+                                        <a:latin typeface="Cambria Math" panose="02040503050406030204" pitchFamily="18" charset="0"/>
+                                        <a:ea typeface="Times New Roman" panose="02020603050405020304" pitchFamily="18" charset="0"/>
+                                      </a:rPr>
+                                    </m:ctrlPr>
+                                  </m:sSubPr>
+                                  <m:e>
+                                    <m:r>
+                                      <m:rPr>
+                                        <m:sty m:val="p"/>
+                                      </m:rPr>
+                                      <a:rPr lang="ru-RU" sz="1800" i="0">
+                                        <a:effectLst/>
+                                        <a:latin typeface="Cambria Math" panose="02040503050406030204" pitchFamily="18" charset="0"/>
+                                        <a:ea typeface="Times New Roman" panose="02020603050405020304" pitchFamily="18" charset="0"/>
+                                      </a:rPr>
+                                      <m:t>log</m:t>
+                                    </m:r>
+                                  </m:e>
+                                  <m:sub>
+                                    <m:r>
+                                      <a:rPr lang="en-US" sz="1800" b="0" i="1" smtClean="0">
+                                        <a:effectLst/>
+                                        <a:latin typeface="Cambria Math" panose="02040503050406030204" pitchFamily="18" charset="0"/>
+                                        <a:ea typeface="Times New Roman" panose="02020603050405020304" pitchFamily="18" charset="0"/>
+                                      </a:rPr>
+                                      <m:t>2</m:t>
+                                    </m:r>
+                                  </m:sub>
+                                </m:sSub>
+                              </m:fName>
                               <m:e>
                                 <m:r>
-                                  <a:rPr lang="ru-RU" sz="1800" i="1">
+                                  <a:rPr lang="en-US" sz="1800" b="0" i="1" smtClean="0">
                                     <a:effectLst/>
                                     <a:latin typeface="Cambria Math" panose="02040503050406030204" pitchFamily="18" charset="0"/>
                                     <a:ea typeface="Times New Roman" panose="02020603050405020304" pitchFamily="18" charset="0"/>
                                   </a:rPr>
-                                  <m:t>𝑔</m:t>
+                                  <m:t>𝑛</m:t>
                                 </m:r>
                               </m:e>
-                              <m:sup>
-                                <m:r>
-                                  <a:rPr lang="ru-RU" sz="1800" i="1">
-                                    <a:effectLst/>
-                                    <a:latin typeface="Cambria Math" panose="02040503050406030204" pitchFamily="18" charset="0"/>
-                                    <a:ea typeface="Times New Roman" panose="02020603050405020304" pitchFamily="18" charset="0"/>
-                                  </a:rPr>
-                                  <m:t>2</m:t>
-                                </m:r>
-                              </m:sup>
-                            </m:sSup>
-                            <m:r>
-                              <a:rPr lang="ru-RU" sz="1800" i="1">
-                                <a:effectLst/>
-                                <a:latin typeface="Cambria Math" panose="02040503050406030204" pitchFamily="18" charset="0"/>
-                                <a:ea typeface="Times New Roman" panose="02020603050405020304" pitchFamily="18" charset="0"/>
-                              </a:rPr>
-                              <m:t>𝑛</m:t>
-                            </m:r>
+                            </m:func>
                             <m:r>
                               <a:rPr lang="ru-RU" sz="1800" i="1">
                                 <a:effectLst/>
@@ -11584,12 +13097,10 @@
                       <m:t>𝑛</m:t>
                     </m:r>
                     <m:r>
-                      <a:rPr lang="en-US" sz="1800" b="0" i="1" smtClean="0">
-                        <a:effectLst/>
+                      <a:rPr lang="en-US" sz="1800" i="1" dirty="0">
                         <a:latin typeface="Cambria Math" panose="02040503050406030204" pitchFamily="18" charset="0"/>
-                        <a:ea typeface="Times New Roman" panose="02020603050405020304" pitchFamily="18" charset="0"/>
                       </a:rPr>
-                      <m:t> </m:t>
+                      <m:t>·</m:t>
                     </m:r>
                     <m:r>
                       <a:rPr lang="ru-RU" sz="1800" i="1">
@@ -11656,7 +13167,7 @@
                     </m:r>
                   </m:oMath>
                 </a14:m>
-                <a:endParaRPr lang="ru-RU" sz="1800" dirty="0">
+                <a:endParaRPr lang="ru-RU" sz="1800" i="1" dirty="0">
                   <a:effectLst/>
                   <a:latin typeface="Times New Roman" panose="02020603050405020304" pitchFamily="18" charset="0"/>
                   <a:ea typeface="Times New Roman" panose="02020603050405020304" pitchFamily="18" charset="0"/>
@@ -11770,52 +13281,65 @@
                         </m:ctrlPr>
                       </m:fPr>
                       <m:num>
-                        <m:r>
-                          <a:rPr lang="ru-RU" sz="1800" i="1">
-                            <a:effectLst/>
-                            <a:latin typeface="Cambria Math" panose="02040503050406030204" pitchFamily="18" charset="0"/>
-                            <a:ea typeface="Times New Roman" panose="02020603050405020304" pitchFamily="18" charset="0"/>
-                          </a:rPr>
-                          <m:t>𝑙𝑜</m:t>
-                        </m:r>
-                        <m:sSup>
-                          <m:sSupPr>
+                        <m:func>
+                          <m:funcPr>
                             <m:ctrlPr>
-                              <a:rPr lang="ru-RU" sz="1800" i="1">
+                              <a:rPr lang="en-US" sz="1800" b="0" i="1" smtClean="0">
                                 <a:effectLst/>
                                 <a:latin typeface="Cambria Math" panose="02040503050406030204" pitchFamily="18" charset="0"/>
                                 <a:ea typeface="Times New Roman" panose="02020603050405020304" pitchFamily="18" charset="0"/>
                               </a:rPr>
                             </m:ctrlPr>
-                          </m:sSupPr>
+                          </m:funcPr>
+                          <m:fName>
+                            <m:sSub>
+                              <m:sSubPr>
+                                <m:ctrlPr>
+                                  <a:rPr lang="en-US" sz="1800" b="0" i="1" smtClean="0">
+                                    <a:effectLst/>
+                                    <a:latin typeface="Cambria Math" panose="02040503050406030204" pitchFamily="18" charset="0"/>
+                                    <a:ea typeface="Times New Roman" panose="02020603050405020304" pitchFamily="18" charset="0"/>
+                                  </a:rPr>
+                                </m:ctrlPr>
+                              </m:sSubPr>
+                              <m:e>
+                                <m:r>
+                                  <a:rPr lang="ru-RU" sz="1800" i="1">
+                                    <a:effectLst/>
+                                    <a:latin typeface="Cambria Math" panose="02040503050406030204" pitchFamily="18" charset="0"/>
+                                    <a:ea typeface="Times New Roman" panose="02020603050405020304" pitchFamily="18" charset="0"/>
+                                  </a:rPr>
+                                  <m:t>𝑙𝑜𝑔</m:t>
+                                </m:r>
+                              </m:e>
+                              <m:sub>
+                                <m:r>
+                                  <a:rPr lang="en-US" sz="1800" b="0" i="1" smtClean="0">
+                                    <a:effectLst/>
+                                    <a:latin typeface="Cambria Math" panose="02040503050406030204" pitchFamily="18" charset="0"/>
+                                    <a:ea typeface="Times New Roman" panose="02020603050405020304" pitchFamily="18" charset="0"/>
+                                  </a:rPr>
+                                  <m:t>2</m:t>
+                                </m:r>
+                              </m:sub>
+                            </m:sSub>
+                          </m:fName>
                           <m:e>
                             <m:r>
-                              <a:rPr lang="ru-RU" sz="1800" i="1">
+                              <a:rPr lang="en-US" sz="1800" b="0" i="1" smtClean="0">
                                 <a:effectLst/>
                                 <a:latin typeface="Cambria Math" panose="02040503050406030204" pitchFamily="18" charset="0"/>
                                 <a:ea typeface="Times New Roman" panose="02020603050405020304" pitchFamily="18" charset="0"/>
                               </a:rPr>
-                              <m:t>𝑔</m:t>
+                              <m:t>𝑛</m:t>
                             </m:r>
                           </m:e>
-                          <m:sup>
-                            <m:r>
-                              <a:rPr lang="ru-RU" sz="1800" i="1">
-                                <a:effectLst/>
-                                <a:latin typeface="Cambria Math" panose="02040503050406030204" pitchFamily="18" charset="0"/>
-                                <a:ea typeface="Times New Roman" panose="02020603050405020304" pitchFamily="18" charset="0"/>
-                              </a:rPr>
-                              <m:t>2</m:t>
-                            </m:r>
-                          </m:sup>
-                        </m:sSup>
+                        </m:func>
                         <m:r>
-                          <a:rPr lang="ru-RU" sz="1800" i="1">
-                            <a:effectLst/>
+                          <a:rPr lang="en-US" sz="1800" i="1" dirty="0">
                             <a:latin typeface="Cambria Math" panose="02040503050406030204" pitchFamily="18" charset="0"/>
-                            <a:ea typeface="Times New Roman" panose="02020603050405020304" pitchFamily="18" charset="0"/>
                           </a:rPr>
-                          <m:t>𝑛</m:t>
+                          <m:t>·</m:t>
                         </m:r>
                         <m:d>
                           <m:dPr>
@@ -11828,53 +13352,60 @@
                             </m:ctrlPr>
                           </m:dPr>
                           <m:e>
-                            <m:r>
-                              <a:rPr lang="ru-RU" sz="1800" i="1">
-                                <a:effectLst/>
-                                <a:latin typeface="Cambria Math" panose="02040503050406030204" pitchFamily="18" charset="0"/>
-                                <a:ea typeface="Times New Roman" panose="02020603050405020304" pitchFamily="18" charset="0"/>
-                              </a:rPr>
-                              <m:t>𝑙𝑜</m:t>
-                            </m:r>
-                            <m:sSup>
-                              <m:sSupPr>
+                            <m:func>
+                              <m:funcPr>
                                 <m:ctrlPr>
-                                  <a:rPr lang="ru-RU" sz="1800" i="1">
+                                  <a:rPr lang="en-US" sz="1800" b="0" i="1" smtClean="0">
                                     <a:effectLst/>
                                     <a:latin typeface="Cambria Math" panose="02040503050406030204" pitchFamily="18" charset="0"/>
                                     <a:ea typeface="Times New Roman" panose="02020603050405020304" pitchFamily="18" charset="0"/>
                                   </a:rPr>
                                 </m:ctrlPr>
-                              </m:sSupPr>
+                              </m:funcPr>
+                              <m:fName>
+                                <m:sSub>
+                                  <m:sSubPr>
+                                    <m:ctrlPr>
+                                      <a:rPr lang="en-US" sz="1800" b="0" i="1" smtClean="0">
+                                        <a:effectLst/>
+                                        <a:latin typeface="Cambria Math" panose="02040503050406030204" pitchFamily="18" charset="0"/>
+                                        <a:ea typeface="Times New Roman" panose="02020603050405020304" pitchFamily="18" charset="0"/>
+                                      </a:rPr>
+                                    </m:ctrlPr>
+                                  </m:sSubPr>
+                                  <m:e>
+                                    <m:r>
+                                      <a:rPr lang="ru-RU" sz="1800" i="1">
+                                        <a:effectLst/>
+                                        <a:latin typeface="Cambria Math" panose="02040503050406030204" pitchFamily="18" charset="0"/>
+                                        <a:ea typeface="Times New Roman" panose="02020603050405020304" pitchFamily="18" charset="0"/>
+                                      </a:rPr>
+                                      <m:t>𝑙𝑜𝑔</m:t>
+                                    </m:r>
+                                  </m:e>
+                                  <m:sub>
+                                    <m:r>
+                                      <a:rPr lang="en-US" sz="1800" b="0" i="1" smtClean="0">
+                                        <a:effectLst/>
+                                        <a:latin typeface="Cambria Math" panose="02040503050406030204" pitchFamily="18" charset="0"/>
+                                        <a:ea typeface="Times New Roman" panose="02020603050405020304" pitchFamily="18" charset="0"/>
+                                      </a:rPr>
+                                      <m:t>2</m:t>
+                                    </m:r>
+                                  </m:sub>
+                                </m:sSub>
+                              </m:fName>
                               <m:e>
                                 <m:r>
-                                  <a:rPr lang="ru-RU" sz="1800" i="1">
+                                  <a:rPr lang="en-US" sz="1800" b="0" i="1" smtClean="0">
                                     <a:effectLst/>
                                     <a:latin typeface="Cambria Math" panose="02040503050406030204" pitchFamily="18" charset="0"/>
                                     <a:ea typeface="Times New Roman" panose="02020603050405020304" pitchFamily="18" charset="0"/>
                                   </a:rPr>
-                                  <m:t>𝑔</m:t>
+                                  <m:t>𝑛</m:t>
                                 </m:r>
                               </m:e>
-                              <m:sup>
-                                <m:r>
-                                  <a:rPr lang="ru-RU" sz="1800" i="1">
-                                    <a:effectLst/>
-                                    <a:latin typeface="Cambria Math" panose="02040503050406030204" pitchFamily="18" charset="0"/>
-                                    <a:ea typeface="Times New Roman" panose="02020603050405020304" pitchFamily="18" charset="0"/>
-                                  </a:rPr>
-                                  <m:t>2</m:t>
-                                </m:r>
-                              </m:sup>
-                            </m:sSup>
-                            <m:r>
-                              <a:rPr lang="ru-RU" sz="1800" i="1">
-                                <a:effectLst/>
-                                <a:latin typeface="Cambria Math" panose="02040503050406030204" pitchFamily="18" charset="0"/>
-                                <a:ea typeface="Times New Roman" panose="02020603050405020304" pitchFamily="18" charset="0"/>
-                              </a:rPr>
-                              <m:t>𝑛</m:t>
-                            </m:r>
+                            </m:func>
                             <m:r>
                               <a:rPr lang="ru-RU" sz="1800" i="1">
                                 <a:effectLst/>
@@ -11913,7 +13444,7 @@
                       <m:t>𝛩</m:t>
                     </m:r>
                     <m:r>
-                      <a:rPr lang="ru-RU" sz="1800" i="1">
+                      <a:rPr lang="en-US" sz="1800" b="0" i="1" smtClean="0">
                         <a:latin typeface="Cambria Math" panose="02040503050406030204" pitchFamily="18" charset="0"/>
                         <a:ea typeface="Times New Roman" panose="02020603050405020304" pitchFamily="18" charset="0"/>
                       </a:rPr>
@@ -11940,14 +13471,11 @@
                           </m:sSupPr>
                           <m:e>
                             <m:r>
-                              <m:rPr>
-                                <m:sty m:val="p"/>
-                              </m:rPr>
-                              <a:rPr lang="ru-RU" sz="1800" i="0">
+                              <a:rPr lang="ru-RU" sz="1800" i="1">
                                 <a:latin typeface="Cambria Math" panose="02040503050406030204" pitchFamily="18" charset="0"/>
                                 <a:ea typeface="Times New Roman" panose="02020603050405020304" pitchFamily="18" charset="0"/>
                               </a:rPr>
-                              <m:t>log</m:t>
+                              <m:t>𝑙𝑜𝑔</m:t>
                             </m:r>
                           </m:e>
                           <m:sup>
@@ -11972,7 +13500,7 @@
                       </m:e>
                     </m:func>
                     <m:r>
-                      <a:rPr lang="ru-RU" sz="1800" b="1" i="1">
+                      <a:rPr lang="en-US" sz="1800" b="1" i="1" smtClean="0">
                         <a:latin typeface="Cambria Math" panose="02040503050406030204" pitchFamily="18" charset="0"/>
                         <a:ea typeface="Times New Roman" panose="02020603050405020304" pitchFamily="18" charset="0"/>
                       </a:rPr>
@@ -11987,12 +13515,12 @@
                     </m:r>
                   </m:oMath>
                 </a14:m>
-                <a:endParaRPr lang="ru-RU" dirty="0"/>
+                <a:endParaRPr lang="ru-RU" i="1" dirty="0"/>
               </a:p>
             </p:txBody>
           </p:sp>
         </mc:Choice>
-        <mc:Fallback xmlns="">
+        <mc:Fallback>
           <p:sp>
             <p:nvSpPr>
               <p:cNvPr id="3" name="Объект 2">
@@ -12199,7 +13727,7 @@
                 <a:latin typeface="Times New Roman" panose="02020603050405020304" pitchFamily="18" charset="0"/>
                 <a:cs typeface="Times New Roman" panose="02020603050405020304" pitchFamily="18" charset="0"/>
               </a:rPr>
-              <a:t>метод раскрутки рекуррентных соотношений;</a:t>
+              <a:t>Метод раскрутки рекуррентных соотношений;</a:t>
             </a:r>
             <a:endParaRPr lang="ru-RU" sz="1400" dirty="0">
               <a:latin typeface="Times New Roman" panose="02020603050405020304" pitchFamily="18" charset="0"/>
@@ -12213,11 +13741,18 @@
             </a:pPr>
             <a:r>
               <a:rPr lang="ru-RU" sz="1400" dirty="0">
+                <a:latin typeface="Times New Roman" panose="02020603050405020304" pitchFamily="18" charset="0"/>
+                <a:cs typeface="Times New Roman" panose="02020603050405020304" pitchFamily="18" charset="0"/>
+              </a:rPr>
+              <a:t>М</a:t>
+            </a:r>
+            <a:r>
+              <a:rPr lang="ru-RU" sz="1400" dirty="0">
                 <a:effectLst/>
                 <a:latin typeface="Times New Roman" panose="02020603050405020304" pitchFamily="18" charset="0"/>
                 <a:cs typeface="Times New Roman" panose="02020603050405020304" pitchFamily="18" charset="0"/>
               </a:rPr>
-              <a:t>мастер-теорема;</a:t>
+              <a:t>астер-теорема;</a:t>
             </a:r>
             <a:endParaRPr lang="ru-RU" sz="1400" dirty="0">
               <a:latin typeface="Times New Roman" panose="02020603050405020304" pitchFamily="18" charset="0"/>
@@ -12231,11 +13766,18 @@
             </a:pPr>
             <a:r>
               <a:rPr lang="ru-RU" sz="1400" dirty="0">
+                <a:latin typeface="Times New Roman" panose="02020603050405020304" pitchFamily="18" charset="0"/>
+                <a:cs typeface="Times New Roman" panose="02020603050405020304" pitchFamily="18" charset="0"/>
+              </a:rPr>
+              <a:t>М</a:t>
+            </a:r>
+            <a:r>
+              <a:rPr lang="ru-RU" sz="1400" dirty="0">
                 <a:effectLst/>
                 <a:latin typeface="Times New Roman" panose="02020603050405020304" pitchFamily="18" charset="0"/>
                 <a:cs typeface="Times New Roman" panose="02020603050405020304" pitchFamily="18" charset="0"/>
               </a:rPr>
-              <a:t>метод Акра–</a:t>
+              <a:t>етод Акра–</a:t>
             </a:r>
             <a:r>
               <a:rPr lang="ru-RU" sz="1400" dirty="0" err="1">
@@ -12265,11 +13807,18 @@
             </a:pPr>
             <a:r>
               <a:rPr lang="ru-RU" sz="1400" dirty="0">
+                <a:latin typeface="Times New Roman" panose="02020603050405020304" pitchFamily="18" charset="0"/>
+                <a:cs typeface="Times New Roman" panose="02020603050405020304" pitchFamily="18" charset="0"/>
+              </a:rPr>
+              <a:t>П</a:t>
+            </a:r>
+            <a:r>
+              <a:rPr lang="ru-RU" sz="1400" dirty="0">
                 <a:effectLst/>
                 <a:latin typeface="Times New Roman" panose="02020603050405020304" pitchFamily="18" charset="0"/>
                 <a:cs typeface="Times New Roman" panose="02020603050405020304" pitchFamily="18" charset="0"/>
               </a:rPr>
-              <a:t>прямой подсчёт;</a:t>
+              <a:t>рямой подсчёт;</a:t>
             </a:r>
             <a:endParaRPr lang="ru-RU" sz="1400" dirty="0">
               <a:latin typeface="Times New Roman" panose="02020603050405020304" pitchFamily="18" charset="0"/>
@@ -12283,11 +13832,18 @@
             </a:pPr>
             <a:r>
               <a:rPr lang="ru-RU" sz="1400" dirty="0">
+                <a:latin typeface="Times New Roman" panose="02020603050405020304" pitchFamily="18" charset="0"/>
+                <a:cs typeface="Times New Roman" panose="02020603050405020304" pitchFamily="18" charset="0"/>
+              </a:rPr>
+              <a:t>В</a:t>
+            </a:r>
+            <a:r>
+              <a:rPr lang="ru-RU" sz="1400" dirty="0">
                 <a:effectLst/>
                 <a:latin typeface="Times New Roman" panose="02020603050405020304" pitchFamily="18" charset="0"/>
                 <a:cs typeface="Times New Roman" panose="02020603050405020304" pitchFamily="18" charset="0"/>
               </a:rPr>
-              <a:t>вероятностный и амортизированный анализ.</a:t>
+              <a:t>ероятностный и амортизированный анализ.</a:t>
             </a:r>
             <a:endParaRPr lang="en-US" sz="1400" dirty="0">
               <a:effectLst/>
@@ -12329,11 +13885,18 @@
             </a:pPr>
             <a:r>
               <a:rPr lang="ru-RU" sz="1400" dirty="0">
+                <a:latin typeface="Times New Roman" panose="02020603050405020304" pitchFamily="18" charset="0"/>
+                <a:cs typeface="Times New Roman" panose="02020603050405020304" pitchFamily="18" charset="0"/>
+              </a:rPr>
+              <a:t>Д</a:t>
+            </a:r>
+            <a:r>
+              <a:rPr lang="ru-RU" sz="1400" dirty="0">
                 <a:effectLst/>
                 <a:latin typeface="Times New Roman" panose="02020603050405020304" pitchFamily="18" charset="0"/>
                 <a:cs typeface="Times New Roman" panose="02020603050405020304" pitchFamily="18" charset="0"/>
               </a:rPr>
-              <a:t>даёт не только асимптотику, но и точную формулу;</a:t>
+              <a:t>аёт не только асимптотику, но и точную формулу;</a:t>
             </a:r>
             <a:endParaRPr lang="ru-RU" sz="1400" dirty="0">
               <a:latin typeface="Times New Roman" panose="02020603050405020304" pitchFamily="18" charset="0"/>
@@ -12347,11 +13910,18 @@
             </a:pPr>
             <a:r>
               <a:rPr lang="ru-RU" sz="1400" dirty="0">
+                <a:latin typeface="Times New Roman" panose="02020603050405020304" pitchFamily="18" charset="0"/>
+                <a:cs typeface="Times New Roman" panose="02020603050405020304" pitchFamily="18" charset="0"/>
+              </a:rPr>
+              <a:t>Х</a:t>
+            </a:r>
+            <a:r>
+              <a:rPr lang="ru-RU" sz="1400" dirty="0">
                 <a:effectLst/>
                 <a:latin typeface="Times New Roman" panose="02020603050405020304" pitchFamily="18" charset="0"/>
                 <a:cs typeface="Times New Roman" panose="02020603050405020304" pitchFamily="18" charset="0"/>
               </a:rPr>
-              <a:t>хорошо подходит для рекурсивных алгоритмов;</a:t>
+              <a:t>орошо подходит для рекурсивных алгоритмов;</a:t>
             </a:r>
             <a:endParaRPr lang="ru-RU" sz="1400" dirty="0">
               <a:latin typeface="Times New Roman" panose="02020603050405020304" pitchFamily="18" charset="0"/>
@@ -12365,11 +13935,18 @@
             </a:pPr>
             <a:r>
               <a:rPr lang="ru-RU" sz="1400" dirty="0">
+                <a:latin typeface="Times New Roman" panose="02020603050405020304" pitchFamily="18" charset="0"/>
+                <a:cs typeface="Times New Roman" panose="02020603050405020304" pitchFamily="18" charset="0"/>
+              </a:rPr>
+              <a:t>П</a:t>
+            </a:r>
+            <a:r>
+              <a:rPr lang="ru-RU" sz="1400" dirty="0">
                 <a:effectLst/>
                 <a:latin typeface="Times New Roman" panose="02020603050405020304" pitchFamily="18" charset="0"/>
                 <a:cs typeface="Times New Roman" panose="02020603050405020304" pitchFamily="18" charset="0"/>
               </a:rPr>
-              <a:t>прозрачно показывает вклад каждого уровня рекурсии.</a:t>
+              <a:t>розрачно показывает вклад каждого уровня рекурсии.</a:t>
             </a:r>
             <a:endParaRPr lang="ru-RU" sz="1400" dirty="0">
               <a:latin typeface="Times New Roman" panose="02020603050405020304" pitchFamily="18" charset="0"/>
@@ -12534,15 +14111,41 @@
                     <a:latin typeface="Times New Roman" panose="02020603050405020304" pitchFamily="18" charset="0"/>
                     <a:cs typeface="Times New Roman" panose="02020603050405020304" pitchFamily="18" charset="0"/>
                   </a:rPr>
-                  <a:t>Пусть M</a:t>
+                  <a:t>Пусть </a:t>
                 </a:r>
-                <a:r>
-                  <a:rPr lang="ru-RU" sz="1600" dirty="0">
-                    <a:latin typeface="Times New Roman" panose="02020603050405020304" pitchFamily="18" charset="0"/>
-                    <a:cs typeface="Times New Roman" panose="02020603050405020304" pitchFamily="18" charset="0"/>
-                  </a:rPr>
-                  <a:t>(n)</a:t>
-                </a:r>
+                <a14:m>
+                  <m:oMath xmlns:m="http://schemas.openxmlformats.org/officeDocument/2006/math">
+                    <m:r>
+                      <a:rPr lang="ru-RU" sz="1600" i="1" dirty="0" smtClean="0">
+                        <a:effectLst/>
+                        <a:latin typeface="Cambria Math" panose="02040503050406030204" pitchFamily="18" charset="0"/>
+                        <a:cs typeface="Times New Roman" panose="02020603050405020304" pitchFamily="18" charset="0"/>
+                      </a:rPr>
+                      <m:t>𝑀</m:t>
+                    </m:r>
+                    <m:r>
+                      <a:rPr lang="ru-RU" sz="1600" i="1" dirty="0">
+                        <a:latin typeface="Cambria Math" panose="02040503050406030204" pitchFamily="18" charset="0"/>
+                        <a:cs typeface="Times New Roman" panose="02020603050405020304" pitchFamily="18" charset="0"/>
+                      </a:rPr>
+                      <m:t>(</m:t>
+                    </m:r>
+                    <m:r>
+                      <a:rPr lang="ru-RU" sz="1600" i="1" dirty="0">
+                        <a:latin typeface="Cambria Math" panose="02040503050406030204" pitchFamily="18" charset="0"/>
+                        <a:cs typeface="Times New Roman" panose="02020603050405020304" pitchFamily="18" charset="0"/>
+                      </a:rPr>
+                      <m:t>𝑛</m:t>
+                    </m:r>
+                    <m:r>
+                      <a:rPr lang="ru-RU" sz="1600" i="1" dirty="0">
+                        <a:latin typeface="Cambria Math" panose="02040503050406030204" pitchFamily="18" charset="0"/>
+                        <a:cs typeface="Times New Roman" panose="02020603050405020304" pitchFamily="18" charset="0"/>
+                      </a:rPr>
+                      <m:t>)</m:t>
+                    </m:r>
+                  </m:oMath>
+                </a14:m>
                 <a:r>
                   <a:rPr lang="ru-RU" sz="1600" dirty="0">
                     <a:effectLst/>
@@ -12645,13 +14248,6 @@
                       </a:rPr>
                       <m:t>&gt;2</m:t>
                     </m:r>
-                    <m:r>
-                      <a:rPr lang="ru-RU" sz="1600" i="1" dirty="0" smtClean="0">
-                        <a:effectLst/>
-                        <a:latin typeface="Cambria Math" panose="02040503050406030204" pitchFamily="18" charset="0"/>
-                      </a:rPr>
-                      <m:t> </m:t>
-                    </m:r>
                   </m:oMath>
                 </a14:m>
                 <a:r>
@@ -12660,39 +14256,7 @@
                     <a:latin typeface="Times New Roman" panose="02020603050405020304" pitchFamily="18" charset="0"/>
                     <a:cs typeface="Times New Roman" panose="02020603050405020304" pitchFamily="18" charset="0"/>
                   </a:rPr>
-                  <a:t>(пара элементов каждый раз упорядочивается операцией </a:t>
-                </a:r>
-                <a:r>
-                  <a:rPr lang="ru-RU" sz="1600" dirty="0" err="1">
-                    <a:effectLst/>
-                    <a:latin typeface="Times New Roman" panose="02020603050405020304" pitchFamily="18" charset="0"/>
-                    <a:cs typeface="Times New Roman" panose="02020603050405020304" pitchFamily="18" charset="0"/>
-                  </a:rPr>
-                  <a:t>min</a:t>
-                </a:r>
-                <a:r>
-                  <a:rPr lang="ru-RU" sz="1600" dirty="0">
-                    <a:effectLst/>
-                    <a:latin typeface="Times New Roman" panose="02020603050405020304" pitchFamily="18" charset="0"/>
-                    <a:cs typeface="Times New Roman" panose="02020603050405020304" pitchFamily="18" charset="0"/>
-                  </a:rPr>
-                  <a:t>/</a:t>
-                </a:r>
-                <a:r>
-                  <a:rPr lang="ru-RU" sz="1600" dirty="0" err="1">
-                    <a:effectLst/>
-                    <a:latin typeface="Times New Roman" panose="02020603050405020304" pitchFamily="18" charset="0"/>
-                    <a:cs typeface="Times New Roman" panose="02020603050405020304" pitchFamily="18" charset="0"/>
-                  </a:rPr>
-                  <a:t>max</a:t>
-                </a:r>
-                <a:r>
-                  <a:rPr lang="ru-RU" sz="1600" dirty="0">
-                    <a:effectLst/>
-                    <a:latin typeface="Times New Roman" panose="02020603050405020304" pitchFamily="18" charset="0"/>
-                    <a:cs typeface="Times New Roman" panose="02020603050405020304" pitchFamily="18" charset="0"/>
-                  </a:rPr>
-                  <a:t>). Рекуррентное соотношение:</a:t>
+                  <a:t>. Тогда Рекуррентное соотношение будет иметь вид:</a:t>
                 </a:r>
                 <a:endParaRPr lang="en-US" sz="1600" dirty="0">
                   <a:effectLst/>
@@ -12861,7 +14425,7 @@
                         <m:t>− 1,  </m:t>
                       </m:r>
                       <m:r>
-                        <a:rPr lang="en-US" sz="1800" i="1" smtClean="0">
+                        <a:rPr lang="en-US" sz="1800" b="0" i="1" smtClean="0">
                           <a:effectLst/>
                           <a:latin typeface="Cambria Math" panose="02040503050406030204" pitchFamily="18" charset="0"/>
                           <a:ea typeface="Times New Roman" panose="02020603050405020304" pitchFamily="18" charset="0"/>
@@ -12872,15 +14436,17 @@
                       <m:d>
                         <m:dPr>
                           <m:ctrlPr>
-                            <a:rPr lang="ru-RU" sz="1200" i="1" smtClean="0">
+                            <a:rPr lang="ru-RU" sz="1800" i="1" smtClean="0">
                               <a:effectLst/>
                               <a:latin typeface="Cambria Math" panose="02040503050406030204" pitchFamily="18" charset="0"/>
+                              <a:ea typeface="Times New Roman" panose="02020603050405020304" pitchFamily="18" charset="0"/>
+                              <a:cs typeface="Times New Roman" panose="02020603050405020304" pitchFamily="18" charset="0"/>
                             </a:rPr>
                           </m:ctrlPr>
                         </m:dPr>
                         <m:e>
                           <m:r>
-                            <a:rPr lang="en-US" sz="1800" i="1">
+                            <a:rPr lang="ru-RU" sz="1800" b="0" i="1" smtClean="0">
                               <a:effectLst/>
                               <a:latin typeface="Cambria Math" panose="02040503050406030204" pitchFamily="18" charset="0"/>
                               <a:ea typeface="Times New Roman" panose="02020603050405020304" pitchFamily="18" charset="0"/>
@@ -12891,7 +14457,7 @@
                         </m:e>
                       </m:d>
                       <m:r>
-                        <a:rPr lang="en-US" sz="1800" i="1" smtClean="0">
+                        <a:rPr lang="en-US" sz="1800" b="0" i="1" smtClean="0">
                           <a:effectLst/>
                           <a:latin typeface="Cambria Math" panose="02040503050406030204" pitchFamily="18" charset="0"/>
                           <a:ea typeface="Times New Roman" panose="02020603050405020304" pitchFamily="18" charset="0"/>
@@ -12900,7 +14466,7 @@
                         <m:t>= </m:t>
                       </m:r>
                       <m:r>
-                        <a:rPr lang="ru-RU" sz="1800" i="1" smtClean="0">
+                        <a:rPr lang="ru-RU" sz="1800" b="0" i="1" smtClean="0">
                           <a:effectLst/>
                           <a:latin typeface="Cambria Math" panose="02040503050406030204" pitchFamily="18" charset="0"/>
                           <a:ea typeface="Times New Roman" panose="02020603050405020304" pitchFamily="18" charset="0"/>
@@ -12908,32 +14474,37 @@
                         </a:rPr>
                         <m:t>𝛩</m:t>
                       </m:r>
-                      <m:r>
-                        <a:rPr lang="ru-RU" sz="1800" i="1" smtClean="0">
-                          <a:effectLst/>
-                          <a:latin typeface="Cambria Math" panose="02040503050406030204" pitchFamily="18" charset="0"/>
-                          <a:ea typeface="Times New Roman" panose="02020603050405020304" pitchFamily="18" charset="0"/>
-                          <a:cs typeface="Times New Roman" panose="02020603050405020304" pitchFamily="18" charset="0"/>
-                        </a:rPr>
-                        <m:t>(1)</m:t>
-                      </m:r>
+                      <m:d>
+                        <m:dPr>
+                          <m:ctrlPr>
+                            <a:rPr lang="ru-RU" sz="1800" i="1" smtClean="0">
+                              <a:effectLst/>
+                              <a:latin typeface="Cambria Math" panose="02040503050406030204" pitchFamily="18" charset="0"/>
+                              <a:ea typeface="Times New Roman" panose="02020603050405020304" pitchFamily="18" charset="0"/>
+                              <a:cs typeface="Times New Roman" panose="02020603050405020304" pitchFamily="18" charset="0"/>
+                            </a:rPr>
+                          </m:ctrlPr>
+                        </m:dPr>
+                        <m:e>
+                          <m:r>
+                            <a:rPr lang="ru-RU" sz="1800" b="0" i="1" smtClean="0">
+                              <a:effectLst/>
+                              <a:latin typeface="Cambria Math" panose="02040503050406030204" pitchFamily="18" charset="0"/>
+                              <a:ea typeface="Times New Roman" panose="02020603050405020304" pitchFamily="18" charset="0"/>
+                              <a:cs typeface="Times New Roman" panose="02020603050405020304" pitchFamily="18" charset="0"/>
+                            </a:rPr>
+                            <m:t>1</m:t>
+                          </m:r>
+                        </m:e>
+                      </m:d>
                     </m:oMath>
                   </m:oMathPara>
                 </a14:m>
-                <a:endParaRPr lang="en-US" sz="1800" dirty="0">
+                <a:endParaRPr lang="ru-RU" sz="1800" dirty="0">
                   <a:effectLst/>
                   <a:latin typeface="Times New Roman" panose="02020603050405020304" pitchFamily="18" charset="0"/>
                   <a:ea typeface="Times New Roman" panose="02020603050405020304" pitchFamily="18" charset="0"/>
-                </a:endParaRPr>
-              </a:p>
-              <a:p>
-                <a:pPr marL="0" indent="0">
-                  <a:buNone/>
-                </a:pPr>
-                <a:endParaRPr lang="en-US" sz="1800" dirty="0">
-                  <a:effectLst/>
-                  <a:latin typeface="Times New Roman" panose="02020603050405020304" pitchFamily="18" charset="0"/>
-                  <a:ea typeface="Times New Roman" panose="02020603050405020304" pitchFamily="18" charset="0"/>
+                  <a:cs typeface="Times New Roman" panose="02020603050405020304" pitchFamily="18" charset="0"/>
                 </a:endParaRPr>
               </a:p>
               <a:p>
@@ -12946,22 +14517,68 @@
                     <a:latin typeface="Times New Roman" panose="02020603050405020304" pitchFamily="18" charset="0"/>
                     <a:cs typeface="Times New Roman" panose="02020603050405020304" pitchFamily="18" charset="0"/>
                   </a:rPr>
-                  <a:t>Идея: подставить M</a:t>
+                  <a:t>Идея: подставить </a:t>
                 </a:r>
-                <a:r>
-                  <a:rPr lang="ru-RU" sz="1600" dirty="0">
-                    <a:latin typeface="Times New Roman" panose="02020603050405020304" pitchFamily="18" charset="0"/>
-                    <a:cs typeface="Times New Roman" panose="02020603050405020304" pitchFamily="18" charset="0"/>
-                  </a:rPr>
-                  <a:t>(n)</a:t>
-                </a:r>
+                <a14:m>
+                  <m:oMath xmlns:m="http://schemas.openxmlformats.org/officeDocument/2006/math">
+                    <m:r>
+                      <a:rPr lang="ru-RU" sz="1600" i="1" dirty="0" smtClean="0">
+                        <a:effectLst/>
+                        <a:latin typeface="Cambria Math" panose="02040503050406030204" pitchFamily="18" charset="0"/>
+                        <a:cs typeface="Times New Roman" panose="02020603050405020304" pitchFamily="18" charset="0"/>
+                      </a:rPr>
+                      <m:t>𝑀</m:t>
+                    </m:r>
+                    <m:r>
+                      <a:rPr lang="ru-RU" sz="1600" i="1" dirty="0">
+                        <a:latin typeface="Cambria Math" panose="02040503050406030204" pitchFamily="18" charset="0"/>
+                        <a:cs typeface="Times New Roman" panose="02020603050405020304" pitchFamily="18" charset="0"/>
+                      </a:rPr>
+                      <m:t>(</m:t>
+                    </m:r>
+                    <m:r>
+                      <a:rPr lang="ru-RU" sz="1600" i="1" dirty="0">
+                        <a:latin typeface="Cambria Math" panose="02040503050406030204" pitchFamily="18" charset="0"/>
+                        <a:cs typeface="Times New Roman" panose="02020603050405020304" pitchFamily="18" charset="0"/>
+                      </a:rPr>
+                      <m:t>𝑛</m:t>
+                    </m:r>
+                    <m:r>
+                      <a:rPr lang="ru-RU" sz="1600" i="1" dirty="0">
+                        <a:latin typeface="Cambria Math" panose="02040503050406030204" pitchFamily="18" charset="0"/>
+                        <a:cs typeface="Times New Roman" panose="02020603050405020304" pitchFamily="18" charset="0"/>
+                      </a:rPr>
+                      <m:t>)</m:t>
+                    </m:r>
+                  </m:oMath>
+                </a14:m>
                 <a:r>
                   <a:rPr lang="ru-RU" sz="1600" dirty="0">
                     <a:effectLst/>
                     <a:latin typeface="Times New Roman" panose="02020603050405020304" pitchFamily="18" charset="0"/>
                     <a:cs typeface="Times New Roman" panose="02020603050405020304" pitchFamily="18" charset="0"/>
                   </a:rPr>
-                  <a:t> в себя k раз — получится</a:t>
+                  <a:t> в себя </a:t>
+                </a:r>
+                <a14:m>
+                  <m:oMath xmlns:m="http://schemas.openxmlformats.org/officeDocument/2006/math">
+                    <m:r>
+                      <a:rPr lang="ru-RU" sz="1600" i="1" dirty="0" smtClean="0">
+                        <a:effectLst/>
+                        <a:latin typeface="Cambria Math" panose="02040503050406030204" pitchFamily="18" charset="0"/>
+                        <a:cs typeface="Times New Roman" panose="02020603050405020304" pitchFamily="18" charset="0"/>
+                      </a:rPr>
+                      <m:t>𝑘</m:t>
+                    </m:r>
+                  </m:oMath>
+                </a14:m>
+                <a:r>
+                  <a:rPr lang="ru-RU" sz="1600" dirty="0">
+                    <a:effectLst/>
+                    <a:latin typeface="Times New Roman" panose="02020603050405020304" pitchFamily="18" charset="0"/>
+                    <a:cs typeface="Times New Roman" panose="02020603050405020304" pitchFamily="18" charset="0"/>
+                  </a:rPr>
+                  <a:t> раз — получится</a:t>
                 </a:r>
                 <a:endParaRPr lang="en-US" sz="1600" dirty="0">
                   <a:effectLst/>
@@ -12990,7 +14607,7 @@
                     </m:oMathParaPr>
                     <m:oMath xmlns:m="http://schemas.openxmlformats.org/officeDocument/2006/math">
                       <m:r>
-                        <a:rPr lang="en-US" sz="1800" i="1" smtClean="0">
+                        <a:rPr lang="en-US" sz="1800" i="1" dirty="0" smtClean="0">
                           <a:effectLst/>
                           <a:latin typeface="Cambria Math" panose="02040503050406030204" pitchFamily="18" charset="0"/>
                           <a:ea typeface="Times New Roman" panose="02020603050405020304" pitchFamily="18" charset="0"/>
@@ -12999,7 +14616,7 @@
                         <m:t>𝑀</m:t>
                       </m:r>
                       <m:r>
-                        <a:rPr lang="en-US" sz="1800" i="1" smtClean="0">
+                        <a:rPr lang="en-US" sz="1800" i="1" dirty="0" smtClean="0">
                           <a:effectLst/>
                           <a:latin typeface="Cambria Math" panose="02040503050406030204" pitchFamily="18" charset="0"/>
                           <a:ea typeface="Times New Roman" panose="02020603050405020304" pitchFamily="18" charset="0"/>
@@ -13010,15 +14627,17 @@
                       <m:sSub>
                         <m:sSubPr>
                           <m:ctrlPr>
-                            <a:rPr lang="ru-RU" sz="1200" i="1">
+                            <a:rPr lang="ru-RU" sz="1200" i="1" dirty="0" smtClean="0">
                               <a:effectLst/>
                               <a:latin typeface="Cambria Math" panose="02040503050406030204" pitchFamily="18" charset="0"/>
+                              <a:ea typeface="Times New Roman" panose="02020603050405020304" pitchFamily="18" charset="0"/>
+                              <a:cs typeface="Times New Roman" panose="02020603050405020304" pitchFamily="18" charset="0"/>
                             </a:rPr>
                           </m:ctrlPr>
                         </m:sSubPr>
                         <m:e>
                           <m:r>
-                            <a:rPr lang="en-US" sz="1800" i="1">
+                            <a:rPr lang="en-US" sz="1800" i="1" dirty="0" smtClean="0">
                               <a:effectLst/>
                               <a:latin typeface="Cambria Math" panose="02040503050406030204" pitchFamily="18" charset="0"/>
                               <a:ea typeface="Times New Roman" panose="02020603050405020304" pitchFamily="18" charset="0"/>
@@ -13029,7 +14648,7 @@
                         </m:e>
                         <m:sub>
                           <m:r>
-                            <a:rPr lang="en-US" sz="1800" i="1">
+                            <a:rPr lang="en-US" sz="1800" i="1" dirty="0" smtClean="0">
                               <a:effectLst/>
                               <a:latin typeface="Cambria Math" panose="02040503050406030204" pitchFamily="18" charset="0"/>
                               <a:ea typeface="Times New Roman" panose="02020603050405020304" pitchFamily="18" charset="0"/>
@@ -13038,7 +14657,7 @@
                             <m:t>𝑚</m:t>
                           </m:r>
                           <m:r>
-                            <a:rPr lang="en-US" sz="1800" i="1">
+                            <a:rPr lang="en-US" sz="1800" i="1" dirty="0" smtClean="0">
                               <a:effectLst/>
                               <a:latin typeface="Cambria Math" panose="02040503050406030204" pitchFamily="18" charset="0"/>
                               <a:ea typeface="Times New Roman" panose="02020603050405020304" pitchFamily="18" charset="0"/>
@@ -13047,7 +14666,7 @@
                             <m:t>−</m:t>
                           </m:r>
                           <m:r>
-                            <a:rPr lang="en-US" sz="1800" i="1">
+                            <a:rPr lang="en-US" sz="1800" i="1" dirty="0" smtClean="0">
                               <a:effectLst/>
                               <a:latin typeface="Cambria Math" panose="02040503050406030204" pitchFamily="18" charset="0"/>
                               <a:ea typeface="Times New Roman" panose="02020603050405020304" pitchFamily="18" charset="0"/>
@@ -13058,7 +14677,7 @@
                         </m:sub>
                       </m:sSub>
                       <m:r>
-                        <a:rPr lang="en-US" sz="1800" i="1">
+                        <a:rPr lang="en-US" sz="1800" i="1" dirty="0" smtClean="0">
                           <a:effectLst/>
                           <a:latin typeface="Cambria Math" panose="02040503050406030204" pitchFamily="18" charset="0"/>
                           <a:ea typeface="Times New Roman" panose="02020603050405020304" pitchFamily="18" charset="0"/>
@@ -13067,7 +14686,7 @@
                         <m:t> + </m:t>
                       </m:r>
                       <m:r>
-                        <a:rPr lang="en-US" sz="1800" i="1">
+                        <a:rPr lang="en-US" sz="1800" i="1" dirty="0" smtClean="0">
                           <a:effectLst/>
                           <a:latin typeface="Cambria Math" panose="02040503050406030204" pitchFamily="18" charset="0"/>
                           <a:ea typeface="Times New Roman" panose="02020603050405020304" pitchFamily="18" charset="0"/>
@@ -13076,7 +14695,7 @@
                         <m:t>𝑘</m:t>
                       </m:r>
                       <m:r>
-                        <a:rPr lang="en-US" sz="1800" i="1">
+                        <a:rPr lang="en-US" sz="1800" i="1" dirty="0" smtClean="0">
                           <a:effectLst/>
                           <a:latin typeface="Cambria Math" panose="02040503050406030204" pitchFamily="18" charset="0"/>
                           <a:ea typeface="Times New Roman" panose="02020603050405020304" pitchFamily="18" charset="0"/>
@@ -13087,15 +14706,17 @@
                       <m:sSup>
                         <m:sSupPr>
                           <m:ctrlPr>
-                            <a:rPr lang="ru-RU" sz="1200" i="1">
+                            <a:rPr lang="ru-RU" sz="1200" i="1" dirty="0">
                               <a:effectLst/>
                               <a:latin typeface="Cambria Math" panose="02040503050406030204" pitchFamily="18" charset="0"/>
+                              <a:ea typeface="Times New Roman" panose="02020603050405020304" pitchFamily="18" charset="0"/>
+                              <a:cs typeface="Times New Roman" panose="02020603050405020304" pitchFamily="18" charset="0"/>
                             </a:rPr>
                           </m:ctrlPr>
                         </m:sSupPr>
                         <m:e>
                           <m:r>
-                            <a:rPr lang="en-US" sz="1800" i="1">
+                            <a:rPr lang="en-US" sz="1800" i="1" dirty="0" smtClean="0">
                               <a:effectLst/>
                               <a:latin typeface="Cambria Math" panose="02040503050406030204" pitchFamily="18" charset="0"/>
                               <a:ea typeface="Times New Roman" panose="02020603050405020304" pitchFamily="18" charset="0"/>
@@ -13106,7 +14727,7 @@
                         </m:e>
                         <m:sup>
                           <m:r>
-                            <a:rPr lang="en-US" sz="1800" i="1">
+                            <a:rPr lang="en-US" sz="1800" i="1" dirty="0">
                               <a:effectLst/>
                               <a:latin typeface="Cambria Math" panose="02040503050406030204" pitchFamily="18" charset="0"/>
                               <a:ea typeface="Times New Roman" panose="02020603050405020304" pitchFamily="18" charset="0"/>
@@ -13117,35 +14738,32 @@
                         </m:sup>
                       </m:sSup>
                       <m:r>
-                        <a:rPr lang="en-US" sz="1800" i="1">
+                        <a:rPr lang="en-US" sz="1800" i="1" dirty="0" smtClean="0">
                           <a:effectLst/>
                           <a:latin typeface="Cambria Math" panose="02040503050406030204" pitchFamily="18" charset="0"/>
                           <a:ea typeface="Times New Roman" panose="02020603050405020304" pitchFamily="18" charset="0"/>
                           <a:cs typeface="Times New Roman" panose="02020603050405020304" pitchFamily="18" charset="0"/>
                         </a:rPr>
-                        <m:t>− </m:t>
+                        <m:t>−</m:t>
                       </m:r>
-                      <m:d>
-                        <m:dPr>
-                          <m:ctrlPr>
-                            <a:rPr lang="ru-RU" sz="1200" i="1">
-                              <a:effectLst/>
-                              <a:latin typeface="Cambria Math" panose="02040503050406030204" pitchFamily="18" charset="0"/>
-                            </a:rPr>
-                          </m:ctrlPr>
-                        </m:dPr>
-                        <m:e>
-                          <m:r>
-                            <a:rPr lang="en-US" sz="1800" i="1">
-                              <a:effectLst/>
-                              <a:latin typeface="Cambria Math" panose="02040503050406030204" pitchFamily="18" charset="0"/>
-                              <a:ea typeface="Times New Roman" panose="02020603050405020304" pitchFamily="18" charset="0"/>
-                              <a:cs typeface="Times New Roman" panose="02020603050405020304" pitchFamily="18" charset="0"/>
-                            </a:rPr>
-                            <m:t>2ᵏ − 1</m:t>
-                          </m:r>
-                        </m:e>
-                      </m:d>
+                      <m:r>
+                        <a:rPr lang="ru-RU" sz="1800" b="0" i="1" dirty="0" smtClean="0">
+                          <a:effectLst/>
+                          <a:latin typeface="Cambria Math" panose="02040503050406030204" pitchFamily="18" charset="0"/>
+                          <a:ea typeface="Times New Roman" panose="02020603050405020304" pitchFamily="18" charset="0"/>
+                          <a:cs typeface="Times New Roman" panose="02020603050405020304" pitchFamily="18" charset="0"/>
+                        </a:rPr>
+                        <m:t>(</m:t>
+                      </m:r>
+                      <m:r>
+                        <a:rPr lang="en-US" sz="1800" i="1" dirty="0" smtClean="0">
+                          <a:effectLst/>
+                          <a:latin typeface="Cambria Math" panose="02040503050406030204" pitchFamily="18" charset="0"/>
+                          <a:ea typeface="Times New Roman" panose="02020603050405020304" pitchFamily="18" charset="0"/>
+                          <a:cs typeface="Times New Roman" panose="02020603050405020304" pitchFamily="18" charset="0"/>
+                        </a:rPr>
+                        <m:t>2ᵏ − 1)</m:t>
+                      </m:r>
                     </m:oMath>
                   </m:oMathPara>
                 </a14:m>
@@ -13176,16 +14794,48 @@
                   </a:rPr>
                   <a:t>При </a:t>
                 </a:r>
+                <a14:m>
+                  <m:oMath xmlns:m="http://schemas.openxmlformats.org/officeDocument/2006/math">
+                    <m:r>
+                      <a:rPr lang="en-US" sz="1600" i="1" dirty="0" smtClean="0">
+                        <a:latin typeface="Cambria Math" panose="02040503050406030204" pitchFamily="18" charset="0"/>
+                        <a:cs typeface="Times New Roman" panose="02020603050405020304" pitchFamily="18" charset="0"/>
+                      </a:rPr>
+                      <m:t>𝑘</m:t>
+                    </m:r>
+                    <m:r>
+                      <a:rPr lang="en-US" sz="1600" i="1" dirty="0" smtClean="0">
+                        <a:latin typeface="Cambria Math" panose="02040503050406030204" pitchFamily="18" charset="0"/>
+                        <a:cs typeface="Times New Roman" panose="02020603050405020304" pitchFamily="18" charset="0"/>
+                      </a:rPr>
+                      <m:t>=</m:t>
+                    </m:r>
+                    <m:r>
+                      <a:rPr lang="en-US" sz="1600" i="1" dirty="0" smtClean="0">
+                        <a:latin typeface="Cambria Math" panose="02040503050406030204" pitchFamily="18" charset="0"/>
+                        <a:cs typeface="Times New Roman" panose="02020603050405020304" pitchFamily="18" charset="0"/>
+                      </a:rPr>
+                      <m:t>𝑚</m:t>
+                    </m:r>
+                    <m:r>
+                      <a:rPr lang="en-US" sz="1600" i="1" dirty="0" smtClean="0">
+                        <a:latin typeface="Cambria Math" panose="02040503050406030204" pitchFamily="18" charset="0"/>
+                        <a:cs typeface="Times New Roman" panose="02020603050405020304" pitchFamily="18" charset="0"/>
+                      </a:rPr>
+                      <m:t>−1</m:t>
+                    </m:r>
+                  </m:oMath>
+                </a14:m>
                 <a:r>
                   <a:rPr lang="en-US" sz="1600" dirty="0">
                     <a:latin typeface="Times New Roman" panose="02020603050405020304" pitchFamily="18" charset="0"/>
                     <a:cs typeface="Times New Roman" panose="02020603050405020304" pitchFamily="18" charset="0"/>
                   </a:rPr>
-                  <a:t>k=m−1:</a:t>
+                  <a:t>:</a:t>
                 </a:r>
               </a:p>
               <a:p>
-                <a:pPr marL="0" indent="0" algn="just">
+                <a:pPr marL="0" indent="0">
                   <a:buNone/>
                 </a:pPr>
                 <a14:m>
@@ -13251,12 +14901,10 @@
                             <m:t>𝑛</m:t>
                           </m:r>
                           <m:r>
-                            <a:rPr lang="en-US" sz="1800" i="1">
+                            <a:rPr lang="en-US" sz="1800" i="1" dirty="0">
                               <a:latin typeface="Cambria Math" panose="02040503050406030204" pitchFamily="18" charset="0"/>
-                              <a:ea typeface="Times New Roman" panose="02020603050405020304" pitchFamily="18" charset="0"/>
-                              <a:cs typeface="Times New Roman" panose="02020603050405020304" pitchFamily="18" charset="0"/>
                             </a:rPr>
-                            <m:t> </m:t>
+                            <m:t>·</m:t>
                           </m:r>
                           <m:r>
                             <a:rPr lang="en-US" sz="1800" i="1">
@@ -13389,7 +15037,21 @@
                               <a:ea typeface="Times New Roman" panose="02020603050405020304" pitchFamily="18" charset="0"/>
                               <a:cs typeface="Times New Roman" panose="02020603050405020304" pitchFamily="18" charset="0"/>
                             </a:rPr>
-                            <m:t>𝑛𝑙𝑜𝑔</m:t>
+                            <m:t>𝑛</m:t>
+                          </m:r>
+                          <m:r>
+                            <a:rPr lang="en-US" sz="1800" i="1" dirty="0">
+                              <a:latin typeface="Cambria Math" panose="02040503050406030204" pitchFamily="18" charset="0"/>
+                            </a:rPr>
+                            <m:t>·</m:t>
+                          </m:r>
+                          <m:r>
+                            <a:rPr lang="en-US" sz="1800" i="1">
+                              <a:latin typeface="Cambria Math" panose="02040503050406030204" pitchFamily="18" charset="0"/>
+                              <a:ea typeface="Times New Roman" panose="02020603050405020304" pitchFamily="18" charset="0"/>
+                              <a:cs typeface="Times New Roman" panose="02020603050405020304" pitchFamily="18" charset="0"/>
+                            </a:rPr>
+                            <m:t>𝑙𝑜𝑔</m:t>
                           </m:r>
                           <m:r>
                             <a:rPr lang="en-US" sz="1800" i="1">
@@ -13474,33 +15136,73 @@
                 </a:r>
                 <a14:m>
                   <m:oMath xmlns:m="http://schemas.openxmlformats.org/officeDocument/2006/math">
+                    <m:sSub>
+                      <m:sSubPr>
+                        <m:ctrlPr>
+                          <a:rPr lang="ru-RU" sz="1600" b="0" i="1" dirty="0" smtClean="0">
+                            <a:latin typeface="Cambria Math" panose="02040503050406030204" pitchFamily="18" charset="0"/>
+                            <a:cs typeface="Times New Roman" panose="02020603050405020304" pitchFamily="18" charset="0"/>
+                          </a:rPr>
+                        </m:ctrlPr>
+                      </m:sSubPr>
+                      <m:e>
+                        <m:r>
+                          <a:rPr lang="ru-RU" sz="1600" i="1" dirty="0" smtClean="0">
+                            <a:latin typeface="Cambria Math" panose="02040503050406030204" pitchFamily="18" charset="0"/>
+                            <a:cs typeface="Times New Roman" panose="02020603050405020304" pitchFamily="18" charset="0"/>
+                          </a:rPr>
+                          <m:t>𝑑</m:t>
+                        </m:r>
+                      </m:e>
+                      <m:sub>
+                        <m:r>
+                          <a:rPr lang="ru-RU" sz="1600" i="1" dirty="0" smtClean="0">
+                            <a:latin typeface="Cambria Math" panose="02040503050406030204" pitchFamily="18" charset="0"/>
+                            <a:cs typeface="Times New Roman" panose="02020603050405020304" pitchFamily="18" charset="0"/>
+                          </a:rPr>
+                          <m:t>𝑆</m:t>
+                        </m:r>
+                      </m:sub>
+                    </m:sSub>
                     <m:r>
                       <a:rPr lang="ru-RU" sz="1600" i="1" dirty="0" smtClean="0">
                         <a:latin typeface="Cambria Math" panose="02040503050406030204" pitchFamily="18" charset="0"/>
                         <a:cs typeface="Times New Roman" panose="02020603050405020304" pitchFamily="18" charset="0"/>
                       </a:rPr>
-                      <m:t>𝑑𝑆</m:t>
+                      <m:t>​</m:t>
                     </m:r>
+                    <m:d>
+                      <m:dPr>
+                        <m:ctrlPr>
+                          <a:rPr lang="ru-RU" sz="1600" i="1" dirty="0" smtClean="0">
+                            <a:latin typeface="Cambria Math" panose="02040503050406030204" pitchFamily="18" charset="0"/>
+                            <a:cs typeface="Times New Roman" panose="02020603050405020304" pitchFamily="18" charset="0"/>
+                          </a:rPr>
+                        </m:ctrlPr>
+                      </m:dPr>
+                      <m:e>
+                        <m:r>
+                          <a:rPr lang="ru-RU" sz="1600" i="1" dirty="0" smtClean="0">
+                            <a:latin typeface="Cambria Math" panose="02040503050406030204" pitchFamily="18" charset="0"/>
+                            <a:cs typeface="Times New Roman" panose="02020603050405020304" pitchFamily="18" charset="0"/>
+                          </a:rPr>
+                          <m:t>𝑛</m:t>
+                        </m:r>
+                      </m:e>
+                    </m:d>
                     <m:r>
                       <a:rPr lang="ru-RU" sz="1600" i="1" dirty="0">
                         <a:latin typeface="Cambria Math" panose="02040503050406030204" pitchFamily="18" charset="0"/>
                         <a:cs typeface="Times New Roman" panose="02020603050405020304" pitchFamily="18" charset="0"/>
                       </a:rPr>
-                      <m:t>​(</m:t>
+                      <m:t>.</m:t>
                     </m:r>
                     <m:r>
-                      <a:rPr lang="ru-RU" sz="1600" i="1" dirty="0">
+                      <a:rPr lang="en-US" sz="1600" b="0" i="1" dirty="0" smtClean="0">
                         <a:latin typeface="Cambria Math" panose="02040503050406030204" pitchFamily="18" charset="0"/>
                         <a:cs typeface="Times New Roman" panose="02020603050405020304" pitchFamily="18" charset="0"/>
                       </a:rPr>
-                      <m:t>𝑛</m:t>
-                    </m:r>
-                    <m:r>
-                      <a:rPr lang="ru-RU" sz="1600" i="1" dirty="0">
-                        <a:latin typeface="Cambria Math" panose="02040503050406030204" pitchFamily="18" charset="0"/>
-                        <a:cs typeface="Times New Roman" panose="02020603050405020304" pitchFamily="18" charset="0"/>
-                      </a:rPr>
-                      <m:t>)</m:t>
+                      <m:t> </m:t>
                     </m:r>
                   </m:oMath>
                 </a14:m>
@@ -13509,8 +15211,125 @@
                     <a:latin typeface="Times New Roman" panose="02020603050405020304" pitchFamily="18" charset="0"/>
                     <a:cs typeface="Times New Roman" panose="02020603050405020304" pitchFamily="18" charset="0"/>
                   </a:rPr>
-                  <a:t>.</a:t>
+                  <a:t>Характерны замены</a:t>
                 </a:r>
+                <a:r>
+                  <a:rPr lang="en-US" sz="1600" dirty="0">
+                    <a:latin typeface="Times New Roman" panose="02020603050405020304" pitchFamily="18" charset="0"/>
+                    <a:cs typeface="Times New Roman" panose="02020603050405020304" pitchFamily="18" charset="0"/>
+                  </a:rPr>
+                  <a:t>: </a:t>
+                </a:r>
+                <a14:m>
+                  <m:oMath xmlns:m="http://schemas.openxmlformats.org/officeDocument/2006/math">
+                    <m:r>
+                      <a:rPr lang="ru-RU" sz="1600" i="1"/>
+                      <m:t>𝑛</m:t>
+                    </m:r>
+                    <m:r>
+                      <a:rPr lang="ru-RU" sz="1600" b="1" i="1"/>
+                      <m:t>=</m:t>
+                    </m:r>
+                    <m:sSup>
+                      <m:sSupPr>
+                        <m:ctrlPr>
+                          <a:rPr lang="ru-RU" sz="1600" i="1"/>
+                        </m:ctrlPr>
+                      </m:sSupPr>
+                      <m:e>
+                        <m:r>
+                          <a:rPr lang="ru-RU" sz="1600" i="1"/>
+                          <m:t>2</m:t>
+                        </m:r>
+                      </m:e>
+                      <m:sup>
+                        <m:r>
+                          <a:rPr lang="ru-RU" sz="1600" i="1"/>
+                          <m:t>𝑚</m:t>
+                        </m:r>
+                      </m:sup>
+                    </m:sSup>
+                  </m:oMath>
+                </a14:m>
+                <a:r>
+                  <a:rPr lang="ru-RU" sz="1600" dirty="0">
+                    <a:latin typeface="Times New Roman" panose="02020603050405020304" pitchFamily="18" charset="0"/>
+                    <a:cs typeface="Times New Roman" panose="02020603050405020304" pitchFamily="18" charset="0"/>
+                  </a:rPr>
+                  <a:t> и </a:t>
+                </a:r>
+                <a14:m>
+                  <m:oMath xmlns:m="http://schemas.openxmlformats.org/officeDocument/2006/math">
+                    <m:sSub>
+                      <m:sSubPr>
+                        <m:ctrlPr>
+                          <a:rPr lang="ru-RU" sz="1600" i="1"/>
+                        </m:ctrlPr>
+                      </m:sSubPr>
+                      <m:e>
+                        <m:r>
+                          <a:rPr lang="ru-RU" sz="1600" i="1"/>
+                          <m:t>𝑀</m:t>
+                        </m:r>
+                      </m:e>
+                      <m:sub>
+                        <m:r>
+                          <a:rPr lang="ru-RU" sz="1600" i="1"/>
+                          <m:t>𝑚</m:t>
+                        </m:r>
+                      </m:sub>
+                    </m:sSub>
+                    <m:r>
+                      <a:rPr lang="ru-RU" sz="1600" i="1"/>
+                      <m:t>​</m:t>
+                    </m:r>
+                    <m:r>
+                      <a:rPr lang="ru-RU" sz="1600" b="1" i="1"/>
+                      <m:t>=</m:t>
+                    </m:r>
+                    <m:r>
+                      <a:rPr lang="ru-RU" sz="1600" i="1"/>
+                      <m:t>𝑀</m:t>
+                    </m:r>
+                    <m:r>
+                      <a:rPr lang="ru-RU" sz="1600" i="1"/>
+                      <m:t>(</m:t>
+                    </m:r>
+                    <m:sSup>
+                      <m:sSupPr>
+                        <m:ctrlPr>
+                          <a:rPr lang="ru-RU" sz="1600" i="1"/>
+                        </m:ctrlPr>
+                      </m:sSupPr>
+                      <m:e>
+                        <m:r>
+                          <a:rPr lang="ru-RU" sz="1600" i="1"/>
+                          <m:t>2</m:t>
+                        </m:r>
+                      </m:e>
+                      <m:sup>
+                        <m:r>
+                          <a:rPr lang="ru-RU" sz="1600" i="1"/>
+                          <m:t>𝑚</m:t>
+                        </m:r>
+                      </m:sup>
+                    </m:sSup>
+                    <m:r>
+                      <a:rPr lang="ru-RU" sz="1600" i="1"/>
+                      <m:t>)</m:t>
+                    </m:r>
+                  </m:oMath>
+                </a14:m>
+                <a:br>
+                  <a:rPr lang="en-US" sz="1100" dirty="0">
+                    <a:latin typeface="Times New Roman" panose="02020603050405020304" pitchFamily="18" charset="0"/>
+                    <a:cs typeface="Times New Roman" panose="02020603050405020304" pitchFamily="18" charset="0"/>
+                  </a:rPr>
+                </a:br>
+                <a:endParaRPr lang="ru-RU" sz="1100" dirty="0">
+                  <a:latin typeface="Times New Roman" panose="02020603050405020304" pitchFamily="18" charset="0"/>
+                  <a:cs typeface="Times New Roman" panose="02020603050405020304" pitchFamily="18" charset="0"/>
+                </a:endParaRPr>
               </a:p>
               <a:p>
                 <a:pPr marL="0" indent="0">
@@ -13545,7 +15364,7 @@
               <a:blipFill>
                 <a:blip r:embed="rId2"/>
                 <a:stretch>
-                  <a:fillRect l="-362" t="-581" r="-603" b="-1744"/>
+                  <a:fillRect l="-348" t="-980" r="-58"/>
                 </a:stretch>
               </a:blipFill>
             </p:spPr>
@@ -13680,8 +15499,8 @@
           </a:p>
         </p:txBody>
       </p:sp>
-      <mc:AlternateContent xmlns:mc="http://schemas.openxmlformats.org/markup-compatibility/2006" xmlns:a14="http://schemas.microsoft.com/office/drawing/2010/main">
-        <mc:Choice Requires="a14">
+      <mc:AlternateContent xmlns:mc="http://schemas.openxmlformats.org/markup-compatibility/2006">
+        <mc:Choice xmlns:a14="http://schemas.microsoft.com/office/drawing/2010/main" Requires="a14">
           <p:sp>
             <p:nvSpPr>
               <p:cNvPr id="3" name="Объект 2">
@@ -13743,14 +15562,70 @@
                     <a:latin typeface="Times New Roman" panose="02020603050405020304" pitchFamily="18" charset="0"/>
                     <a:ea typeface="Times New Roman" panose="02020603050405020304" pitchFamily="18" charset="0"/>
                   </a:rPr>
-                  <a:t> Задача размера n должна сводиться к одной или нескольким подзадачам того же типа меньшего размера. Например, сортировка слиянием сводит сортировку массива длины n к сортировке двух массивов длины </a:t>
+                  <a:t> Задача размера </a:t>
+                </a:r>
+                <a14:m>
+                  <m:oMath xmlns:m="http://schemas.openxmlformats.org/officeDocument/2006/math">
+                    <m:r>
+                      <a:rPr lang="ru-RU" sz="1800" i="1" dirty="0" smtClean="0">
+                        <a:effectLst/>
+                        <a:latin typeface="Cambria Math" panose="02040503050406030204" pitchFamily="18" charset="0"/>
+                        <a:ea typeface="Times New Roman" panose="02020603050405020304" pitchFamily="18" charset="0"/>
+                      </a:rPr>
+                      <m:t>𝑛</m:t>
+                    </m:r>
+                  </m:oMath>
+                </a14:m>
+                <a:r>
+                  <a:rPr lang="ru-RU" sz="1800" dirty="0">
+                    <a:effectLst/>
+                    <a:latin typeface="Times New Roman" panose="02020603050405020304" pitchFamily="18" charset="0"/>
+                    <a:ea typeface="Times New Roman" panose="02020603050405020304" pitchFamily="18" charset="0"/>
+                  </a:rPr>
+                  <a:t> должна сводиться к одной или нескольким подзадачам того же типа меньшего размера. Например, сортировка слиянием сводит сортировку массива длины </a:t>
+                </a:r>
+                <a14:m>
+                  <m:oMath xmlns:m="http://schemas.openxmlformats.org/officeDocument/2006/math">
+                    <m:r>
+                      <a:rPr lang="ru-RU" sz="1800" i="1" dirty="0" smtClean="0">
+                        <a:effectLst/>
+                        <a:latin typeface="Cambria Math" panose="02040503050406030204" pitchFamily="18" charset="0"/>
+                        <a:ea typeface="Times New Roman" panose="02020603050405020304" pitchFamily="18" charset="0"/>
+                      </a:rPr>
+                      <m:t>𝑛</m:t>
+                    </m:r>
+                  </m:oMath>
+                </a14:m>
+                <a:r>
+                  <a:rPr lang="ru-RU" sz="1800" dirty="0">
+                    <a:effectLst/>
+                    <a:latin typeface="Times New Roman" panose="02020603050405020304" pitchFamily="18" charset="0"/>
+                    <a:ea typeface="Times New Roman" panose="02020603050405020304" pitchFamily="18" charset="0"/>
+                  </a:rPr>
+                  <a:t> к сортировке двух массивов длины</a:t>
+                </a:r>
+                <a:r>
+                  <a:rPr lang="en-US" sz="1800" dirty="0">
+                    <a:effectLst/>
+                    <a:latin typeface="Times New Roman" panose="02020603050405020304" pitchFamily="18" charset="0"/>
+                    <a:ea typeface="Times New Roman" panose="02020603050405020304" pitchFamily="18" charset="0"/>
+                  </a:rPr>
+                  <a:t> </a:t>
+                </a:r>
+                <a:r>
+                  <a:rPr lang="ru-RU" sz="1800" dirty="0">
+                    <a:effectLst/>
+                    <a:latin typeface="Times New Roman" panose="02020603050405020304" pitchFamily="18" charset="0"/>
+                    <a:ea typeface="Times New Roman" panose="02020603050405020304" pitchFamily="18" charset="0"/>
+                  </a:rPr>
+                  <a:t> </a:t>
                 </a:r>
                 <a14:m>
                   <m:oMath xmlns:m="http://schemas.openxmlformats.org/officeDocument/2006/math">
                     <m:f>
                       <m:fPr>
                         <m:ctrlPr>
-                          <a:rPr lang="ru-RU" sz="1800" b="1" i="1">
+                          <a:rPr lang="ru-RU" sz="1800" i="1">
                             <a:effectLst/>
                             <a:latin typeface="Cambria Math" panose="02040503050406030204" pitchFamily="18" charset="0"/>
                             <a:ea typeface="Times New Roman" panose="02020603050405020304" pitchFamily="18" charset="0"/>
@@ -13759,34 +15634,42 @@
                       </m:fPr>
                       <m:num>
                         <m:r>
-                          <a:rPr lang="ru-RU" sz="1800" b="1" i="1">
+                          <a:rPr lang="ru-RU" sz="1800" b="0" i="1">
                             <a:effectLst/>
                             <a:latin typeface="Cambria Math" panose="02040503050406030204" pitchFamily="18" charset="0"/>
                             <a:ea typeface="Times New Roman" panose="02020603050405020304" pitchFamily="18" charset="0"/>
                           </a:rPr>
-                          <m:t>𝒏</m:t>
+                          <m:t>𝑛</m:t>
                         </m:r>
                       </m:num>
                       <m:den>
                         <m:r>
-                          <a:rPr lang="ru-RU" sz="1800" b="1" i="1">
+                          <a:rPr lang="ru-RU" sz="1800" b="0" i="1">
                             <a:effectLst/>
                             <a:latin typeface="Cambria Math" panose="02040503050406030204" pitchFamily="18" charset="0"/>
                             <a:ea typeface="Times New Roman" panose="02020603050405020304" pitchFamily="18" charset="0"/>
                           </a:rPr>
-                          <m:t>𝟐</m:t>
+                          <m:t>2</m:t>
                         </m:r>
                       </m:den>
                     </m:f>
                   </m:oMath>
                 </a14:m>
                 <a:r>
+                  <a:rPr lang="ru-RU" sz="1800" i="1" dirty="0">
+                    <a:effectLst/>
+                    <a:latin typeface="Times New Roman" panose="02020603050405020304" pitchFamily="18" charset="0"/>
+                    <a:ea typeface="Times New Roman" panose="02020603050405020304" pitchFamily="18" charset="0"/>
+                  </a:rPr>
+                  <a:t> </a:t>
+                </a:r>
+                <a:r>
                   <a:rPr lang="ru-RU" sz="1800" dirty="0">
                     <a:effectLst/>
                     <a:latin typeface="Times New Roman" panose="02020603050405020304" pitchFamily="18" charset="0"/>
                     <a:ea typeface="Times New Roman" panose="02020603050405020304" pitchFamily="18" charset="0"/>
                   </a:rPr>
-                  <a:t> ; </a:t>
+                  <a:t>; </a:t>
                 </a:r>
                 <a:r>
                   <a:rPr lang="ru-RU" sz="1800" dirty="0">
@@ -13843,7 +15726,27 @@
                     <a:latin typeface="Times New Roman" panose="02020603050405020304" pitchFamily="18" charset="0"/>
                     <a:ea typeface="Times New Roman" panose="02020603050405020304" pitchFamily="18" charset="0"/>
                   </a:rPr>
-                  <a:t>. Размеры подзадач должны определяться только n, а не содержимым входных данных. В сортировке Бэтчера подзадачи всегда имеют размеры </a:t>
+                  <a:t>. Размеры подзадач должны определяться только </a:t>
+                </a:r>
+                <a14:m>
+                  <m:oMath xmlns:m="http://schemas.openxmlformats.org/officeDocument/2006/math">
+                    <m:r>
+                      <a:rPr lang="ru-RU" sz="1800" i="1" dirty="0" smtClean="0">
+                        <a:effectLst/>
+                        <a:latin typeface="Cambria Math" panose="02040503050406030204" pitchFamily="18" charset="0"/>
+                        <a:ea typeface="Times New Roman" panose="02020603050405020304" pitchFamily="18" charset="0"/>
+                      </a:rPr>
+                      <m:t>𝑛</m:t>
+                    </m:r>
+                  </m:oMath>
+                </a14:m>
+                <a:r>
+                  <a:rPr lang="ru-RU" sz="1800" dirty="0">
+                    <a:effectLst/>
+                    <a:latin typeface="Times New Roman" panose="02020603050405020304" pitchFamily="18" charset="0"/>
+                    <a:ea typeface="Times New Roman" panose="02020603050405020304" pitchFamily="18" charset="0"/>
+                  </a:rPr>
+                  <a:t>, а не содержимым входных данных. В сортировке Бэтчера подзадачи всегда имеют размеры </a:t>
                 </a:r>
                 <a14:m>
                   <m:oMath xmlns:m="http://schemas.openxmlformats.org/officeDocument/2006/math">
@@ -13909,20 +15812,17 @@
                     <a:latin typeface="Times New Roman" panose="02020603050405020304" pitchFamily="18" charset="0"/>
                     <a:ea typeface="Times New Roman" panose="02020603050405020304" pitchFamily="18" charset="0"/>
                   </a:rPr>
-                  <a:t> Работа, выполняемая вне рекурсивных вызовов, должна быть выражена формулой от n. В сортировке слиянием это </a:t>
+                  <a:t> Работа, выполняемая вне рекурсивных вызовов, должна быть выражена формулой от </a:t>
                 </a:r>
                 <a14:m>
                   <m:oMath xmlns:m="http://schemas.openxmlformats.org/officeDocument/2006/math">
                     <m:r>
-                      <m:rPr>
-                        <m:sty m:val="p"/>
-                      </m:rPr>
-                      <a:rPr lang="ru-RU" sz="1800">
+                      <a:rPr lang="ru-RU" sz="1800" i="1" dirty="0" smtClean="0">
                         <a:effectLst/>
                         <a:latin typeface="Cambria Math" panose="02040503050406030204" pitchFamily="18" charset="0"/>
                         <a:ea typeface="Times New Roman" panose="02020603050405020304" pitchFamily="18" charset="0"/>
                       </a:rPr>
-                      <m:t>cn</m:t>
+                      <m:t>𝑛</m:t>
                     </m:r>
                   </m:oMath>
                 </a14:m>
@@ -13932,14 +15832,64 @@
                     <a:latin typeface="Times New Roman" panose="02020603050405020304" pitchFamily="18" charset="0"/>
                     <a:ea typeface="Times New Roman" panose="02020603050405020304" pitchFamily="18" charset="0"/>
                   </a:rPr>
-                  <a:t>, в чётно-нечётном слиянии Бэтчера — </a:t>
+                  <a:t>. В сортировке слиянием это </a:t>
+                </a:r>
+                <a14:m>
+                  <m:oMath xmlns:m="http://schemas.openxmlformats.org/officeDocument/2006/math">
+                    <m:r>
+                      <a:rPr lang="ru-RU" sz="1800" i="1" dirty="0" smtClean="0">
+                        <a:effectLst/>
+                        <a:latin typeface="Cambria Math" panose="02040503050406030204" pitchFamily="18" charset="0"/>
+                        <a:ea typeface="Times New Roman" panose="02020603050405020304" pitchFamily="18" charset="0"/>
+                      </a:rPr>
+                      <m:t>𝑐</m:t>
+                    </m:r>
+                    <m:r>
+                      <a:rPr lang="en-US" sz="1800" i="1" dirty="0">
+                        <a:latin typeface="Cambria Math" panose="02040503050406030204" pitchFamily="18" charset="0"/>
+                      </a:rPr>
+                      <m:t>·</m:t>
+                    </m:r>
+                    <m:r>
+                      <a:rPr lang="ru-RU" sz="1800" i="1" dirty="0" smtClean="0">
+                        <a:effectLst/>
+                        <a:latin typeface="Cambria Math" panose="02040503050406030204" pitchFamily="18" charset="0"/>
+                        <a:ea typeface="Times New Roman" panose="02020603050405020304" pitchFamily="18" charset="0"/>
+                      </a:rPr>
+                      <m:t>𝑛</m:t>
+                    </m:r>
+                  </m:oMath>
+                </a14:m>
+                <a:r>
+                  <a:rPr lang="ru-RU" sz="1800" dirty="0">
+                    <a:effectLst/>
+                    <a:latin typeface="Times New Roman" panose="02020603050405020304" pitchFamily="18" charset="0"/>
+                    <a:ea typeface="Times New Roman" panose="02020603050405020304" pitchFamily="18" charset="0"/>
+                  </a:rPr>
+                  <a:t>, в чётно-нечётном слиянии Бэтчера</a:t>
+                </a:r>
+                <a:r>
+                  <a:rPr lang="en-US" sz="1800" dirty="0">
+                    <a:effectLst/>
+                    <a:latin typeface="Times New Roman" panose="02020603050405020304" pitchFamily="18" charset="0"/>
+                    <a:ea typeface="Times New Roman" panose="02020603050405020304" pitchFamily="18" charset="0"/>
+                  </a:rPr>
+                  <a:t>:</a:t>
+                </a:r>
+                <a:r>
+                  <a:rPr lang="ru-RU" sz="1800" dirty="0">
+                    <a:effectLst/>
+                    <a:latin typeface="Times New Roman" panose="02020603050405020304" pitchFamily="18" charset="0"/>
+                    <a:ea typeface="Times New Roman" panose="02020603050405020304" pitchFamily="18" charset="0"/>
+                  </a:rPr>
+                  <a:t> </a:t>
                 </a:r>
                 <a14:m>
                   <m:oMath xmlns:m="http://schemas.openxmlformats.org/officeDocument/2006/math">
                     <m:f>
                       <m:fPr>
                         <m:ctrlPr>
-                          <a:rPr lang="ru-RU" sz="1800" i="1">
+                          <a:rPr lang="ru-RU" sz="1800" i="1" dirty="0" smtClean="0">
                             <a:effectLst/>
                             <a:latin typeface="Cambria Math" panose="02040503050406030204" pitchFamily="18" charset="0"/>
                             <a:ea typeface="Times New Roman" panose="02020603050405020304" pitchFamily="18" charset="0"/>
@@ -13948,7 +15898,7 @@
                       </m:fPr>
                       <m:num>
                         <m:r>
-                          <a:rPr lang="ru-RU" sz="1800" i="1">
+                          <a:rPr lang="ru-RU" sz="1800" i="1" dirty="0" smtClean="0">
                             <a:effectLst/>
                             <a:latin typeface="Cambria Math" panose="02040503050406030204" pitchFamily="18" charset="0"/>
                             <a:ea typeface="Times New Roman" panose="02020603050405020304" pitchFamily="18" charset="0"/>
@@ -13958,7 +15908,7 @@
                       </m:num>
                       <m:den>
                         <m:r>
-                          <a:rPr lang="ru-RU" sz="1800" i="1">
+                          <a:rPr lang="ru-RU" sz="1800" i="1" dirty="0" smtClean="0">
                             <a:effectLst/>
                             <a:latin typeface="Cambria Math" panose="02040503050406030204" pitchFamily="18" charset="0"/>
                             <a:ea typeface="Times New Roman" panose="02020603050405020304" pitchFamily="18" charset="0"/>
@@ -13968,7 +15918,7 @@
                       </m:den>
                     </m:f>
                     <m:r>
-                      <a:rPr lang="ru-RU" sz="1800" i="1">
+                      <a:rPr lang="ru-RU" sz="1800" i="1" dirty="0" smtClean="0">
                         <a:effectLst/>
                         <a:latin typeface="Cambria Math" panose="02040503050406030204" pitchFamily="18" charset="0"/>
                         <a:ea typeface="Times New Roman" panose="02020603050405020304" pitchFamily="18" charset="0"/>
@@ -13983,7 +15933,51 @@
                     <a:latin typeface="Times New Roman" panose="02020603050405020304" pitchFamily="18" charset="0"/>
                     <a:ea typeface="Times New Roman" panose="02020603050405020304" pitchFamily="18" charset="0"/>
                   </a:rPr>
-                  <a:t>, в алгоритме Карацубы — Θ(n).</a:t>
+                  <a:t>, в алгоритме Карацубы — </a:t>
+                </a:r>
+                <a14:m>
+                  <m:oMath xmlns:m="http://schemas.openxmlformats.org/officeDocument/2006/math">
+                    <m:r>
+                      <a:rPr lang="ru-RU" sz="1800" i="1" dirty="0" smtClean="0">
+                        <a:effectLst/>
+                        <a:latin typeface="Cambria Math" panose="02040503050406030204" pitchFamily="18" charset="0"/>
+                        <a:ea typeface="Times New Roman" panose="02020603050405020304" pitchFamily="18" charset="0"/>
+                      </a:rPr>
+                      <m:t>𝛩</m:t>
+                    </m:r>
+                    <m:r>
+                      <a:rPr lang="ru-RU" sz="1800" i="1" dirty="0" smtClean="0">
+                        <a:effectLst/>
+                        <a:latin typeface="Cambria Math" panose="02040503050406030204" pitchFamily="18" charset="0"/>
+                        <a:ea typeface="Times New Roman" panose="02020603050405020304" pitchFamily="18" charset="0"/>
+                      </a:rPr>
+                      <m:t>(</m:t>
+                    </m:r>
+                    <m:r>
+                      <a:rPr lang="ru-RU" sz="1800" i="1" dirty="0" smtClean="0">
+                        <a:effectLst/>
+                        <a:latin typeface="Cambria Math" panose="02040503050406030204" pitchFamily="18" charset="0"/>
+                        <a:ea typeface="Times New Roman" panose="02020603050405020304" pitchFamily="18" charset="0"/>
+                      </a:rPr>
+                      <m:t>𝑛</m:t>
+                    </m:r>
+                    <m:r>
+                      <a:rPr lang="ru-RU" sz="1800" i="1" dirty="0" smtClean="0">
+                        <a:effectLst/>
+                        <a:latin typeface="Cambria Math" panose="02040503050406030204" pitchFamily="18" charset="0"/>
+                        <a:ea typeface="Times New Roman" panose="02020603050405020304" pitchFamily="18" charset="0"/>
+                      </a:rPr>
+                      <m:t>)</m:t>
+                    </m:r>
+                  </m:oMath>
+                </a14:m>
+                <a:r>
+                  <a:rPr lang="ru-RU" sz="1800" dirty="0">
+                    <a:effectLst/>
+                    <a:latin typeface="Times New Roman" panose="02020603050405020304" pitchFamily="18" charset="0"/>
+                    <a:ea typeface="Times New Roman" panose="02020603050405020304" pitchFamily="18" charset="0"/>
+                  </a:rPr>
+                  <a:t>.</a:t>
                 </a:r>
               </a:p>
               <a:p>
@@ -13995,7 +15989,7 @@
             </p:txBody>
           </p:sp>
         </mc:Choice>
-        <mc:Fallback xmlns="">
+        <mc:Fallback>
           <p:sp>
             <p:nvSpPr>
               <p:cNvPr id="3" name="Объект 2">
@@ -14218,630 +16212,581 @@
           </a:p>
         </p:txBody>
       </p:sp>
-      <p:graphicFrame>
-        <p:nvGraphicFramePr>
-          <p:cNvPr id="12" name="Объект 11">
-            <a:extLst>
-              <a:ext uri="{FF2B5EF4-FFF2-40B4-BE49-F238E27FC236}">
-                <a16:creationId xmlns:a16="http://schemas.microsoft.com/office/drawing/2014/main" id="{DE20148F-6EB6-E3AB-403C-5DCDBCF08EBE}"/>
-              </a:ext>
-            </a:extLst>
-          </p:cNvPr>
-          <p:cNvGraphicFramePr>
-            <a:graphicFrameLocks noGrp="1"/>
-          </p:cNvGraphicFramePr>
-          <p:nvPr>
-            <p:ph idx="1"/>
-            <p:extLst>
-              <p:ext uri="{D42A27DB-BD31-4B8C-83A1-F6EECF244321}">
-                <p14:modId xmlns:p14="http://schemas.microsoft.com/office/powerpoint/2010/main" val="2040341977"/>
-              </p:ext>
-            </p:extLst>
-          </p:nvPr>
-        </p:nvGraphicFramePr>
-        <p:xfrm>
-          <a:off x="605396" y="1879250"/>
-          <a:ext cx="9137984" cy="3943997"/>
-        </p:xfrm>
-        <a:graphic>
-          <a:graphicData uri="http://schemas.openxmlformats.org/drawingml/2006/table">
-            <a:tbl>
-              <a:tblPr firstRow="1" firstCol="1" bandRow="1">
-                <a:tableStyleId>{5C22544A-7EE6-4342-B048-85BDC9FD1C3A}</a:tableStyleId>
-              </a:tblPr>
-              <a:tblGrid>
-                <a:gridCol w="1823940">
-                  <a:extLst>
-                    <a:ext uri="{9D8B030D-6E8A-4147-A177-3AD203B41FA5}">
-                      <a16:colId xmlns:a16="http://schemas.microsoft.com/office/drawing/2014/main" val="2972771461"/>
-                    </a:ext>
-                  </a:extLst>
-                </a:gridCol>
-                <a:gridCol w="1828511">
-                  <a:extLst>
-                    <a:ext uri="{9D8B030D-6E8A-4147-A177-3AD203B41FA5}">
-                      <a16:colId xmlns:a16="http://schemas.microsoft.com/office/drawing/2014/main" val="2908776324"/>
-                    </a:ext>
-                  </a:extLst>
-                </a:gridCol>
-                <a:gridCol w="1828511">
-                  <a:extLst>
-                    <a:ext uri="{9D8B030D-6E8A-4147-A177-3AD203B41FA5}">
-                      <a16:colId xmlns:a16="http://schemas.microsoft.com/office/drawing/2014/main" val="1968334037"/>
-                    </a:ext>
-                  </a:extLst>
-                </a:gridCol>
-                <a:gridCol w="1828511">
-                  <a:extLst>
-                    <a:ext uri="{9D8B030D-6E8A-4147-A177-3AD203B41FA5}">
-                      <a16:colId xmlns:a16="http://schemas.microsoft.com/office/drawing/2014/main" val="2864858108"/>
-                    </a:ext>
-                  </a:extLst>
-                </a:gridCol>
-                <a:gridCol w="1828511">
-                  <a:extLst>
-                    <a:ext uri="{9D8B030D-6E8A-4147-A177-3AD203B41FA5}">
-                      <a16:colId xmlns:a16="http://schemas.microsoft.com/office/drawing/2014/main" val="4120696970"/>
-                    </a:ext>
-                  </a:extLst>
-                </a:gridCol>
-              </a:tblGrid>
-              <a:tr h="727783">
-                <a:tc>
-                  <a:txBody>
-                    <a:bodyPr/>
-                    <a:lstStyle/>
-                    <a:p>
-                      <a:r>
-                        <a:rPr lang="ru-RU">
-                          <a:effectLst/>
-                        </a:rPr>
-                        <a:t>Алгоритм</a:t>
-                      </a:r>
-                      <a:endParaRPr lang="ru-RU"/>
-                    </a:p>
-                  </a:txBody>
-                  <a:tcPr anchor="ctr"/>
-                </a:tc>
-                <a:tc>
-                  <a:txBody>
-                    <a:bodyPr/>
-                    <a:lstStyle/>
-                    <a:p>
-                      <a:r>
-                        <a:rPr lang="en-US">
-                          <a:effectLst/>
-                        </a:rPr>
-                        <a:t>A: </a:t>
-                      </a:r>
-                      <a:r>
-                        <a:rPr lang="ru-RU">
-                          <a:effectLst/>
-                        </a:rPr>
-                        <a:t>рекурсия</a:t>
-                      </a:r>
-                      <a:endParaRPr lang="ru-RU"/>
-                    </a:p>
-                  </a:txBody>
-                  <a:tcPr anchor="ctr"/>
-                </a:tc>
-                <a:tc>
-                  <a:txBody>
-                    <a:bodyPr/>
-                    <a:lstStyle/>
-                    <a:p>
-                      <a:r>
-                        <a:rPr lang="en-US">
-                          <a:effectLst/>
-                        </a:rPr>
-                        <a:t>B: </a:t>
-                      </a:r>
-                      <a:r>
-                        <a:rPr lang="ru-RU">
-                          <a:effectLst/>
-                        </a:rPr>
-                        <a:t>фиксированные размеры</a:t>
-                      </a:r>
-                      <a:endParaRPr lang="ru-RU"/>
-                    </a:p>
-                  </a:txBody>
-                  <a:tcPr anchor="ctr"/>
-                </a:tc>
-                <a:tc>
-                  <a:txBody>
-                    <a:bodyPr/>
-                    <a:lstStyle/>
-                    <a:p>
-                      <a:r>
-                        <a:rPr lang="en-US">
-                          <a:effectLst/>
-                        </a:rPr>
-                        <a:t>C: </a:t>
-                      </a:r>
-                      <a:r>
-                        <a:rPr lang="ru-RU">
-                          <a:effectLst/>
-                        </a:rPr>
-                        <a:t>явная работа</a:t>
-                      </a:r>
-                      <a:endParaRPr lang="ru-RU"/>
-                    </a:p>
-                  </a:txBody>
-                  <a:tcPr anchor="ctr"/>
-                </a:tc>
-                <a:tc>
-                  <a:txBody>
-                    <a:bodyPr/>
-                    <a:lstStyle/>
-                    <a:p>
-                      <a:r>
-                        <a:rPr lang="ru-RU">
-                          <a:effectLst/>
-                        </a:rPr>
-                        <a:t>Метод применим?</a:t>
-                      </a:r>
-                      <a:endParaRPr lang="ru-RU"/>
-                    </a:p>
-                  </a:txBody>
-                  <a:tcPr anchor="ctr"/>
-                </a:tc>
+      <mc:AlternateContent xmlns:mc="http://schemas.openxmlformats.org/markup-compatibility/2006">
+        <mc:Choice xmlns:a14="http://schemas.microsoft.com/office/drawing/2010/main" Requires="a14">
+          <p:sp>
+            <p:nvSpPr>
+              <p:cNvPr id="6" name="Объект 5">
                 <a:extLst>
-                  <a:ext uri="{0D108BD9-81ED-4DB2-BD59-A6C34878D82A}">
-                    <a16:rowId xmlns:a16="http://schemas.microsoft.com/office/drawing/2014/main" val="2638527655"/>
+                  <a:ext uri="{FF2B5EF4-FFF2-40B4-BE49-F238E27FC236}">
+                    <a16:creationId xmlns:a16="http://schemas.microsoft.com/office/drawing/2014/main" id="{F2447BDF-697A-A416-9F2A-D64868F46B68}"/>
                   </a:ext>
                 </a:extLst>
-              </a:tr>
-              <a:tr h="536218">
-                <a:tc>
-                  <a:txBody>
-                    <a:bodyPr/>
-                    <a:lstStyle/>
-                    <a:p>
-                      <a:r>
-                        <a:rPr lang="ru-RU">
-                          <a:effectLst/>
-                        </a:rPr>
-                        <a:t>Бэтчера</a:t>
-                      </a:r>
-                      <a:endParaRPr lang="ru-RU"/>
-                    </a:p>
-                  </a:txBody>
-                  <a:tcPr anchor="ctr"/>
-                </a:tc>
-                <a:tc>
-                  <a:txBody>
-                    <a:bodyPr/>
-                    <a:lstStyle/>
-                    <a:p>
-                      <a:r>
-                        <a:rPr lang="ru-RU">
-                          <a:effectLst/>
-                        </a:rPr>
-                        <a:t>да</a:t>
-                      </a:r>
-                      <a:endParaRPr lang="ru-RU"/>
-                    </a:p>
-                  </a:txBody>
-                  <a:tcPr anchor="ctr"/>
-                </a:tc>
-                <a:tc>
-                  <a:txBody>
-                    <a:bodyPr/>
-                    <a:lstStyle/>
-                    <a:p>
-                      <a:r>
-                        <a:rPr lang="ru-RU">
-                          <a:effectLst/>
-                        </a:rPr>
-                        <a:t>да</a:t>
-                      </a:r>
-                      <a:endParaRPr lang="ru-RU"/>
-                    </a:p>
-                  </a:txBody>
-                  <a:tcPr anchor="ctr"/>
-                </a:tc>
-                <a:tc>
-                  <a:txBody>
-                    <a:bodyPr/>
-                    <a:lstStyle/>
-                    <a:p>
-                      <a:r>
-                        <a:rPr lang="ru-RU">
-                          <a:effectLst/>
-                        </a:rPr>
-                        <a:t>да</a:t>
-                      </a:r>
-                      <a:endParaRPr lang="ru-RU"/>
-                    </a:p>
-                  </a:txBody>
-                  <a:tcPr anchor="ctr"/>
-                </a:tc>
-                <a:tc>
-                  <a:txBody>
-                    <a:bodyPr/>
-                    <a:lstStyle/>
-                    <a:p>
-                      <a:r>
-                        <a:rPr lang="ru-RU">
-                          <a:effectLst/>
-                        </a:rPr>
-                        <a:t>да</a:t>
-                      </a:r>
-                      <a:endParaRPr lang="ru-RU"/>
-                    </a:p>
-                  </a:txBody>
-                  <a:tcPr anchor="ctr"/>
-                </a:tc>
+              </p:cNvPr>
+              <p:cNvSpPr>
+                <a:spLocks noGrp="1"/>
+              </p:cNvSpPr>
+              <p:nvPr>
+                <p:ph idx="1"/>
+              </p:nvPr>
+            </p:nvSpPr>
+            <p:spPr/>
+            <p:txBody>
+              <a:bodyPr>
+                <a:normAutofit/>
+              </a:bodyPr>
+              <a:lstStyle/>
+              <a:p>
+                <a:pPr marL="0" indent="0" rtl="0">
+                  <a:buNone/>
+                </a:pPr>
+                <a:r>
+                  <a:rPr lang="ru-RU" sz="1900" dirty="0">
+                    <a:effectLst/>
+                    <a:latin typeface="Times New Roman" panose="02020603050405020304" pitchFamily="18" charset="0"/>
+                    <a:cs typeface="Times New Roman" panose="02020603050405020304" pitchFamily="18" charset="0"/>
+                  </a:rPr>
+                  <a:t>Подходят напрямую</a:t>
+                </a:r>
+                <a:r>
+                  <a:rPr lang="en-US" sz="1900" dirty="0">
+                    <a:effectLst/>
+                    <a:latin typeface="Times New Roman" panose="02020603050405020304" pitchFamily="18" charset="0"/>
+                    <a:cs typeface="Times New Roman" panose="02020603050405020304" pitchFamily="18" charset="0"/>
+                  </a:rPr>
+                  <a:t>:</a:t>
+                </a:r>
+                <a:endParaRPr lang="ru-RU" sz="1900" dirty="0">
+                  <a:latin typeface="Times New Roman" panose="02020603050405020304" pitchFamily="18" charset="0"/>
+                  <a:cs typeface="Times New Roman" panose="02020603050405020304" pitchFamily="18" charset="0"/>
+                </a:endParaRPr>
+              </a:p>
+              <a:p>
+                <a:pPr rtl="0">
+                  <a:buFont typeface="Arial" panose="020B0604020202020204" pitchFamily="34" charset="0"/>
+                  <a:buChar char="•"/>
+                </a:pPr>
+                <a:r>
+                  <a:rPr lang="en-US" sz="1900" dirty="0">
+                    <a:effectLst/>
+                    <a:latin typeface="Times New Roman" panose="02020603050405020304" pitchFamily="18" charset="0"/>
+                    <a:cs typeface="Times New Roman" panose="02020603050405020304" pitchFamily="18" charset="0"/>
+                  </a:rPr>
+                  <a:t>C</a:t>
+                </a:r>
+                <a:r>
+                  <a:rPr lang="ru-RU" sz="1900" dirty="0" err="1">
+                    <a:latin typeface="Times New Roman" panose="02020603050405020304" pitchFamily="18" charset="0"/>
+                    <a:cs typeface="Times New Roman" panose="02020603050405020304" pitchFamily="18" charset="0"/>
+                  </a:rPr>
+                  <a:t>ортировка</a:t>
+                </a:r>
+                <a:r>
+                  <a:rPr lang="ru-RU" sz="1900" dirty="0">
+                    <a:latin typeface="Times New Roman" panose="02020603050405020304" pitchFamily="18" charset="0"/>
+                    <a:cs typeface="Times New Roman" panose="02020603050405020304" pitchFamily="18" charset="0"/>
+                  </a:rPr>
+                  <a:t> </a:t>
+                </a:r>
+                <a:r>
+                  <a:rPr lang="ru-RU" sz="1900" dirty="0">
+                    <a:effectLst/>
+                    <a:latin typeface="Times New Roman" panose="02020603050405020304" pitchFamily="18" charset="0"/>
+                    <a:cs typeface="Times New Roman" panose="02020603050405020304" pitchFamily="18" charset="0"/>
+                  </a:rPr>
+                  <a:t>Бэтчер</a:t>
+                </a:r>
+                <a:r>
+                  <a:rPr lang="ru-RU" sz="1900" dirty="0">
+                    <a:latin typeface="Times New Roman" panose="02020603050405020304" pitchFamily="18" charset="0"/>
+                    <a:cs typeface="Times New Roman" panose="02020603050405020304" pitchFamily="18" charset="0"/>
+                  </a:rPr>
+                  <a:t>а</a:t>
+                </a:r>
+                <a:r>
+                  <a:rPr lang="ru-RU" sz="1900" dirty="0">
+                    <a:effectLst/>
+                    <a:latin typeface="Times New Roman" panose="02020603050405020304" pitchFamily="18" charset="0"/>
+                    <a:cs typeface="Times New Roman" panose="02020603050405020304" pitchFamily="18" charset="0"/>
+                  </a:rPr>
+                  <a:t> — фиксированные подзадачи </a:t>
+                </a:r>
+                <a:r>
+                  <a:rPr lang="ru-RU" sz="1900" dirty="0">
+                    <a:latin typeface="Times New Roman" panose="02020603050405020304" pitchFamily="18" charset="0"/>
+                    <a:cs typeface="Times New Roman" panose="02020603050405020304" pitchFamily="18" charset="0"/>
+                  </a:rPr>
+                  <a:t>размера</a:t>
+                </a:r>
+                <a:r>
+                  <a:rPr lang="ru-RU" sz="1900" dirty="0">
+                    <a:effectLst/>
+                    <a:latin typeface="Times New Roman" panose="02020603050405020304" pitchFamily="18" charset="0"/>
+                    <a:cs typeface="Times New Roman" panose="02020603050405020304" pitchFamily="18" charset="0"/>
+                  </a:rPr>
+                  <a:t> </a:t>
+                </a:r>
+                <a14:m>
+                  <m:oMath xmlns:m="http://schemas.openxmlformats.org/officeDocument/2006/math">
+                    <m:f>
+                      <m:fPr>
+                        <m:ctrlPr>
+                          <a:rPr lang="en-US" sz="1900" i="1" dirty="0" smtClean="0">
+                            <a:latin typeface="Cambria Math" panose="02040503050406030204" pitchFamily="18" charset="0"/>
+                            <a:cs typeface="Times New Roman" panose="02020603050405020304" pitchFamily="18" charset="0"/>
+                          </a:rPr>
+                        </m:ctrlPr>
+                      </m:fPr>
+                      <m:num>
+                        <m:r>
+                          <a:rPr lang="en-US" sz="1900" i="1" dirty="0" smtClean="0">
+                            <a:latin typeface="Cambria Math" panose="02040503050406030204" pitchFamily="18" charset="0"/>
+                            <a:cs typeface="Times New Roman" panose="02020603050405020304" pitchFamily="18" charset="0"/>
+                          </a:rPr>
+                          <m:t>𝑛</m:t>
+                        </m:r>
+                      </m:num>
+                      <m:den>
+                        <m:r>
+                          <a:rPr lang="en-US" sz="1900" i="1" dirty="0" smtClean="0">
+                            <a:latin typeface="Cambria Math" panose="02040503050406030204" pitchFamily="18" charset="0"/>
+                            <a:cs typeface="Times New Roman" panose="02020603050405020304" pitchFamily="18" charset="0"/>
+                          </a:rPr>
+                          <m:t>2</m:t>
+                        </m:r>
+                      </m:den>
+                    </m:f>
+                  </m:oMath>
+                </a14:m>
+                <a:r>
+                  <a:rPr lang="en-US" sz="1900" dirty="0">
+                    <a:effectLst/>
+                    <a:latin typeface="Times New Roman" panose="02020603050405020304" pitchFamily="18" charset="0"/>
+                    <a:cs typeface="Times New Roman" panose="02020603050405020304" pitchFamily="18" charset="0"/>
+                  </a:rPr>
+                  <a:t>, </a:t>
+                </a:r>
+                <a:r>
+                  <a:rPr lang="ru-RU" sz="1900" dirty="0">
+                    <a:effectLst/>
+                    <a:latin typeface="Times New Roman" panose="02020603050405020304" pitchFamily="18" charset="0"/>
+                    <a:cs typeface="Times New Roman" panose="02020603050405020304" pitchFamily="18" charset="0"/>
+                  </a:rPr>
+                  <a:t>явное слияние.</a:t>
+                </a:r>
+                <a:endParaRPr lang="ru-RU" sz="1900" dirty="0">
+                  <a:latin typeface="Times New Roman" panose="02020603050405020304" pitchFamily="18" charset="0"/>
+                  <a:cs typeface="Times New Roman" panose="02020603050405020304" pitchFamily="18" charset="0"/>
+                </a:endParaRPr>
+              </a:p>
+              <a:p>
+                <a:pPr rtl="0">
+                  <a:buFont typeface="Arial" panose="020B0604020202020204" pitchFamily="34" charset="0"/>
+                  <a:buChar char="•"/>
+                </a:pPr>
+                <a:r>
+                  <a:rPr lang="en-US" sz="1900" dirty="0">
+                    <a:effectLst/>
+                    <a:latin typeface="Times New Roman" panose="02020603050405020304" pitchFamily="18" charset="0"/>
+                    <a:cs typeface="Times New Roman" panose="02020603050405020304" pitchFamily="18" charset="0"/>
+                  </a:rPr>
+                  <a:t>Merge Sort — </a:t>
+                </a:r>
+                <a:r>
+                  <a:rPr lang="ru-RU" sz="1900" dirty="0">
+                    <a:effectLst/>
+                    <a:latin typeface="Times New Roman" panose="02020603050405020304" pitchFamily="18" charset="0"/>
+                    <a:cs typeface="Times New Roman" panose="02020603050405020304" pitchFamily="18" charset="0"/>
+                  </a:rPr>
+                  <a:t>две половины </a:t>
+                </a:r>
+                <a14:m>
+                  <m:oMath xmlns:m="http://schemas.openxmlformats.org/officeDocument/2006/math">
+                    <m:f>
+                      <m:fPr>
+                        <m:ctrlPr>
+                          <a:rPr lang="en-US" sz="1900" i="1" dirty="0" smtClean="0">
+                            <a:latin typeface="Cambria Math" panose="02040503050406030204" pitchFamily="18" charset="0"/>
+                            <a:cs typeface="Times New Roman" panose="02020603050405020304" pitchFamily="18" charset="0"/>
+                          </a:rPr>
+                        </m:ctrlPr>
+                      </m:fPr>
+                      <m:num>
+                        <m:r>
+                          <a:rPr lang="en-US" sz="1900" i="1" dirty="0" smtClean="0">
+                            <a:latin typeface="Cambria Math" panose="02040503050406030204" pitchFamily="18" charset="0"/>
+                            <a:cs typeface="Times New Roman" panose="02020603050405020304" pitchFamily="18" charset="0"/>
+                          </a:rPr>
+                          <m:t>𝑛</m:t>
+                        </m:r>
+                      </m:num>
+                      <m:den>
+                        <m:r>
+                          <a:rPr lang="en-US" sz="1900" i="1" dirty="0" smtClean="0">
+                            <a:latin typeface="Cambria Math" panose="02040503050406030204" pitchFamily="18" charset="0"/>
+                            <a:cs typeface="Times New Roman" panose="02020603050405020304" pitchFamily="18" charset="0"/>
+                          </a:rPr>
+                          <m:t>2</m:t>
+                        </m:r>
+                      </m:den>
+                    </m:f>
+                  </m:oMath>
+                </a14:m>
+                <a:r>
+                  <a:rPr lang="en-US" sz="1900" dirty="0">
+                    <a:effectLst/>
+                    <a:latin typeface="Times New Roman" panose="02020603050405020304" pitchFamily="18" charset="0"/>
+                    <a:cs typeface="Times New Roman" panose="02020603050405020304" pitchFamily="18" charset="0"/>
+                  </a:rPr>
+                  <a:t>, </a:t>
+                </a:r>
+                <a:r>
+                  <a:rPr lang="ru-RU" sz="1900" dirty="0">
+                    <a:effectLst/>
+                    <a:latin typeface="Times New Roman" panose="02020603050405020304" pitchFamily="18" charset="0"/>
+                    <a:cs typeface="Times New Roman" panose="02020603050405020304" pitchFamily="18" charset="0"/>
+                  </a:rPr>
+                  <a:t>линейное слияние.</a:t>
+                </a:r>
+                <a:endParaRPr lang="ru-RU" sz="1900" dirty="0">
+                  <a:latin typeface="Times New Roman" panose="02020603050405020304" pitchFamily="18" charset="0"/>
+                  <a:cs typeface="Times New Roman" panose="02020603050405020304" pitchFamily="18" charset="0"/>
+                </a:endParaRPr>
+              </a:p>
+              <a:p>
+                <a:pPr rtl="0">
+                  <a:buFont typeface="Arial" panose="020B0604020202020204" pitchFamily="34" charset="0"/>
+                  <a:buChar char="•"/>
+                </a:pPr>
+                <a:r>
+                  <a:rPr lang="en-US" sz="1900" dirty="0" err="1">
+                    <a:effectLst/>
+                    <a:latin typeface="Times New Roman" panose="02020603050405020304" pitchFamily="18" charset="0"/>
+                    <a:cs typeface="Times New Roman" panose="02020603050405020304" pitchFamily="18" charset="0"/>
+                  </a:rPr>
+                  <a:t>Bitonic</a:t>
+                </a:r>
+                <a:r>
+                  <a:rPr lang="en-US" sz="1900" dirty="0">
+                    <a:effectLst/>
+                    <a:latin typeface="Times New Roman" panose="02020603050405020304" pitchFamily="18" charset="0"/>
+                    <a:cs typeface="Times New Roman" panose="02020603050405020304" pitchFamily="18" charset="0"/>
+                  </a:rPr>
+                  <a:t> Sort — </a:t>
+                </a:r>
+                <a:r>
+                  <a:rPr lang="ru-RU" sz="1900" dirty="0">
+                    <a:effectLst/>
+                    <a:latin typeface="Times New Roman" panose="02020603050405020304" pitchFamily="18" charset="0"/>
+                    <a:cs typeface="Times New Roman" panose="02020603050405020304" pitchFamily="18" charset="0"/>
+                  </a:rPr>
+                  <a:t>рекурсивная сортировочная сеть.</a:t>
+                </a:r>
+                <a:endParaRPr lang="ru-RU" sz="1900" dirty="0">
+                  <a:latin typeface="Times New Roman" panose="02020603050405020304" pitchFamily="18" charset="0"/>
+                  <a:cs typeface="Times New Roman" panose="02020603050405020304" pitchFamily="18" charset="0"/>
+                </a:endParaRPr>
+              </a:p>
+              <a:p>
+                <a:pPr rtl="0">
+                  <a:buFont typeface="Arial" panose="020B0604020202020204" pitchFamily="34" charset="0"/>
+                  <a:buChar char="•"/>
+                </a:pPr>
+                <a:r>
+                  <a:rPr lang="en-US" sz="1900" dirty="0">
+                    <a:effectLst/>
+                    <a:latin typeface="Times New Roman" panose="02020603050405020304" pitchFamily="18" charset="0"/>
+                    <a:cs typeface="Times New Roman" panose="02020603050405020304" pitchFamily="18" charset="0"/>
+                  </a:rPr>
+                  <a:t>Quick Sort, </a:t>
+                </a:r>
+                <a:r>
+                  <a:rPr lang="ru-RU" sz="1900" dirty="0">
+                    <a:effectLst/>
+                    <a:latin typeface="Times New Roman" panose="02020603050405020304" pitchFamily="18" charset="0"/>
+                    <a:cs typeface="Times New Roman" panose="02020603050405020304" pitchFamily="18" charset="0"/>
+                  </a:rPr>
+                  <a:t>лучший случай — разбиение пополам.</a:t>
+                </a:r>
+                <a:endParaRPr lang="ru-RU" sz="1900" dirty="0">
+                  <a:latin typeface="Times New Roman" panose="02020603050405020304" pitchFamily="18" charset="0"/>
+                  <a:cs typeface="Times New Roman" panose="02020603050405020304" pitchFamily="18" charset="0"/>
+                </a:endParaRPr>
+              </a:p>
+              <a:p>
+                <a:pPr rtl="0">
+                  <a:buFont typeface="Arial" panose="020B0604020202020204" pitchFamily="34" charset="0"/>
+                  <a:buChar char="•"/>
+                </a:pPr>
+                <a:r>
+                  <a:rPr lang="en-US" sz="1900" dirty="0">
+                    <a:effectLst/>
+                    <a:latin typeface="Times New Roman" panose="02020603050405020304" pitchFamily="18" charset="0"/>
+                    <a:cs typeface="Times New Roman" panose="02020603050405020304" pitchFamily="18" charset="0"/>
+                  </a:rPr>
+                  <a:t>Quick Sort, </a:t>
+                </a:r>
+                <a:r>
+                  <a:rPr lang="ru-RU" sz="1900" dirty="0">
+                    <a:effectLst/>
+                    <a:latin typeface="Times New Roman" panose="02020603050405020304" pitchFamily="18" charset="0"/>
+                    <a:cs typeface="Times New Roman" panose="02020603050405020304" pitchFamily="18" charset="0"/>
+                  </a:rPr>
+                  <a:t>худший случай — подзадача размера </a:t>
+                </a:r>
+                <a14:m>
+                  <m:oMath xmlns:m="http://schemas.openxmlformats.org/officeDocument/2006/math">
+                    <m:r>
+                      <a:rPr lang="en-US" sz="1900" i="1" dirty="0" smtClean="0">
+                        <a:latin typeface="Cambria Math" panose="02040503050406030204" pitchFamily="18" charset="0"/>
+                        <a:cs typeface="Times New Roman" panose="02020603050405020304" pitchFamily="18" charset="0"/>
+                      </a:rPr>
+                      <m:t>𝑛</m:t>
+                    </m:r>
+                    <m:r>
+                      <a:rPr lang="en-US" sz="1900" i="1" dirty="0" smtClean="0">
+                        <a:latin typeface="Cambria Math" panose="02040503050406030204" pitchFamily="18" charset="0"/>
+                        <a:cs typeface="Times New Roman" panose="02020603050405020304" pitchFamily="18" charset="0"/>
+                      </a:rPr>
+                      <m:t>−1</m:t>
+                    </m:r>
+                  </m:oMath>
+                </a14:m>
+                <a:r>
+                  <a:rPr lang="en-US" sz="1900" dirty="0">
+                    <a:effectLst/>
+                    <a:latin typeface="Times New Roman" panose="02020603050405020304" pitchFamily="18" charset="0"/>
+                    <a:cs typeface="Times New Roman" panose="02020603050405020304" pitchFamily="18" charset="0"/>
+                  </a:rPr>
+                  <a:t>.</a:t>
+                </a:r>
+                <a:endParaRPr lang="en-US" sz="1900" dirty="0">
+                  <a:latin typeface="Times New Roman" panose="02020603050405020304" pitchFamily="18" charset="0"/>
+                  <a:cs typeface="Times New Roman" panose="02020603050405020304" pitchFamily="18" charset="0"/>
+                </a:endParaRPr>
+              </a:p>
+              <a:p>
+                <a:pPr marL="0" indent="0">
+                  <a:buNone/>
+                </a:pPr>
+                <a:r>
+                  <a:rPr lang="ru-RU" sz="1900" dirty="0">
+                    <a:effectLst/>
+                    <a:latin typeface="Times New Roman" panose="02020603050405020304" pitchFamily="18" charset="0"/>
+                    <a:cs typeface="Times New Roman" panose="02020603050405020304" pitchFamily="18" charset="0"/>
+                  </a:rPr>
+                  <a:t>Формально подходит:</a:t>
+                </a:r>
+              </a:p>
+              <a:p>
+                <a:pPr>
+                  <a:lnSpc>
+                    <a:spcPct val="100000"/>
+                  </a:lnSpc>
+                </a:pPr>
+                <a:r>
+                  <a:rPr lang="ru-RU" sz="1900" dirty="0" err="1">
+                    <a:latin typeface="Times New Roman" panose="02020603050405020304" pitchFamily="18" charset="0"/>
+                    <a:cs typeface="Times New Roman" panose="02020603050405020304" pitchFamily="18" charset="0"/>
+                  </a:rPr>
+                  <a:t>Insertion</a:t>
+                </a:r>
+                <a:r>
+                  <a:rPr lang="ru-RU" sz="1900" dirty="0">
+                    <a:latin typeface="Times New Roman" panose="02020603050405020304" pitchFamily="18" charset="0"/>
+                    <a:cs typeface="Times New Roman" panose="02020603050405020304" pitchFamily="18" charset="0"/>
+                  </a:rPr>
+                  <a:t> </a:t>
+                </a:r>
+                <a:r>
+                  <a:rPr lang="ru-RU" sz="1900" dirty="0" err="1">
+                    <a:latin typeface="Times New Roman" panose="02020603050405020304" pitchFamily="18" charset="0"/>
+                    <a:cs typeface="Times New Roman" panose="02020603050405020304" pitchFamily="18" charset="0"/>
+                  </a:rPr>
+                  <a:t>Sort</a:t>
+                </a:r>
+                <a:r>
+                  <a:rPr lang="en-US" sz="1900" dirty="0">
+                    <a:latin typeface="Times New Roman" panose="02020603050405020304" pitchFamily="18" charset="0"/>
+                    <a:cs typeface="Times New Roman" panose="02020603050405020304" pitchFamily="18" charset="0"/>
+                  </a:rPr>
+                  <a:t>,</a:t>
+                </a:r>
+                <a:r>
+                  <a:rPr lang="ru-RU" sz="1900" dirty="0">
+                    <a:latin typeface="Times New Roman" panose="02020603050405020304" pitchFamily="18" charset="0"/>
+                    <a:cs typeface="Times New Roman" panose="02020603050405020304" pitchFamily="18" charset="0"/>
+                  </a:rPr>
+                  <a:t> так как можно представить рекуррентным соотношением</a:t>
+                </a:r>
+                <a:r>
+                  <a:rPr lang="en-US" sz="1900" dirty="0">
+                    <a:latin typeface="Times New Roman" panose="02020603050405020304" pitchFamily="18" charset="0"/>
+                    <a:cs typeface="Times New Roman" panose="02020603050405020304" pitchFamily="18" charset="0"/>
+                  </a:rPr>
+                  <a:t>:</a:t>
+                </a:r>
+                <a:r>
+                  <a:rPr lang="ru-RU" sz="1900" dirty="0">
+                    <a:latin typeface="Times New Roman" panose="02020603050405020304" pitchFamily="18" charset="0"/>
+                    <a:cs typeface="Times New Roman" panose="02020603050405020304" pitchFamily="18" charset="0"/>
+                  </a:rPr>
+                  <a:t> </a:t>
+                </a:r>
+                <a14:m>
+                  <m:oMath xmlns:m="http://schemas.openxmlformats.org/officeDocument/2006/math">
+                    <m:r>
+                      <a:rPr lang="ru-RU" sz="1900" i="1" dirty="0" smtClean="0">
+                        <a:latin typeface="Cambria Math" panose="02040503050406030204" pitchFamily="18" charset="0"/>
+                        <a:cs typeface="Times New Roman" panose="02020603050405020304" pitchFamily="18" charset="0"/>
+                      </a:rPr>
+                      <m:t>𝑇</m:t>
+                    </m:r>
+                    <m:d>
+                      <m:dPr>
+                        <m:ctrlPr>
+                          <a:rPr lang="ru-RU" sz="1900" i="1" dirty="0" smtClean="0">
+                            <a:latin typeface="Cambria Math" panose="02040503050406030204" pitchFamily="18" charset="0"/>
+                            <a:cs typeface="Times New Roman" panose="02020603050405020304" pitchFamily="18" charset="0"/>
+                          </a:rPr>
+                        </m:ctrlPr>
+                      </m:dPr>
+                      <m:e>
+                        <m:r>
+                          <a:rPr lang="ru-RU" sz="1900" i="1" dirty="0" smtClean="0">
+                            <a:latin typeface="Cambria Math" panose="02040503050406030204" pitchFamily="18" charset="0"/>
+                            <a:cs typeface="Times New Roman" panose="02020603050405020304" pitchFamily="18" charset="0"/>
+                          </a:rPr>
+                          <m:t>𝑛</m:t>
+                        </m:r>
+                      </m:e>
+                    </m:d>
+                    <m:r>
+                      <a:rPr lang="ru-RU" sz="1900" i="1" dirty="0" smtClean="0">
+                        <a:latin typeface="Cambria Math" panose="02040503050406030204" pitchFamily="18" charset="0"/>
+                        <a:cs typeface="Times New Roman" panose="02020603050405020304" pitchFamily="18" charset="0"/>
+                      </a:rPr>
+                      <m:t>=</m:t>
+                    </m:r>
+                    <m:r>
+                      <a:rPr lang="ru-RU" sz="1900" i="1" dirty="0" smtClean="0">
+                        <a:latin typeface="Cambria Math" panose="02040503050406030204" pitchFamily="18" charset="0"/>
+                        <a:cs typeface="Times New Roman" panose="02020603050405020304" pitchFamily="18" charset="0"/>
+                      </a:rPr>
+                      <m:t>𝑇</m:t>
+                    </m:r>
+                    <m:d>
+                      <m:dPr>
+                        <m:ctrlPr>
+                          <a:rPr lang="ru-RU" sz="1900" i="1" dirty="0" smtClean="0">
+                            <a:latin typeface="Cambria Math" panose="02040503050406030204" pitchFamily="18" charset="0"/>
+                            <a:cs typeface="Times New Roman" panose="02020603050405020304" pitchFamily="18" charset="0"/>
+                          </a:rPr>
+                        </m:ctrlPr>
+                      </m:dPr>
+                      <m:e>
+                        <m:r>
+                          <a:rPr lang="ru-RU" sz="1900" i="1" dirty="0" smtClean="0">
+                            <a:latin typeface="Cambria Math" panose="02040503050406030204" pitchFamily="18" charset="0"/>
+                            <a:cs typeface="Times New Roman" panose="02020603050405020304" pitchFamily="18" charset="0"/>
+                          </a:rPr>
+                          <m:t>𝑛</m:t>
+                        </m:r>
+                        <m:r>
+                          <a:rPr lang="ru-RU" sz="1900" i="1" dirty="0" smtClean="0">
+                            <a:latin typeface="Cambria Math" panose="02040503050406030204" pitchFamily="18" charset="0"/>
+                            <a:cs typeface="Times New Roman" panose="02020603050405020304" pitchFamily="18" charset="0"/>
+                          </a:rPr>
+                          <m:t>−1</m:t>
+                        </m:r>
+                      </m:e>
+                    </m:d>
+                    <m:r>
+                      <a:rPr lang="ru-RU" sz="1900" i="1" dirty="0" smtClean="0">
+                        <a:latin typeface="Cambria Math" panose="02040503050406030204" pitchFamily="18" charset="0"/>
+                        <a:cs typeface="Times New Roman" panose="02020603050405020304" pitchFamily="18" charset="0"/>
+                      </a:rPr>
+                      <m:t>+</m:t>
+                    </m:r>
+                    <m:r>
+                      <a:rPr lang="en-US" sz="1900" b="0" i="1" dirty="0" smtClean="0">
+                        <a:latin typeface="Cambria Math" panose="02040503050406030204" pitchFamily="18" charset="0"/>
+                        <a:cs typeface="Times New Roman" panose="02020603050405020304" pitchFamily="18" charset="0"/>
+                      </a:rPr>
+                      <m:t>𝑐</m:t>
+                    </m:r>
+                    <m:r>
+                      <a:rPr lang="en-US" sz="2000" i="1" dirty="0">
+                        <a:latin typeface="Cambria Math" panose="02040503050406030204" pitchFamily="18" charset="0"/>
+                      </a:rPr>
+                      <m:t>·</m:t>
+                    </m:r>
+                    <m:r>
+                      <a:rPr lang="en-US" sz="2000" b="0" i="1" dirty="0" smtClean="0">
+                        <a:latin typeface="Cambria Math" panose="02040503050406030204" pitchFamily="18" charset="0"/>
+                      </a:rPr>
+                      <m:t>𝑛</m:t>
+                    </m:r>
+                  </m:oMath>
+                </a14:m>
+                <a:r>
+                  <a:rPr lang="ru-RU" sz="1900" dirty="0">
+                    <a:latin typeface="Times New Roman" panose="02020603050405020304" pitchFamily="18" charset="0"/>
+                    <a:cs typeface="Times New Roman" panose="02020603050405020304" pitchFamily="18" charset="0"/>
+                  </a:rPr>
+                  <a:t> </a:t>
+                </a:r>
+                <a:r>
+                  <a:rPr lang="ru-RU" dirty="0">
+                    <a:latin typeface="Times New Roman" panose="02020603050405020304" pitchFamily="18" charset="0"/>
+                    <a:cs typeface="Times New Roman" panose="02020603050405020304" pitchFamily="18" charset="0"/>
+                  </a:rPr>
+                  <a:t>. </a:t>
+                </a:r>
+              </a:p>
+            </p:txBody>
+          </p:sp>
+        </mc:Choice>
+        <mc:Fallback>
+          <p:sp>
+            <p:nvSpPr>
+              <p:cNvPr id="6" name="Объект 5">
                 <a:extLst>
-                  <a:ext uri="{0D108BD9-81ED-4DB2-BD59-A6C34878D82A}">
-                    <a16:rowId xmlns:a16="http://schemas.microsoft.com/office/drawing/2014/main" val="127775465"/>
+                  <a:ext uri="{FF2B5EF4-FFF2-40B4-BE49-F238E27FC236}">
+                    <a16:creationId xmlns:a16="http://schemas.microsoft.com/office/drawing/2014/main" id="{F2447BDF-697A-A416-9F2A-D64868F46B68}"/>
                   </a:ext>
                 </a:extLst>
-              </a:tr>
-              <a:tr h="306410">
-                <a:tc>
-                  <a:txBody>
-                    <a:bodyPr/>
-                    <a:lstStyle/>
-                    <a:p>
-                      <a:r>
-                        <a:rPr lang="en-US">
-                          <a:effectLst/>
-                        </a:rPr>
-                        <a:t>Merge Sort</a:t>
-                      </a:r>
-                      <a:endParaRPr lang="en-US"/>
-                    </a:p>
-                  </a:txBody>
-                  <a:tcPr anchor="ctr"/>
-                </a:tc>
-                <a:tc>
-                  <a:txBody>
-                    <a:bodyPr/>
-                    <a:lstStyle/>
-                    <a:p>
-                      <a:r>
-                        <a:rPr lang="ru-RU">
-                          <a:effectLst/>
-                        </a:rPr>
-                        <a:t>да</a:t>
-                      </a:r>
-                      <a:endParaRPr lang="ru-RU"/>
-                    </a:p>
-                  </a:txBody>
-                  <a:tcPr anchor="ctr"/>
-                </a:tc>
-                <a:tc>
-                  <a:txBody>
-                    <a:bodyPr/>
-                    <a:lstStyle/>
-                    <a:p>
-                      <a:r>
-                        <a:rPr lang="ru-RU">
-                          <a:effectLst/>
-                        </a:rPr>
-                        <a:t>да</a:t>
-                      </a:r>
-                      <a:endParaRPr lang="ru-RU"/>
-                    </a:p>
-                  </a:txBody>
-                  <a:tcPr anchor="ctr"/>
-                </a:tc>
-                <a:tc>
-                  <a:txBody>
-                    <a:bodyPr/>
-                    <a:lstStyle/>
-                    <a:p>
-                      <a:r>
-                        <a:rPr lang="ru-RU">
-                          <a:effectLst/>
-                        </a:rPr>
-                        <a:t>да</a:t>
-                      </a:r>
-                      <a:endParaRPr lang="ru-RU"/>
-                    </a:p>
-                  </a:txBody>
-                  <a:tcPr anchor="ctr"/>
-                </a:tc>
-                <a:tc>
-                  <a:txBody>
-                    <a:bodyPr/>
-                    <a:lstStyle/>
-                    <a:p>
-                      <a:r>
-                        <a:rPr lang="ru-RU">
-                          <a:effectLst/>
-                        </a:rPr>
-                        <a:t>да</a:t>
-                      </a:r>
-                      <a:endParaRPr lang="ru-RU"/>
-                    </a:p>
-                  </a:txBody>
-                  <a:tcPr anchor="ctr"/>
-                </a:tc>
-                <a:extLst>
-                  <a:ext uri="{0D108BD9-81ED-4DB2-BD59-A6C34878D82A}">
-                    <a16:rowId xmlns:a16="http://schemas.microsoft.com/office/drawing/2014/main" val="2746044621"/>
-                  </a:ext>
-                </a:extLst>
-              </a:tr>
-              <a:tr h="306410">
-                <a:tc>
-                  <a:txBody>
-                    <a:bodyPr/>
-                    <a:lstStyle/>
-                    <a:p>
-                      <a:r>
-                        <a:rPr lang="en-US">
-                          <a:effectLst/>
-                        </a:rPr>
-                        <a:t>Bitonic Sort</a:t>
-                      </a:r>
-                      <a:endParaRPr lang="en-US"/>
-                    </a:p>
-                  </a:txBody>
-                  <a:tcPr anchor="ctr"/>
-                </a:tc>
-                <a:tc>
-                  <a:txBody>
-                    <a:bodyPr/>
-                    <a:lstStyle/>
-                    <a:p>
-                      <a:r>
-                        <a:rPr lang="ru-RU">
-                          <a:effectLst/>
-                        </a:rPr>
-                        <a:t>да</a:t>
-                      </a:r>
-                      <a:endParaRPr lang="ru-RU"/>
-                    </a:p>
-                  </a:txBody>
-                  <a:tcPr anchor="ctr"/>
-                </a:tc>
-                <a:tc>
-                  <a:txBody>
-                    <a:bodyPr/>
-                    <a:lstStyle/>
-                    <a:p>
-                      <a:r>
-                        <a:rPr lang="ru-RU">
-                          <a:effectLst/>
-                        </a:rPr>
-                        <a:t>да</a:t>
-                      </a:r>
-                      <a:endParaRPr lang="ru-RU"/>
-                    </a:p>
-                  </a:txBody>
-                  <a:tcPr anchor="ctr"/>
-                </a:tc>
-                <a:tc>
-                  <a:txBody>
-                    <a:bodyPr/>
-                    <a:lstStyle/>
-                    <a:p>
-                      <a:r>
-                        <a:rPr lang="ru-RU">
-                          <a:effectLst/>
-                        </a:rPr>
-                        <a:t>да</a:t>
-                      </a:r>
-                      <a:endParaRPr lang="ru-RU"/>
-                    </a:p>
-                  </a:txBody>
-                  <a:tcPr anchor="ctr"/>
-                </a:tc>
-                <a:tc>
-                  <a:txBody>
-                    <a:bodyPr/>
-                    <a:lstStyle/>
-                    <a:p>
-                      <a:r>
-                        <a:rPr lang="ru-RU">
-                          <a:effectLst/>
-                        </a:rPr>
-                        <a:t>да</a:t>
-                      </a:r>
-                      <a:endParaRPr lang="ru-RU"/>
-                    </a:p>
-                  </a:txBody>
-                  <a:tcPr anchor="ctr"/>
-                </a:tc>
-                <a:extLst>
-                  <a:ext uri="{0D108BD9-81ED-4DB2-BD59-A6C34878D82A}">
-                    <a16:rowId xmlns:a16="http://schemas.microsoft.com/office/drawing/2014/main" val="4026821890"/>
-                  </a:ext>
-                </a:extLst>
-              </a:tr>
-              <a:tr h="995833">
-                <a:tc>
-                  <a:txBody>
-                    <a:bodyPr/>
-                    <a:lstStyle/>
-                    <a:p>
-                      <a:r>
-                        <a:rPr lang="en-US">
-                          <a:effectLst/>
-                        </a:rPr>
-                        <a:t>Quick Sort, </a:t>
-                      </a:r>
-                      <a:r>
-                        <a:rPr lang="ru-RU">
-                          <a:effectLst/>
-                        </a:rPr>
-                        <a:t>лучший</a:t>
-                      </a:r>
-                      <a:endParaRPr lang="ru-RU"/>
-                    </a:p>
-                  </a:txBody>
-                  <a:tcPr anchor="ctr"/>
-                </a:tc>
-                <a:tc>
-                  <a:txBody>
-                    <a:bodyPr/>
-                    <a:lstStyle/>
-                    <a:p>
-                      <a:r>
-                        <a:rPr lang="ru-RU">
-                          <a:effectLst/>
-                        </a:rPr>
-                        <a:t>да</a:t>
-                      </a:r>
-                      <a:endParaRPr lang="ru-RU"/>
-                    </a:p>
-                  </a:txBody>
-                  <a:tcPr anchor="ctr"/>
-                </a:tc>
-                <a:tc>
-                  <a:txBody>
-                    <a:bodyPr/>
-                    <a:lstStyle/>
-                    <a:p>
-                      <a:r>
-                        <a:rPr lang="ru-RU">
-                          <a:effectLst/>
-                        </a:rPr>
-                        <a:t>да</a:t>
-                      </a:r>
-                      <a:endParaRPr lang="ru-RU"/>
-                    </a:p>
-                  </a:txBody>
-                  <a:tcPr anchor="ctr"/>
-                </a:tc>
-                <a:tc>
-                  <a:txBody>
-                    <a:bodyPr/>
-                    <a:lstStyle/>
-                    <a:p>
-                      <a:r>
-                        <a:rPr lang="ru-RU">
-                          <a:effectLst/>
-                        </a:rPr>
-                        <a:t>да</a:t>
-                      </a:r>
-                      <a:endParaRPr lang="ru-RU"/>
-                    </a:p>
-                  </a:txBody>
-                  <a:tcPr anchor="ctr"/>
-                </a:tc>
-                <a:tc>
-                  <a:txBody>
-                    <a:bodyPr/>
-                    <a:lstStyle/>
-                    <a:p>
-                      <a:r>
-                        <a:rPr lang="ru-RU">
-                          <a:effectLst/>
-                        </a:rPr>
-                        <a:t>да</a:t>
-                      </a:r>
-                      <a:endParaRPr lang="ru-RU"/>
-                    </a:p>
-                  </a:txBody>
-                  <a:tcPr anchor="ctr"/>
-                </a:tc>
-                <a:extLst>
-                  <a:ext uri="{0D108BD9-81ED-4DB2-BD59-A6C34878D82A}">
-                    <a16:rowId xmlns:a16="http://schemas.microsoft.com/office/drawing/2014/main" val="3351411420"/>
-                  </a:ext>
-                </a:extLst>
-              </a:tr>
-              <a:tr h="766026">
-                <a:tc>
-                  <a:txBody>
-                    <a:bodyPr/>
-                    <a:lstStyle/>
-                    <a:p>
-                      <a:r>
-                        <a:rPr lang="en-US">
-                          <a:effectLst/>
-                        </a:rPr>
-                        <a:t>Quick Sort, </a:t>
-                      </a:r>
-                      <a:r>
-                        <a:rPr lang="ru-RU">
-                          <a:effectLst/>
-                        </a:rPr>
-                        <a:t>худший</a:t>
-                      </a:r>
-                      <a:endParaRPr lang="ru-RU"/>
-                    </a:p>
-                  </a:txBody>
-                  <a:tcPr anchor="ctr"/>
-                </a:tc>
-                <a:tc>
-                  <a:txBody>
-                    <a:bodyPr/>
-                    <a:lstStyle/>
-                    <a:p>
-                      <a:r>
-                        <a:rPr lang="ru-RU">
-                          <a:effectLst/>
-                        </a:rPr>
-                        <a:t>да</a:t>
-                      </a:r>
-                      <a:endParaRPr lang="ru-RU"/>
-                    </a:p>
-                  </a:txBody>
-                  <a:tcPr anchor="ctr"/>
-                </a:tc>
-                <a:tc>
-                  <a:txBody>
-                    <a:bodyPr/>
-                    <a:lstStyle/>
-                    <a:p>
-                      <a:r>
-                        <a:rPr lang="ru-RU">
-                          <a:effectLst/>
-                        </a:rPr>
-                        <a:t>да</a:t>
-                      </a:r>
-                      <a:endParaRPr lang="ru-RU"/>
-                    </a:p>
-                  </a:txBody>
-                  <a:tcPr anchor="ctr"/>
-                </a:tc>
-                <a:tc>
-                  <a:txBody>
-                    <a:bodyPr/>
-                    <a:lstStyle/>
-                    <a:p>
-                      <a:r>
-                        <a:rPr lang="ru-RU">
-                          <a:effectLst/>
-                        </a:rPr>
-                        <a:t>да</a:t>
-                      </a:r>
-                      <a:endParaRPr lang="ru-RU"/>
-                    </a:p>
-                  </a:txBody>
-                  <a:tcPr anchor="ctr"/>
-                </a:tc>
-                <a:tc>
-                  <a:txBody>
-                    <a:bodyPr/>
-                    <a:lstStyle/>
-                    <a:p>
-                      <a:r>
-                        <a:rPr lang="ru-RU" dirty="0">
-                          <a:effectLst/>
-                        </a:rPr>
-                        <a:t>да</a:t>
-                      </a:r>
-                      <a:endParaRPr lang="ru-RU" dirty="0"/>
-                    </a:p>
-                  </a:txBody>
-                  <a:tcPr anchor="ctr"/>
-                </a:tc>
-                <a:extLst>
-                  <a:ext uri="{0D108BD9-81ED-4DB2-BD59-A6C34878D82A}">
-                    <a16:rowId xmlns:a16="http://schemas.microsoft.com/office/drawing/2014/main" val="3157463526"/>
-                  </a:ext>
-                </a:extLst>
-              </a:tr>
-            </a:tbl>
-          </a:graphicData>
-        </a:graphic>
-      </p:graphicFrame>
+              </p:cNvPr>
+              <p:cNvSpPr>
+                <a:spLocks noGrp="1" noRot="1" noChangeAspect="1" noMove="1" noResize="1" noEditPoints="1" noAdjustHandles="1" noChangeArrowheads="1" noChangeShapeType="1" noTextEdit="1"/>
+              </p:cNvSpPr>
+              <p:nvPr>
+                <p:ph idx="1"/>
+              </p:nvPr>
+            </p:nvSpPr>
+            <p:spPr>
+              <a:blipFill>
+                <a:blip r:embed="rId2"/>
+                <a:stretch>
+                  <a:fillRect l="-580" t="-1401" r="-1739"/>
+                </a:stretch>
+              </a:blipFill>
+            </p:spPr>
+            <p:txBody>
+              <a:bodyPr/>
+              <a:lstStyle/>
+              <a:p>
+                <a:r>
+                  <a:rPr lang="ru-RU">
+                    <a:noFill/>
+                  </a:rPr>
+                  <a:t> </a:t>
+                </a:r>
+              </a:p>
+            </p:txBody>
+          </p:sp>
+        </mc:Fallback>
+      </mc:AlternateContent>
     </p:spTree>
     <p:extLst>
       <p:ext uri="{BB962C8B-B14F-4D97-AF65-F5344CB8AC3E}">

--- a/ВКР.pptx
+++ b/ВКР.pptx
@@ -212,7 +212,7 @@
           <a:p>
             <a:fld id="{31713541-B05E-4552-95DD-0156478D5135}" type="datetimeFigureOut">
               <a:rPr lang="ru-RU" smtClean="0"/>
-              <a:t>14.05.2026</a:t>
+              <a:t>15.05.2026</a:t>
             </a:fld>
             <a:endParaRPr lang="ru-RU"/>
           </a:p>
@@ -519,7 +519,7 @@
           <a:p>
             <a:fld id="{ABD338A3-B5FA-4892-8782-04A8FAC2DE2D}" type="datetime1">
               <a:rPr lang="ru-RU" smtClean="0"/>
-              <a:t>14.05.2026</a:t>
+              <a:t>15.05.2026</a:t>
             </a:fld>
             <a:endParaRPr lang="ru-RU"/>
           </a:p>
@@ -940,7 +940,7 @@
           <a:p>
             <a:fld id="{E45DF212-0581-4804-9196-08E59AD85A60}" type="datetime1">
               <a:rPr lang="ru-RU" smtClean="0"/>
-              <a:t>14.05.2026</a:t>
+              <a:t>15.05.2026</a:t>
             </a:fld>
             <a:endParaRPr lang="ru-RU"/>
           </a:p>
@@ -1151,7 +1151,7 @@
           <a:p>
             <a:fld id="{85A33102-27BA-4101-BD19-C265B43D1861}" type="datetime1">
               <a:rPr lang="ru-RU" smtClean="0"/>
-              <a:t>14.05.2026</a:t>
+              <a:t>15.05.2026</a:t>
             </a:fld>
             <a:endParaRPr lang="ru-RU"/>
           </a:p>
@@ -1387,7 +1387,7 @@
           <a:p>
             <a:fld id="{FA39DC75-0073-477D-B85F-B87BD2D9AA66}" type="datetime1">
               <a:rPr lang="ru-RU" smtClean="0"/>
-              <a:t>14.05.2026</a:t>
+              <a:t>15.05.2026</a:t>
             </a:fld>
             <a:endParaRPr lang="ru-RU"/>
           </a:p>
@@ -1677,7 +1677,7 @@
           <a:p>
             <a:fld id="{3826988C-DC8F-439B-AB31-15A4297BC55F}" type="datetime1">
               <a:rPr lang="ru-RU" smtClean="0"/>
-              <a:t>14.05.2026</a:t>
+              <a:t>15.05.2026</a:t>
             </a:fld>
             <a:endParaRPr lang="ru-RU"/>
           </a:p>
@@ -1945,7 +1945,7 @@
           <a:p>
             <a:fld id="{1FA422C7-A0AF-4B73-A3E0-92773191928A}" type="datetime1">
               <a:rPr lang="ru-RU" smtClean="0"/>
-              <a:t>14.05.2026</a:t>
+              <a:t>15.05.2026</a:t>
             </a:fld>
             <a:endParaRPr lang="ru-RU"/>
           </a:p>
@@ -2360,7 +2360,7 @@
           <a:p>
             <a:fld id="{AE075EF7-06F9-47F2-ABB5-15A865F5A607}" type="datetime1">
               <a:rPr lang="ru-RU" smtClean="0"/>
-              <a:t>14.05.2026</a:t>
+              <a:t>15.05.2026</a:t>
             </a:fld>
             <a:endParaRPr lang="ru-RU"/>
           </a:p>
@@ -2504,7 +2504,7 @@
           <a:p>
             <a:fld id="{18133A35-A3AC-4FD5-9F62-E2E842F797D6}" type="datetime1">
               <a:rPr lang="ru-RU" smtClean="0"/>
-              <a:t>14.05.2026</a:t>
+              <a:t>15.05.2026</a:t>
             </a:fld>
             <a:endParaRPr lang="ru-RU"/>
           </a:p>
@@ -2620,7 +2620,7 @@
           <a:p>
             <a:fld id="{C75FB44B-5874-4EB6-914B-68491120A420}" type="datetime1">
               <a:rPr lang="ru-RU" smtClean="0"/>
-              <a:t>14.05.2026</a:t>
+              <a:t>15.05.2026</a:t>
             </a:fld>
             <a:endParaRPr lang="ru-RU"/>
           </a:p>
@@ -2934,7 +2934,7 @@
           <a:p>
             <a:fld id="{DC59103B-4E77-49D0-9E40-D0F96ACD7E42}" type="datetime1">
               <a:rPr lang="ru-RU" smtClean="0"/>
-              <a:t>14.05.2026</a:t>
+              <a:t>15.05.2026</a:t>
             </a:fld>
             <a:endParaRPr lang="ru-RU"/>
           </a:p>
@@ -3225,7 +3225,7 @@
           <a:p>
             <a:fld id="{7F0F4974-916B-4771-921F-D6B7309972A3}" type="datetime1">
               <a:rPr lang="ru-RU" smtClean="0"/>
-              <a:t>14.05.2026</a:t>
+              <a:t>15.05.2026</a:t>
             </a:fld>
             <a:endParaRPr lang="ru-RU"/>
           </a:p>
@@ -3501,7 +3501,7 @@
           <a:p>
             <a:fld id="{2732E4CB-F021-4DE4-87F8-062D97973001}" type="datetime1">
               <a:rPr lang="ru-RU" smtClean="0"/>
-              <a:t>14.05.2026</a:t>
+              <a:t>15.05.2026</a:t>
             </a:fld>
             <a:endParaRPr lang="ru-RU" dirty="0"/>
           </a:p>
@@ -4314,7 +4314,51 @@
             </a:pPr>
             <a:r>
               <a:rPr lang="ru-RU" sz="2000" b="1" dirty="0"/>
-              <a:t>Научный руководитель: </a:t>
+              <a:t>Научный руководитель: к.</a:t>
+            </a:r>
+            <a:r>
+              <a:rPr lang="en-US" sz="2000" b="1" dirty="0"/>
+              <a:t> </a:t>
+            </a:r>
+            <a:r>
+              <a:rPr lang="ru-RU" sz="2000" b="1" dirty="0"/>
+              <a:t>т.</a:t>
+            </a:r>
+            <a:r>
+              <a:rPr lang="en-US" sz="2000" b="1" dirty="0"/>
+              <a:t> </a:t>
+            </a:r>
+            <a:r>
+              <a:rPr lang="en-US" sz="2000" b="1" dirty="0" err="1"/>
+              <a:t>н</a:t>
+            </a:r>
+            <a:r>
+              <a:rPr lang="ru-RU" sz="2000" b="1" dirty="0"/>
+              <a:t> .</a:t>
+            </a:r>
+            <a:r>
+              <a:rPr lang="en-US" sz="2000" b="1" dirty="0"/>
+              <a:t>, </a:t>
+            </a:r>
+            <a:r>
+              <a:rPr lang="en-US" sz="2000" b="1" dirty="0" err="1"/>
+              <a:t>д</a:t>
+            </a:r>
+            <a:r>
+              <a:rPr lang="ru-RU" sz="2000" b="1" dirty="0" err="1"/>
+              <a:t>оцент</a:t>
+            </a:r>
+            <a:r>
+              <a:rPr lang="ru-RU" sz="2000" b="1" dirty="0"/>
+              <a:t>,</a:t>
+            </a:r>
+            <a:r>
+              <a:rPr lang="en-US" sz="2000" b="1" dirty="0"/>
+              <a:t> </a:t>
+            </a:r>
+            <a:r>
+              <a:rPr lang="ru-RU" sz="2000" b="1" dirty="0"/>
+              <a:t>доцент кафедры 806 </a:t>
             </a:r>
             <a:r>
               <a:rPr lang="ru-RU" sz="2000" dirty="0"/>
@@ -4568,14 +4612,14 @@
                 <p:ph idx="1"/>
                 <p:extLst>
                   <p:ext uri="{D42A27DB-BD31-4B8C-83A1-F6EECF244321}">
-                    <p14:modId xmlns:p14="http://schemas.microsoft.com/office/powerpoint/2010/main" val="2047347247"/>
+                    <p14:modId xmlns:p14="http://schemas.microsoft.com/office/powerpoint/2010/main" val="4142363549"/>
                   </p:ext>
                 </p:extLst>
               </p:nvPr>
             </p:nvGraphicFramePr>
             <p:xfrm>
               <a:off x="838200" y="1380149"/>
-              <a:ext cx="10786240" cy="4506156"/>
+              <a:ext cx="10786240" cy="4498981"/>
             </p:xfrm>
             <a:graphic>
               <a:graphicData uri="http://schemas.openxmlformats.org/drawingml/2006/table">
@@ -4824,7 +4868,7 @@
                             <a:rPr lang="ru-RU" sz="1200" dirty="0">
                               <a:effectLst/>
                             </a:rPr>
-                            <a:t>случайный размер подзадач</a:t>
+                            <a:t>Случайный размер подзадач</a:t>
                           </a:r>
                           <a:endParaRPr lang="ru-RU" sz="1400" dirty="0">
                             <a:effectLst/>
@@ -4853,7 +4897,19 @@
                             <a:rPr lang="ru-RU" sz="1200" dirty="0">
                               <a:effectLst/>
                             </a:rPr>
-                            <a:t>Вероятностный анализ: перейти к матожиданию, получить рекуррентность</a:t>
+                            <a:t>Вероятностный анализ: перейти к мат</a:t>
+                          </a:r>
+                          <a:r>
+                            <a:rPr lang="en-US" sz="1200" dirty="0">
+                              <a:effectLst/>
+                            </a:rPr>
+                            <a:t>-</a:t>
+                          </a:r>
+                          <a:r>
+                            <a:rPr lang="ru-RU" sz="1200" dirty="0">
+                              <a:effectLst/>
+                            </a:rPr>
+                            <a:t>ожиданию, получить рекуррентность</a:t>
                           </a:r>
                           <a:r>
                             <a:rPr lang="ru-RU" sz="1200" baseline="0" dirty="0">
@@ -4898,7 +4954,7 @@
                                       <a:schemeClr val="dk1"/>
                                     </a:solidFill>
                                     <a:effectLst/>
-                                    <a:latin typeface="+mn-lt"/>
+                                    <a:latin typeface="Cambria Math" panose="02040503050406030204" pitchFamily="18" charset="0"/>
                                     <a:ea typeface="+mn-ea"/>
                                     <a:cs typeface="+mn-cs"/>
                                   </a:rPr>
@@ -4912,7 +4968,7 @@
                                           <a:schemeClr val="dk1"/>
                                         </a:solidFill>
                                         <a:effectLst/>
-                                        <a:latin typeface="+mn-lt"/>
+                                        <a:latin typeface="Cambria Math" panose="02040503050406030204" pitchFamily="18" charset="0"/>
                                         <a:ea typeface="+mn-ea"/>
                                         <a:cs typeface="+mn-cs"/>
                                       </a:rPr>
@@ -4925,7 +4981,7 @@
                                           <a:schemeClr val="dk1"/>
                                         </a:solidFill>
                                         <a:effectLst/>
-                                        <a:latin typeface="+mn-lt"/>
+                                        <a:latin typeface="Cambria Math" panose="02040503050406030204" pitchFamily="18" charset="0"/>
                                         <a:ea typeface="+mn-ea"/>
                                         <a:cs typeface="+mn-cs"/>
                                       </a:rPr>
@@ -4939,7 +4995,7 @@
                                       <a:schemeClr val="dk1"/>
                                     </a:solidFill>
                                     <a:effectLst/>
-                                    <a:latin typeface="+mn-lt"/>
+                                    <a:latin typeface="Cambria Math" panose="02040503050406030204" pitchFamily="18" charset="0"/>
                                     <a:ea typeface="+mn-ea"/>
                                     <a:cs typeface="+mn-cs"/>
                                   </a:rPr>
@@ -4953,7 +5009,7 @@
                                           <a:schemeClr val="dk1"/>
                                         </a:solidFill>
                                         <a:effectLst/>
-                                        <a:latin typeface="+mn-lt"/>
+                                        <a:latin typeface="Cambria Math" panose="02040503050406030204" pitchFamily="18" charset="0"/>
                                         <a:ea typeface="+mn-ea"/>
                                         <a:cs typeface="+mn-cs"/>
                                       </a:rPr>
@@ -4966,7 +5022,7 @@
                                           <a:schemeClr val="dk1"/>
                                         </a:solidFill>
                                         <a:effectLst/>
-                                        <a:latin typeface="+mn-lt"/>
+                                        <a:latin typeface="Cambria Math" panose="02040503050406030204" pitchFamily="18" charset="0"/>
                                         <a:ea typeface="+mn-ea"/>
                                         <a:cs typeface="+mn-cs"/>
                                       </a:rPr>
@@ -4978,7 +5034,7 @@
                                           <a:schemeClr val="dk1"/>
                                         </a:solidFill>
                                         <a:effectLst/>
-                                        <a:latin typeface="+mn-lt"/>
+                                        <a:latin typeface="Cambria Math" panose="02040503050406030204" pitchFamily="18" charset="0"/>
                                         <a:ea typeface="+mn-ea"/>
                                         <a:cs typeface="+mn-cs"/>
                                       </a:rPr>
@@ -4992,7 +5048,7 @@
                                       <a:schemeClr val="dk1"/>
                                     </a:solidFill>
                                     <a:effectLst/>
-                                    <a:latin typeface="+mn-lt"/>
+                                    <a:latin typeface="Cambria Math" panose="02040503050406030204" pitchFamily="18" charset="0"/>
                                     <a:ea typeface="+mn-ea"/>
                                     <a:cs typeface="+mn-cs"/>
                                   </a:rPr>
@@ -5006,7 +5062,7 @@
                                           <a:schemeClr val="dk1"/>
                                         </a:solidFill>
                                         <a:effectLst/>
-                                        <a:latin typeface="+mn-lt"/>
+                                        <a:latin typeface="Cambria Math" panose="02040503050406030204" pitchFamily="18" charset="0"/>
                                         <a:ea typeface="+mn-ea"/>
                                         <a:cs typeface="+mn-cs"/>
                                       </a:rPr>
@@ -5019,7 +5075,7 @@
                                           <a:schemeClr val="dk1"/>
                                         </a:solidFill>
                                         <a:effectLst/>
-                                        <a:latin typeface="+mn-lt"/>
+                                        <a:latin typeface="Cambria Math" panose="02040503050406030204" pitchFamily="18" charset="0"/>
                                         <a:ea typeface="+mn-ea"/>
                                         <a:cs typeface="+mn-cs"/>
                                       </a:rPr>
@@ -5033,7 +5089,7 @@
                                           <a:schemeClr val="dk1"/>
                                         </a:solidFill>
                                         <a:effectLst/>
-                                        <a:latin typeface="+mn-lt"/>
+                                        <a:latin typeface="Cambria Math" panose="02040503050406030204" pitchFamily="18" charset="0"/>
                                         <a:ea typeface="+mn-ea"/>
                                         <a:cs typeface="+mn-cs"/>
                                       </a:rPr>
@@ -5052,7 +5108,7 @@
                                           <a:schemeClr val="dk1"/>
                                         </a:solidFill>
                                         <a:effectLst/>
-                                        <a:latin typeface="+mn-lt"/>
+                                        <a:latin typeface="Cambria Math" panose="02040503050406030204" pitchFamily="18" charset="0"/>
                                         <a:ea typeface="+mn-ea"/>
                                         <a:cs typeface="+mn-cs"/>
                                       </a:rPr>
@@ -5065,7 +5121,7 @@
                                           <a:schemeClr val="dk1"/>
                                         </a:solidFill>
                                         <a:effectLst/>
-                                        <a:latin typeface="+mn-lt"/>
+                                        <a:latin typeface="Cambria Math" panose="02040503050406030204" pitchFamily="18" charset="0"/>
                                         <a:ea typeface="+mn-ea"/>
                                         <a:cs typeface="+mn-cs"/>
                                       </a:rPr>
@@ -5077,7 +5133,7 @@
                                           <a:schemeClr val="dk1"/>
                                         </a:solidFill>
                                         <a:effectLst/>
-                                        <a:latin typeface="+mn-lt"/>
+                                        <a:latin typeface="Cambria Math" panose="02040503050406030204" pitchFamily="18" charset="0"/>
                                         <a:ea typeface="+mn-ea"/>
                                         <a:cs typeface="+mn-cs"/>
                                       </a:rPr>
@@ -5091,7 +5147,7 @@
                                           <a:schemeClr val="dk1"/>
                                         </a:solidFill>
                                         <a:effectLst/>
-                                        <a:latin typeface="+mn-lt"/>
+                                        <a:latin typeface="Cambria Math" panose="02040503050406030204" pitchFamily="18" charset="0"/>
                                         <a:ea typeface="+mn-ea"/>
                                         <a:cs typeface="+mn-cs"/>
                                       </a:rPr>
@@ -5103,7 +5159,7 @@
                                           <a:schemeClr val="dk1"/>
                                         </a:solidFill>
                                         <a:effectLst/>
-                                        <a:latin typeface="+mn-lt"/>
+                                        <a:latin typeface="Cambria Math" panose="02040503050406030204" pitchFamily="18" charset="0"/>
                                         <a:ea typeface="+mn-ea"/>
                                         <a:cs typeface="+mn-cs"/>
                                       </a:rPr>
@@ -5117,7 +5173,7 @@
                                           <a:schemeClr val="dk1"/>
                                         </a:solidFill>
                                         <a:effectLst/>
-                                        <a:latin typeface="+mn-lt"/>
+                                        <a:latin typeface="Cambria Math" panose="02040503050406030204" pitchFamily="18" charset="0"/>
                                         <a:ea typeface="+mn-ea"/>
                                         <a:cs typeface="+mn-cs"/>
                                       </a:rPr>
@@ -5131,7 +5187,7 @@
                                               <a:schemeClr val="dk1"/>
                                             </a:solidFill>
                                             <a:effectLst/>
-                                            <a:latin typeface="+mn-lt"/>
+                                            <a:latin typeface="Cambria Math" panose="02040503050406030204" pitchFamily="18" charset="0"/>
                                             <a:ea typeface="+mn-ea"/>
                                             <a:cs typeface="+mn-cs"/>
                                           </a:rPr>
@@ -5144,7 +5200,7 @@
                                               <a:schemeClr val="dk1"/>
                                             </a:solidFill>
                                             <a:effectLst/>
-                                            <a:latin typeface="+mn-lt"/>
+                                            <a:latin typeface="Cambria Math" panose="02040503050406030204" pitchFamily="18" charset="0"/>
                                             <a:ea typeface="+mn-ea"/>
                                             <a:cs typeface="+mn-cs"/>
                                           </a:rPr>
@@ -5258,12 +5314,12 @@
                             </a:spcAft>
                           </a:pPr>
                           <a:r>
-                            <a:rPr lang="ru-RU" sz="1200">
+                            <a:rPr lang="ru-RU" sz="1200" dirty="0">
                               <a:effectLst/>
                             </a:rPr>
-                            <a:t>нет рекурсивной структуры сортировки</a:t>
+                            <a:t>Нет рекурсивной структуры сортировки</a:t>
                           </a:r>
-                          <a:endParaRPr lang="ru-RU" sz="1400">
+                          <a:endParaRPr lang="ru-RU" sz="1400" dirty="0">
                             <a:effectLst/>
                             <a:latin typeface="Times New Roman" panose="02020603050405020304" pitchFamily="18" charset="0"/>
                             <a:ea typeface="Times New Roman" panose="02020603050405020304" pitchFamily="18" charset="0"/>
@@ -5434,7 +5490,7 @@
                             <a:rPr lang="ru-RU" sz="1200" dirty="0">
                               <a:effectLst/>
                             </a:rPr>
-                            <a:t>зависимость от последовательности шагов и входа</a:t>
+                            <a:t>Зависимость от последовательности шагов и входа</a:t>
                           </a:r>
                           <a:endParaRPr lang="ru-RU" sz="1400" dirty="0">
                             <a:effectLst/>
@@ -5557,7 +5613,7 @@
                             <a:rPr lang="ru-RU" sz="1200" dirty="0">
                               <a:effectLst/>
                             </a:rPr>
-                            <a:t>адаптивные серии и стратегия слияния</a:t>
+                            <a:t>Адаптивные серии и стратегия слияния</a:t>
                           </a:r>
                           <a:endParaRPr lang="ru-RU" sz="1400" dirty="0">
                             <a:effectLst/>
@@ -5731,12 +5787,12 @@
                             </a:spcAft>
                           </a:pPr>
                           <a:r>
-                            <a:rPr lang="ru-RU" sz="1200">
+                            <a:rPr lang="ru-RU" sz="1200" dirty="0">
                               <a:effectLst/>
                             </a:rPr>
-                            <a:t>итеративная структура</a:t>
+                            <a:t>Итеративная структура</a:t>
                           </a:r>
-                          <a:endParaRPr lang="ru-RU" sz="1400">
+                          <a:endParaRPr lang="ru-RU" sz="1400" dirty="0">
                             <a:effectLst/>
                             <a:latin typeface="Times New Roman" panose="02020603050405020304" pitchFamily="18" charset="0"/>
                             <a:ea typeface="Times New Roman" panose="02020603050405020304" pitchFamily="18" charset="0"/>
@@ -5803,14 +5859,14 @@
                 <p:ph idx="1"/>
                 <p:extLst>
                   <p:ext uri="{D42A27DB-BD31-4B8C-83A1-F6EECF244321}">
-                    <p14:modId xmlns:p14="http://schemas.microsoft.com/office/powerpoint/2010/main" val="2047347247"/>
+                    <p14:modId xmlns:p14="http://schemas.microsoft.com/office/powerpoint/2010/main" val="4142363549"/>
                   </p:ext>
                 </p:extLst>
               </p:nvPr>
             </p:nvGraphicFramePr>
             <p:xfrm>
               <a:off x="838200" y="1380149"/>
-              <a:ext cx="10786240" cy="4506156"/>
+              <a:ext cx="10786240" cy="4498981"/>
             </p:xfrm>
             <a:graphic>
               <a:graphicData uri="http://schemas.openxmlformats.org/drawingml/2006/table">
@@ -5971,7 +6027,7 @@
                       </a:ext>
                     </a:extLst>
                   </a:tr>
-                  <a:tr h="1599819">
+                  <a:tr h="1592644">
                     <a:tc>
                       <a:txBody>
                         <a:bodyPr/>
@@ -6059,7 +6115,7 @@
                             <a:rPr lang="ru-RU" sz="1200" dirty="0">
                               <a:effectLst/>
                             </a:rPr>
-                            <a:t>случайный размер подзадач</a:t>
+                            <a:t>Случайный размер подзадач</a:t>
                           </a:r>
                           <a:endParaRPr lang="ru-RU" sz="1400" dirty="0">
                             <a:effectLst/>
@@ -6083,7 +6139,7 @@
                         <a:blipFill>
                           <a:blip r:embed="rId2"/>
                           <a:stretch>
-                            <a:fillRect l="-152639" t="-28517" r="-713" b="-153992"/>
+                            <a:fillRect l="-152522" t="-28800" r="-593" b="-156800"/>
                           </a:stretch>
                         </a:blipFill>
                       </a:tcPr>
@@ -6179,12 +6235,12 @@
                             </a:spcAft>
                           </a:pPr>
                           <a:r>
-                            <a:rPr lang="ru-RU" sz="1200">
+                            <a:rPr lang="ru-RU" sz="1200" dirty="0">
                               <a:effectLst/>
                             </a:rPr>
-                            <a:t>нет рекурсивной структуры сортировки</a:t>
+                            <a:t>Нет рекурсивной структуры сортировки</a:t>
                           </a:r>
-                          <a:endParaRPr lang="ru-RU" sz="1400">
+                          <a:endParaRPr lang="ru-RU" sz="1400" dirty="0">
                             <a:effectLst/>
                             <a:latin typeface="Times New Roman" panose="02020603050405020304" pitchFamily="18" charset="0"/>
                             <a:ea typeface="Times New Roman" panose="02020603050405020304" pitchFamily="18" charset="0"/>
@@ -6206,7 +6262,7 @@
                         <a:blipFill>
                           <a:blip r:embed="rId2"/>
                           <a:stretch>
-                            <a:fillRect l="-152639" t="-379775" r="-713" b="-355056"/>
+                            <a:fillRect l="-152522" t="-374419" r="-593" b="-355814"/>
                           </a:stretch>
                         </a:blipFill>
                       </a:tcPr>
@@ -6293,7 +6349,7 @@
                             <a:rPr lang="ru-RU" sz="1200" dirty="0">
                               <a:effectLst/>
                             </a:rPr>
-                            <a:t>зависимость от последовательности шагов и входа</a:t>
+                            <a:t>Зависимость от последовательности шагов и входа</a:t>
                           </a:r>
                           <a:endParaRPr lang="ru-RU" sz="1400" dirty="0">
                             <a:effectLst/>
@@ -6416,7 +6472,7 @@
                             <a:rPr lang="ru-RU" sz="1200" dirty="0">
                               <a:effectLst/>
                             </a:rPr>
-                            <a:t>адаптивные серии и стратегия слияния</a:t>
+                            <a:t>Адаптивные серии и стратегия слияния</a:t>
                           </a:r>
                           <a:endParaRPr lang="ru-RU" sz="1400" dirty="0">
                             <a:effectLst/>
@@ -6590,12 +6646,12 @@
                             </a:spcAft>
                           </a:pPr>
                           <a:r>
-                            <a:rPr lang="ru-RU" sz="1200">
+                            <a:rPr lang="ru-RU" sz="1200" dirty="0">
                               <a:effectLst/>
                             </a:rPr>
-                            <a:t>итеративная структура</a:t>
+                            <a:t>Итеративная структура</a:t>
                           </a:r>
-                          <a:endParaRPr lang="ru-RU" sz="1400">
+                          <a:endParaRPr lang="ru-RU" sz="1400" dirty="0">
                             <a:effectLst/>
                             <a:latin typeface="Times New Roman" panose="02020603050405020304" pitchFamily="18" charset="0"/>
                             <a:ea typeface="Times New Roman" panose="02020603050405020304" pitchFamily="18" charset="0"/>
@@ -6728,6 +6784,9 @@
           <a:lstStyle/>
           <a:p>
             <a:pPr marL="0" indent="0">
+              <a:lnSpc>
+                <a:spcPct val="150000"/>
+              </a:lnSpc>
               <a:buNone/>
             </a:pPr>
             <a:r>
@@ -6813,8 +6872,8 @@
           </a:p>
         </p:txBody>
       </p:sp>
-      <mc:AlternateContent xmlns:mc="http://schemas.openxmlformats.org/markup-compatibility/2006">
-        <mc:Choice xmlns:a14="http://schemas.microsoft.com/office/drawing/2010/main" Requires="a14">
+      <mc:AlternateContent xmlns:mc="http://schemas.openxmlformats.org/markup-compatibility/2006" xmlns:a14="http://schemas.microsoft.com/office/drawing/2010/main">
+        <mc:Choice Requires="a14">
           <p:graphicFrame>
             <p:nvGraphicFramePr>
               <p:cNvPr id="9" name="Таблица 8">
@@ -6837,7 +6896,7 @@
             </p:nvGraphicFramePr>
             <p:xfrm>
               <a:off x="838200" y="3086894"/>
-              <a:ext cx="10515600" cy="2204880"/>
+              <a:ext cx="10515600" cy="2155412"/>
             </p:xfrm>
             <a:graphic>
               <a:graphicData uri="http://schemas.openxmlformats.org/drawingml/2006/table">
@@ -6875,12 +6934,12 @@
                         <a:lstStyle/>
                         <a:p>
                           <a:r>
-                            <a:rPr lang="ru-RU">
+                            <a:rPr lang="ru-RU" dirty="0">
                               <a:effectLst/>
                             </a:rPr>
                             <a:t>Алгоритм</a:t>
                           </a:r>
-                          <a:endParaRPr lang="ru-RU"/>
+                          <a:endParaRPr lang="ru-RU" dirty="0"/>
                         </a:p>
                       </a:txBody>
                       <a:tcPr anchor="ctr"/>
@@ -7655,7 +7714,7 @@
             </a:graphic>
           </p:graphicFrame>
         </mc:Choice>
-        <mc:Fallback>
+        <mc:Fallback xmlns="">
           <p:graphicFrame>
             <p:nvGraphicFramePr>
               <p:cNvPr id="9" name="Таблица 8">
@@ -8077,6 +8136,9 @@
           <a:lstStyle/>
           <a:p>
             <a:pPr marL="0" indent="0">
+              <a:lnSpc>
+                <a:spcPct val="150000"/>
+              </a:lnSpc>
               <a:buNone/>
             </a:pPr>
             <a:r>
@@ -8157,8 +8219,8 @@
           </a:p>
         </p:txBody>
       </p:sp>
-      <mc:AlternateContent xmlns:mc="http://schemas.openxmlformats.org/markup-compatibility/2006">
-        <mc:Choice xmlns:a14="http://schemas.microsoft.com/office/drawing/2010/main" Requires="a14">
+      <mc:AlternateContent xmlns:mc="http://schemas.openxmlformats.org/markup-compatibility/2006" xmlns:a14="http://schemas.microsoft.com/office/drawing/2010/main">
+        <mc:Choice Requires="a14">
           <p:graphicFrame>
             <p:nvGraphicFramePr>
               <p:cNvPr id="6" name="Таблица 5">
@@ -8658,7 +8720,7 @@
             </a:graphic>
           </p:graphicFrame>
         </mc:Choice>
-        <mc:Fallback>
+        <mc:Fallback xmlns="">
           <p:graphicFrame>
             <p:nvGraphicFramePr>
               <p:cNvPr id="6" name="Таблица 5">
@@ -9356,8 +9418,8 @@
           </a:p>
         </p:txBody>
       </p:sp>
-      <mc:AlternateContent xmlns:mc="http://schemas.openxmlformats.org/markup-compatibility/2006" xmlns:a14="http://schemas.microsoft.com/office/drawing/2010/main">
-        <mc:Choice Requires="a14">
+      <mc:AlternateContent xmlns:mc="http://schemas.openxmlformats.org/markup-compatibility/2006">
+        <mc:Choice xmlns:a14="http://schemas.microsoft.com/office/drawing/2010/main" Requires="a14">
           <p:sp>
             <p:nvSpPr>
               <p:cNvPr id="3" name="Объект 2">
@@ -9377,11 +9439,14 @@
             <p:spPr/>
             <p:txBody>
               <a:bodyPr>
-                <a:normAutofit/>
+                <a:normAutofit fontScale="85000" lnSpcReduction="20000"/>
               </a:bodyPr>
               <a:lstStyle/>
               <a:p>
                 <a:pPr marL="0" indent="0" rtl="0">
+                  <a:lnSpc>
+                    <a:spcPct val="150000"/>
+                  </a:lnSpc>
                   <a:buNone/>
                 </a:pPr>
                 <a:r>
@@ -9399,6 +9464,9 @@
               </a:p>
               <a:p>
                 <a:pPr rtl="0">
+                  <a:lnSpc>
+                    <a:spcPct val="150000"/>
+                  </a:lnSpc>
                   <a:buFont typeface="+mj-lt"/>
                   <a:buAutoNum type="arabicPeriod"/>
                 </a:pPr>
@@ -9417,6 +9485,9 @@
               </a:p>
               <a:p>
                 <a:pPr marL="457200" lvl="1" indent="0">
+                  <a:lnSpc>
+                    <a:spcPct val="150000"/>
+                  </a:lnSpc>
                   <a:buNone/>
                 </a:pPr>
                 <a:r>
@@ -9601,6 +9672,9 @@
               </a:p>
               <a:p>
                 <a:pPr marL="457200" lvl="1" indent="0" rtl="0">
+                  <a:lnSpc>
+                    <a:spcPct val="150000"/>
+                  </a:lnSpc>
                   <a:buNone/>
                 </a:pPr>
                 <a:r>
@@ -9868,6 +9942,9 @@
               </a:p>
               <a:p>
                 <a:pPr marL="457200" lvl="1" indent="0" rtl="0">
+                  <a:lnSpc>
+                    <a:spcPct val="150000"/>
+                  </a:lnSpc>
                   <a:buNone/>
                 </a:pPr>
                 <a:r>
@@ -10125,6 +10202,9 @@
               </a:p>
               <a:p>
                 <a:pPr rtl="0">
+                  <a:lnSpc>
+                    <a:spcPct val="150000"/>
+                  </a:lnSpc>
                   <a:buFont typeface="+mj-lt"/>
                   <a:buAutoNum type="arabicPeriod" startAt="2"/>
                 </a:pPr>
@@ -10143,6 +10223,9 @@
               </a:p>
               <a:p>
                 <a:pPr rtl="0">
+                  <a:lnSpc>
+                    <a:spcPct val="150000"/>
+                  </a:lnSpc>
                   <a:buFont typeface="+mj-lt"/>
                   <a:buAutoNum type="arabicPeriod" startAt="3"/>
                 </a:pPr>
@@ -10161,6 +10244,9 @@
               </a:p>
               <a:p>
                 <a:pPr rtl="0">
+                  <a:lnSpc>
+                    <a:spcPct val="150000"/>
+                  </a:lnSpc>
                   <a:buFont typeface="+mj-lt"/>
                   <a:buAutoNum type="arabicPeriod" startAt="4"/>
                 </a:pPr>
@@ -10179,6 +10265,9 @@
               </a:p>
               <a:p>
                 <a:pPr rtl="0">
+                  <a:lnSpc>
+                    <a:spcPct val="150000"/>
+                  </a:lnSpc>
                   <a:buFont typeface="+mj-lt"/>
                   <a:buAutoNum type="arabicPeriod" startAt="5"/>
                 </a:pPr>
@@ -10204,7 +10293,7 @@
             </p:txBody>
           </p:sp>
         </mc:Choice>
-        <mc:Fallback xmlns="">
+        <mc:Fallback>
           <p:sp>
             <p:nvSpPr>
               <p:cNvPr id="3" name="Объект 2">
@@ -10225,7 +10314,7 @@
               <a:blipFill>
                 <a:blip r:embed="rId2"/>
                 <a:stretch>
-                  <a:fillRect l="-638" t="-1401"/>
+                  <a:fillRect l="-483"/>
                 </a:stretch>
               </a:blipFill>
             </p:spPr>
@@ -10383,13 +10472,20 @@
           <a:p>
             <a:r>
               <a:rPr lang="ru-RU" dirty="0"/>
-              <a:t>ВКР (м) студента Фамилия Имя </a:t>
+              <a:t>ВКР (м) студента</a:t>
+            </a:r>
+            <a:r>
+              <a:rPr lang="en-US" dirty="0"/>
+              <a:t>: </a:t>
             </a:r>
             <a:r>
               <a:rPr lang="ru-RU" dirty="0" err="1"/>
-              <a:t>Отчетство</a:t>
-            </a:r>
-            <a:endParaRPr lang="ru-RU" dirty="0"/>
+              <a:t>Муханова</a:t>
+            </a:r>
+            <a:r>
+              <a:rPr lang="ru-RU" dirty="0"/>
+              <a:t> Дмитрия Ильича</a:t>
+            </a:r>
           </a:p>
         </p:txBody>
       </p:sp>
@@ -10538,6 +10634,9 @@
           <a:lstStyle/>
           <a:p>
             <a:pPr marL="0" indent="0">
+              <a:lnSpc>
+                <a:spcPct val="150000"/>
+              </a:lnSpc>
               <a:buNone/>
             </a:pPr>
             <a:r>
@@ -10559,6 +10658,9 @@
           </a:p>
           <a:p>
             <a:pPr marL="0" indent="0">
+              <a:lnSpc>
+                <a:spcPct val="150000"/>
+              </a:lnSpc>
               <a:buNone/>
             </a:pPr>
             <a:r>
@@ -10622,6 +10724,9 @@
           </a:p>
           <a:p>
             <a:pPr marL="0" indent="0">
+              <a:lnSpc>
+                <a:spcPct val="150000"/>
+              </a:lnSpc>
               <a:buNone/>
             </a:pPr>
             <a:r>
@@ -10776,28 +10881,19 @@
         <p:spPr/>
         <p:txBody>
           <a:bodyPr>
-            <a:normAutofit fontScale="85000" lnSpcReduction="20000"/>
+            <a:normAutofit fontScale="85000" lnSpcReduction="10000"/>
           </a:bodyPr>
           <a:lstStyle/>
           <a:p>
             <a:pPr indent="0" algn="just">
               <a:lnSpc>
-                <a:spcPct val="150000"/>
+                <a:spcPct val="160000"/>
               </a:lnSpc>
               <a:spcAft>
                 <a:spcPts val="1000"/>
               </a:spcAft>
               <a:buNone/>
             </a:pPr>
-            <a:r>
-              <a:rPr lang="en-US" sz="1800" b="1" kern="100" dirty="0">
-                <a:effectLst/>
-                <a:latin typeface="Times New Roman" panose="02020603050405020304" pitchFamily="18" charset="0"/>
-                <a:ea typeface="Calibri" panose="020F0502020204030204" pitchFamily="34" charset="0"/>
-                <a:cs typeface="Times New Roman" panose="02020603050405020304" pitchFamily="18" charset="0"/>
-              </a:rPr>
-              <a:t>	</a:t>
-            </a:r>
             <a:r>
               <a:rPr lang="ru-RU" sz="1900" b="1" kern="100" dirty="0">
                 <a:effectLst/>
@@ -10886,7 +10982,7 @@
           <a:p>
             <a:pPr marL="342900" lvl="0" indent="-342900" algn="just">
               <a:lnSpc>
-                <a:spcPct val="150000"/>
+                <a:spcPct val="160000"/>
               </a:lnSpc>
               <a:buFont typeface="+mj-lt"/>
               <a:buAutoNum type="arabicPeriod"/>
@@ -10904,7 +11000,7 @@
           <a:p>
             <a:pPr marL="342900" lvl="0" indent="-342900" algn="just">
               <a:lnSpc>
-                <a:spcPct val="150000"/>
+                <a:spcPct val="160000"/>
               </a:lnSpc>
               <a:buFont typeface="+mj-lt"/>
               <a:buAutoNum type="arabicPeriod"/>
@@ -10930,7 +11026,7 @@
           <a:p>
             <a:pPr marL="342900" lvl="0" indent="-342900" algn="just">
               <a:lnSpc>
-                <a:spcPct val="150000"/>
+                <a:spcPct val="160000"/>
               </a:lnSpc>
               <a:buFont typeface="+mj-lt"/>
               <a:buAutoNum type="arabicPeriod"/>
@@ -10948,7 +11044,7 @@
           <a:p>
             <a:pPr marL="342900" lvl="0" indent="-342900" algn="just">
               <a:lnSpc>
-                <a:spcPct val="150000"/>
+                <a:spcPct val="160000"/>
               </a:lnSpc>
               <a:buFont typeface="+mj-lt"/>
               <a:buAutoNum type="arabicPeriod"/>
@@ -10966,7 +11062,7 @@
           <a:p>
             <a:pPr marL="342900" lvl="0" indent="-342900" algn="just">
               <a:lnSpc>
-                <a:spcPct val="150000"/>
+                <a:spcPct val="160000"/>
               </a:lnSpc>
               <a:buFont typeface="+mj-lt"/>
               <a:buAutoNum type="arabicPeriod"/>
@@ -10984,7 +11080,7 @@
           <a:p>
             <a:pPr marL="342900" lvl="0" indent="-342900" algn="just">
               <a:lnSpc>
-                <a:spcPct val="150000"/>
+                <a:spcPct val="160000"/>
               </a:lnSpc>
               <a:buFont typeface="+mj-lt"/>
               <a:buAutoNum type="arabicPeriod"/>
@@ -11152,18 +11248,10 @@
               <a:p>
                 <a:pPr marL="0" indent="0">
                   <a:lnSpc>
-                    <a:spcPct val="160000"/>
+                    <a:spcPct val="150000"/>
                   </a:lnSpc>
                   <a:buNone/>
                 </a:pPr>
-                <a:r>
-                  <a:rPr lang="en-US" sz="1200" kern="100" dirty="0">
-                    <a:latin typeface="Times New Roman" panose="02020603050405020304" pitchFamily="18" charset="0"/>
-                    <a:ea typeface="Calibri" panose="020F0502020204030204" pitchFamily="34" charset="0"/>
-                    <a:cs typeface="Times New Roman" panose="02020603050405020304" pitchFamily="18" charset="0"/>
-                  </a:rPr>
-                  <a:t>	</a:t>
-                </a:r>
                 <a:r>
                   <a:rPr lang="ru-RU" sz="1200" kern="100" dirty="0">
                     <a:latin typeface="Times New Roman" panose="02020603050405020304" pitchFamily="18" charset="0"/>
@@ -11259,6 +11347,9 @@
               </a:p>
               <a:p>
                 <a:pPr marL="0" indent="0">
+                  <a:lnSpc>
+                    <a:spcPct val="150000"/>
+                  </a:lnSpc>
                   <a:buNone/>
                 </a:pPr>
                 <a:r>
@@ -11331,6 +11422,9 @@
               </a:p>
               <a:p>
                 <a:pPr marL="0" indent="0">
+                  <a:lnSpc>
+                    <a:spcPct val="150000"/>
+                  </a:lnSpc>
                   <a:buNone/>
                 </a:pPr>
                 <a:r>
@@ -11403,6 +11497,9 @@
               </a:p>
               <a:p>
                 <a:pPr marL="0" indent="0">
+                  <a:lnSpc>
+                    <a:spcPct val="150000"/>
+                  </a:lnSpc>
                   <a:buNone/>
                 </a:pPr>
                 <a:r>
@@ -11472,16 +11569,9 @@
               </a:p>
               <a:p>
                 <a:pPr marL="0" indent="0">
-                  <a:buNone/>
-                </a:pPr>
-                <a:endParaRPr lang="en-US" sz="1200" kern="100" dirty="0">
-                  <a:latin typeface="Times New Roman" panose="02020603050405020304" pitchFamily="18" charset="0"/>
-                  <a:ea typeface="Calibri" panose="020F0502020204030204" pitchFamily="34" charset="0"/>
-                  <a:cs typeface="Times New Roman" panose="02020603050405020304" pitchFamily="18" charset="0"/>
-                </a:endParaRPr>
-              </a:p>
-              <a:p>
-                <a:pPr marL="0" indent="0">
+                  <a:lnSpc>
+                    <a:spcPct val="150000"/>
+                  </a:lnSpc>
                   <a:buNone/>
                 </a:pPr>
                 <a:r>
@@ -11547,6 +11637,9 @@
               </a:p>
               <a:p>
                 <a:pPr marL="0" indent="0">
+                  <a:lnSpc>
+                    <a:spcPct val="150000"/>
+                  </a:lnSpc>
                   <a:buNone/>
                 </a:pPr>
                 <a:r>
@@ -12273,7 +12366,7 @@
               <a:blipFill>
                 <a:blip r:embed="rId2"/>
                 <a:stretch>
-                  <a:fillRect l="-57" b="-625"/>
+                  <a:fillRect l="-119" b="-260"/>
                 </a:stretch>
               </a:blipFill>
             </p:spPr>
@@ -13695,11 +13788,14 @@
         <p:spPr/>
         <p:txBody>
           <a:bodyPr>
-            <a:normAutofit/>
+            <a:normAutofit lnSpcReduction="10000"/>
           </a:bodyPr>
           <a:lstStyle/>
           <a:p>
             <a:pPr marL="0" indent="0" rtl="0">
+              <a:lnSpc>
+                <a:spcPct val="150000"/>
+              </a:lnSpc>
               <a:buNone/>
             </a:pPr>
             <a:r>
@@ -13718,6 +13814,9 @@
           </a:p>
           <a:p>
             <a:pPr rtl="0">
+              <a:lnSpc>
+                <a:spcPct val="150000"/>
+              </a:lnSpc>
               <a:buFont typeface="Arial" panose="020B0604020202020204" pitchFamily="34" charset="0"/>
               <a:buChar char="•"/>
             </a:pPr>
@@ -13736,6 +13835,9 @@
           </a:p>
           <a:p>
             <a:pPr rtl="0">
+              <a:lnSpc>
+                <a:spcPct val="150000"/>
+              </a:lnSpc>
               <a:buFont typeface="Arial" panose="020B0604020202020204" pitchFamily="34" charset="0"/>
               <a:buChar char="•"/>
             </a:pPr>
@@ -13761,6 +13863,9 @@
           </a:p>
           <a:p>
             <a:pPr rtl="0">
+              <a:lnSpc>
+                <a:spcPct val="150000"/>
+              </a:lnSpc>
               <a:buFont typeface="Arial" panose="020B0604020202020204" pitchFamily="34" charset="0"/>
               <a:buChar char="•"/>
             </a:pPr>
@@ -13802,6 +13907,9 @@
           </a:p>
           <a:p>
             <a:pPr rtl="0">
+              <a:lnSpc>
+                <a:spcPct val="150000"/>
+              </a:lnSpc>
               <a:buFont typeface="Arial" panose="020B0604020202020204" pitchFamily="34" charset="0"/>
               <a:buChar char="•"/>
             </a:pPr>
@@ -13827,6 +13935,9 @@
           </a:p>
           <a:p>
             <a:pPr rtl="0">
+              <a:lnSpc>
+                <a:spcPct val="150000"/>
+              </a:lnSpc>
               <a:buFont typeface="Arial" panose="020B0604020202020204" pitchFamily="34" charset="0"/>
               <a:buChar char="•"/>
             </a:pPr>
@@ -13843,18 +13954,8 @@
                 <a:latin typeface="Times New Roman" panose="02020603050405020304" pitchFamily="18" charset="0"/>
                 <a:cs typeface="Times New Roman" panose="02020603050405020304" pitchFamily="18" charset="0"/>
               </a:rPr>
-              <a:t>ероятностный и амортизированный анализ.</a:t>
-            </a:r>
-            <a:endParaRPr lang="en-US" sz="1400" dirty="0">
-              <a:effectLst/>
-              <a:latin typeface="Times New Roman" panose="02020603050405020304" pitchFamily="18" charset="0"/>
-              <a:cs typeface="Times New Roman" panose="02020603050405020304" pitchFamily="18" charset="0"/>
-            </a:endParaRPr>
-          </a:p>
-          <a:p>
-            <a:pPr marL="0" indent="0" rtl="0">
-              <a:buNone/>
-            </a:pPr>
+              <a:t>ероятностный и амортизированный анализ;</a:t>
+            </a:r>
             <a:endParaRPr lang="ru-RU" sz="1400" dirty="0">
               <a:latin typeface="Times New Roman" panose="02020603050405020304" pitchFamily="18" charset="0"/>
               <a:cs typeface="Times New Roman" panose="02020603050405020304" pitchFamily="18" charset="0"/>
@@ -13862,6 +13963,9 @@
           </a:p>
           <a:p>
             <a:pPr marL="0" indent="0" rtl="0">
+              <a:lnSpc>
+                <a:spcPct val="150000"/>
+              </a:lnSpc>
               <a:buNone/>
             </a:pPr>
             <a:r>
@@ -13880,6 +13984,9 @@
           </a:p>
           <a:p>
             <a:pPr rtl="0">
+              <a:lnSpc>
+                <a:spcPct val="150000"/>
+              </a:lnSpc>
               <a:buFont typeface="Arial" panose="020B0604020202020204" pitchFamily="34" charset="0"/>
               <a:buChar char="•"/>
             </a:pPr>
@@ -13905,6 +14012,9 @@
           </a:p>
           <a:p>
             <a:pPr rtl="0">
+              <a:lnSpc>
+                <a:spcPct val="150000"/>
+              </a:lnSpc>
               <a:buFont typeface="Arial" panose="020B0604020202020204" pitchFamily="34" charset="0"/>
               <a:buChar char="•"/>
             </a:pPr>
@@ -13930,6 +14040,9 @@
           </a:p>
           <a:p>
             <a:pPr rtl="0">
+              <a:lnSpc>
+                <a:spcPct val="150000"/>
+              </a:lnSpc>
               <a:buFont typeface="Arial" panose="020B0604020202020204" pitchFamily="34" charset="0"/>
               <a:buChar char="•"/>
             </a:pPr>
@@ -13946,7 +14059,15 @@
                 <a:latin typeface="Times New Roman" panose="02020603050405020304" pitchFamily="18" charset="0"/>
                 <a:cs typeface="Times New Roman" panose="02020603050405020304" pitchFamily="18" charset="0"/>
               </a:rPr>
-              <a:t>розрачно показывает вклад каждого уровня рекурсии.</a:t>
+              <a:t>розрачно показывает вклад каждого уровня рекурсии</a:t>
+            </a:r>
+            <a:r>
+              <a:rPr lang="en-US" sz="1400" dirty="0">
+                <a:effectLst/>
+                <a:latin typeface="Times New Roman" panose="02020603050405020304" pitchFamily="18" charset="0"/>
+                <a:cs typeface="Times New Roman" panose="02020603050405020304" pitchFamily="18" charset="0"/>
+              </a:rPr>
+              <a:t>;</a:t>
             </a:r>
             <a:endParaRPr lang="ru-RU" sz="1400" dirty="0">
               <a:latin typeface="Times New Roman" panose="02020603050405020304" pitchFamily="18" charset="0"/>
@@ -14098,11 +14219,14 @@
             <p:spPr/>
             <p:txBody>
               <a:bodyPr>
-                <a:normAutofit/>
+                <a:normAutofit fontScale="70000" lnSpcReduction="20000"/>
               </a:bodyPr>
               <a:lstStyle/>
               <a:p>
                 <a:pPr marL="0" indent="0">
+                  <a:lnSpc>
+                    <a:spcPct val="150000"/>
+                  </a:lnSpc>
                   <a:buNone/>
                 </a:pPr>
                 <a:r>
@@ -14256,7 +14380,7 @@
                     <a:latin typeface="Times New Roman" panose="02020603050405020304" pitchFamily="18" charset="0"/>
                     <a:cs typeface="Times New Roman" panose="02020603050405020304" pitchFamily="18" charset="0"/>
                   </a:rPr>
-                  <a:t>. Тогда Рекуррентное соотношение будет иметь вид:</a:t>
+                  <a:t>. Тогда рекуррентное соотношение будет иметь вид:</a:t>
                 </a:r>
                 <a:endParaRPr lang="en-US" sz="1600" dirty="0">
                   <a:effectLst/>
@@ -14266,6 +14390,9 @@
               </a:p>
               <a:p>
                 <a:pPr marL="0" indent="0">
+                  <a:lnSpc>
+                    <a:spcPct val="150000"/>
+                  </a:lnSpc>
                   <a:buNone/>
                 </a:pPr>
                 <a:endParaRPr lang="ru-RU" sz="1200" dirty="0">
@@ -14276,6 +14403,9 @@
               </a:p>
               <a:p>
                 <a:pPr marL="0" indent="0">
+                  <a:lnSpc>
+                    <a:spcPct val="150000"/>
+                  </a:lnSpc>
                   <a:buNone/>
                 </a:pPr>
                 <a14:m>
@@ -14509,6 +14639,9 @@
               </a:p>
               <a:p>
                 <a:pPr marL="0" indent="0">
+                  <a:lnSpc>
+                    <a:spcPct val="150000"/>
+                  </a:lnSpc>
                   <a:buNone/>
                 </a:pPr>
                 <a:r>
@@ -14588,6 +14721,9 @@
               </a:p>
               <a:p>
                 <a:pPr marL="0" indent="0">
+                  <a:lnSpc>
+                    <a:spcPct val="150000"/>
+                  </a:lnSpc>
                   <a:buNone/>
                 </a:pPr>
                 <a:endParaRPr lang="en-US" sz="1800" dirty="0">
@@ -14598,6 +14734,9 @@
               </a:p>
               <a:p>
                 <a:pPr marL="0" indent="0">
+                  <a:lnSpc>
+                    <a:spcPct val="150000"/>
+                  </a:lnSpc>
                   <a:buNone/>
                 </a:pPr>
                 <a14:m>
@@ -14775,6 +14914,9 @@
               </a:p>
               <a:p>
                 <a:pPr marL="0" indent="0">
+                  <a:lnSpc>
+                    <a:spcPct val="150000"/>
+                  </a:lnSpc>
                   <a:buNone/>
                 </a:pPr>
                 <a:endParaRPr lang="en-US" sz="1800" dirty="0">
@@ -14785,6 +14927,9 @@
               </a:p>
               <a:p>
                 <a:pPr marL="0" indent="0">
+                  <a:lnSpc>
+                    <a:spcPct val="150000"/>
+                  </a:lnSpc>
                   <a:buNone/>
                 </a:pPr>
                 <a:r>
@@ -14836,6 +14981,9 @@
               </a:p>
               <a:p>
                 <a:pPr marL="0" indent="0">
+                  <a:lnSpc>
+                    <a:spcPct val="150000"/>
+                  </a:lnSpc>
                   <a:buNone/>
                 </a:pPr>
                 <a14:m>
@@ -15223,28 +15371,38 @@
                 <a14:m>
                   <m:oMath xmlns:m="http://schemas.openxmlformats.org/officeDocument/2006/math">
                     <m:r>
-                      <a:rPr lang="ru-RU" sz="1600" i="1"/>
+                      <a:rPr lang="ru-RU" sz="1600" i="1">
+                        <a:latin typeface="Cambria Math" panose="02040503050406030204" pitchFamily="18" charset="0"/>
+                      </a:rPr>
                       <m:t>𝑛</m:t>
                     </m:r>
                     <m:r>
-                      <a:rPr lang="ru-RU" sz="1600" b="1" i="1"/>
+                      <a:rPr lang="ru-RU" sz="1600" b="1" i="1">
+                        <a:latin typeface="Cambria Math" panose="02040503050406030204" pitchFamily="18" charset="0"/>
+                      </a:rPr>
                       <m:t>=</m:t>
                     </m:r>
                     <m:sSup>
                       <m:sSupPr>
                         <m:ctrlPr>
-                          <a:rPr lang="ru-RU" sz="1600" i="1"/>
+                          <a:rPr lang="ru-RU" sz="1600" i="1">
+                            <a:latin typeface="Cambria Math" panose="02040503050406030204" pitchFamily="18" charset="0"/>
+                          </a:rPr>
                         </m:ctrlPr>
                       </m:sSupPr>
                       <m:e>
                         <m:r>
-                          <a:rPr lang="ru-RU" sz="1600" i="1"/>
+                          <a:rPr lang="ru-RU" sz="1600" i="1">
+                            <a:latin typeface="Cambria Math" panose="02040503050406030204" pitchFamily="18" charset="0"/>
+                          </a:rPr>
                           <m:t>2</m:t>
                         </m:r>
                       </m:e>
                       <m:sup>
                         <m:r>
-                          <a:rPr lang="ru-RU" sz="1600" i="1"/>
+                          <a:rPr lang="ru-RU" sz="1600" i="1">
+                            <a:latin typeface="Cambria Math" panose="02040503050406030204" pitchFamily="18" charset="0"/>
+                          </a:rPr>
                           <m:t>𝑚</m:t>
                         </m:r>
                       </m:sup>
@@ -15263,59 +15421,81 @@
                     <m:sSub>
                       <m:sSubPr>
                         <m:ctrlPr>
-                          <a:rPr lang="ru-RU" sz="1600" i="1"/>
+                          <a:rPr lang="ru-RU" sz="1600" i="1">
+                            <a:latin typeface="Cambria Math" panose="02040503050406030204" pitchFamily="18" charset="0"/>
+                          </a:rPr>
                         </m:ctrlPr>
                       </m:sSubPr>
                       <m:e>
                         <m:r>
-                          <a:rPr lang="ru-RU" sz="1600" i="1"/>
+                          <a:rPr lang="ru-RU" sz="1600" i="1">
+                            <a:latin typeface="Cambria Math" panose="02040503050406030204" pitchFamily="18" charset="0"/>
+                          </a:rPr>
                           <m:t>𝑀</m:t>
                         </m:r>
                       </m:e>
                       <m:sub>
                         <m:r>
-                          <a:rPr lang="ru-RU" sz="1600" i="1"/>
+                          <a:rPr lang="ru-RU" sz="1600" i="1">
+                            <a:latin typeface="Cambria Math" panose="02040503050406030204" pitchFamily="18" charset="0"/>
+                          </a:rPr>
                           <m:t>𝑚</m:t>
                         </m:r>
                       </m:sub>
                     </m:sSub>
                     <m:r>
-                      <a:rPr lang="ru-RU" sz="1600" i="1"/>
+                      <a:rPr lang="ru-RU" sz="1600" i="1">
+                        <a:latin typeface="Cambria Math" panose="02040503050406030204" pitchFamily="18" charset="0"/>
+                      </a:rPr>
                       <m:t>​</m:t>
                     </m:r>
                     <m:r>
-                      <a:rPr lang="ru-RU" sz="1600" b="1" i="1"/>
+                      <a:rPr lang="ru-RU" sz="1600" b="1" i="1">
+                        <a:latin typeface="Cambria Math" panose="02040503050406030204" pitchFamily="18" charset="0"/>
+                      </a:rPr>
                       <m:t>=</m:t>
                     </m:r>
                     <m:r>
-                      <a:rPr lang="ru-RU" sz="1600" i="1"/>
+                      <a:rPr lang="ru-RU" sz="1600" i="1">
+                        <a:latin typeface="Cambria Math" panose="02040503050406030204" pitchFamily="18" charset="0"/>
+                      </a:rPr>
                       <m:t>𝑀</m:t>
                     </m:r>
                     <m:r>
-                      <a:rPr lang="ru-RU" sz="1600" i="1"/>
+                      <a:rPr lang="ru-RU" sz="1600" i="1">
+                        <a:latin typeface="Cambria Math" panose="02040503050406030204" pitchFamily="18" charset="0"/>
+                      </a:rPr>
                       <m:t>(</m:t>
                     </m:r>
                     <m:sSup>
                       <m:sSupPr>
                         <m:ctrlPr>
-                          <a:rPr lang="ru-RU" sz="1600" i="1"/>
+                          <a:rPr lang="ru-RU" sz="1600" i="1">
+                            <a:latin typeface="Cambria Math" panose="02040503050406030204" pitchFamily="18" charset="0"/>
+                          </a:rPr>
                         </m:ctrlPr>
                       </m:sSupPr>
                       <m:e>
                         <m:r>
-                          <a:rPr lang="ru-RU" sz="1600" i="1"/>
+                          <a:rPr lang="ru-RU" sz="1600" i="1">
+                            <a:latin typeface="Cambria Math" panose="02040503050406030204" pitchFamily="18" charset="0"/>
+                          </a:rPr>
                           <m:t>2</m:t>
                         </m:r>
                       </m:e>
                       <m:sup>
                         <m:r>
-                          <a:rPr lang="ru-RU" sz="1600" i="1"/>
+                          <a:rPr lang="ru-RU" sz="1600" i="1">
+                            <a:latin typeface="Cambria Math" panose="02040503050406030204" pitchFamily="18" charset="0"/>
+                          </a:rPr>
                           <m:t>𝑚</m:t>
                         </m:r>
                       </m:sup>
                     </m:sSup>
                     <m:r>
-                      <a:rPr lang="ru-RU" sz="1600" i="1"/>
+                      <a:rPr lang="ru-RU" sz="1600" i="1">
+                        <a:latin typeface="Cambria Math" panose="02040503050406030204" pitchFamily="18" charset="0"/>
+                      </a:rPr>
                       <m:t>)</m:t>
                     </m:r>
                   </m:oMath>
@@ -15364,7 +15544,7 @@
               <a:blipFill>
                 <a:blip r:embed="rId2"/>
                 <a:stretch>
-                  <a:fillRect l="-348" t="-980" r="-58"/>
+                  <a:fillRect/>
                 </a:stretch>
               </a:blipFill>
             </p:spPr>
@@ -15525,11 +15705,14 @@
             </p:spPr>
             <p:txBody>
               <a:bodyPr>
-                <a:normAutofit fontScale="85000" lnSpcReduction="20000"/>
+                <a:normAutofit fontScale="77500" lnSpcReduction="20000"/>
               </a:bodyPr>
               <a:lstStyle/>
               <a:p>
                 <a:pPr marL="0" indent="0">
+                  <a:lnSpc>
+                    <a:spcPct val="170000"/>
+                  </a:lnSpc>
                   <a:buNone/>
                 </a:pPr>
                 <a:r>
@@ -15542,7 +15725,7 @@
               <a:p>
                 <a:pPr indent="449580" algn="just">
                   <a:lnSpc>
-                    <a:spcPct val="150000"/>
+                    <a:spcPct val="170000"/>
                   </a:lnSpc>
                   <a:spcAft>
                     <a:spcPts val="1000"/>
@@ -15690,7 +15873,7 @@
               <a:p>
                 <a:pPr indent="449580" algn="just">
                   <a:lnSpc>
-                    <a:spcPct val="150000"/>
+                    <a:spcPct val="170000"/>
                   </a:lnSpc>
                   <a:spcAft>
                     <a:spcPts val="1000"/>
@@ -15795,7 +15978,7 @@
               <a:p>
                 <a:pPr indent="449580" algn="just">
                   <a:lnSpc>
-                    <a:spcPct val="150000"/>
+                    <a:spcPct val="170000"/>
                   </a:lnSpc>
                 </a:pPr>
                 <a:r>
@@ -16014,7 +16197,7 @@
               <a:blipFill>
                 <a:blip r:embed="rId2"/>
                 <a:stretch>
-                  <a:fillRect l="-232" t="-1681" r="-232"/>
+                  <a:fillRect l="-241" r="-121"/>
                 </a:stretch>
               </a:blipFill>
             </p:spPr>
@@ -16233,11 +16416,14 @@
             <p:spPr/>
             <p:txBody>
               <a:bodyPr>
-                <a:normAutofit/>
+                <a:normAutofit fontScale="92500" lnSpcReduction="20000"/>
               </a:bodyPr>
               <a:lstStyle/>
               <a:p>
                 <a:pPr marL="0" indent="0" rtl="0">
+                  <a:lnSpc>
+                    <a:spcPct val="150000"/>
+                  </a:lnSpc>
                   <a:buNone/>
                 </a:pPr>
                 <a:r>
@@ -16263,6 +16449,9 @@
               </a:p>
               <a:p>
                 <a:pPr rtl="0">
+                  <a:lnSpc>
+                    <a:spcPct val="150000"/>
+                  </a:lnSpc>
                   <a:buFont typeface="Arial" panose="020B0604020202020204" pitchFamily="34" charset="0"/>
                   <a:buChar char="•"/>
                 </a:pPr>
@@ -16381,6 +16570,9 @@
               </a:p>
               <a:p>
                 <a:pPr rtl="0">
+                  <a:lnSpc>
+                    <a:spcPct val="150000"/>
+                  </a:lnSpc>
                   <a:buFont typeface="Arial" panose="020B0604020202020204" pitchFamily="34" charset="0"/>
                   <a:buChar char="•"/>
                 </a:pPr>
@@ -16455,6 +16647,9 @@
               </a:p>
               <a:p>
                 <a:pPr rtl="0">
+                  <a:lnSpc>
+                    <a:spcPct val="150000"/>
+                  </a:lnSpc>
                   <a:buFont typeface="Arial" panose="020B0604020202020204" pitchFamily="34" charset="0"/>
                   <a:buChar char="•"/>
                 </a:pPr>
@@ -16489,6 +16684,9 @@
               </a:p>
               <a:p>
                 <a:pPr rtl="0">
+                  <a:lnSpc>
+                    <a:spcPct val="150000"/>
+                  </a:lnSpc>
                   <a:buFont typeface="Arial" panose="020B0604020202020204" pitchFamily="34" charset="0"/>
                   <a:buChar char="•"/>
                 </a:pPr>
@@ -16515,6 +16713,9 @@
               </a:p>
               <a:p>
                 <a:pPr rtl="0">
+                  <a:lnSpc>
+                    <a:spcPct val="150000"/>
+                  </a:lnSpc>
                   <a:buFont typeface="Arial" panose="020B0604020202020204" pitchFamily="34" charset="0"/>
                   <a:buChar char="•"/>
                 </a:pPr>
@@ -16567,6 +16768,9 @@
               </a:p>
               <a:p>
                 <a:pPr marL="0" indent="0">
+                  <a:lnSpc>
+                    <a:spcPct val="150000"/>
+                  </a:lnSpc>
                   <a:buNone/>
                 </a:pPr>
                 <a:r>
@@ -16581,7 +16785,7 @@
               <a:p>
                 <a:pPr>
                   <a:lnSpc>
-                    <a:spcPct val="100000"/>
+                    <a:spcPct val="150000"/>
                   </a:lnSpc>
                 </a:pPr>
                 <a:r>
@@ -16768,7 +16972,7 @@
               <a:blipFill>
                 <a:blip r:embed="rId2"/>
                 <a:stretch>
-                  <a:fillRect l="-580" t="-1401" r="-1739"/>
+                  <a:fillRect l="-603"/>
                 </a:stretch>
               </a:blipFill>
             </p:spPr>

--- a/ВКР.pptx
+++ b/ВКР.pptx
@@ -212,7 +212,7 @@
           <a:p>
             <a:fld id="{31713541-B05E-4552-95DD-0156478D5135}" type="datetimeFigureOut">
               <a:rPr lang="ru-RU" smtClean="0"/>
-              <a:t>15.05.2026</a:t>
+              <a:t>26.05.2026</a:t>
             </a:fld>
             <a:endParaRPr lang="ru-RU"/>
           </a:p>
@@ -519,7 +519,7 @@
           <a:p>
             <a:fld id="{ABD338A3-B5FA-4892-8782-04A8FAC2DE2D}" type="datetime1">
               <a:rPr lang="ru-RU" smtClean="0"/>
-              <a:t>15.05.2026</a:t>
+              <a:t>26.05.2026</a:t>
             </a:fld>
             <a:endParaRPr lang="ru-RU"/>
           </a:p>
@@ -940,7 +940,7 @@
           <a:p>
             <a:fld id="{E45DF212-0581-4804-9196-08E59AD85A60}" type="datetime1">
               <a:rPr lang="ru-RU" smtClean="0"/>
-              <a:t>15.05.2026</a:t>
+              <a:t>26.05.2026</a:t>
             </a:fld>
             <a:endParaRPr lang="ru-RU"/>
           </a:p>
@@ -1151,7 +1151,7 @@
           <a:p>
             <a:fld id="{85A33102-27BA-4101-BD19-C265B43D1861}" type="datetime1">
               <a:rPr lang="ru-RU" smtClean="0"/>
-              <a:t>15.05.2026</a:t>
+              <a:t>26.05.2026</a:t>
             </a:fld>
             <a:endParaRPr lang="ru-RU"/>
           </a:p>
@@ -1387,7 +1387,7 @@
           <a:p>
             <a:fld id="{FA39DC75-0073-477D-B85F-B87BD2D9AA66}" type="datetime1">
               <a:rPr lang="ru-RU" smtClean="0"/>
-              <a:t>15.05.2026</a:t>
+              <a:t>26.05.2026</a:t>
             </a:fld>
             <a:endParaRPr lang="ru-RU"/>
           </a:p>
@@ -1677,7 +1677,7 @@
           <a:p>
             <a:fld id="{3826988C-DC8F-439B-AB31-15A4297BC55F}" type="datetime1">
               <a:rPr lang="ru-RU" smtClean="0"/>
-              <a:t>15.05.2026</a:t>
+              <a:t>26.05.2026</a:t>
             </a:fld>
             <a:endParaRPr lang="ru-RU"/>
           </a:p>
@@ -1945,7 +1945,7 @@
           <a:p>
             <a:fld id="{1FA422C7-A0AF-4B73-A3E0-92773191928A}" type="datetime1">
               <a:rPr lang="ru-RU" smtClean="0"/>
-              <a:t>15.05.2026</a:t>
+              <a:t>26.05.2026</a:t>
             </a:fld>
             <a:endParaRPr lang="ru-RU"/>
           </a:p>
@@ -2360,7 +2360,7 @@
           <a:p>
             <a:fld id="{AE075EF7-06F9-47F2-ABB5-15A865F5A607}" type="datetime1">
               <a:rPr lang="ru-RU" smtClean="0"/>
-              <a:t>15.05.2026</a:t>
+              <a:t>26.05.2026</a:t>
             </a:fld>
             <a:endParaRPr lang="ru-RU"/>
           </a:p>
@@ -2504,7 +2504,7 @@
           <a:p>
             <a:fld id="{18133A35-A3AC-4FD5-9F62-E2E842F797D6}" type="datetime1">
               <a:rPr lang="ru-RU" smtClean="0"/>
-              <a:t>15.05.2026</a:t>
+              <a:t>26.05.2026</a:t>
             </a:fld>
             <a:endParaRPr lang="ru-RU"/>
           </a:p>
@@ -2620,7 +2620,7 @@
           <a:p>
             <a:fld id="{C75FB44B-5874-4EB6-914B-68491120A420}" type="datetime1">
               <a:rPr lang="ru-RU" smtClean="0"/>
-              <a:t>15.05.2026</a:t>
+              <a:t>26.05.2026</a:t>
             </a:fld>
             <a:endParaRPr lang="ru-RU"/>
           </a:p>
@@ -2934,7 +2934,7 @@
           <a:p>
             <a:fld id="{DC59103B-4E77-49D0-9E40-D0F96ACD7E42}" type="datetime1">
               <a:rPr lang="ru-RU" smtClean="0"/>
-              <a:t>15.05.2026</a:t>
+              <a:t>26.05.2026</a:t>
             </a:fld>
             <a:endParaRPr lang="ru-RU"/>
           </a:p>
@@ -3225,7 +3225,7 @@
           <a:p>
             <a:fld id="{7F0F4974-916B-4771-921F-D6B7309972A3}" type="datetime1">
               <a:rPr lang="ru-RU" smtClean="0"/>
-              <a:t>15.05.2026</a:t>
+              <a:t>26.05.2026</a:t>
             </a:fld>
             <a:endParaRPr lang="ru-RU"/>
           </a:p>
@@ -3501,7 +3501,7 @@
           <a:p>
             <a:fld id="{2732E4CB-F021-4DE4-87F8-062D97973001}" type="datetime1">
               <a:rPr lang="ru-RU" smtClean="0"/>
-              <a:t>15.05.2026</a:t>
+              <a:t>26.05.2026</a:t>
             </a:fld>
             <a:endParaRPr lang="ru-RU" dirty="0"/>
           </a:p>
@@ -4612,7 +4612,7 @@
                 <p:ph idx="1"/>
                 <p:extLst>
                   <p:ext uri="{D42A27DB-BD31-4B8C-83A1-F6EECF244321}">
-                    <p14:modId xmlns:p14="http://schemas.microsoft.com/office/powerpoint/2010/main" val="4142363549"/>
+                    <p14:modId xmlns:p14="http://schemas.microsoft.com/office/powerpoint/2010/main" val="367277208"/>
                   </p:ext>
                 </p:extLst>
               </p:nvPr>
@@ -5515,12 +5515,6 @@
                               <a:spcPts val="1000"/>
                             </a:spcAft>
                           </a:pPr>
-                          <a:r>
-                            <a:rPr lang="ru-RU" sz="1200" dirty="0">
-                              <a:effectLst/>
-                            </a:rPr>
-                            <a:t>Подсчёт инверсий по проходам; результат зависит от шагов</a:t>
-                          </a:r>
                           <a:endParaRPr lang="ru-RU" sz="1400" dirty="0">
                             <a:effectLst/>
                             <a:latin typeface="Times New Roman" panose="02020603050405020304" pitchFamily="18" charset="0"/>
@@ -5859,7 +5853,7 @@
                 <p:ph idx="1"/>
                 <p:extLst>
                   <p:ext uri="{D42A27DB-BD31-4B8C-83A1-F6EECF244321}">
-                    <p14:modId xmlns:p14="http://schemas.microsoft.com/office/powerpoint/2010/main" val="4142363549"/>
+                    <p14:modId xmlns:p14="http://schemas.microsoft.com/office/powerpoint/2010/main" val="367277208"/>
                   </p:ext>
                 </p:extLst>
               </p:nvPr>
@@ -6139,7 +6133,7 @@
                         <a:blipFill>
                           <a:blip r:embed="rId2"/>
                           <a:stretch>
-                            <a:fillRect l="-152522" t="-28800" r="-593" b="-156800"/>
+                            <a:fillRect l="-152639" t="-28626" r="-713" b="-154580"/>
                           </a:stretch>
                         </a:blipFill>
                       </a:tcPr>
@@ -6262,7 +6256,7 @@
                         <a:blipFill>
                           <a:blip r:embed="rId2"/>
                           <a:stretch>
-                            <a:fillRect l="-152522" t="-374419" r="-593" b="-355814"/>
+                            <a:fillRect l="-152639" t="-382955" r="-713" b="-360227"/>
                           </a:stretch>
                         </a:blipFill>
                       </a:tcPr>
@@ -6374,12 +6368,6 @@
                               <a:spcPts val="1000"/>
                             </a:spcAft>
                           </a:pPr>
-                          <a:r>
-                            <a:rPr lang="ru-RU" sz="1200" dirty="0">
-                              <a:effectLst/>
-                            </a:rPr>
-                            <a:t>Подсчёт инверсий по проходам; результат зависит от шагов</a:t>
-                          </a:r>
                           <a:endParaRPr lang="ru-RU" sz="1400" dirty="0">
                             <a:effectLst/>
                             <a:latin typeface="Times New Roman" panose="02020603050405020304" pitchFamily="18" charset="0"/>
@@ -6896,7 +6884,7 @@
             </p:nvGraphicFramePr>
             <p:xfrm>
               <a:off x="838200" y="3086894"/>
-              <a:ext cx="10515600" cy="2155412"/>
+              <a:ext cx="10515600" cy="2204880"/>
             </p:xfrm>
             <a:graphic>
               <a:graphicData uri="http://schemas.openxmlformats.org/drawingml/2006/table">
@@ -9418,8 +9406,8 @@
           </a:p>
         </p:txBody>
       </p:sp>
-      <mc:AlternateContent xmlns:mc="http://schemas.openxmlformats.org/markup-compatibility/2006">
-        <mc:Choice xmlns:a14="http://schemas.microsoft.com/office/drawing/2010/main" Requires="a14">
+      <mc:AlternateContent xmlns:mc="http://schemas.openxmlformats.org/markup-compatibility/2006" xmlns:a14="http://schemas.microsoft.com/office/drawing/2010/main">
+        <mc:Choice Requires="a14">
           <p:sp>
             <p:nvSpPr>
               <p:cNvPr id="3" name="Объект 2">
@@ -10293,7 +10281,7 @@
             </p:txBody>
           </p:sp>
         </mc:Choice>
-        <mc:Fallback>
+        <mc:Fallback xmlns="">
           <p:sp>
             <p:nvSpPr>
               <p:cNvPr id="3" name="Объект 2">
@@ -11074,7 +11062,25 @@
                 <a:ea typeface="Calibri" panose="020F0502020204030204" pitchFamily="34" charset="0"/>
                 <a:cs typeface="Times New Roman" panose="02020603050405020304" pitchFamily="18" charset="0"/>
               </a:rPr>
-              <a:t>Расширение подхода на криптографические алгоритмы.</a:t>
+              <a:t>Расширение подхода на алгоритмы </a:t>
+            </a:r>
+            <a:r>
+              <a:rPr lang="ru-RU" sz="1900" dirty="0">
+                <a:effectLst/>
+                <a:latin typeface="Times New Roman" panose="02020603050405020304" pitchFamily="18" charset="0"/>
+                <a:ea typeface="Aptos" panose="020B0004020202020204" pitchFamily="34" charset="0"/>
+                <a:cs typeface="Times New Roman" panose="02020603050405020304" pitchFamily="18" charset="0"/>
+              </a:rPr>
+              <a:t>из вычислительной алгебры</a:t>
+            </a:r>
+            <a:r>
+              <a:rPr lang="ru-RU" sz="1900" kern="100" dirty="0">
+                <a:effectLst/>
+                <a:latin typeface="Times New Roman" panose="02020603050405020304" pitchFamily="18" charset="0"/>
+                <a:ea typeface="Calibri" panose="020F0502020204030204" pitchFamily="34" charset="0"/>
+                <a:cs typeface="Times New Roman" panose="02020603050405020304" pitchFamily="18" charset="0"/>
+              </a:rPr>
+              <a:t>.</a:t>
             </a:r>
           </a:p>
           <a:p>
@@ -11278,7 +11284,7 @@
                     <a:ea typeface="Calibri" panose="020F0502020204030204" pitchFamily="34" charset="0"/>
                     <a:cs typeface="Times New Roman" panose="02020603050405020304" pitchFamily="18" charset="0"/>
                   </a:rPr>
-                  <a:t> задаётся фиксированная последовательность компараторов (пары индексов). Порядок сравнений не зависит от значений ключей, поэтому число сравнений одинаково в лучшем, среднем и худшем случаях — удобно для параллельной и аппаратной реализации и для строгого анализа.</a:t>
+                  <a:t> задаётся фиксированная последовательность компараторов (пары индексов). Порядок сравнений не зависит от значений ключей, поэтому число сравнений одинаково в лучшем, среднем и худшем случаях — удобно для строгого анализа.</a:t>
                 </a:r>
                 <a:r>
                   <a:rPr lang="en-US" sz="1200" kern="100" dirty="0">
@@ -12366,7 +12372,7 @@
               <a:blipFill>
                 <a:blip r:embed="rId2"/>
                 <a:stretch>
-                  <a:fillRect l="-119" b="-260"/>
+                  <a:fillRect l="-57" b="-250"/>
                 </a:stretch>
               </a:blipFill>
             </p:spPr>
@@ -12810,12 +12816,31 @@
                       <m:t>·</m:t>
                     </m:r>
                     <m:r>
+                      <m:rPr>
+                        <m:sty m:val="p"/>
+                      </m:rPr>
+                      <a:rPr lang="ru-RU" sz="1800" i="0">
+                        <a:effectLst/>
+                        <a:latin typeface="Cambria Math" panose="02040503050406030204" pitchFamily="18" charset="0"/>
+                        <a:ea typeface="Times New Roman" panose="02020603050405020304" pitchFamily="18" charset="0"/>
+                      </a:rPr>
+                      <m:t>log</m:t>
+                    </m:r>
+                    <m:r>
+                      <a:rPr lang="en-US" sz="1800" b="0" i="1" smtClean="0">
+                        <a:effectLst/>
+                        <a:latin typeface="Cambria Math" panose="02040503050406030204" pitchFamily="18" charset="0"/>
+                        <a:ea typeface="Times New Roman" panose="02020603050405020304" pitchFamily="18" charset="0"/>
+                      </a:rPr>
+                      <m:t> </m:t>
+                    </m:r>
+                    <m:r>
                       <a:rPr lang="ru-RU" sz="1800" i="1">
                         <a:effectLst/>
                         <a:latin typeface="Cambria Math" panose="02040503050406030204" pitchFamily="18" charset="0"/>
                         <a:ea typeface="Times New Roman" panose="02020603050405020304" pitchFamily="18" charset="0"/>
                       </a:rPr>
-                      <m:t>𝑙𝑜𝑔𝑛</m:t>
+                      <m:t>𝑛</m:t>
                     </m:r>
                     <m:r>
                       <a:rPr lang="ru-RU" sz="1800" b="1" i="1">
@@ -12967,12 +12992,15 @@
                               </m:sSubPr>
                               <m:e>
                                 <m:r>
-                                  <a:rPr lang="ru-RU" sz="1800" i="1">
+                                  <m:rPr>
+                                    <m:sty m:val="p"/>
+                                  </m:rPr>
+                                  <a:rPr lang="ru-RU" sz="1800" i="0">
                                     <a:effectLst/>
                                     <a:latin typeface="Cambria Math" panose="02040503050406030204" pitchFamily="18" charset="0"/>
                                     <a:ea typeface="Times New Roman" panose="02020603050405020304" pitchFamily="18" charset="0"/>
                                   </a:rPr>
-                                  <m:t>𝑙𝑜𝑔</m:t>
+                                  <m:t>log</m:t>
                                 </m:r>
                               </m:e>
                               <m:sub>
@@ -13196,17 +13224,20 @@
                       <m:t>·</m:t>
                     </m:r>
                     <m:r>
-                      <a:rPr lang="ru-RU" sz="1800" i="1">
+                      <m:rPr>
+                        <m:sty m:val="p"/>
+                      </m:rPr>
+                      <a:rPr lang="ru-RU" sz="1800" i="0">
                         <a:effectLst/>
                         <a:latin typeface="Cambria Math" panose="02040503050406030204" pitchFamily="18" charset="0"/>
                         <a:ea typeface="Times New Roman" panose="02020603050405020304" pitchFamily="18" charset="0"/>
                       </a:rPr>
-                      <m:t>𝑙𝑜</m:t>
+                      <m:t>lo</m:t>
                     </m:r>
                     <m:sSup>
                       <m:sSupPr>
                         <m:ctrlPr>
-                          <a:rPr lang="en-US" sz="1800" b="0" i="1" smtClean="0">
+                          <a:rPr lang="en-US" sz="1800" b="0" smtClean="0">
                             <a:effectLst/>
                             <a:latin typeface="Cambria Math" panose="02040503050406030204" pitchFamily="18" charset="0"/>
                             <a:ea typeface="Times New Roman" panose="02020603050405020304" pitchFamily="18" charset="0"/>
@@ -13215,17 +13246,20 @@
                       </m:sSupPr>
                       <m:e>
                         <m:r>
-                          <a:rPr lang="ru-RU" sz="1800" i="1">
+                          <m:rPr>
+                            <m:sty m:val="p"/>
+                          </m:rPr>
+                          <a:rPr lang="ru-RU" sz="1800" i="0">
                             <a:effectLst/>
                             <a:latin typeface="Cambria Math" panose="02040503050406030204" pitchFamily="18" charset="0"/>
                             <a:ea typeface="Times New Roman" panose="02020603050405020304" pitchFamily="18" charset="0"/>
                           </a:rPr>
-                          <m:t>𝑔</m:t>
+                          <m:t>g</m:t>
                         </m:r>
                       </m:e>
                       <m:sup>
                         <m:r>
-                          <a:rPr lang="ru-RU" sz="1800" i="1">
+                          <a:rPr lang="ru-RU" sz="1800" i="0">
                             <a:effectLst/>
                             <a:latin typeface="Cambria Math" panose="02040503050406030204" pitchFamily="18" charset="0"/>
                             <a:ea typeface="Times New Roman" panose="02020603050405020304" pitchFamily="18" charset="0"/>
@@ -13468,12 +13502,15 @@
                                   </m:sSubPr>
                                   <m:e>
                                     <m:r>
-                                      <a:rPr lang="ru-RU" sz="1800" i="1">
+                                      <m:rPr>
+                                        <m:sty m:val="p"/>
+                                      </m:rPr>
+                                      <a:rPr lang="ru-RU" sz="1800" i="0">
                                         <a:effectLst/>
                                         <a:latin typeface="Cambria Math" panose="02040503050406030204" pitchFamily="18" charset="0"/>
                                         <a:ea typeface="Times New Roman" panose="02020603050405020304" pitchFamily="18" charset="0"/>
                                       </a:rPr>
-                                      <m:t>𝑙𝑜𝑔</m:t>
+                                      <m:t>log</m:t>
                                     </m:r>
                                   </m:e>
                                   <m:sub>
@@ -13564,11 +13601,14 @@
                           </m:sSupPr>
                           <m:e>
                             <m:r>
-                              <a:rPr lang="ru-RU" sz="1800" i="1">
+                              <m:rPr>
+                                <m:sty m:val="p"/>
+                              </m:rPr>
+                              <a:rPr lang="ru-RU" sz="1800" i="0">
                                 <a:latin typeface="Cambria Math" panose="02040503050406030204" pitchFamily="18" charset="0"/>
                                 <a:ea typeface="Times New Roman" panose="02020603050405020304" pitchFamily="18" charset="0"/>
                               </a:rPr>
-                              <m:t>𝑙𝑜𝑔</m:t>
+                              <m:t>log</m:t>
                             </m:r>
                           </m:e>
                           <m:sup>
@@ -14596,13 +14636,16 @@
                         <m:t>= </m:t>
                       </m:r>
                       <m:r>
-                        <a:rPr lang="ru-RU" sz="1800" b="0" i="1" smtClean="0">
+                        <m:rPr>
+                          <m:sty m:val="p"/>
+                        </m:rPr>
+                        <a:rPr lang="ru-RU" sz="1800" b="0" i="0" smtClean="0">
                           <a:effectLst/>
                           <a:latin typeface="Cambria Math" panose="02040503050406030204" pitchFamily="18" charset="0"/>
                           <a:ea typeface="Times New Roman" panose="02020603050405020304" pitchFamily="18" charset="0"/>
                           <a:cs typeface="Times New Roman" panose="02020603050405020304" pitchFamily="18" charset="0"/>
                         </a:rPr>
-                        <m:t>𝛩</m:t>
+                        <m:t>Θ</m:t>
                       </m:r>
                       <m:d>
                         <m:dPr>
@@ -15055,17 +15098,20 @@
                             <m:t>·</m:t>
                           </m:r>
                           <m:r>
-                            <a:rPr lang="en-US" sz="1800" i="1">
+                            <m:rPr>
+                              <m:sty m:val="p"/>
+                            </m:rPr>
+                            <a:rPr lang="en-US" sz="1800" i="0">
                               <a:latin typeface="Cambria Math" panose="02040503050406030204" pitchFamily="18" charset="0"/>
                               <a:ea typeface="Times New Roman" panose="02020603050405020304" pitchFamily="18" charset="0"/>
                               <a:cs typeface="Times New Roman" panose="02020603050405020304" pitchFamily="18" charset="0"/>
                             </a:rPr>
-                            <m:t>𝑙𝑜</m:t>
+                            <m:t>lo</m:t>
                           </m:r>
                           <m:sSub>
                             <m:sSubPr>
                               <m:ctrlPr>
-                                <a:rPr lang="ru-RU" sz="1800" i="1">
+                                <a:rPr lang="ru-RU" sz="1800">
                                   <a:latin typeface="Cambria Math" panose="02040503050406030204" pitchFamily="18" charset="0"/>
                                   <a:ea typeface="Times New Roman" panose="02020603050405020304" pitchFamily="18" charset="0"/>
                                   <a:cs typeface="Times New Roman" panose="02020603050405020304" pitchFamily="18" charset="0"/>
@@ -15074,17 +15120,20 @@
                             </m:sSubPr>
                             <m:e>
                               <m:r>
-                                <a:rPr lang="en-US" sz="1800" i="1">
+                                <m:rPr>
+                                  <m:sty m:val="p"/>
+                                </m:rPr>
+                                <a:rPr lang="en-US" sz="1800" i="0">
                                   <a:latin typeface="Cambria Math" panose="02040503050406030204" pitchFamily="18" charset="0"/>
                                   <a:ea typeface="Times New Roman" panose="02020603050405020304" pitchFamily="18" charset="0"/>
                                   <a:cs typeface="Times New Roman" panose="02020603050405020304" pitchFamily="18" charset="0"/>
                                 </a:rPr>
-                                <m:t>𝑔</m:t>
+                                <m:t>g</m:t>
                               </m:r>
                             </m:e>
                             <m:sub>
                               <m:r>
-                                <a:rPr lang="en-US" sz="1800" i="1">
+                                <a:rPr lang="en-US" sz="1800" i="0">
                                   <a:latin typeface="Cambria Math" panose="02040503050406030204" pitchFamily="18" charset="0"/>
                                   <a:ea typeface="Times New Roman" panose="02020603050405020304" pitchFamily="18" charset="0"/>
                                   <a:cs typeface="Times New Roman" panose="02020603050405020304" pitchFamily="18" charset="0"/>
@@ -15194,12 +15243,15 @@
                             <m:t>·</m:t>
                           </m:r>
                           <m:r>
-                            <a:rPr lang="en-US" sz="1800" i="1">
+                            <m:rPr>
+                              <m:sty m:val="p"/>
+                            </m:rPr>
+                            <a:rPr lang="en-US" sz="1800" i="0">
                               <a:latin typeface="Cambria Math" panose="02040503050406030204" pitchFamily="18" charset="0"/>
                               <a:ea typeface="Times New Roman" panose="02020603050405020304" pitchFamily="18" charset="0"/>
                               <a:cs typeface="Times New Roman" panose="02020603050405020304" pitchFamily="18" charset="0"/>
                             </a:rPr>
-                            <m:t>𝑙𝑜𝑔</m:t>
+                            <m:t>log</m:t>
                           </m:r>
                           <m:r>
                             <a:rPr lang="en-US" sz="1800" i="1">
@@ -15679,8 +15731,8 @@
           </a:p>
         </p:txBody>
       </p:sp>
-      <mc:AlternateContent xmlns:mc="http://schemas.openxmlformats.org/markup-compatibility/2006">
-        <mc:Choice xmlns:a14="http://schemas.microsoft.com/office/drawing/2010/main" Requires="a14">
+      <mc:AlternateContent xmlns:mc="http://schemas.openxmlformats.org/markup-compatibility/2006" xmlns:a14="http://schemas.microsoft.com/office/drawing/2010/main">
+        <mc:Choice Requires="a14">
           <p:sp>
             <p:nvSpPr>
               <p:cNvPr id="3" name="Объект 2">
@@ -16172,7 +16224,7 @@
             </p:txBody>
           </p:sp>
         </mc:Choice>
-        <mc:Fallback>
+        <mc:Fallback xmlns="">
           <p:sp>
             <p:nvSpPr>
               <p:cNvPr id="3" name="Объект 2">
@@ -16395,8 +16447,8 @@
           </a:p>
         </p:txBody>
       </p:sp>
-      <mc:AlternateContent xmlns:mc="http://schemas.openxmlformats.org/markup-compatibility/2006">
-        <mc:Choice xmlns:a14="http://schemas.microsoft.com/office/drawing/2010/main" Requires="a14">
+      <mc:AlternateContent xmlns:mc="http://schemas.openxmlformats.org/markup-compatibility/2006" xmlns:a14="http://schemas.microsoft.com/office/drawing/2010/main">
+        <mc:Choice Requires="a14">
           <p:sp>
             <p:nvSpPr>
               <p:cNvPr id="6" name="Объект 5">
@@ -16951,7 +17003,7 @@
             </p:txBody>
           </p:sp>
         </mc:Choice>
-        <mc:Fallback>
+        <mc:Fallback xmlns="">
           <p:sp>
             <p:nvSpPr>
               <p:cNvPr id="6" name="Объект 5">

--- a/ВКР.pptx
+++ b/ВКР.pptx
@@ -4594,8 +4594,8 @@
           </a:p>
         </p:txBody>
       </p:sp>
-      <mc:AlternateContent xmlns:mc="http://schemas.openxmlformats.org/markup-compatibility/2006">
-        <mc:Choice xmlns:a14="http://schemas.microsoft.com/office/drawing/2010/main" Requires="a14">
+      <mc:AlternateContent xmlns:mc="http://schemas.openxmlformats.org/markup-compatibility/2006" xmlns:a14="http://schemas.microsoft.com/office/drawing/2010/main">
+        <mc:Choice Requires="a14">
           <p:graphicFrame>
             <p:nvGraphicFramePr>
               <p:cNvPr id="11" name="Объект 10">
@@ -5836,7 +5836,7 @@
             </a:graphic>
           </p:graphicFrame>
         </mc:Choice>
-        <mc:Fallback>
+        <mc:Fallback xmlns="">
           <p:graphicFrame>
             <p:nvGraphicFramePr>
               <p:cNvPr id="11" name="Объект 10">
@@ -9406,8 +9406,8 @@
           </a:p>
         </p:txBody>
       </p:sp>
-      <mc:AlternateContent xmlns:mc="http://schemas.openxmlformats.org/markup-compatibility/2006" xmlns:a14="http://schemas.microsoft.com/office/drawing/2010/main">
-        <mc:Choice Requires="a14">
+      <mc:AlternateContent xmlns:mc="http://schemas.openxmlformats.org/markup-compatibility/2006">
+        <mc:Choice xmlns:a14="http://schemas.microsoft.com/office/drawing/2010/main" Requires="a14">
           <p:sp>
             <p:nvSpPr>
               <p:cNvPr id="3" name="Объект 2">
@@ -9743,18 +9743,21 @@
                           <m:t> </m:t>
                         </m:r>
                         <m:r>
-                          <a:rPr lang="ru-RU" sz="1600" i="1">
+                          <m:rPr>
+                            <m:sty m:val="p"/>
+                          </m:rPr>
+                          <a:rPr lang="ru-RU" sz="1600" i="0">
                             <a:effectLst/>
                             <a:latin typeface="Cambria Math" panose="02040503050406030204" pitchFamily="18" charset="0"/>
                             <a:ea typeface="Times New Roman" panose="02020603050405020304" pitchFamily="18" charset="0"/>
                             <a:cs typeface="Times New Roman" panose="02020603050405020304" pitchFamily="18" charset="0"/>
                           </a:rPr>
-                          <m:t>𝑙𝑜</m:t>
+                          <m:t>lo</m:t>
                         </m:r>
                         <m:sSub>
                           <m:sSubPr>
                             <m:ctrlPr>
-                              <a:rPr lang="ru-RU" sz="1600" i="1">
+                              <a:rPr lang="ru-RU" sz="1600">
                                 <a:effectLst/>
                                 <a:latin typeface="Cambria Math" panose="02040503050406030204" pitchFamily="18" charset="0"/>
                               </a:rPr>
@@ -9762,18 +9765,21 @@
                           </m:sSubPr>
                           <m:e>
                             <m:r>
-                              <a:rPr lang="ru-RU" sz="1600" i="1">
+                              <m:rPr>
+                                <m:sty m:val="p"/>
+                              </m:rPr>
+                              <a:rPr lang="ru-RU" sz="1600" i="0">
                                 <a:effectLst/>
                                 <a:latin typeface="Cambria Math" panose="02040503050406030204" pitchFamily="18" charset="0"/>
                                 <a:ea typeface="Times New Roman" panose="02020603050405020304" pitchFamily="18" charset="0"/>
                                 <a:cs typeface="Times New Roman" panose="02020603050405020304" pitchFamily="18" charset="0"/>
                               </a:rPr>
-                              <m:t>𝑔</m:t>
+                              <m:t>g</m:t>
                             </m:r>
                           </m:e>
                           <m:sub>
                             <m:r>
-                              <a:rPr lang="en-US" sz="1600" i="1">
+                              <a:rPr lang="en-US" sz="1600" i="0">
                                 <a:effectLst/>
                                 <a:latin typeface="Cambria Math" panose="02040503050406030204" pitchFamily="18" charset="0"/>
                                 <a:ea typeface="Times New Roman" panose="02020603050405020304" pitchFamily="18" charset="0"/>
@@ -10281,7 +10287,7 @@
             </p:txBody>
           </p:sp>
         </mc:Choice>
-        <mc:Fallback xmlns="">
+        <mc:Fallback>
           <p:sp>
             <p:nvSpPr>
               <p:cNvPr id="3" name="Объект 2">
@@ -10302,7 +10308,7 @@
               <a:blipFill>
                 <a:blip r:embed="rId2"/>
                 <a:stretch>
-                  <a:fillRect l="-483"/>
+                  <a:fillRect l="-406"/>
                 </a:stretch>
               </a:blipFill>
             </p:spPr>
@@ -11222,8 +11228,8 @@
           </a:p>
         </p:txBody>
       </p:sp>
-      <mc:AlternateContent xmlns:mc="http://schemas.openxmlformats.org/markup-compatibility/2006">
-        <mc:Choice xmlns:a14="http://schemas.microsoft.com/office/drawing/2010/main" Requires="a14">
+      <mc:AlternateContent xmlns:mc="http://schemas.openxmlformats.org/markup-compatibility/2006" xmlns:a14="http://schemas.microsoft.com/office/drawing/2010/main">
+        <mc:Choice Requires="a14">
           <p:sp>
             <p:nvSpPr>
               <p:cNvPr id="3" name="Объект 2">
@@ -12347,7 +12353,7 @@
             </p:txBody>
           </p:sp>
         </mc:Choice>
-        <mc:Fallback>
+        <mc:Fallback xmlns="">
           <p:sp>
             <p:nvSpPr>
               <p:cNvPr id="3" name="Объект 2">
@@ -12509,8 +12515,8 @@
           </a:p>
         </p:txBody>
       </p:sp>
-      <mc:AlternateContent xmlns:mc="http://schemas.openxmlformats.org/markup-compatibility/2006">
-        <mc:Choice xmlns:a14="http://schemas.microsoft.com/office/drawing/2010/main" Requires="a14">
+      <mc:AlternateContent xmlns:mc="http://schemas.openxmlformats.org/markup-compatibility/2006" xmlns:a14="http://schemas.microsoft.com/office/drawing/2010/main">
+        <mc:Choice Requires="a14">
           <p:sp>
             <p:nvSpPr>
               <p:cNvPr id="3" name="Объект 2">
@@ -13237,7 +13243,7 @@
                     <m:sSup>
                       <m:sSupPr>
                         <m:ctrlPr>
-                          <a:rPr lang="en-US" sz="1800" b="0" smtClean="0">
+                          <a:rPr lang="en-US" sz="1800" b="0" i="1" smtClean="0">
                             <a:effectLst/>
                             <a:latin typeface="Cambria Math" panose="02040503050406030204" pitchFamily="18" charset="0"/>
                             <a:ea typeface="Times New Roman" panose="02020603050405020304" pitchFamily="18" charset="0"/>
@@ -13653,7 +13659,7 @@
             </p:txBody>
           </p:sp>
         </mc:Choice>
-        <mc:Fallback>
+        <mc:Fallback xmlns="">
           <p:sp>
             <p:nvSpPr>
               <p:cNvPr id="3" name="Объект 2">
@@ -14238,8 +14244,8 @@
           </a:p>
         </p:txBody>
       </p:sp>
-      <mc:AlternateContent xmlns:mc="http://schemas.openxmlformats.org/markup-compatibility/2006">
-        <mc:Choice xmlns:a14="http://schemas.microsoft.com/office/drawing/2010/main" Requires="a14">
+      <mc:AlternateContent xmlns:mc="http://schemas.openxmlformats.org/markup-compatibility/2006" xmlns:a14="http://schemas.microsoft.com/office/drawing/2010/main">
+        <mc:Choice Requires="a14">
           <p:sp>
             <p:nvSpPr>
               <p:cNvPr id="3" name="Объект 2">
@@ -15111,7 +15117,7 @@
                           <m:sSub>
                             <m:sSubPr>
                               <m:ctrlPr>
-                                <a:rPr lang="ru-RU" sz="1800">
+                                <a:rPr lang="ru-RU" sz="1800" i="1">
                                   <a:latin typeface="Cambria Math" panose="02040503050406030204" pitchFamily="18" charset="0"/>
                                   <a:ea typeface="Times New Roman" panose="02020603050405020304" pitchFamily="18" charset="0"/>
                                   <a:cs typeface="Times New Roman" panose="02020603050405020304" pitchFamily="18" charset="0"/>
@@ -15575,7 +15581,7 @@
             </p:txBody>
           </p:sp>
         </mc:Choice>
-        <mc:Fallback>
+        <mc:Fallback xmlns="">
           <p:sp>
             <p:nvSpPr>
               <p:cNvPr id="3" name="Объект 2">

--- a/ВКР.pptx
+++ b/ВКР.pptx
@@ -11,15 +11,15 @@
     <p:sldId id="256" r:id="rId2"/>
     <p:sldId id="257" r:id="rId3"/>
     <p:sldId id="259" r:id="rId4"/>
-    <p:sldId id="258" r:id="rId5"/>
-    <p:sldId id="260" r:id="rId6"/>
-    <p:sldId id="261" r:id="rId7"/>
-    <p:sldId id="262" r:id="rId8"/>
-    <p:sldId id="263" r:id="rId9"/>
-    <p:sldId id="264" r:id="rId10"/>
-    <p:sldId id="265" r:id="rId11"/>
-    <p:sldId id="266" r:id="rId12"/>
-    <p:sldId id="267" r:id="rId13"/>
+    <p:sldId id="272" r:id="rId5"/>
+    <p:sldId id="258" r:id="rId6"/>
+    <p:sldId id="260" r:id="rId7"/>
+    <p:sldId id="261" r:id="rId8"/>
+    <p:sldId id="262" r:id="rId9"/>
+    <p:sldId id="263" r:id="rId10"/>
+    <p:sldId id="264" r:id="rId11"/>
+    <p:sldId id="265" r:id="rId12"/>
+    <p:sldId id="266" r:id="rId13"/>
     <p:sldId id="268" r:id="rId14"/>
     <p:sldId id="269" r:id="rId15"/>
     <p:sldId id="270" r:id="rId16"/>
@@ -212,7 +212,7 @@
           <a:p>
             <a:fld id="{31713541-B05E-4552-95DD-0156478D5135}" type="datetimeFigureOut">
               <a:rPr lang="ru-RU" smtClean="0"/>
-              <a:t>26.05.2026</a:t>
+              <a:t>13.06.2026</a:t>
             </a:fld>
             <a:endParaRPr lang="ru-RU"/>
           </a:p>
@@ -519,7 +519,7 @@
           <a:p>
             <a:fld id="{ABD338A3-B5FA-4892-8782-04A8FAC2DE2D}" type="datetime1">
               <a:rPr lang="ru-RU" smtClean="0"/>
-              <a:t>26.05.2026</a:t>
+              <a:t>13.06.2026</a:t>
             </a:fld>
             <a:endParaRPr lang="ru-RU"/>
           </a:p>
@@ -940,7 +940,7 @@
           <a:p>
             <a:fld id="{E45DF212-0581-4804-9196-08E59AD85A60}" type="datetime1">
               <a:rPr lang="ru-RU" smtClean="0"/>
-              <a:t>26.05.2026</a:t>
+              <a:t>13.06.2026</a:t>
             </a:fld>
             <a:endParaRPr lang="ru-RU"/>
           </a:p>
@@ -1151,7 +1151,7 @@
           <a:p>
             <a:fld id="{85A33102-27BA-4101-BD19-C265B43D1861}" type="datetime1">
               <a:rPr lang="ru-RU" smtClean="0"/>
-              <a:t>26.05.2026</a:t>
+              <a:t>13.06.2026</a:t>
             </a:fld>
             <a:endParaRPr lang="ru-RU"/>
           </a:p>
@@ -1387,7 +1387,7 @@
           <a:p>
             <a:fld id="{FA39DC75-0073-477D-B85F-B87BD2D9AA66}" type="datetime1">
               <a:rPr lang="ru-RU" smtClean="0"/>
-              <a:t>26.05.2026</a:t>
+              <a:t>13.06.2026</a:t>
             </a:fld>
             <a:endParaRPr lang="ru-RU"/>
           </a:p>
@@ -1677,7 +1677,7 @@
           <a:p>
             <a:fld id="{3826988C-DC8F-439B-AB31-15A4297BC55F}" type="datetime1">
               <a:rPr lang="ru-RU" smtClean="0"/>
-              <a:t>26.05.2026</a:t>
+              <a:t>13.06.2026</a:t>
             </a:fld>
             <a:endParaRPr lang="ru-RU"/>
           </a:p>
@@ -1945,7 +1945,7 @@
           <a:p>
             <a:fld id="{1FA422C7-A0AF-4B73-A3E0-92773191928A}" type="datetime1">
               <a:rPr lang="ru-RU" smtClean="0"/>
-              <a:t>26.05.2026</a:t>
+              <a:t>13.06.2026</a:t>
             </a:fld>
             <a:endParaRPr lang="ru-RU"/>
           </a:p>
@@ -2360,7 +2360,7 @@
           <a:p>
             <a:fld id="{AE075EF7-06F9-47F2-ABB5-15A865F5A607}" type="datetime1">
               <a:rPr lang="ru-RU" smtClean="0"/>
-              <a:t>26.05.2026</a:t>
+              <a:t>13.06.2026</a:t>
             </a:fld>
             <a:endParaRPr lang="ru-RU"/>
           </a:p>
@@ -2504,7 +2504,7 @@
           <a:p>
             <a:fld id="{18133A35-A3AC-4FD5-9F62-E2E842F797D6}" type="datetime1">
               <a:rPr lang="ru-RU" smtClean="0"/>
-              <a:t>26.05.2026</a:t>
+              <a:t>13.06.2026</a:t>
             </a:fld>
             <a:endParaRPr lang="ru-RU"/>
           </a:p>
@@ -2620,7 +2620,7 @@
           <a:p>
             <a:fld id="{C75FB44B-5874-4EB6-914B-68491120A420}" type="datetime1">
               <a:rPr lang="ru-RU" smtClean="0"/>
-              <a:t>26.05.2026</a:t>
+              <a:t>13.06.2026</a:t>
             </a:fld>
             <a:endParaRPr lang="ru-RU"/>
           </a:p>
@@ -2934,7 +2934,7 @@
           <a:p>
             <a:fld id="{DC59103B-4E77-49D0-9E40-D0F96ACD7E42}" type="datetime1">
               <a:rPr lang="ru-RU" smtClean="0"/>
-              <a:t>26.05.2026</a:t>
+              <a:t>13.06.2026</a:t>
             </a:fld>
             <a:endParaRPr lang="ru-RU"/>
           </a:p>
@@ -3225,7 +3225,7 @@
           <a:p>
             <a:fld id="{7F0F4974-916B-4771-921F-D6B7309972A3}" type="datetime1">
               <a:rPr lang="ru-RU" smtClean="0"/>
-              <a:t>26.05.2026</a:t>
+              <a:t>13.06.2026</a:t>
             </a:fld>
             <a:endParaRPr lang="ru-RU"/>
           </a:p>
@@ -3501,7 +3501,7 @@
           <a:p>
             <a:fld id="{2732E4CB-F021-4DE4-87F8-062D97973001}" type="datetime1">
               <a:rPr lang="ru-RU" smtClean="0"/>
-              <a:t>26.05.2026</a:t>
+              <a:t>13.06.2026</a:t>
             </a:fld>
             <a:endParaRPr lang="ru-RU" dirty="0"/>
           </a:p>
@@ -4519,6 +4519,723 @@
             <p:ph type="title"/>
           </p:nvPr>
         </p:nvSpPr>
+        <p:spPr>
+          <a:xfrm>
+            <a:off x="859746" y="365125"/>
+            <a:ext cx="10515600" cy="1325563"/>
+          </a:xfrm>
+        </p:spPr>
+        <p:txBody>
+          <a:bodyPr/>
+          <a:lstStyle/>
+          <a:p>
+            <a:r>
+              <a:rPr lang="ru-RU" dirty="0"/>
+              <a:t>Соответствие классических сортировок условиям A–C</a:t>
+            </a:r>
+          </a:p>
+        </p:txBody>
+      </p:sp>
+      <p:sp>
+        <p:nvSpPr>
+          <p:cNvPr id="4" name="Нижний колонтитул 3">
+            <a:extLst>
+              <a:ext uri="{FF2B5EF4-FFF2-40B4-BE49-F238E27FC236}">
+                <a16:creationId xmlns:a16="http://schemas.microsoft.com/office/drawing/2014/main" id="{5925DB78-19D7-65BE-0456-469E827F2B66}"/>
+              </a:ext>
+            </a:extLst>
+          </p:cNvPr>
+          <p:cNvSpPr>
+            <a:spLocks noGrp="1"/>
+          </p:cNvSpPr>
+          <p:nvPr>
+            <p:ph type="ftr" sz="quarter" idx="11"/>
+          </p:nvPr>
+        </p:nvSpPr>
+        <p:spPr/>
+        <p:txBody>
+          <a:bodyPr/>
+          <a:lstStyle/>
+          <a:p>
+            <a:r>
+              <a:rPr lang="ru-RU" dirty="0"/>
+              <a:t>ВКР (м) студента Муханова Дмитрия Ильича</a:t>
+            </a:r>
+          </a:p>
+        </p:txBody>
+      </p:sp>
+      <p:sp>
+        <p:nvSpPr>
+          <p:cNvPr id="5" name="Номер слайда 4">
+            <a:extLst>
+              <a:ext uri="{FF2B5EF4-FFF2-40B4-BE49-F238E27FC236}">
+                <a16:creationId xmlns:a16="http://schemas.microsoft.com/office/drawing/2014/main" id="{4F14D21B-6418-AB2B-D943-6DAD1BB04F34}"/>
+              </a:ext>
+            </a:extLst>
+          </p:cNvPr>
+          <p:cNvSpPr>
+            <a:spLocks noGrp="1"/>
+          </p:cNvSpPr>
+          <p:nvPr>
+            <p:ph type="sldNum" sz="quarter" idx="12"/>
+          </p:nvPr>
+        </p:nvSpPr>
+        <p:spPr/>
+        <p:txBody>
+          <a:bodyPr/>
+          <a:lstStyle/>
+          <a:p>
+            <a:fld id="{2E0151D6-1CE6-4546-836D-2A836D7A7EF2}" type="slidenum">
+              <a:rPr lang="ru-RU" smtClean="0"/>
+              <a:pPr/>
+              <a:t>10</a:t>
+            </a:fld>
+            <a:endParaRPr lang="ru-RU" dirty="0"/>
+          </a:p>
+        </p:txBody>
+      </p:sp>
+      <mc:AlternateContent xmlns:mc="http://schemas.openxmlformats.org/markup-compatibility/2006" xmlns:a14="http://schemas.microsoft.com/office/drawing/2010/main">
+        <mc:Choice Requires="a14">
+          <p:sp>
+            <p:nvSpPr>
+              <p:cNvPr id="6" name="Объект 5">
+                <a:extLst>
+                  <a:ext uri="{FF2B5EF4-FFF2-40B4-BE49-F238E27FC236}">
+                    <a16:creationId xmlns:a16="http://schemas.microsoft.com/office/drawing/2014/main" id="{F2447BDF-697A-A416-9F2A-D64868F46B68}"/>
+                  </a:ext>
+                </a:extLst>
+              </p:cNvPr>
+              <p:cNvSpPr>
+                <a:spLocks noGrp="1"/>
+              </p:cNvSpPr>
+              <p:nvPr>
+                <p:ph idx="1"/>
+              </p:nvPr>
+            </p:nvSpPr>
+            <p:spPr/>
+            <p:txBody>
+              <a:bodyPr>
+                <a:normAutofit fontScale="92500" lnSpcReduction="20000"/>
+              </a:bodyPr>
+              <a:lstStyle/>
+              <a:p>
+                <a:pPr marL="0" indent="0" rtl="0">
+                  <a:lnSpc>
+                    <a:spcPct val="150000"/>
+                  </a:lnSpc>
+                  <a:buNone/>
+                </a:pPr>
+                <a:r>
+                  <a:rPr lang="ru-RU" sz="1900" dirty="0">
+                    <a:effectLst/>
+                    <a:latin typeface="Times New Roman" panose="02020603050405020304" pitchFamily="18" charset="0"/>
+                    <a:cs typeface="Times New Roman" panose="02020603050405020304" pitchFamily="18" charset="0"/>
+                  </a:rPr>
+                  <a:t>Подходят напрямую</a:t>
+                </a:r>
+                <a:r>
+                  <a:rPr lang="en-US" sz="1900" dirty="0">
+                    <a:effectLst/>
+                    <a:latin typeface="Times New Roman" panose="02020603050405020304" pitchFamily="18" charset="0"/>
+                    <a:cs typeface="Times New Roman" panose="02020603050405020304" pitchFamily="18" charset="0"/>
+                  </a:rPr>
+                  <a:t>:</a:t>
+                </a:r>
+                <a:endParaRPr lang="ru-RU" sz="1900" dirty="0">
+                  <a:latin typeface="Times New Roman" panose="02020603050405020304" pitchFamily="18" charset="0"/>
+                  <a:cs typeface="Times New Roman" panose="02020603050405020304" pitchFamily="18" charset="0"/>
+                </a:endParaRPr>
+              </a:p>
+              <a:p>
+                <a:pPr rtl="0">
+                  <a:lnSpc>
+                    <a:spcPct val="150000"/>
+                  </a:lnSpc>
+                  <a:buFont typeface="Arial" panose="020B0604020202020204" pitchFamily="34" charset="0"/>
+                  <a:buChar char="•"/>
+                </a:pPr>
+                <a:r>
+                  <a:rPr lang="en-US" sz="1900" dirty="0">
+                    <a:effectLst/>
+                    <a:latin typeface="Times New Roman" panose="02020603050405020304" pitchFamily="18" charset="0"/>
+                    <a:cs typeface="Times New Roman" panose="02020603050405020304" pitchFamily="18" charset="0"/>
+                  </a:rPr>
+                  <a:t>C</a:t>
+                </a:r>
+                <a:r>
+                  <a:rPr lang="ru-RU" sz="1900" dirty="0" err="1">
+                    <a:latin typeface="Times New Roman" panose="02020603050405020304" pitchFamily="18" charset="0"/>
+                    <a:cs typeface="Times New Roman" panose="02020603050405020304" pitchFamily="18" charset="0"/>
+                  </a:rPr>
+                  <a:t>ортировка</a:t>
+                </a:r>
+                <a:r>
+                  <a:rPr lang="ru-RU" sz="1900" dirty="0">
+                    <a:latin typeface="Times New Roman" panose="02020603050405020304" pitchFamily="18" charset="0"/>
+                    <a:cs typeface="Times New Roman" panose="02020603050405020304" pitchFamily="18" charset="0"/>
+                  </a:rPr>
+                  <a:t> </a:t>
+                </a:r>
+                <a:r>
+                  <a:rPr lang="ru-RU" sz="1900" dirty="0">
+                    <a:effectLst/>
+                    <a:latin typeface="Times New Roman" panose="02020603050405020304" pitchFamily="18" charset="0"/>
+                    <a:cs typeface="Times New Roman" panose="02020603050405020304" pitchFamily="18" charset="0"/>
+                  </a:rPr>
+                  <a:t>Бэтчер</a:t>
+                </a:r>
+                <a:r>
+                  <a:rPr lang="ru-RU" sz="1900" dirty="0">
+                    <a:latin typeface="Times New Roman" panose="02020603050405020304" pitchFamily="18" charset="0"/>
+                    <a:cs typeface="Times New Roman" panose="02020603050405020304" pitchFamily="18" charset="0"/>
+                  </a:rPr>
+                  <a:t>а</a:t>
+                </a:r>
+                <a:r>
+                  <a:rPr lang="ru-RU" sz="1900" dirty="0">
+                    <a:effectLst/>
+                    <a:latin typeface="Times New Roman" panose="02020603050405020304" pitchFamily="18" charset="0"/>
+                    <a:cs typeface="Times New Roman" panose="02020603050405020304" pitchFamily="18" charset="0"/>
+                  </a:rPr>
+                  <a:t> — фиксированные подзадачи </a:t>
+                </a:r>
+                <a:r>
+                  <a:rPr lang="ru-RU" sz="1900" dirty="0">
+                    <a:latin typeface="Times New Roman" panose="02020603050405020304" pitchFamily="18" charset="0"/>
+                    <a:cs typeface="Times New Roman" panose="02020603050405020304" pitchFamily="18" charset="0"/>
+                  </a:rPr>
+                  <a:t>размера</a:t>
+                </a:r>
+                <a:r>
+                  <a:rPr lang="ru-RU" sz="1900" dirty="0">
+                    <a:effectLst/>
+                    <a:latin typeface="Times New Roman" panose="02020603050405020304" pitchFamily="18" charset="0"/>
+                    <a:cs typeface="Times New Roman" panose="02020603050405020304" pitchFamily="18" charset="0"/>
+                  </a:rPr>
+                  <a:t> </a:t>
+                </a:r>
+                <a14:m>
+                  <m:oMath xmlns:m="http://schemas.openxmlformats.org/officeDocument/2006/math">
+                    <m:f>
+                      <m:fPr>
+                        <m:ctrlPr>
+                          <a:rPr lang="en-US" sz="1900" i="1" dirty="0" smtClean="0">
+                            <a:latin typeface="Cambria Math" panose="02040503050406030204" pitchFamily="18" charset="0"/>
+                            <a:cs typeface="Times New Roman" panose="02020603050405020304" pitchFamily="18" charset="0"/>
+                          </a:rPr>
+                        </m:ctrlPr>
+                      </m:fPr>
+                      <m:num>
+                        <m:r>
+                          <a:rPr lang="en-US" sz="1900" i="1" dirty="0" smtClean="0">
+                            <a:latin typeface="Cambria Math" panose="02040503050406030204" pitchFamily="18" charset="0"/>
+                            <a:cs typeface="Times New Roman" panose="02020603050405020304" pitchFamily="18" charset="0"/>
+                          </a:rPr>
+                          <m:t>𝑛</m:t>
+                        </m:r>
+                      </m:num>
+                      <m:den>
+                        <m:r>
+                          <a:rPr lang="en-US" sz="1900" i="1" dirty="0" smtClean="0">
+                            <a:latin typeface="Cambria Math" panose="02040503050406030204" pitchFamily="18" charset="0"/>
+                            <a:cs typeface="Times New Roman" panose="02020603050405020304" pitchFamily="18" charset="0"/>
+                          </a:rPr>
+                          <m:t>2</m:t>
+                        </m:r>
+                      </m:den>
+                    </m:f>
+                  </m:oMath>
+                </a14:m>
+                <a:r>
+                  <a:rPr lang="en-US" sz="1900" dirty="0">
+                    <a:effectLst/>
+                    <a:latin typeface="Times New Roman" panose="02020603050405020304" pitchFamily="18" charset="0"/>
+                    <a:cs typeface="Times New Roman" panose="02020603050405020304" pitchFamily="18" charset="0"/>
+                  </a:rPr>
+                  <a:t>, </a:t>
+                </a:r>
+                <a:r>
+                  <a:rPr lang="ru-RU" sz="1900" dirty="0">
+                    <a:effectLst/>
+                    <a:latin typeface="Times New Roman" panose="02020603050405020304" pitchFamily="18" charset="0"/>
+                    <a:cs typeface="Times New Roman" panose="02020603050405020304" pitchFamily="18" charset="0"/>
+                  </a:rPr>
+                  <a:t>явное слияние.</a:t>
+                </a:r>
+                <a:endParaRPr lang="ru-RU" sz="1900" dirty="0">
+                  <a:latin typeface="Times New Roman" panose="02020603050405020304" pitchFamily="18" charset="0"/>
+                  <a:cs typeface="Times New Roman" panose="02020603050405020304" pitchFamily="18" charset="0"/>
+                </a:endParaRPr>
+              </a:p>
+              <a:p>
+                <a:pPr rtl="0">
+                  <a:lnSpc>
+                    <a:spcPct val="150000"/>
+                  </a:lnSpc>
+                  <a:buFont typeface="Arial" panose="020B0604020202020204" pitchFamily="34" charset="0"/>
+                  <a:buChar char="•"/>
+                </a:pPr>
+                <a:r>
+                  <a:rPr lang="en-US" sz="1900" dirty="0">
+                    <a:effectLst/>
+                    <a:latin typeface="Times New Roman" panose="02020603050405020304" pitchFamily="18" charset="0"/>
+                    <a:cs typeface="Times New Roman" panose="02020603050405020304" pitchFamily="18" charset="0"/>
+                  </a:rPr>
+                  <a:t>Merge Sort — </a:t>
+                </a:r>
+                <a:r>
+                  <a:rPr lang="ru-RU" sz="1900" dirty="0">
+                    <a:effectLst/>
+                    <a:latin typeface="Times New Roman" panose="02020603050405020304" pitchFamily="18" charset="0"/>
+                    <a:cs typeface="Times New Roman" panose="02020603050405020304" pitchFamily="18" charset="0"/>
+                  </a:rPr>
+                  <a:t>две половины </a:t>
+                </a:r>
+                <a14:m>
+                  <m:oMath xmlns:m="http://schemas.openxmlformats.org/officeDocument/2006/math">
+                    <m:f>
+                      <m:fPr>
+                        <m:ctrlPr>
+                          <a:rPr lang="en-US" sz="1900" i="1" dirty="0" smtClean="0">
+                            <a:latin typeface="Cambria Math" panose="02040503050406030204" pitchFamily="18" charset="0"/>
+                            <a:cs typeface="Times New Roman" panose="02020603050405020304" pitchFamily="18" charset="0"/>
+                          </a:rPr>
+                        </m:ctrlPr>
+                      </m:fPr>
+                      <m:num>
+                        <m:r>
+                          <a:rPr lang="en-US" sz="1900" i="1" dirty="0" smtClean="0">
+                            <a:latin typeface="Cambria Math" panose="02040503050406030204" pitchFamily="18" charset="0"/>
+                            <a:cs typeface="Times New Roman" panose="02020603050405020304" pitchFamily="18" charset="0"/>
+                          </a:rPr>
+                          <m:t>𝑛</m:t>
+                        </m:r>
+                      </m:num>
+                      <m:den>
+                        <m:r>
+                          <a:rPr lang="en-US" sz="1900" i="1" dirty="0" smtClean="0">
+                            <a:latin typeface="Cambria Math" panose="02040503050406030204" pitchFamily="18" charset="0"/>
+                            <a:cs typeface="Times New Roman" panose="02020603050405020304" pitchFamily="18" charset="0"/>
+                          </a:rPr>
+                          <m:t>2</m:t>
+                        </m:r>
+                      </m:den>
+                    </m:f>
+                  </m:oMath>
+                </a14:m>
+                <a:r>
+                  <a:rPr lang="en-US" sz="1900" dirty="0">
+                    <a:effectLst/>
+                    <a:latin typeface="Times New Roman" panose="02020603050405020304" pitchFamily="18" charset="0"/>
+                    <a:cs typeface="Times New Roman" panose="02020603050405020304" pitchFamily="18" charset="0"/>
+                  </a:rPr>
+                  <a:t>, </a:t>
+                </a:r>
+                <a:r>
+                  <a:rPr lang="ru-RU" sz="1900" dirty="0">
+                    <a:effectLst/>
+                    <a:latin typeface="Times New Roman" panose="02020603050405020304" pitchFamily="18" charset="0"/>
+                    <a:cs typeface="Times New Roman" panose="02020603050405020304" pitchFamily="18" charset="0"/>
+                  </a:rPr>
+                  <a:t>линейное слияние.</a:t>
+                </a:r>
+                <a:endParaRPr lang="ru-RU" sz="1900" dirty="0">
+                  <a:latin typeface="Times New Roman" panose="02020603050405020304" pitchFamily="18" charset="0"/>
+                  <a:cs typeface="Times New Roman" panose="02020603050405020304" pitchFamily="18" charset="0"/>
+                </a:endParaRPr>
+              </a:p>
+              <a:p>
+                <a:pPr rtl="0">
+                  <a:lnSpc>
+                    <a:spcPct val="150000"/>
+                  </a:lnSpc>
+                  <a:buFont typeface="Arial" panose="020B0604020202020204" pitchFamily="34" charset="0"/>
+                  <a:buChar char="•"/>
+                </a:pPr>
+                <a:r>
+                  <a:rPr lang="en-US" sz="1900" dirty="0" err="1">
+                    <a:effectLst/>
+                    <a:latin typeface="Times New Roman" panose="02020603050405020304" pitchFamily="18" charset="0"/>
+                    <a:cs typeface="Times New Roman" panose="02020603050405020304" pitchFamily="18" charset="0"/>
+                  </a:rPr>
+                  <a:t>Bitonic</a:t>
+                </a:r>
+                <a:r>
+                  <a:rPr lang="en-US" sz="1900" dirty="0">
+                    <a:effectLst/>
+                    <a:latin typeface="Times New Roman" panose="02020603050405020304" pitchFamily="18" charset="0"/>
+                    <a:cs typeface="Times New Roman" panose="02020603050405020304" pitchFamily="18" charset="0"/>
+                  </a:rPr>
+                  <a:t> Sort — </a:t>
+                </a:r>
+                <a:r>
+                  <a:rPr lang="ru-RU" sz="1900" dirty="0">
+                    <a:effectLst/>
+                    <a:latin typeface="Times New Roman" panose="02020603050405020304" pitchFamily="18" charset="0"/>
+                    <a:cs typeface="Times New Roman" panose="02020603050405020304" pitchFamily="18" charset="0"/>
+                  </a:rPr>
+                  <a:t>рекурсивная сортировочная сеть.</a:t>
+                </a:r>
+                <a:endParaRPr lang="ru-RU" sz="1900" dirty="0">
+                  <a:latin typeface="Times New Roman" panose="02020603050405020304" pitchFamily="18" charset="0"/>
+                  <a:cs typeface="Times New Roman" panose="02020603050405020304" pitchFamily="18" charset="0"/>
+                </a:endParaRPr>
+              </a:p>
+              <a:p>
+                <a:pPr rtl="0">
+                  <a:lnSpc>
+                    <a:spcPct val="150000"/>
+                  </a:lnSpc>
+                  <a:buFont typeface="Arial" panose="020B0604020202020204" pitchFamily="34" charset="0"/>
+                  <a:buChar char="•"/>
+                </a:pPr>
+                <a:r>
+                  <a:rPr lang="en-US" sz="1900" dirty="0">
+                    <a:effectLst/>
+                    <a:latin typeface="Times New Roman" panose="02020603050405020304" pitchFamily="18" charset="0"/>
+                    <a:cs typeface="Times New Roman" panose="02020603050405020304" pitchFamily="18" charset="0"/>
+                  </a:rPr>
+                  <a:t>Quick Sort, </a:t>
+                </a:r>
+                <a:r>
+                  <a:rPr lang="ru-RU" sz="1900" dirty="0">
+                    <a:effectLst/>
+                    <a:latin typeface="Times New Roman" panose="02020603050405020304" pitchFamily="18" charset="0"/>
+                    <a:cs typeface="Times New Roman" panose="02020603050405020304" pitchFamily="18" charset="0"/>
+                  </a:rPr>
+                  <a:t>лучший случай — разбиение пополам.</a:t>
+                </a:r>
+                <a:endParaRPr lang="ru-RU" sz="1900" dirty="0">
+                  <a:latin typeface="Times New Roman" panose="02020603050405020304" pitchFamily="18" charset="0"/>
+                  <a:cs typeface="Times New Roman" panose="02020603050405020304" pitchFamily="18" charset="0"/>
+                </a:endParaRPr>
+              </a:p>
+              <a:p>
+                <a:pPr rtl="0">
+                  <a:lnSpc>
+                    <a:spcPct val="150000"/>
+                  </a:lnSpc>
+                  <a:buFont typeface="Arial" panose="020B0604020202020204" pitchFamily="34" charset="0"/>
+                  <a:buChar char="•"/>
+                </a:pPr>
+                <a:r>
+                  <a:rPr lang="en-US" sz="1900" dirty="0">
+                    <a:effectLst/>
+                    <a:latin typeface="Times New Roman" panose="02020603050405020304" pitchFamily="18" charset="0"/>
+                    <a:cs typeface="Times New Roman" panose="02020603050405020304" pitchFamily="18" charset="0"/>
+                  </a:rPr>
+                  <a:t>Quick Sort, </a:t>
+                </a:r>
+                <a:r>
+                  <a:rPr lang="ru-RU" sz="1900" dirty="0">
+                    <a:effectLst/>
+                    <a:latin typeface="Times New Roman" panose="02020603050405020304" pitchFamily="18" charset="0"/>
+                    <a:cs typeface="Times New Roman" panose="02020603050405020304" pitchFamily="18" charset="0"/>
+                  </a:rPr>
+                  <a:t>худший случай — подзадача размера </a:t>
+                </a:r>
+                <a14:m>
+                  <m:oMath xmlns:m="http://schemas.openxmlformats.org/officeDocument/2006/math">
+                    <m:r>
+                      <a:rPr lang="en-US" sz="1900" i="1" dirty="0" smtClean="0">
+                        <a:latin typeface="Cambria Math" panose="02040503050406030204" pitchFamily="18" charset="0"/>
+                        <a:cs typeface="Times New Roman" panose="02020603050405020304" pitchFamily="18" charset="0"/>
+                      </a:rPr>
+                      <m:t>𝑛</m:t>
+                    </m:r>
+                    <m:r>
+                      <a:rPr lang="en-US" sz="1900" i="1" dirty="0" smtClean="0">
+                        <a:latin typeface="Cambria Math" panose="02040503050406030204" pitchFamily="18" charset="0"/>
+                        <a:cs typeface="Times New Roman" panose="02020603050405020304" pitchFamily="18" charset="0"/>
+                      </a:rPr>
+                      <m:t>−1</m:t>
+                    </m:r>
+                  </m:oMath>
+                </a14:m>
+                <a:r>
+                  <a:rPr lang="en-US" sz="1900" dirty="0">
+                    <a:effectLst/>
+                    <a:latin typeface="Times New Roman" panose="02020603050405020304" pitchFamily="18" charset="0"/>
+                    <a:cs typeface="Times New Roman" panose="02020603050405020304" pitchFamily="18" charset="0"/>
+                  </a:rPr>
+                  <a:t>.</a:t>
+                </a:r>
+                <a:endParaRPr lang="en-US" sz="1900" dirty="0">
+                  <a:latin typeface="Times New Roman" panose="02020603050405020304" pitchFamily="18" charset="0"/>
+                  <a:cs typeface="Times New Roman" panose="02020603050405020304" pitchFamily="18" charset="0"/>
+                </a:endParaRPr>
+              </a:p>
+              <a:p>
+                <a:pPr marL="0" indent="0">
+                  <a:lnSpc>
+                    <a:spcPct val="150000"/>
+                  </a:lnSpc>
+                  <a:buNone/>
+                </a:pPr>
+                <a:r>
+                  <a:rPr lang="ru-RU" sz="1900" dirty="0">
+                    <a:effectLst/>
+                    <a:latin typeface="Times New Roman" panose="02020603050405020304" pitchFamily="18" charset="0"/>
+                    <a:cs typeface="Times New Roman" panose="02020603050405020304" pitchFamily="18" charset="0"/>
+                  </a:rPr>
+                  <a:t>Формально подходит:</a:t>
+                </a:r>
+              </a:p>
+              <a:p>
+                <a:pPr>
+                  <a:lnSpc>
+                    <a:spcPct val="150000"/>
+                  </a:lnSpc>
+                </a:pPr>
+                <a:r>
+                  <a:rPr lang="ru-RU" sz="1900" dirty="0" err="1">
+                    <a:latin typeface="Times New Roman" panose="02020603050405020304" pitchFamily="18" charset="0"/>
+                    <a:cs typeface="Times New Roman" panose="02020603050405020304" pitchFamily="18" charset="0"/>
+                  </a:rPr>
+                  <a:t>Insertion</a:t>
+                </a:r>
+                <a:r>
+                  <a:rPr lang="ru-RU" sz="1900" dirty="0">
+                    <a:latin typeface="Times New Roman" panose="02020603050405020304" pitchFamily="18" charset="0"/>
+                    <a:cs typeface="Times New Roman" panose="02020603050405020304" pitchFamily="18" charset="0"/>
+                  </a:rPr>
+                  <a:t> </a:t>
+                </a:r>
+                <a:r>
+                  <a:rPr lang="ru-RU" sz="1900" dirty="0" err="1">
+                    <a:latin typeface="Times New Roman" panose="02020603050405020304" pitchFamily="18" charset="0"/>
+                    <a:cs typeface="Times New Roman" panose="02020603050405020304" pitchFamily="18" charset="0"/>
+                  </a:rPr>
+                  <a:t>Sort</a:t>
+                </a:r>
+                <a:r>
+                  <a:rPr lang="en-US" sz="1900" dirty="0">
+                    <a:latin typeface="Times New Roman" panose="02020603050405020304" pitchFamily="18" charset="0"/>
+                    <a:cs typeface="Times New Roman" panose="02020603050405020304" pitchFamily="18" charset="0"/>
+                  </a:rPr>
+                  <a:t>,</a:t>
+                </a:r>
+                <a:r>
+                  <a:rPr lang="ru-RU" sz="1900" dirty="0">
+                    <a:latin typeface="Times New Roman" panose="02020603050405020304" pitchFamily="18" charset="0"/>
+                    <a:cs typeface="Times New Roman" panose="02020603050405020304" pitchFamily="18" charset="0"/>
+                  </a:rPr>
+                  <a:t> так как можно представить рекуррентным соотношением</a:t>
+                </a:r>
+                <a:r>
+                  <a:rPr lang="en-US" sz="1900" dirty="0">
+                    <a:latin typeface="Times New Roman" panose="02020603050405020304" pitchFamily="18" charset="0"/>
+                    <a:cs typeface="Times New Roman" panose="02020603050405020304" pitchFamily="18" charset="0"/>
+                  </a:rPr>
+                  <a:t>:</a:t>
+                </a:r>
+                <a:r>
+                  <a:rPr lang="ru-RU" sz="1900" dirty="0">
+                    <a:latin typeface="Times New Roman" panose="02020603050405020304" pitchFamily="18" charset="0"/>
+                    <a:cs typeface="Times New Roman" panose="02020603050405020304" pitchFamily="18" charset="0"/>
+                  </a:rPr>
+                  <a:t> </a:t>
+                </a:r>
+                <a14:m>
+                  <m:oMath xmlns:m="http://schemas.openxmlformats.org/officeDocument/2006/math">
+                    <m:r>
+                      <a:rPr lang="ru-RU" sz="1900" i="1" dirty="0" smtClean="0">
+                        <a:latin typeface="Cambria Math" panose="02040503050406030204" pitchFamily="18" charset="0"/>
+                        <a:cs typeface="Times New Roman" panose="02020603050405020304" pitchFamily="18" charset="0"/>
+                      </a:rPr>
+                      <m:t>𝑇</m:t>
+                    </m:r>
+                    <m:d>
+                      <m:dPr>
+                        <m:ctrlPr>
+                          <a:rPr lang="ru-RU" sz="1900" i="1" dirty="0" smtClean="0">
+                            <a:latin typeface="Cambria Math" panose="02040503050406030204" pitchFamily="18" charset="0"/>
+                            <a:cs typeface="Times New Roman" panose="02020603050405020304" pitchFamily="18" charset="0"/>
+                          </a:rPr>
+                        </m:ctrlPr>
+                      </m:dPr>
+                      <m:e>
+                        <m:r>
+                          <a:rPr lang="ru-RU" sz="1900" i="1" dirty="0" smtClean="0">
+                            <a:latin typeface="Cambria Math" panose="02040503050406030204" pitchFamily="18" charset="0"/>
+                            <a:cs typeface="Times New Roman" panose="02020603050405020304" pitchFamily="18" charset="0"/>
+                          </a:rPr>
+                          <m:t>𝑛</m:t>
+                        </m:r>
+                      </m:e>
+                    </m:d>
+                    <m:r>
+                      <a:rPr lang="ru-RU" sz="1900" i="1" dirty="0" smtClean="0">
+                        <a:latin typeface="Cambria Math" panose="02040503050406030204" pitchFamily="18" charset="0"/>
+                        <a:cs typeface="Times New Roman" panose="02020603050405020304" pitchFamily="18" charset="0"/>
+                      </a:rPr>
+                      <m:t>=</m:t>
+                    </m:r>
+                    <m:r>
+                      <a:rPr lang="ru-RU" sz="1900" i="1" dirty="0" smtClean="0">
+                        <a:latin typeface="Cambria Math" panose="02040503050406030204" pitchFamily="18" charset="0"/>
+                        <a:cs typeface="Times New Roman" panose="02020603050405020304" pitchFamily="18" charset="0"/>
+                      </a:rPr>
+                      <m:t>𝑇</m:t>
+                    </m:r>
+                    <m:d>
+                      <m:dPr>
+                        <m:ctrlPr>
+                          <a:rPr lang="ru-RU" sz="1900" i="1" dirty="0" smtClean="0">
+                            <a:latin typeface="Cambria Math" panose="02040503050406030204" pitchFamily="18" charset="0"/>
+                            <a:cs typeface="Times New Roman" panose="02020603050405020304" pitchFamily="18" charset="0"/>
+                          </a:rPr>
+                        </m:ctrlPr>
+                      </m:dPr>
+                      <m:e>
+                        <m:r>
+                          <a:rPr lang="ru-RU" sz="1900" i="1" dirty="0" smtClean="0">
+                            <a:latin typeface="Cambria Math" panose="02040503050406030204" pitchFamily="18" charset="0"/>
+                            <a:cs typeface="Times New Roman" panose="02020603050405020304" pitchFamily="18" charset="0"/>
+                          </a:rPr>
+                          <m:t>𝑛</m:t>
+                        </m:r>
+                        <m:r>
+                          <a:rPr lang="ru-RU" sz="1900" i="1" dirty="0" smtClean="0">
+                            <a:latin typeface="Cambria Math" panose="02040503050406030204" pitchFamily="18" charset="0"/>
+                            <a:cs typeface="Times New Roman" panose="02020603050405020304" pitchFamily="18" charset="0"/>
+                          </a:rPr>
+                          <m:t>−1</m:t>
+                        </m:r>
+                      </m:e>
+                    </m:d>
+                    <m:r>
+                      <a:rPr lang="ru-RU" sz="1900" i="1" dirty="0" smtClean="0">
+                        <a:latin typeface="Cambria Math" panose="02040503050406030204" pitchFamily="18" charset="0"/>
+                        <a:cs typeface="Times New Roman" panose="02020603050405020304" pitchFamily="18" charset="0"/>
+                      </a:rPr>
+                      <m:t>+</m:t>
+                    </m:r>
+                    <m:r>
+                      <a:rPr lang="en-US" sz="1900" b="0" i="1" dirty="0" smtClean="0">
+                        <a:latin typeface="Cambria Math" panose="02040503050406030204" pitchFamily="18" charset="0"/>
+                        <a:cs typeface="Times New Roman" panose="02020603050405020304" pitchFamily="18" charset="0"/>
+                      </a:rPr>
+                      <m:t>𝑐</m:t>
+                    </m:r>
+                    <m:r>
+                      <a:rPr lang="en-US" sz="2000" i="1" dirty="0">
+                        <a:latin typeface="Cambria Math" panose="02040503050406030204" pitchFamily="18" charset="0"/>
+                      </a:rPr>
+                      <m:t>·</m:t>
+                    </m:r>
+                    <m:r>
+                      <a:rPr lang="en-US" sz="2000" b="0" i="1" dirty="0" smtClean="0">
+                        <a:latin typeface="Cambria Math" panose="02040503050406030204" pitchFamily="18" charset="0"/>
+                      </a:rPr>
+                      <m:t>𝑛</m:t>
+                    </m:r>
+                  </m:oMath>
+                </a14:m>
+                <a:r>
+                  <a:rPr lang="ru-RU" sz="1900" dirty="0">
+                    <a:latin typeface="Times New Roman" panose="02020603050405020304" pitchFamily="18" charset="0"/>
+                    <a:cs typeface="Times New Roman" panose="02020603050405020304" pitchFamily="18" charset="0"/>
+                  </a:rPr>
+                  <a:t> </a:t>
+                </a:r>
+                <a:r>
+                  <a:rPr lang="ru-RU" dirty="0">
+                    <a:latin typeface="Times New Roman" panose="02020603050405020304" pitchFamily="18" charset="0"/>
+                    <a:cs typeface="Times New Roman" panose="02020603050405020304" pitchFamily="18" charset="0"/>
+                  </a:rPr>
+                  <a:t>. </a:t>
+                </a:r>
+              </a:p>
+            </p:txBody>
+          </p:sp>
+        </mc:Choice>
+        <mc:Fallback xmlns="">
+          <p:sp>
+            <p:nvSpPr>
+              <p:cNvPr id="6" name="Объект 5">
+                <a:extLst>
+                  <a:ext uri="{FF2B5EF4-FFF2-40B4-BE49-F238E27FC236}">
+                    <a16:creationId xmlns:a16="http://schemas.microsoft.com/office/drawing/2014/main" id="{F2447BDF-697A-A416-9F2A-D64868F46B68}"/>
+                  </a:ext>
+                </a:extLst>
+              </p:cNvPr>
+              <p:cNvSpPr>
+                <a:spLocks noGrp="1" noRot="1" noChangeAspect="1" noMove="1" noResize="1" noEditPoints="1" noAdjustHandles="1" noChangeArrowheads="1" noChangeShapeType="1" noTextEdit="1"/>
+              </p:cNvSpPr>
+              <p:nvPr>
+                <p:ph idx="1"/>
+              </p:nvPr>
+            </p:nvSpPr>
+            <p:spPr>
+              <a:blipFill>
+                <a:blip r:embed="rId2"/>
+                <a:stretch>
+                  <a:fillRect l="-603"/>
+                </a:stretch>
+              </a:blipFill>
+            </p:spPr>
+            <p:txBody>
+              <a:bodyPr/>
+              <a:lstStyle/>
+              <a:p>
+                <a:r>
+                  <a:rPr lang="ru-RU">
+                    <a:noFill/>
+                  </a:rPr>
+                  <a:t> </a:t>
+                </a:r>
+              </a:p>
+            </p:txBody>
+          </p:sp>
+        </mc:Fallback>
+      </mc:AlternateContent>
+    </p:spTree>
+    <p:extLst>
+      <p:ext uri="{BB962C8B-B14F-4D97-AF65-F5344CB8AC3E}">
+        <p14:creationId xmlns:p14="http://schemas.microsoft.com/office/powerpoint/2010/main" val="2035317318"/>
+      </p:ext>
+    </p:extLst>
+  </p:cSld>
+  <p:clrMapOvr>
+    <a:masterClrMapping/>
+  </p:clrMapOvr>
+</p:sld>
+</file>
+
+<file path=ppt/slides/slide11.xml><?xml version="1.0" encoding="utf-8"?>
+<p:sld xmlns:a="http://schemas.openxmlformats.org/drawingml/2006/main" xmlns:r="http://schemas.openxmlformats.org/officeDocument/2006/relationships" xmlns:p="http://schemas.openxmlformats.org/presentationml/2006/main">
+  <p:cSld>
+    <p:spTree>
+      <p:nvGrpSpPr>
+        <p:cNvPr id="1" name=""/>
+        <p:cNvGrpSpPr/>
+        <p:nvPr/>
+      </p:nvGrpSpPr>
+      <p:grpSpPr>
+        <a:xfrm>
+          <a:off x="0" y="0"/>
+          <a:ext cx="0" cy="0"/>
+          <a:chOff x="0" y="0"/>
+          <a:chExt cx="0" cy="0"/>
+        </a:xfrm>
+      </p:grpSpPr>
+      <p:sp>
+        <p:nvSpPr>
+          <p:cNvPr id="2" name="Заголовок 1">
+            <a:extLst>
+              <a:ext uri="{FF2B5EF4-FFF2-40B4-BE49-F238E27FC236}">
+                <a16:creationId xmlns:a16="http://schemas.microsoft.com/office/drawing/2014/main" id="{F550BDBA-10BF-9E23-929C-C568EAFDDA98}"/>
+              </a:ext>
+            </a:extLst>
+          </p:cNvPr>
+          <p:cNvSpPr>
+            <a:spLocks noGrp="1"/>
+          </p:cNvSpPr>
+          <p:nvPr>
+            <p:ph type="title"/>
+          </p:nvPr>
+        </p:nvSpPr>
         <p:spPr/>
         <p:txBody>
           <a:bodyPr/>
@@ -4588,7 +5305,7 @@
             <a:fld id="{2E0151D6-1CE6-4546-836D-2A836D7A7EF2}" type="slidenum">
               <a:rPr lang="ru-RU" smtClean="0"/>
               <a:pPr/>
-              <a:t>10</a:t>
+              <a:t>11</a:t>
             </a:fld>
             <a:endParaRPr lang="ru-RU" dirty="0"/>
           </a:p>
@@ -6703,7 +7420,7 @@
 </p:sld>
 </file>
 
-<file path=ppt/slides/slide11.xml><?xml version="1.0" encoding="utf-8"?>
+<file path=ppt/slides/slide12.xml><?xml version="1.0" encoding="utf-8"?>
 <p:sld xmlns:a="http://schemas.openxmlformats.org/drawingml/2006/main" xmlns:r="http://schemas.openxmlformats.org/officeDocument/2006/relationships" xmlns:p="http://schemas.openxmlformats.org/presentationml/2006/main">
   <p:cSld>
     <p:spTree>
@@ -6743,7 +7460,23 @@
           <a:p>
             <a:r>
               <a:rPr lang="ru-RU" dirty="0"/>
-              <a:t>Дополнительные алгоритмы которые анализируемы этим подходом</a:t>
+              <a:t>Другие алгоритмы парадигмы </a:t>
+            </a:r>
+            <a:r>
+              <a:rPr lang="en-US" dirty="0"/>
+              <a:t>“</a:t>
+            </a:r>
+            <a:r>
+              <a:rPr lang="ru-RU" dirty="0"/>
+              <a:t>разделяй и властвуй</a:t>
+            </a:r>
+            <a:r>
+              <a:rPr lang="en-US" dirty="0"/>
+              <a:t>”, </a:t>
+            </a:r>
+            <a:r>
+              <a:rPr lang="ru-RU" dirty="0"/>
+              <a:t>анализируемые тем же методом</a:t>
             </a:r>
           </a:p>
         </p:txBody>
@@ -6854,14 +7587,14 @@
             <a:fld id="{2E0151D6-1CE6-4546-836D-2A836D7A7EF2}" type="slidenum">
               <a:rPr lang="ru-RU" smtClean="0"/>
               <a:pPr/>
-              <a:t>11</a:t>
+              <a:t>12</a:t>
             </a:fld>
             <a:endParaRPr lang="ru-RU" dirty="0"/>
           </a:p>
         </p:txBody>
       </p:sp>
-      <mc:AlternateContent xmlns:mc="http://schemas.openxmlformats.org/markup-compatibility/2006" xmlns:a14="http://schemas.microsoft.com/office/drawing/2010/main">
-        <mc:Choice Requires="a14">
+      <mc:AlternateContent xmlns:mc="http://schemas.openxmlformats.org/markup-compatibility/2006">
+        <mc:Choice xmlns:a14="http://schemas.microsoft.com/office/drawing/2010/main" Requires="a14">
           <p:graphicFrame>
             <p:nvGraphicFramePr>
               <p:cNvPr id="9" name="Таблица 8">
@@ -6877,14 +7610,14 @@
               <p:nvPr>
                 <p:extLst>
                   <p:ext uri="{D42A27DB-BD31-4B8C-83A1-F6EECF244321}">
-                    <p14:modId xmlns:p14="http://schemas.microsoft.com/office/powerpoint/2010/main" val="3323325760"/>
+                    <p14:modId xmlns:p14="http://schemas.microsoft.com/office/powerpoint/2010/main" val="4092944226"/>
                   </p:ext>
                 </p:extLst>
               </p:nvPr>
             </p:nvGraphicFramePr>
             <p:xfrm>
               <a:off x="838200" y="3086894"/>
-              <a:ext cx="10515600" cy="2204880"/>
+              <a:ext cx="10515600" cy="2680209"/>
             </p:xfrm>
             <a:graphic>
               <a:graphicData uri="http://schemas.openxmlformats.org/drawingml/2006/table">
@@ -7697,12 +8430,273 @@
                       </a:ext>
                     </a:extLst>
                   </a:tr>
+                  <a:tr h="475329">
+                    <a:tc>
+                      <a:txBody>
+                        <a:bodyPr/>
+                        <a:lstStyle/>
+                        <a:p>
+                          <a:r>
+                            <a:rPr lang="ru-RU" dirty="0"/>
+                            <a:t>FFT/NTT</a:t>
+                          </a:r>
+                        </a:p>
+                      </a:txBody>
+                      <a:tcPr anchor="ctr"/>
+                    </a:tc>
+                    <a:tc>
+                      <a:txBody>
+                        <a:bodyPr/>
+                        <a:lstStyle/>
+                        <a:p>
+                          <a:pPr/>
+                          <a14:m>
+                            <m:oMathPara xmlns:m="http://schemas.openxmlformats.org/officeDocument/2006/math">
+                              <m:oMathParaPr>
+                                <m:jc m:val="centerGroup"/>
+                              </m:oMathParaPr>
+                              <m:oMath xmlns:m="http://schemas.openxmlformats.org/officeDocument/2006/math">
+                                <m:r>
+                                  <a:rPr lang="en-US" i="1" dirty="0" smtClean="0">
+                                    <a:effectLst/>
+                                    <a:latin typeface="Cambria Math" panose="02040503050406030204" pitchFamily="18" charset="0"/>
+                                  </a:rPr>
+                                  <m:t>𝑇</m:t>
+                                </m:r>
+                                <m:d>
+                                  <m:dPr>
+                                    <m:ctrlPr>
+                                      <a:rPr lang="en-US" i="1" dirty="0" smtClean="0">
+                                        <a:effectLst/>
+                                        <a:latin typeface="Cambria Math" panose="02040503050406030204" pitchFamily="18" charset="0"/>
+                                      </a:rPr>
+                                    </m:ctrlPr>
+                                  </m:dPr>
+                                  <m:e>
+                                    <m:r>
+                                      <a:rPr lang="en-US" i="1" dirty="0" smtClean="0">
+                                        <a:effectLst/>
+                                        <a:latin typeface="Cambria Math" panose="02040503050406030204" pitchFamily="18" charset="0"/>
+                                      </a:rPr>
+                                      <m:t>𝑛</m:t>
+                                    </m:r>
+                                  </m:e>
+                                </m:d>
+                                <m:r>
+                                  <a:rPr lang="en-US" i="1" dirty="0" smtClean="0">
+                                    <a:effectLst/>
+                                    <a:latin typeface="Cambria Math" panose="02040503050406030204" pitchFamily="18" charset="0"/>
+                                  </a:rPr>
+                                  <m:t>=</m:t>
+                                </m:r>
+                                <m:r>
+                                  <a:rPr lang="en-US" sz="1800" i="1" kern="1200" smtClean="0">
+                                    <a:solidFill>
+                                      <a:schemeClr val="dk1"/>
+                                    </a:solidFill>
+                                    <a:effectLst/>
+                                    <a:latin typeface="+mn-lt"/>
+                                    <a:ea typeface="+mn-ea"/>
+                                    <a:cs typeface="+mn-cs"/>
+                                  </a:rPr>
+                                  <m:t>𝑐</m:t>
+                                </m:r>
+                                <m:r>
+                                  <a:rPr lang="en-US" b="0" i="1" dirty="0" smtClean="0">
+                                    <a:latin typeface="Cambria Math" panose="02040503050406030204" pitchFamily="18" charset="0"/>
+                                  </a:rPr>
+                                  <m:t>·</m:t>
+                                </m:r>
+                                <m:r>
+                                  <a:rPr lang="en-US" sz="1800" i="1" kern="1200" smtClean="0">
+                                    <a:solidFill>
+                                      <a:schemeClr val="dk1"/>
+                                    </a:solidFill>
+                                    <a:effectLst/>
+                                    <a:latin typeface="+mn-lt"/>
+                                    <a:ea typeface="+mn-ea"/>
+                                    <a:cs typeface="+mn-cs"/>
+                                  </a:rPr>
+                                  <m:t>𝑛</m:t>
+                                </m:r>
+                                <m:r>
+                                  <a:rPr lang="en-US" b="0" i="1" dirty="0" smtClean="0">
+                                    <a:latin typeface="Cambria Math" panose="02040503050406030204" pitchFamily="18" charset="0"/>
+                                  </a:rPr>
+                                  <m:t>·</m:t>
+                                </m:r>
+                                <m:r>
+                                  <a:rPr lang="en-US" sz="1800" i="1" kern="1200" smtClean="0">
+                                    <a:solidFill>
+                                      <a:schemeClr val="dk1"/>
+                                    </a:solidFill>
+                                    <a:effectLst/>
+                                    <a:latin typeface="+mn-lt"/>
+                                    <a:ea typeface="+mn-ea"/>
+                                    <a:cs typeface="+mn-cs"/>
+                                  </a:rPr>
+                                  <m:t>𝑙𝑜</m:t>
+                                </m:r>
+                                <m:sSub>
+                                  <m:sSubPr>
+                                    <m:ctrlPr>
+                                      <a:rPr lang="ru-RU" sz="1800" i="1" kern="1200">
+                                        <a:solidFill>
+                                          <a:schemeClr val="dk1"/>
+                                        </a:solidFill>
+                                        <a:effectLst/>
+                                        <a:latin typeface="+mn-lt"/>
+                                        <a:ea typeface="+mn-ea"/>
+                                        <a:cs typeface="+mn-cs"/>
+                                      </a:rPr>
+                                    </m:ctrlPr>
+                                  </m:sSubPr>
+                                  <m:e>
+                                    <m:r>
+                                      <a:rPr lang="en-US" sz="1800" i="1" kern="1200">
+                                        <a:solidFill>
+                                          <a:schemeClr val="dk1"/>
+                                        </a:solidFill>
+                                        <a:effectLst/>
+                                        <a:latin typeface="+mn-lt"/>
+                                        <a:ea typeface="+mn-ea"/>
+                                        <a:cs typeface="+mn-cs"/>
+                                      </a:rPr>
+                                      <m:t>𝑔</m:t>
+                                    </m:r>
+                                  </m:e>
+                                  <m:sub>
+                                    <m:r>
+                                      <a:rPr lang="en-US" sz="1800" i="1" kern="1200">
+                                        <a:solidFill>
+                                          <a:schemeClr val="dk1"/>
+                                        </a:solidFill>
+                                        <a:effectLst/>
+                                        <a:latin typeface="+mn-lt"/>
+                                        <a:ea typeface="+mn-ea"/>
+                                        <a:cs typeface="+mn-cs"/>
+                                      </a:rPr>
+                                      <m:t>2</m:t>
+                                    </m:r>
+                                  </m:sub>
+                                </m:sSub>
+                                <m:r>
+                                  <a:rPr lang="en-US" sz="1800" i="1" kern="1200">
+                                    <a:solidFill>
+                                      <a:schemeClr val="dk1"/>
+                                    </a:solidFill>
+                                    <a:effectLst/>
+                                    <a:latin typeface="+mn-lt"/>
+                                    <a:ea typeface="+mn-ea"/>
+                                    <a:cs typeface="+mn-cs"/>
+                                  </a:rPr>
+                                  <m:t>𝑛</m:t>
+                                </m:r>
+                              </m:oMath>
+                            </m:oMathPara>
+                          </a14:m>
+                          <a:endParaRPr lang="en-US" dirty="0"/>
+                        </a:p>
+                      </a:txBody>
+                      <a:tcPr anchor="ctr"/>
+                    </a:tc>
+                    <a:tc>
+                      <a:txBody>
+                        <a:bodyPr/>
+                        <a:lstStyle/>
+                        <a:p>
+                          <a:pPr/>
+                          <a14:m>
+                            <m:oMathPara xmlns:m="http://schemas.openxmlformats.org/officeDocument/2006/math">
+                              <m:oMathParaPr>
+                                <m:jc m:val="centerGroup"/>
+                              </m:oMathParaPr>
+                              <m:oMath xmlns:m="http://schemas.openxmlformats.org/officeDocument/2006/math">
+                                <m:r>
+                                  <a:rPr lang="en-US" sz="1800" i="1" kern="1200" smtClean="0">
+                                    <a:solidFill>
+                                      <a:schemeClr val="dk1"/>
+                                    </a:solidFill>
+                                    <a:effectLst/>
+                                    <a:latin typeface="+mn-lt"/>
+                                    <a:ea typeface="+mn-ea"/>
+                                    <a:cs typeface="+mn-cs"/>
+                                  </a:rPr>
+                                  <m:t>𝛩</m:t>
+                                </m:r>
+                                <m:d>
+                                  <m:dPr>
+                                    <m:ctrlPr>
+                                      <a:rPr lang="ru-RU" sz="1800" i="1" kern="1200">
+                                        <a:solidFill>
+                                          <a:schemeClr val="dk1"/>
+                                        </a:solidFill>
+                                        <a:effectLst/>
+                                        <a:latin typeface="+mn-lt"/>
+                                        <a:ea typeface="+mn-ea"/>
+                                        <a:cs typeface="+mn-cs"/>
+                                      </a:rPr>
+                                    </m:ctrlPr>
+                                  </m:dPr>
+                                  <m:e>
+                                    <m:r>
+                                      <a:rPr lang="en-US" sz="1800" i="1" kern="1200">
+                                        <a:solidFill>
+                                          <a:schemeClr val="dk1"/>
+                                        </a:solidFill>
+                                        <a:effectLst/>
+                                        <a:latin typeface="+mn-lt"/>
+                                        <a:ea typeface="+mn-ea"/>
+                                        <a:cs typeface="+mn-cs"/>
+                                      </a:rPr>
+                                      <m:t>𝑛𝑙𝑜𝑔</m:t>
+                                    </m:r>
+                                    <m:r>
+                                      <a:rPr lang="en-US" sz="1800" i="1" kern="1200">
+                                        <a:solidFill>
+                                          <a:schemeClr val="dk1"/>
+                                        </a:solidFill>
+                                        <a:effectLst/>
+                                        <a:latin typeface="+mn-lt"/>
+                                        <a:ea typeface="+mn-ea"/>
+                                        <a:cs typeface="+mn-cs"/>
+                                      </a:rPr>
+                                      <m:t> </m:t>
+                                    </m:r>
+                                    <m:r>
+                                      <a:rPr lang="en-US" sz="1800" i="1" kern="1200">
+                                        <a:solidFill>
+                                          <a:schemeClr val="dk1"/>
+                                        </a:solidFill>
+                                        <a:effectLst/>
+                                        <a:latin typeface="+mn-lt"/>
+                                        <a:ea typeface="+mn-ea"/>
+                                        <a:cs typeface="+mn-cs"/>
+                                      </a:rPr>
+                                      <m:t>𝑛</m:t>
+                                    </m:r>
+                                  </m:e>
+                                </m:d>
+                              </m:oMath>
+                            </m:oMathPara>
+                          </a14:m>
+                          <a:endParaRPr lang="en-US" dirty="0"/>
+                        </a:p>
+                      </a:txBody>
+                      <a:tcPr anchor="ctr"/>
+                    </a:tc>
+                    <a:extLst>
+                      <a:ext uri="{0D108BD9-81ED-4DB2-BD59-A6C34878D82A}">
+                        <a16:rowId xmlns:a16="http://schemas.microsoft.com/office/drawing/2014/main" val="2393820844"/>
+                      </a:ext>
+                    </a:extLst>
+                  </a:tr>
                 </a:tbl>
               </a:graphicData>
             </a:graphic>
           </p:graphicFrame>
         </mc:Choice>
-        <mc:Fallback xmlns="">
+        <mc:Fallback>
           <p:graphicFrame>
             <p:nvGraphicFramePr>
               <p:cNvPr id="9" name="Таблица 8">
@@ -7718,14 +8712,14 @@
               <p:nvPr>
                 <p:extLst>
                   <p:ext uri="{D42A27DB-BD31-4B8C-83A1-F6EECF244321}">
-                    <p14:modId xmlns:p14="http://schemas.microsoft.com/office/powerpoint/2010/main" val="3323325760"/>
+                    <p14:modId xmlns:p14="http://schemas.microsoft.com/office/powerpoint/2010/main" val="4092944226"/>
                   </p:ext>
                 </p:extLst>
               </p:nvPr>
             </p:nvGraphicFramePr>
             <p:xfrm>
               <a:off x="838200" y="3086894"/>
-              <a:ext cx="10515600" cy="2204880"/>
+              <a:ext cx="10515600" cy="2680209"/>
             </p:xfrm>
             <a:graphic>
               <a:graphicData uri="http://schemas.openxmlformats.org/drawingml/2006/table">
@@ -7763,12 +8757,12 @@
                         <a:lstStyle/>
                         <a:p>
                           <a:r>
-                            <a:rPr lang="ru-RU">
+                            <a:rPr lang="ru-RU" dirty="0">
                               <a:effectLst/>
                             </a:rPr>
                             <a:t>Алгоритм</a:t>
                           </a:r>
-                          <a:endParaRPr lang="ru-RU"/>
+                          <a:endParaRPr lang="ru-RU" dirty="0"/>
                         </a:p>
                       </a:txBody>
                       <a:tcPr anchor="ctr"/>
@@ -7846,7 +8840,7 @@
                         <a:blipFill>
                           <a:blip r:embed="rId2"/>
                           <a:stretch>
-                            <a:fillRect l="-100000" t="-83158" r="-100521" b="-202105"/>
+                            <a:fillRect l="-100000" t="-83158" r="-100521" b="-288421"/>
                           </a:stretch>
                         </a:blipFill>
                       </a:tcPr>
@@ -7863,7 +8857,7 @@
                         <a:blipFill>
                           <a:blip r:embed="rId2"/>
                           <a:stretch>
-                            <a:fillRect l="-200348" t="-83158" r="-696" b="-202105"/>
+                            <a:fillRect l="-200348" t="-83158" r="-696" b="-288421"/>
                           </a:stretch>
                         </a:blipFill>
                       </a:tcPr>
@@ -7945,7 +8939,7 @@
                         <a:blipFill>
                           <a:blip r:embed="rId2"/>
                           <a:stretch>
-                            <a:fillRect l="-100000" t="-183158" r="-100521" b="-102105"/>
+                            <a:fillRect l="-100000" t="-183158" r="-100521" b="-188421"/>
                           </a:stretch>
                         </a:blipFill>
                       </a:tcPr>
@@ -7962,7 +8956,7 @@
                         <a:blipFill>
                           <a:blip r:embed="rId2"/>
                           <a:stretch>
-                            <a:fillRect l="-200348" t="-183158" r="-696" b="-102105"/>
+                            <a:fillRect l="-200348" t="-183158" r="-696" b="-188421"/>
                           </a:stretch>
                         </a:blipFill>
                       </a:tcPr>
@@ -8008,7 +9002,7 @@
                         <a:blipFill>
                           <a:blip r:embed="rId2"/>
                           <a:stretch>
-                            <a:fillRect l="-100000" t="-283158" r="-100521" b="-2105"/>
+                            <a:fillRect l="-100000" t="-283158" r="-100521" b="-88421"/>
                           </a:stretch>
                         </a:blipFill>
                       </a:tcPr>
@@ -8025,7 +9019,7 @@
                         <a:blipFill>
                           <a:blip r:embed="rId2"/>
                           <a:stretch>
-                            <a:fillRect l="-200348" t="-283158" r="-696" b="-2105"/>
+                            <a:fillRect l="-200348" t="-283158" r="-696" b="-88421"/>
                           </a:stretch>
                         </a:blipFill>
                       </a:tcPr>
@@ -8036,855 +9030,16 @@
                       </a:ext>
                     </a:extLst>
                   </a:tr>
-                </a:tbl>
-              </a:graphicData>
-            </a:graphic>
-          </p:graphicFrame>
-        </mc:Fallback>
-      </mc:AlternateContent>
-    </p:spTree>
-    <p:extLst>
-      <p:ext uri="{BB962C8B-B14F-4D97-AF65-F5344CB8AC3E}">
-        <p14:creationId xmlns:p14="http://schemas.microsoft.com/office/powerpoint/2010/main" val="2486154304"/>
-      </p:ext>
-    </p:extLst>
-  </p:cSld>
-  <p:clrMapOvr>
-    <a:masterClrMapping/>
-  </p:clrMapOvr>
-</p:sld>
-</file>
-
-<file path=ppt/slides/slide12.xml><?xml version="1.0" encoding="utf-8"?>
-<p:sld xmlns:a="http://schemas.openxmlformats.org/drawingml/2006/main" xmlns:r="http://schemas.openxmlformats.org/officeDocument/2006/relationships" xmlns:p="http://schemas.openxmlformats.org/presentationml/2006/main">
-  <p:cSld>
-    <p:spTree>
-      <p:nvGrpSpPr>
-        <p:cNvPr id="1" name=""/>
-        <p:cNvGrpSpPr/>
-        <p:nvPr/>
-      </p:nvGrpSpPr>
-      <p:grpSpPr>
-        <a:xfrm>
-          <a:off x="0" y="0"/>
-          <a:ext cx="0" cy="0"/>
-          <a:chOff x="0" y="0"/>
-          <a:chExt cx="0" cy="0"/>
-        </a:xfrm>
-      </p:grpSpPr>
-      <p:sp>
-        <p:nvSpPr>
-          <p:cNvPr id="2" name="Заголовок 1">
-            <a:extLst>
-              <a:ext uri="{FF2B5EF4-FFF2-40B4-BE49-F238E27FC236}">
-                <a16:creationId xmlns:a16="http://schemas.microsoft.com/office/drawing/2014/main" id="{F550BDBA-10BF-9E23-929C-C568EAFDDA98}"/>
-              </a:ext>
-            </a:extLst>
-          </p:cNvPr>
-          <p:cNvSpPr>
-            <a:spLocks noGrp="1"/>
-          </p:cNvSpPr>
-          <p:nvPr>
-            <p:ph type="title"/>
-          </p:nvPr>
-        </p:nvSpPr>
-        <p:spPr/>
-        <p:txBody>
-          <a:bodyPr/>
-          <a:lstStyle/>
-          <a:p>
-            <a:r>
-              <a:rPr lang="ru-RU" dirty="0"/>
-              <a:t>Аналогия сортировки Бэтчера и FFT/NTT</a:t>
-            </a:r>
-          </a:p>
-        </p:txBody>
-      </p:sp>
-      <p:sp>
-        <p:nvSpPr>
-          <p:cNvPr id="3" name="Объект 2">
-            <a:extLst>
-              <a:ext uri="{FF2B5EF4-FFF2-40B4-BE49-F238E27FC236}">
-                <a16:creationId xmlns:a16="http://schemas.microsoft.com/office/drawing/2014/main" id="{300CEFD8-128C-03B1-85C3-572B036AC88F}"/>
-              </a:ext>
-            </a:extLst>
-          </p:cNvPr>
-          <p:cNvSpPr>
-            <a:spLocks noGrp="1"/>
-          </p:cNvSpPr>
-          <p:nvPr>
-            <p:ph idx="1"/>
-          </p:nvPr>
-        </p:nvSpPr>
-        <p:spPr/>
-        <p:txBody>
-          <a:bodyPr>
-            <a:normAutofit/>
-          </a:bodyPr>
-          <a:lstStyle/>
-          <a:p>
-            <a:pPr marL="0" indent="0">
-              <a:lnSpc>
-                <a:spcPct val="150000"/>
-              </a:lnSpc>
-              <a:buNone/>
-            </a:pPr>
-            <a:r>
-              <a:rPr lang="ru-RU" sz="1800" dirty="0">
-                <a:effectLst/>
-                <a:latin typeface="Times New Roman" panose="02020603050405020304" pitchFamily="18" charset="0"/>
-                <a:cs typeface="Times New Roman" panose="02020603050405020304" pitchFamily="18" charset="0"/>
-              </a:rPr>
-              <a:t>Общий принцип: разбиение по чётности индексов.</a:t>
-            </a:r>
-          </a:p>
-          <a:p>
-            <a:pPr marL="0" indent="0">
-              <a:buNone/>
-            </a:pPr>
-            <a:endParaRPr lang="ru-RU" sz="1600" dirty="0">
-              <a:latin typeface="Times New Roman" panose="02020603050405020304" pitchFamily="18" charset="0"/>
-              <a:cs typeface="Times New Roman" panose="02020603050405020304" pitchFamily="18" charset="0"/>
-            </a:endParaRPr>
-          </a:p>
-        </p:txBody>
-      </p:sp>
-      <p:sp>
-        <p:nvSpPr>
-          <p:cNvPr id="4" name="Нижний колонтитул 3">
-            <a:extLst>
-              <a:ext uri="{FF2B5EF4-FFF2-40B4-BE49-F238E27FC236}">
-                <a16:creationId xmlns:a16="http://schemas.microsoft.com/office/drawing/2014/main" id="{5925DB78-19D7-65BE-0456-469E827F2B66}"/>
-              </a:ext>
-            </a:extLst>
-          </p:cNvPr>
-          <p:cNvSpPr>
-            <a:spLocks noGrp="1"/>
-          </p:cNvSpPr>
-          <p:nvPr>
-            <p:ph type="ftr" sz="quarter" idx="11"/>
-          </p:nvPr>
-        </p:nvSpPr>
-        <p:spPr/>
-        <p:txBody>
-          <a:bodyPr/>
-          <a:lstStyle/>
-          <a:p>
-            <a:r>
-              <a:rPr lang="ru-RU" dirty="0"/>
-              <a:t>ВКР (м) студента Муханова Дмитрия Ильича</a:t>
-            </a:r>
-          </a:p>
-        </p:txBody>
-      </p:sp>
-      <p:sp>
-        <p:nvSpPr>
-          <p:cNvPr id="5" name="Номер слайда 4">
-            <a:extLst>
-              <a:ext uri="{FF2B5EF4-FFF2-40B4-BE49-F238E27FC236}">
-                <a16:creationId xmlns:a16="http://schemas.microsoft.com/office/drawing/2014/main" id="{4F14D21B-6418-AB2B-D943-6DAD1BB04F34}"/>
-              </a:ext>
-            </a:extLst>
-          </p:cNvPr>
-          <p:cNvSpPr>
-            <a:spLocks noGrp="1"/>
-          </p:cNvSpPr>
-          <p:nvPr>
-            <p:ph type="sldNum" sz="quarter" idx="12"/>
-          </p:nvPr>
-        </p:nvSpPr>
-        <p:spPr/>
-        <p:txBody>
-          <a:bodyPr/>
-          <a:lstStyle/>
-          <a:p>
-            <a:fld id="{2E0151D6-1CE6-4546-836D-2A836D7A7EF2}" type="slidenum">
-              <a:rPr lang="ru-RU" smtClean="0"/>
-              <a:pPr/>
-              <a:t>12</a:t>
-            </a:fld>
-            <a:endParaRPr lang="ru-RU" dirty="0"/>
-          </a:p>
-        </p:txBody>
-      </p:sp>
-      <mc:AlternateContent xmlns:mc="http://schemas.openxmlformats.org/markup-compatibility/2006" xmlns:a14="http://schemas.microsoft.com/office/drawing/2010/main">
-        <mc:Choice Requires="a14">
-          <p:graphicFrame>
-            <p:nvGraphicFramePr>
-              <p:cNvPr id="6" name="Таблица 5">
-                <a:extLst>
-                  <a:ext uri="{FF2B5EF4-FFF2-40B4-BE49-F238E27FC236}">
-                    <a16:creationId xmlns:a16="http://schemas.microsoft.com/office/drawing/2014/main" id="{A19A218C-4599-00A2-7499-967B1354EB3D}"/>
-                  </a:ext>
-                </a:extLst>
-              </p:cNvPr>
-              <p:cNvGraphicFramePr>
-                <a:graphicFrameLocks noGrp="1"/>
-              </p:cNvGraphicFramePr>
-              <p:nvPr>
-                <p:extLst>
-                  <p:ext uri="{D42A27DB-BD31-4B8C-83A1-F6EECF244321}">
-                    <p14:modId xmlns:p14="http://schemas.microsoft.com/office/powerpoint/2010/main" val="2411234283"/>
-                  </p:ext>
-                </p:extLst>
-              </p:nvPr>
-            </p:nvGraphicFramePr>
-            <p:xfrm>
-              <a:off x="838200" y="2949734"/>
-              <a:ext cx="10515600" cy="2194370"/>
-            </p:xfrm>
-            <a:graphic>
-              <a:graphicData uri="http://schemas.openxmlformats.org/drawingml/2006/table">
-                <a:tbl>
-                  <a:tblPr firstRow="1" firstCol="1" bandRow="1">
-                    <a:tableStyleId>{5C22544A-7EE6-4342-B048-85BDC9FD1C3A}</a:tableStyleId>
-                  </a:tblPr>
-                  <a:tblGrid>
-                    <a:gridCol w="3505200">
-                      <a:extLst>
-                        <a:ext uri="{9D8B030D-6E8A-4147-A177-3AD203B41FA5}">
-                          <a16:colId xmlns:a16="http://schemas.microsoft.com/office/drawing/2014/main" val="3311830663"/>
-                        </a:ext>
-                      </a:extLst>
-                    </a:gridCol>
-                    <a:gridCol w="3505200">
-                      <a:extLst>
-                        <a:ext uri="{9D8B030D-6E8A-4147-A177-3AD203B41FA5}">
-                          <a16:colId xmlns:a16="http://schemas.microsoft.com/office/drawing/2014/main" val="1317386152"/>
-                        </a:ext>
-                      </a:extLst>
-                    </a:gridCol>
-                    <a:gridCol w="3505200">
-                      <a:extLst>
-                        <a:ext uri="{9D8B030D-6E8A-4147-A177-3AD203B41FA5}">
-                          <a16:colId xmlns:a16="http://schemas.microsoft.com/office/drawing/2014/main" val="1589224047"/>
-                        </a:ext>
-                      </a:extLst>
-                    </a:gridCol>
-                  </a:tblGrid>
-                  <a:tr h="0">
+                  <a:tr h="475329">
                     <a:tc>
                       <a:txBody>
                         <a:bodyPr/>
                         <a:lstStyle/>
                         <a:p>
                           <a:r>
-                            <a:rPr lang="ru-RU">
-                              <a:effectLst/>
-                            </a:rPr>
-                            <a:t>Характеристика</a:t>
+                            <a:rPr lang="ru-RU" dirty="0"/>
+                            <a:t>FFT/NTT</a:t>
                           </a:r>
-                          <a:endParaRPr lang="ru-RU"/>
-                        </a:p>
-                      </a:txBody>
-                      <a:tcPr anchor="ctr"/>
-                    </a:tc>
-                    <a:tc>
-                      <a:txBody>
-                        <a:bodyPr/>
-                        <a:lstStyle/>
-                        <a:p>
-                          <a:r>
-                            <a:rPr lang="ru-RU">
-                              <a:effectLst/>
-                            </a:rPr>
-                            <a:t>Бэтчер</a:t>
-                          </a:r>
-                          <a:endParaRPr lang="ru-RU"/>
-                        </a:p>
-                      </a:txBody>
-                      <a:tcPr anchor="ctr"/>
-                    </a:tc>
-                    <a:tc>
-                      <a:txBody>
-                        <a:bodyPr/>
-                        <a:lstStyle/>
-                        <a:p>
-                          <a:r>
-                            <a:rPr lang="en-US">
-                              <a:effectLst/>
-                            </a:rPr>
-                            <a:t>FFT / NTT</a:t>
-                          </a:r>
-                          <a:endParaRPr lang="en-US"/>
-                        </a:p>
-                      </a:txBody>
-                      <a:tcPr anchor="ctr"/>
-                    </a:tc>
-                    <a:extLst>
-                      <a:ext uri="{0D108BD9-81ED-4DB2-BD59-A6C34878D82A}">
-                        <a16:rowId xmlns:a16="http://schemas.microsoft.com/office/drawing/2014/main" val="204255072"/>
-                      </a:ext>
-                    </a:extLst>
-                  </a:tr>
-                  <a:tr h="0">
-                    <a:tc>
-                      <a:txBody>
-                        <a:bodyPr/>
-                        <a:lstStyle/>
-                        <a:p>
-                          <a:r>
-                            <a:rPr lang="ru-RU" dirty="0">
-                              <a:effectLst/>
-                            </a:rPr>
-                            <a:t>Разбиение</a:t>
-                          </a:r>
-                          <a:endParaRPr lang="ru-RU" dirty="0"/>
-                        </a:p>
-                      </a:txBody>
-                      <a:tcPr anchor="ctr"/>
-                    </a:tc>
-                    <a:tc>
-                      <a:txBody>
-                        <a:bodyPr/>
-                        <a:lstStyle/>
-                        <a:p>
-                          <a:r>
-                            <a:rPr lang="ru-RU">
-                              <a:effectLst/>
-                            </a:rPr>
-                            <a:t>чётные / нечётные элементы</a:t>
-                          </a:r>
-                          <a:endParaRPr lang="ru-RU"/>
-                        </a:p>
-                      </a:txBody>
-                      <a:tcPr anchor="ctr"/>
-                    </a:tc>
-                    <a:tc>
-                      <a:txBody>
-                        <a:bodyPr/>
-                        <a:lstStyle/>
-                        <a:p>
-                          <a:r>
-                            <a:rPr lang="ru-RU" dirty="0">
-                              <a:effectLst/>
-                            </a:rPr>
-                            <a:t>чётные / нечётные коэффициенты</a:t>
-                          </a:r>
-                          <a:endParaRPr lang="ru-RU" dirty="0"/>
-                        </a:p>
-                      </a:txBody>
-                      <a:tcPr anchor="ctr"/>
-                    </a:tc>
-                    <a:extLst>
-                      <a:ext uri="{0D108BD9-81ED-4DB2-BD59-A6C34878D82A}">
-                        <a16:rowId xmlns:a16="http://schemas.microsoft.com/office/drawing/2014/main" val="2369175053"/>
-                      </a:ext>
-                    </a:extLst>
-                  </a:tr>
-                  <a:tr h="0">
-                    <a:tc>
-                      <a:txBody>
-                        <a:bodyPr/>
-                        <a:lstStyle/>
-                        <a:p>
-                          <a:r>
-                            <a:rPr lang="ru-RU">
-                              <a:effectLst/>
-                            </a:rPr>
-                            <a:t>Рекурсия</a:t>
-                          </a:r>
-                          <a:endParaRPr lang="ru-RU"/>
-                        </a:p>
-                      </a:txBody>
-                      <a:tcPr anchor="ctr"/>
-                    </a:tc>
-                    <a:tc>
-                      <a:txBody>
-                        <a:bodyPr/>
-                        <a:lstStyle/>
-                        <a:p>
-                          <a:r>
-                            <a:rPr lang="ru-RU" dirty="0">
-                              <a:effectLst/>
-                            </a:rPr>
-                            <a:t>две подзадачи размера </a:t>
-                          </a:r>
-                          <a14:m>
-                            <m:oMath xmlns:m="http://schemas.openxmlformats.org/officeDocument/2006/math">
-                              <m:f>
-                                <m:fPr>
-                                  <m:ctrlPr>
-                                    <a:rPr lang="en-US" i="1" dirty="0" smtClean="0">
-                                      <a:latin typeface="Cambria Math" panose="02040503050406030204" pitchFamily="18" charset="0"/>
-                                    </a:rPr>
-                                  </m:ctrlPr>
-                                </m:fPr>
-                                <m:num>
-                                  <m:r>
-                                    <a:rPr lang="en-US" i="1" dirty="0" smtClean="0">
-                                      <a:latin typeface="Cambria Math" panose="02040503050406030204" pitchFamily="18" charset="0"/>
-                                    </a:rPr>
-                                    <m:t>𝑛</m:t>
-                                  </m:r>
-                                </m:num>
-                                <m:den>
-                                  <m:r>
-                                    <a:rPr lang="en-US" i="1" dirty="0" smtClean="0">
-                                      <a:latin typeface="Cambria Math" panose="02040503050406030204" pitchFamily="18" charset="0"/>
-                                    </a:rPr>
-                                    <m:t>2</m:t>
-                                  </m:r>
-                                </m:den>
-                              </m:f>
-                            </m:oMath>
-                          </a14:m>
-                          <a:endParaRPr lang="en-US" dirty="0"/>
-                        </a:p>
-                      </a:txBody>
-                      <a:tcPr anchor="ctr"/>
-                    </a:tc>
-                    <a:tc>
-                      <a:txBody>
-                        <a:bodyPr/>
-                        <a:lstStyle/>
-                        <a:p>
-                          <a:r>
-                            <a:rPr lang="ru-RU" dirty="0">
-                              <a:effectLst/>
-                            </a:rPr>
-                            <a:t>две подзадачи</a:t>
-                          </a:r>
-                          <a:r>
-                            <a:rPr lang="en-US" dirty="0">
-                              <a:effectLst/>
-                            </a:rPr>
-                            <a:t> </a:t>
-                          </a:r>
-                          <a:r>
-                            <a:rPr lang="ru-RU" dirty="0">
-                              <a:effectLst/>
-                            </a:rPr>
-                            <a:t>размера </a:t>
-                          </a:r>
-                          <a14:m>
-                            <m:oMath xmlns:m="http://schemas.openxmlformats.org/officeDocument/2006/math">
-                              <m:f>
-                                <m:fPr>
-                                  <m:ctrlPr>
-                                    <a:rPr lang="en-US" i="1" dirty="0" smtClean="0">
-                                      <a:latin typeface="Cambria Math" panose="02040503050406030204" pitchFamily="18" charset="0"/>
-                                    </a:rPr>
-                                  </m:ctrlPr>
-                                </m:fPr>
-                                <m:num>
-                                  <m:r>
-                                    <a:rPr lang="en-US" i="1" dirty="0" smtClean="0">
-                                      <a:latin typeface="Cambria Math" panose="02040503050406030204" pitchFamily="18" charset="0"/>
-                                    </a:rPr>
-                                    <m:t>𝑛</m:t>
-                                  </m:r>
-                                </m:num>
-                                <m:den>
-                                  <m:r>
-                                    <a:rPr lang="en-US" i="1" dirty="0" smtClean="0">
-                                      <a:latin typeface="Cambria Math" panose="02040503050406030204" pitchFamily="18" charset="0"/>
-                                    </a:rPr>
-                                    <m:t>2</m:t>
-                                  </m:r>
-                                </m:den>
-                              </m:f>
-                            </m:oMath>
-                          </a14:m>
-                          <a:endParaRPr lang="en-US" dirty="0"/>
-                        </a:p>
-                      </a:txBody>
-                      <a:tcPr anchor="ctr"/>
-                    </a:tc>
-                    <a:extLst>
-                      <a:ext uri="{0D108BD9-81ED-4DB2-BD59-A6C34878D82A}">
-                        <a16:rowId xmlns:a16="http://schemas.microsoft.com/office/drawing/2014/main" val="524925864"/>
-                      </a:ext>
-                    </a:extLst>
-                  </a:tr>
-                  <a:tr h="0">
-                    <a:tc>
-                      <a:txBody>
-                        <a:bodyPr/>
-                        <a:lstStyle/>
-                        <a:p>
-                          <a:r>
-                            <a:rPr lang="ru-RU">
-                              <a:effectLst/>
-                            </a:rPr>
-                            <a:t>Объединение</a:t>
-                          </a:r>
-                          <a:endParaRPr lang="ru-RU"/>
-                        </a:p>
-                      </a:txBody>
-                      <a:tcPr anchor="ctr"/>
-                    </a:tc>
-                    <a:tc>
-                      <a:txBody>
-                        <a:bodyPr/>
-                        <a:lstStyle/>
-                        <a:p>
-                          <a:r>
-                            <a:rPr lang="ru-RU" dirty="0">
-                              <a:effectLst/>
-                            </a:rPr>
-                            <a:t>компараторы</a:t>
-                          </a:r>
-                          <a:endParaRPr lang="ru-RU" dirty="0"/>
-                        </a:p>
-                      </a:txBody>
-                      <a:tcPr anchor="ctr"/>
-                    </a:tc>
-                    <a:tc>
-                      <a:txBody>
-                        <a:bodyPr/>
-                        <a:lstStyle/>
-                        <a:p>
-                          <a:r>
-                            <a:rPr lang="ru-RU" dirty="0">
-                              <a:effectLst/>
-                            </a:rPr>
-                            <a:t>операции «бабочки»</a:t>
-                          </a:r>
-                          <a:endParaRPr lang="ru-RU" dirty="0"/>
-                        </a:p>
-                      </a:txBody>
-                      <a:tcPr anchor="ctr"/>
-                    </a:tc>
-                    <a:extLst>
-                      <a:ext uri="{0D108BD9-81ED-4DB2-BD59-A6C34878D82A}">
-                        <a16:rowId xmlns:a16="http://schemas.microsoft.com/office/drawing/2014/main" val="2854767491"/>
-                      </a:ext>
-                    </a:extLst>
-                  </a:tr>
-                  <a:tr h="0">
-                    <a:tc>
-                      <a:txBody>
-                        <a:bodyPr/>
-                        <a:lstStyle/>
-                        <a:p>
-                          <a:r>
-                            <a:rPr lang="ru-RU">
-                              <a:effectLst/>
-                            </a:rPr>
-                            <a:t>Сложность базовой операции</a:t>
-                          </a:r>
-                          <a:endParaRPr lang="ru-RU"/>
-                        </a:p>
-                      </a:txBody>
-                      <a:tcPr anchor="ctr"/>
-                    </a:tc>
-                    <a:tc>
-                      <a:txBody>
-                        <a:bodyPr/>
-                        <a:lstStyle/>
-                        <a:p>
-                          <a:pPr/>
-                          <a14:m>
-                            <m:oMathPara xmlns:m="http://schemas.openxmlformats.org/officeDocument/2006/math">
-                              <m:oMathParaPr>
-                                <m:jc m:val="left"/>
-                              </m:oMathParaPr>
-                              <m:oMath xmlns:m="http://schemas.openxmlformats.org/officeDocument/2006/math">
-                                <m:r>
-                                  <m:rPr>
-                                    <m:sty m:val="p"/>
-                                  </m:rPr>
-                                  <a:rPr lang="el-GR" i="0" dirty="0" smtClean="0">
-                                    <a:effectLst/>
-                                    <a:latin typeface="Cambria Math" panose="02040503050406030204" pitchFamily="18" charset="0"/>
-                                  </a:rPr>
-                                  <m:t>Θ</m:t>
-                                </m:r>
-                                <m:r>
-                                  <a:rPr lang="el-GR" i="1" dirty="0" smtClean="0">
-                                    <a:effectLst/>
-                                    <a:latin typeface="Cambria Math" panose="02040503050406030204" pitchFamily="18" charset="0"/>
-                                  </a:rPr>
-                                  <m:t>(</m:t>
-                                </m:r>
-                                <m:r>
-                                  <a:rPr lang="en-US" i="1" dirty="0" smtClean="0">
-                                    <a:effectLst/>
-                                    <a:latin typeface="Cambria Math" panose="02040503050406030204" pitchFamily="18" charset="0"/>
-                                  </a:rPr>
-                                  <m:t>𝑛</m:t>
-                                </m:r>
-                                <m:r>
-                                  <a:rPr lang="en-US" b="0" i="1" dirty="0" smtClean="0">
-                                    <a:latin typeface="Cambria Math" panose="02040503050406030204" pitchFamily="18" charset="0"/>
-                                  </a:rPr>
-                                  <m:t>·</m:t>
-                                </m:r>
-                                <m:r>
-                                  <a:rPr lang="en-US" i="1" dirty="0" smtClean="0">
-                                    <a:effectLst/>
-                                    <a:latin typeface="Cambria Math" panose="02040503050406030204" pitchFamily="18" charset="0"/>
-                                  </a:rPr>
-                                  <m:t>𝑙𝑜𝑔𝑛</m:t>
-                                </m:r>
-                                <m:r>
-                                  <a:rPr lang="en-US" i="1" dirty="0" smtClean="0">
-                                    <a:effectLst/>
-                                    <a:latin typeface="Cambria Math" panose="02040503050406030204" pitchFamily="18" charset="0"/>
-                                  </a:rPr>
-                                  <m:t>)</m:t>
-                                </m:r>
-                              </m:oMath>
-                            </m:oMathPara>
-                          </a14:m>
-                          <a:endParaRPr lang="en-US" dirty="0"/>
-                        </a:p>
-                      </a:txBody>
-                      <a:tcPr anchor="ctr"/>
-                    </a:tc>
-                    <a:tc>
-                      <a:txBody>
-                        <a:bodyPr/>
-                        <a:lstStyle/>
-                        <a:p>
-                          <a:pPr/>
-                          <a14:m>
-                            <m:oMathPara xmlns:m="http://schemas.openxmlformats.org/officeDocument/2006/math">
-                              <m:oMathParaPr>
-                                <m:jc m:val="left"/>
-                              </m:oMathParaPr>
-                              <m:oMath xmlns:m="http://schemas.openxmlformats.org/officeDocument/2006/math">
-                                <m:r>
-                                  <m:rPr>
-                                    <m:sty m:val="p"/>
-                                  </m:rPr>
-                                  <a:rPr lang="el-GR" i="0" dirty="0" smtClean="0">
-                                    <a:effectLst/>
-                                    <a:latin typeface="Cambria Math" panose="02040503050406030204" pitchFamily="18" charset="0"/>
-                                  </a:rPr>
-                                  <m:t>Θ</m:t>
-                                </m:r>
-                                <m:r>
-                                  <a:rPr lang="el-GR" i="1" dirty="0" smtClean="0">
-                                    <a:effectLst/>
-                                    <a:latin typeface="Cambria Math" panose="02040503050406030204" pitchFamily="18" charset="0"/>
-                                  </a:rPr>
-                                  <m:t>(</m:t>
-                                </m:r>
-                                <m:r>
-                                  <a:rPr lang="en-US" i="1" dirty="0" smtClean="0">
-                                    <a:effectLst/>
-                                    <a:latin typeface="Cambria Math" panose="02040503050406030204" pitchFamily="18" charset="0"/>
-                                  </a:rPr>
-                                  <m:t>𝑛</m:t>
-                                </m:r>
-                                <m:r>
-                                  <a:rPr lang="en-US" b="0" i="1" dirty="0" smtClean="0">
-                                    <a:latin typeface="Cambria Math" panose="02040503050406030204" pitchFamily="18" charset="0"/>
-                                  </a:rPr>
-                                  <m:t>·</m:t>
-                                </m:r>
-                                <m:r>
-                                  <a:rPr lang="en-US" i="1" dirty="0" smtClean="0">
-                                    <a:effectLst/>
-                                    <a:latin typeface="Cambria Math" panose="02040503050406030204" pitchFamily="18" charset="0"/>
-                                  </a:rPr>
-                                  <m:t>𝑙𝑜𝑔𝑛</m:t>
-                                </m:r>
-                                <m:r>
-                                  <a:rPr lang="en-US" i="1" dirty="0" smtClean="0">
-                                    <a:effectLst/>
-                                    <a:latin typeface="Cambria Math" panose="02040503050406030204" pitchFamily="18" charset="0"/>
-                                  </a:rPr>
-                                  <m:t>)</m:t>
-                                </m:r>
-                              </m:oMath>
-                            </m:oMathPara>
-                          </a14:m>
-                          <a:endParaRPr lang="en-US" dirty="0"/>
-                        </a:p>
-                      </a:txBody>
-                      <a:tcPr anchor="ctr"/>
-                    </a:tc>
-                    <a:extLst>
-                      <a:ext uri="{0D108BD9-81ED-4DB2-BD59-A6C34878D82A}">
-                        <a16:rowId xmlns:a16="http://schemas.microsoft.com/office/drawing/2014/main" val="3352621708"/>
-                      </a:ext>
-                    </a:extLst>
-                  </a:tr>
-                </a:tbl>
-              </a:graphicData>
-            </a:graphic>
-          </p:graphicFrame>
-        </mc:Choice>
-        <mc:Fallback xmlns="">
-          <p:graphicFrame>
-            <p:nvGraphicFramePr>
-              <p:cNvPr id="6" name="Таблица 5">
-                <a:extLst>
-                  <a:ext uri="{FF2B5EF4-FFF2-40B4-BE49-F238E27FC236}">
-                    <a16:creationId xmlns:a16="http://schemas.microsoft.com/office/drawing/2014/main" id="{A19A218C-4599-00A2-7499-967B1354EB3D}"/>
-                  </a:ext>
-                </a:extLst>
-              </p:cNvPr>
-              <p:cNvGraphicFramePr>
-                <a:graphicFrameLocks noGrp="1"/>
-              </p:cNvGraphicFramePr>
-              <p:nvPr>
-                <p:extLst>
-                  <p:ext uri="{D42A27DB-BD31-4B8C-83A1-F6EECF244321}">
-                    <p14:modId xmlns:p14="http://schemas.microsoft.com/office/powerpoint/2010/main" val="2411234283"/>
-                  </p:ext>
-                </p:extLst>
-              </p:nvPr>
-            </p:nvGraphicFramePr>
-            <p:xfrm>
-              <a:off x="838200" y="2949734"/>
-              <a:ext cx="10515600" cy="2194370"/>
-            </p:xfrm>
-            <a:graphic>
-              <a:graphicData uri="http://schemas.openxmlformats.org/drawingml/2006/table">
-                <a:tbl>
-                  <a:tblPr firstRow="1" firstCol="1" bandRow="1">
-                    <a:tableStyleId>{5C22544A-7EE6-4342-B048-85BDC9FD1C3A}</a:tableStyleId>
-                  </a:tblPr>
-                  <a:tblGrid>
-                    <a:gridCol w="3505200">
-                      <a:extLst>
-                        <a:ext uri="{9D8B030D-6E8A-4147-A177-3AD203B41FA5}">
-                          <a16:colId xmlns:a16="http://schemas.microsoft.com/office/drawing/2014/main" val="3311830663"/>
-                        </a:ext>
-                      </a:extLst>
-                    </a:gridCol>
-                    <a:gridCol w="3505200">
-                      <a:extLst>
-                        <a:ext uri="{9D8B030D-6E8A-4147-A177-3AD203B41FA5}">
-                          <a16:colId xmlns:a16="http://schemas.microsoft.com/office/drawing/2014/main" val="1317386152"/>
-                        </a:ext>
-                      </a:extLst>
-                    </a:gridCol>
-                    <a:gridCol w="3505200">
-                      <a:extLst>
-                        <a:ext uri="{9D8B030D-6E8A-4147-A177-3AD203B41FA5}">
-                          <a16:colId xmlns:a16="http://schemas.microsoft.com/office/drawing/2014/main" val="1589224047"/>
-                        </a:ext>
-                      </a:extLst>
-                    </a:gridCol>
-                  </a:tblGrid>
-                  <a:tr h="365760">
-                    <a:tc>
-                      <a:txBody>
-                        <a:bodyPr/>
-                        <a:lstStyle/>
-                        <a:p>
-                          <a:r>
-                            <a:rPr lang="ru-RU">
-                              <a:effectLst/>
-                            </a:rPr>
-                            <a:t>Характеристика</a:t>
-                          </a:r>
-                          <a:endParaRPr lang="ru-RU"/>
-                        </a:p>
-                      </a:txBody>
-                      <a:tcPr anchor="ctr"/>
-                    </a:tc>
-                    <a:tc>
-                      <a:txBody>
-                        <a:bodyPr/>
-                        <a:lstStyle/>
-                        <a:p>
-                          <a:r>
-                            <a:rPr lang="ru-RU">
-                              <a:effectLst/>
-                            </a:rPr>
-                            <a:t>Бэтчер</a:t>
-                          </a:r>
-                          <a:endParaRPr lang="ru-RU"/>
-                        </a:p>
-                      </a:txBody>
-                      <a:tcPr anchor="ctr"/>
-                    </a:tc>
-                    <a:tc>
-                      <a:txBody>
-                        <a:bodyPr/>
-                        <a:lstStyle/>
-                        <a:p>
-                          <a:r>
-                            <a:rPr lang="en-US">
-                              <a:effectLst/>
-                            </a:rPr>
-                            <a:t>FFT / NTT</a:t>
-                          </a:r>
-                          <a:endParaRPr lang="en-US"/>
-                        </a:p>
-                      </a:txBody>
-                      <a:tcPr anchor="ctr"/>
-                    </a:tc>
-                    <a:extLst>
-                      <a:ext uri="{0D108BD9-81ED-4DB2-BD59-A6C34878D82A}">
-                        <a16:rowId xmlns:a16="http://schemas.microsoft.com/office/drawing/2014/main" val="204255072"/>
-                      </a:ext>
-                    </a:extLst>
-                  </a:tr>
-                  <a:tr h="640080">
-                    <a:tc>
-                      <a:txBody>
-                        <a:bodyPr/>
-                        <a:lstStyle/>
-                        <a:p>
-                          <a:r>
-                            <a:rPr lang="ru-RU" dirty="0">
-                              <a:effectLst/>
-                            </a:rPr>
-                            <a:t>Разбиение</a:t>
-                          </a:r>
-                          <a:endParaRPr lang="ru-RU" dirty="0"/>
-                        </a:p>
-                      </a:txBody>
-                      <a:tcPr anchor="ctr"/>
-                    </a:tc>
-                    <a:tc>
-                      <a:txBody>
-                        <a:bodyPr/>
-                        <a:lstStyle/>
-                        <a:p>
-                          <a:r>
-                            <a:rPr lang="ru-RU">
-                              <a:effectLst/>
-                            </a:rPr>
-                            <a:t>чётные / нечётные элементы</a:t>
-                          </a:r>
-                          <a:endParaRPr lang="ru-RU"/>
-                        </a:p>
-                      </a:txBody>
-                      <a:tcPr anchor="ctr"/>
-                    </a:tc>
-                    <a:tc>
-                      <a:txBody>
-                        <a:bodyPr/>
-                        <a:lstStyle/>
-                        <a:p>
-                          <a:r>
-                            <a:rPr lang="ru-RU" dirty="0">
-                              <a:effectLst/>
-                            </a:rPr>
-                            <a:t>чётные / нечётные коэффициенты</a:t>
-                          </a:r>
-                          <a:endParaRPr lang="ru-RU" dirty="0"/>
-                        </a:p>
-                      </a:txBody>
-                      <a:tcPr anchor="ctr"/>
-                    </a:tc>
-                    <a:extLst>
-                      <a:ext uri="{0D108BD9-81ED-4DB2-BD59-A6C34878D82A}">
-                        <a16:rowId xmlns:a16="http://schemas.microsoft.com/office/drawing/2014/main" val="2369175053"/>
-                      </a:ext>
-                    </a:extLst>
-                  </a:tr>
-                  <a:tr h="457010">
-                    <a:tc>
-                      <a:txBody>
-                        <a:bodyPr/>
-                        <a:lstStyle/>
-                        <a:p>
-                          <a:r>
-                            <a:rPr lang="ru-RU">
-                              <a:effectLst/>
-                            </a:rPr>
-                            <a:t>Рекурсия</a:t>
-                          </a:r>
-                          <a:endParaRPr lang="ru-RU"/>
                         </a:p>
                       </a:txBody>
                       <a:tcPr anchor="ctr"/>
@@ -8901,7 +9056,7 @@
                         <a:blipFill>
                           <a:blip r:embed="rId2"/>
                           <a:stretch>
-                            <a:fillRect l="-100000" t="-223684" r="-100521" b="-178947"/>
+                            <a:fillRect l="-100000" t="-466667" r="-100521" b="-7692"/>
                           </a:stretch>
                         </a:blipFill>
                       </a:tcPr>
@@ -8918,126 +9073,14 @@
                         <a:blipFill>
                           <a:blip r:embed="rId2"/>
                           <a:stretch>
-                            <a:fillRect l="-200348" t="-223684" r="-696" b="-178947"/>
+                            <a:fillRect l="-200348" t="-466667" r="-696" b="-7692"/>
                           </a:stretch>
                         </a:blipFill>
                       </a:tcPr>
                     </a:tc>
                     <a:extLst>
                       <a:ext uri="{0D108BD9-81ED-4DB2-BD59-A6C34878D82A}">
-                        <a16:rowId xmlns:a16="http://schemas.microsoft.com/office/drawing/2014/main" val="524925864"/>
-                      </a:ext>
-                    </a:extLst>
-                  </a:tr>
-                  <a:tr h="365760">
-                    <a:tc>
-                      <a:txBody>
-                        <a:bodyPr/>
-                        <a:lstStyle/>
-                        <a:p>
-                          <a:r>
-                            <a:rPr lang="ru-RU">
-                              <a:effectLst/>
-                            </a:rPr>
-                            <a:t>Объединение</a:t>
-                          </a:r>
-                          <a:endParaRPr lang="ru-RU"/>
-                        </a:p>
-                      </a:txBody>
-                      <a:tcPr anchor="ctr"/>
-                    </a:tc>
-                    <a:tc>
-                      <a:txBody>
-                        <a:bodyPr/>
-                        <a:lstStyle/>
-                        <a:p>
-                          <a:r>
-                            <a:rPr lang="ru-RU" dirty="0">
-                              <a:effectLst/>
-                            </a:rPr>
-                            <a:t>компараторы</a:t>
-                          </a:r>
-                          <a:endParaRPr lang="ru-RU" dirty="0"/>
-                        </a:p>
-                      </a:txBody>
-                      <a:tcPr anchor="ctr"/>
-                    </a:tc>
-                    <a:tc>
-                      <a:txBody>
-                        <a:bodyPr/>
-                        <a:lstStyle/>
-                        <a:p>
-                          <a:r>
-                            <a:rPr lang="ru-RU" dirty="0">
-                              <a:effectLst/>
-                            </a:rPr>
-                            <a:t>операции «бабочки»</a:t>
-                          </a:r>
-                          <a:endParaRPr lang="ru-RU" dirty="0"/>
-                        </a:p>
-                      </a:txBody>
-                      <a:tcPr anchor="ctr"/>
-                    </a:tc>
-                    <a:extLst>
-                      <a:ext uri="{0D108BD9-81ED-4DB2-BD59-A6C34878D82A}">
-                        <a16:rowId xmlns:a16="http://schemas.microsoft.com/office/drawing/2014/main" val="2854767491"/>
-                      </a:ext>
-                    </a:extLst>
-                  </a:tr>
-                  <a:tr h="365760">
-                    <a:tc>
-                      <a:txBody>
-                        <a:bodyPr/>
-                        <a:lstStyle/>
-                        <a:p>
-                          <a:r>
-                            <a:rPr lang="ru-RU">
-                              <a:effectLst/>
-                            </a:rPr>
-                            <a:t>Сложность базовой операции</a:t>
-                          </a:r>
-                          <a:endParaRPr lang="ru-RU"/>
-                        </a:p>
-                      </a:txBody>
-                      <a:tcPr anchor="ctr"/>
-                    </a:tc>
-                    <a:tc>
-                      <a:txBody>
-                        <a:bodyPr/>
-                        <a:lstStyle/>
-                        <a:p>
-                          <a:endParaRPr lang="ru-RU"/>
-                        </a:p>
-                      </a:txBody>
-                      <a:tcPr anchor="ctr">
-                        <a:blipFill>
-                          <a:blip r:embed="rId2"/>
-                          <a:stretch>
-                            <a:fillRect l="-100000" t="-510000" r="-100521" b="-26667"/>
-                          </a:stretch>
-                        </a:blipFill>
-                      </a:tcPr>
-                    </a:tc>
-                    <a:tc>
-                      <a:txBody>
-                        <a:bodyPr/>
-                        <a:lstStyle/>
-                        <a:p>
-                          <a:endParaRPr lang="ru-RU"/>
-                        </a:p>
-                      </a:txBody>
-                      <a:tcPr anchor="ctr">
-                        <a:blipFill>
-                          <a:blip r:embed="rId2"/>
-                          <a:stretch>
-                            <a:fillRect l="-200348" t="-510000" r="-696" b="-26667"/>
-                          </a:stretch>
-                        </a:blipFill>
-                      </a:tcPr>
-                    </a:tc>
-                    <a:extLst>
-                      <a:ext uri="{0D108BD9-81ED-4DB2-BD59-A6C34878D82A}">
-                        <a16:rowId xmlns:a16="http://schemas.microsoft.com/office/drawing/2014/main" val="3352621708"/>
+                        <a16:rowId xmlns:a16="http://schemas.microsoft.com/office/drawing/2014/main" val="2393820844"/>
                       </a:ext>
                     </a:extLst>
                   </a:tr>
@@ -9050,7 +9093,7 @@
     </p:spTree>
     <p:extLst>
       <p:ext uri="{BB962C8B-B14F-4D97-AF65-F5344CB8AC3E}">
-        <p14:creationId xmlns:p14="http://schemas.microsoft.com/office/powerpoint/2010/main" val="858703796"/>
+        <p14:creationId xmlns:p14="http://schemas.microsoft.com/office/powerpoint/2010/main" val="2486154304"/>
       </p:ext>
     </p:extLst>
   </p:cSld>
@@ -9093,20 +9136,22 @@
             <p:ph type="title"/>
           </p:nvPr>
         </p:nvSpPr>
-        <p:spPr/>
+        <p:spPr>
+          <a:xfrm>
+            <a:off x="838200" y="573866"/>
+            <a:ext cx="10515600" cy="51540"/>
+          </a:xfrm>
+        </p:spPr>
         <p:txBody>
-          <a:bodyPr/>
+          <a:bodyPr>
+            <a:normAutofit fontScale="90000"/>
+          </a:bodyPr>
           <a:lstStyle/>
           <a:p>
             <a:r>
               <a:rPr lang="ru-RU" dirty="0"/>
-              <a:t>Экспериментальная проверка: </a:t>
-            </a:r>
-            <a:r>
-              <a:rPr lang="ru-RU" dirty="0" err="1"/>
-              <a:t>Бэтчер</a:t>
-            </a:r>
-            <a:endParaRPr lang="ru-RU" dirty="0"/>
+              <a:t>Экспериментальная проверка полученной формулы</a:t>
+            </a:r>
           </a:p>
         </p:txBody>
       </p:sp>
@@ -9192,8 +9237,8 @@
         </p:blipFill>
         <p:spPr>
           <a:xfrm>
-            <a:off x="838200" y="2072690"/>
-            <a:ext cx="10515600" cy="3857207"/>
+            <a:off x="84544" y="1822494"/>
+            <a:ext cx="12022911" cy="4410101"/>
           </a:xfrm>
           <a:prstGeom prst="rect">
             <a:avLst/>
@@ -9246,14 +9291,19 @@
             <p:ph type="title"/>
           </p:nvPr>
         </p:nvSpPr>
-        <p:spPr/>
+        <p:spPr>
+          <a:xfrm>
+            <a:off x="838200" y="1"/>
+            <a:ext cx="10515600" cy="895480"/>
+          </a:xfrm>
+        </p:spPr>
         <p:txBody>
           <a:bodyPr/>
           <a:lstStyle/>
           <a:p>
             <a:r>
               <a:rPr lang="ru-RU" dirty="0"/>
-              <a:t>Сводный график алгоритмов</a:t>
+              <a:t>Сводное сравнение алгоритмов</a:t>
             </a:r>
           </a:p>
         </p:txBody>
@@ -9340,8 +9390,8 @@
         </p:blipFill>
         <p:spPr>
           <a:xfrm>
-            <a:off x="2304214" y="1825625"/>
-            <a:ext cx="7583571" cy="4351338"/>
+            <a:off x="1389270" y="775663"/>
+            <a:ext cx="9413459" cy="5401300"/>
           </a:xfrm>
           <a:prstGeom prst="rect">
             <a:avLst/>
@@ -9533,19 +9583,16 @@
                       </m:fPr>
                       <m:num>
                         <m:r>
-                          <m:rPr>
-                            <m:sty m:val="p"/>
-                          </m:rPr>
-                          <a:rPr lang="en-US" sz="1600" b="0" i="0">
+                          <a:rPr lang="en-US" sz="1600" b="0" i="1">
                             <a:latin typeface="Cambria Math" panose="02040503050406030204" pitchFamily="18" charset="0"/>
                           </a:rPr>
-                          <m:t>n</m:t>
+                          <m:t>𝑛</m:t>
                         </m:r>
                         <m:r>
-                          <a:rPr lang="en-US" sz="1600" b="0" i="0">
+                          <a:rPr lang="en-US" sz="1600" i="1" dirty="0">
                             <a:latin typeface="Cambria Math" panose="02040503050406030204" pitchFamily="18" charset="0"/>
                           </a:rPr>
-                          <m:t> </m:t>
+                          <m:t>·</m:t>
                         </m:r>
                         <m:r>
                           <m:rPr>
@@ -9585,13 +9632,10 @@
                           </m:sub>
                         </m:sSub>
                         <m:r>
-                          <m:rPr>
-                            <m:sty m:val="p"/>
-                          </m:rPr>
-                          <a:rPr lang="en-US" sz="1600" b="0" i="0">
+                          <a:rPr lang="en-US" sz="1600" b="0" i="1">
                             <a:latin typeface="Cambria Math" panose="02040503050406030204" pitchFamily="18" charset="0"/>
                           </a:rPr>
-                          <m:t>n</m:t>
+                          <m:t>𝑛</m:t>
                         </m:r>
                       </m:num>
                       <m:den>
@@ -9619,13 +9663,10 @@
                       </m:fPr>
                       <m:num>
                         <m:r>
-                          <m:rPr>
-                            <m:sty m:val="p"/>
-                          </m:rPr>
-                          <a:rPr lang="en-US" sz="1600" b="0" i="0">
+                          <a:rPr lang="en-US" sz="1600" b="0" i="1">
                             <a:latin typeface="Cambria Math" panose="02040503050406030204" pitchFamily="18" charset="0"/>
                           </a:rPr>
-                          <m:t>n</m:t>
+                          <m:t>𝑛</m:t>
                         </m:r>
                       </m:num>
                       <m:den>
@@ -9659,7 +9700,7 @@
                 </a:endParaRPr>
               </a:p>
               <a:p>
-                <a:pPr marL="457200" lvl="1" indent="0" rtl="0">
+                <a:pPr marL="457200" lvl="1" indent="0">
                   <a:lnSpc>
                     <a:spcPct val="150000"/>
                   </a:lnSpc>
@@ -9676,13 +9717,16 @@
                 <a14:m>
                   <m:oMath xmlns:m="http://schemas.openxmlformats.org/officeDocument/2006/math">
                     <m:r>
-                      <a:rPr lang="ru-RU" sz="1600" i="1" smtClean="0">
+                      <m:rPr>
+                        <m:sty m:val="p"/>
+                      </m:rPr>
+                      <a:rPr lang="ru-RU" sz="1600" i="0" smtClean="0">
                         <a:effectLst/>
                         <a:latin typeface="Cambria Math" panose="02040503050406030204" pitchFamily="18" charset="0"/>
                         <a:ea typeface="Times New Roman" panose="02020603050405020304" pitchFamily="18" charset="0"/>
                         <a:cs typeface="Times New Roman" panose="02020603050405020304" pitchFamily="18" charset="0"/>
                       </a:rPr>
-                      <m:t>𝑆</m:t>
+                      <m:t>S</m:t>
                     </m:r>
                     <m:d>
                       <m:dPr>
@@ -9734,13 +9778,10 @@
                           <m:t>𝑛</m:t>
                         </m:r>
                         <m:r>
-                          <a:rPr lang="ru-RU" sz="1600" i="1">
-                            <a:effectLst/>
+                          <a:rPr lang="en-US" sz="1600" i="1" dirty="0">
                             <a:latin typeface="Cambria Math" panose="02040503050406030204" pitchFamily="18" charset="0"/>
-                            <a:ea typeface="Times New Roman" panose="02020603050405020304" pitchFamily="18" charset="0"/>
-                            <a:cs typeface="Times New Roman" panose="02020603050405020304" pitchFamily="18" charset="0"/>
                           </a:rPr>
-                          <m:t> </m:t>
+                          <m:t>·</m:t>
                         </m:r>
                         <m:r>
                           <m:rPr>
@@ -9757,7 +9798,7 @@
                         <m:sSub>
                           <m:sSubPr>
                             <m:ctrlPr>
-                              <a:rPr lang="ru-RU" sz="1600">
+                              <a:rPr lang="ru-RU" sz="1600" i="1">
                                 <a:effectLst/>
                                 <a:latin typeface="Cambria Math" panose="02040503050406030204" pitchFamily="18" charset="0"/>
                               </a:rPr>
@@ -9806,6 +9847,12 @@
                             <a:cs typeface="Times New Roman" panose="02020603050405020304" pitchFamily="18" charset="0"/>
                           </a:rPr>
                           <m:t>𝑛</m:t>
+                        </m:r>
+                        <m:r>
+                          <a:rPr lang="en-US" sz="1600" i="1" dirty="0">
+                            <a:latin typeface="Cambria Math" panose="02040503050406030204" pitchFamily="18" charset="0"/>
+                          </a:rPr>
+                          <m:t>·</m:t>
                         </m:r>
                         <m:d>
                           <m:dPr>
@@ -9935,7 +9982,7 @@
                 </a:endParaRPr>
               </a:p>
               <a:p>
-                <a:pPr marL="457200" lvl="1" indent="0" rtl="0">
+                <a:pPr marL="457200" lvl="1" indent="0">
                   <a:lnSpc>
                     <a:spcPct val="150000"/>
                   </a:lnSpc>
@@ -9960,7 +10007,7 @@
                     <m:sSub>
                       <m:sSubPr>
                         <m:ctrlPr>
-                          <a:rPr lang="ru-RU" sz="1600" i="1" smtClean="0">
+                          <a:rPr lang="ru-RU" sz="1600" smtClean="0">
                             <a:effectLst/>
                             <a:latin typeface="Cambria Math" panose="02040503050406030204" pitchFamily="18" charset="0"/>
                           </a:rPr>
@@ -9968,29 +10015,35 @@
                       </m:sSubPr>
                       <m:e>
                         <m:r>
-                          <a:rPr lang="en-US" sz="1600" i="1">
+                          <m:rPr>
+                            <m:sty m:val="p"/>
+                          </m:rPr>
+                          <a:rPr lang="en-US" sz="1600" i="0">
                             <a:effectLst/>
                             <a:latin typeface="Cambria Math" panose="02040503050406030204" pitchFamily="18" charset="0"/>
                             <a:ea typeface="Times New Roman" panose="02020603050405020304" pitchFamily="18" charset="0"/>
                             <a:cs typeface="Times New Roman" panose="02020603050405020304" pitchFamily="18" charset="0"/>
                           </a:rPr>
-                          <m:t>𝑑</m:t>
+                          <m:t>d</m:t>
                         </m:r>
                       </m:e>
                       <m:sub>
                         <m:r>
-                          <a:rPr lang="en-US" sz="1600" i="1">
+                          <m:rPr>
+                            <m:sty m:val="p"/>
+                          </m:rPr>
+                          <a:rPr lang="en-US" sz="1600" i="0">
                             <a:effectLst/>
                             <a:latin typeface="Cambria Math" panose="02040503050406030204" pitchFamily="18" charset="0"/>
                             <a:ea typeface="Times New Roman" panose="02020603050405020304" pitchFamily="18" charset="0"/>
                             <a:cs typeface="Times New Roman" panose="02020603050405020304" pitchFamily="18" charset="0"/>
                           </a:rPr>
-                          <m:t>𝑆</m:t>
+                          <m:t>S</m:t>
                         </m:r>
                         <m:d>
                           <m:dPr>
                             <m:ctrlPr>
-                              <a:rPr lang="ru-RU" sz="1600" i="1">
+                              <a:rPr lang="ru-RU" sz="1600">
                                 <a:effectLst/>
                                 <a:latin typeface="Cambria Math" panose="02040503050406030204" pitchFamily="18" charset="0"/>
                               </a:rPr>
@@ -9998,13 +10051,16 @@
                           </m:dPr>
                           <m:e>
                             <m:r>
-                              <a:rPr lang="en-US" sz="1600" i="1">
+                              <m:rPr>
+                                <m:sty m:val="p"/>
+                              </m:rPr>
+                              <a:rPr lang="en-US" sz="1600" i="0">
                                 <a:effectLst/>
                                 <a:latin typeface="Cambria Math" panose="02040503050406030204" pitchFamily="18" charset="0"/>
                                 <a:ea typeface="Times New Roman" panose="02020603050405020304" pitchFamily="18" charset="0"/>
                                 <a:cs typeface="Times New Roman" panose="02020603050405020304" pitchFamily="18" charset="0"/>
                               </a:rPr>
-                              <m:t>𝑛</m:t>
+                              <m:t>n</m:t>
                             </m:r>
                           </m:e>
                         </m:d>
@@ -10087,6 +10143,12 @@
                             </m:r>
                           </m:e>
                         </m:func>
+                        <m:r>
+                          <a:rPr lang="en-US" sz="1600" i="1" dirty="0">
+                            <a:latin typeface="Cambria Math" panose="02040503050406030204" pitchFamily="18" charset="0"/>
+                          </a:rPr>
+                          <m:t>·</m:t>
+                        </m:r>
                         <m:d>
                           <m:dPr>
                             <m:ctrlPr>
@@ -10250,7 +10312,39 @@
                     <a:latin typeface="Times New Roman" panose="02020603050405020304" pitchFamily="18" charset="0"/>
                     <a:cs typeface="Times New Roman" panose="02020603050405020304" pitchFamily="18" charset="0"/>
                   </a:rPr>
-                  <a:t>Метод распространён на криптографические алгоритмы.</a:t>
+                  <a:t>Метод распространён на другие алгоритмы парадигмы </a:t>
+                </a:r>
+                <a:r>
+                  <a:rPr lang="en-US" sz="2000" dirty="0">
+                    <a:effectLst/>
+                    <a:latin typeface="Times New Roman" panose="02020603050405020304" pitchFamily="18" charset="0"/>
+                    <a:cs typeface="Times New Roman" panose="02020603050405020304" pitchFamily="18" charset="0"/>
+                  </a:rPr>
+                  <a:t>“</a:t>
+                </a:r>
+                <a:r>
+                  <a:rPr lang="ru-RU" sz="2000" dirty="0">
+                    <a:effectLst/>
+                    <a:latin typeface="Times New Roman" panose="02020603050405020304" pitchFamily="18" charset="0"/>
+                    <a:cs typeface="Times New Roman" panose="02020603050405020304" pitchFamily="18" charset="0"/>
+                  </a:rPr>
+                  <a:t>разделяй и властвуй</a:t>
+                </a:r>
+                <a:r>
+                  <a:rPr lang="en-US" sz="2000" dirty="0">
+                    <a:effectLst/>
+                    <a:latin typeface="Times New Roman" panose="02020603050405020304" pitchFamily="18" charset="0"/>
+                    <a:cs typeface="Times New Roman" panose="02020603050405020304" pitchFamily="18" charset="0"/>
+                  </a:rPr>
+                  <a:t>”</a:t>
+                </a:r>
+                <a:r>
+                  <a:rPr lang="ru-RU" sz="2000" dirty="0">
+                    <a:effectLst/>
+                    <a:latin typeface="Times New Roman" panose="02020603050405020304" pitchFamily="18" charset="0"/>
+                    <a:cs typeface="Times New Roman" panose="02020603050405020304" pitchFamily="18" charset="0"/>
+                  </a:rPr>
+                  <a:t>.</a:t>
                 </a:r>
                 <a:endParaRPr lang="ru-RU" sz="2000" dirty="0">
                   <a:latin typeface="Times New Roman" panose="02020603050405020304" pitchFamily="18" charset="0"/>
@@ -11182,6 +11276,324 @@
 </file>
 
 <file path=ppt/slides/slide4.xml><?xml version="1.0" encoding="utf-8"?>
+<p:sld xmlns:a="http://schemas.openxmlformats.org/drawingml/2006/main" xmlns:r="http://schemas.openxmlformats.org/officeDocument/2006/relationships" xmlns:p="http://schemas.openxmlformats.org/presentationml/2006/main">
+  <p:cSld>
+    <p:spTree>
+      <p:nvGrpSpPr>
+        <p:cNvPr id="1" name=""/>
+        <p:cNvGrpSpPr/>
+        <p:nvPr/>
+      </p:nvGrpSpPr>
+      <p:grpSpPr>
+        <a:xfrm>
+          <a:off x="0" y="0"/>
+          <a:ext cx="0" cy="0"/>
+          <a:chOff x="0" y="0"/>
+          <a:chExt cx="0" cy="0"/>
+        </a:xfrm>
+      </p:grpSpPr>
+      <p:sp>
+        <p:nvSpPr>
+          <p:cNvPr id="2" name="Заголовок 1">
+            <a:extLst>
+              <a:ext uri="{FF2B5EF4-FFF2-40B4-BE49-F238E27FC236}">
+                <a16:creationId xmlns:a16="http://schemas.microsoft.com/office/drawing/2014/main" id="{69B8C879-B460-D9C5-5E56-AD7B312A9818}"/>
+              </a:ext>
+            </a:extLst>
+          </p:cNvPr>
+          <p:cNvSpPr>
+            <a:spLocks noGrp="1"/>
+          </p:cNvSpPr>
+          <p:nvPr>
+            <p:ph type="title"/>
+          </p:nvPr>
+        </p:nvSpPr>
+        <p:spPr/>
+        <p:txBody>
+          <a:bodyPr/>
+          <a:lstStyle/>
+          <a:p>
+            <a:r>
+              <a:rPr lang="ru-RU" dirty="0"/>
+              <a:t>Объект и предмет исследования</a:t>
+            </a:r>
+          </a:p>
+        </p:txBody>
+      </p:sp>
+      <p:sp>
+        <p:nvSpPr>
+          <p:cNvPr id="3" name="Объект 2">
+            <a:extLst>
+              <a:ext uri="{FF2B5EF4-FFF2-40B4-BE49-F238E27FC236}">
+                <a16:creationId xmlns:a16="http://schemas.microsoft.com/office/drawing/2014/main" id="{E4991026-8C75-B11E-7CA1-FC201537B395}"/>
+              </a:ext>
+            </a:extLst>
+          </p:cNvPr>
+          <p:cNvSpPr>
+            <a:spLocks noGrp="1"/>
+          </p:cNvSpPr>
+          <p:nvPr>
+            <p:ph idx="1"/>
+          </p:nvPr>
+        </p:nvSpPr>
+        <p:spPr/>
+        <p:txBody>
+          <a:bodyPr>
+            <a:normAutofit/>
+          </a:bodyPr>
+          <a:lstStyle/>
+          <a:p>
+            <a:pPr marL="0" indent="0" rtl="0">
+              <a:buNone/>
+            </a:pPr>
+            <a:r>
+              <a:rPr lang="ru-RU" sz="2000" b="1" dirty="0">
+                <a:effectLst/>
+                <a:latin typeface="Times New Roman" panose="02020603050405020304" pitchFamily="18" charset="0"/>
+                <a:cs typeface="Times New Roman" panose="02020603050405020304" pitchFamily="18" charset="0"/>
+              </a:rPr>
+              <a:t>Объект исследования:</a:t>
+            </a:r>
+            <a:r>
+              <a:rPr lang="ru-RU" sz="2000" dirty="0">
+                <a:effectLst/>
+                <a:latin typeface="Times New Roman" panose="02020603050405020304" pitchFamily="18" charset="0"/>
+                <a:cs typeface="Times New Roman" panose="02020603050405020304" pitchFamily="18" charset="0"/>
+              </a:rPr>
+              <a:t> алгоритмы сортировки</a:t>
+            </a:r>
+            <a:r>
+              <a:rPr lang="en-US" sz="2000" dirty="0">
+                <a:effectLst/>
+                <a:latin typeface="Times New Roman" panose="02020603050405020304" pitchFamily="18" charset="0"/>
+                <a:cs typeface="Times New Roman" panose="02020603050405020304" pitchFamily="18" charset="0"/>
+              </a:rPr>
+              <a:t> </a:t>
+            </a:r>
+            <a:r>
+              <a:rPr lang="ru-RU" sz="2000" dirty="0">
+                <a:latin typeface="Times New Roman" panose="02020603050405020304" pitchFamily="18" charset="0"/>
+                <a:cs typeface="Times New Roman" panose="02020603050405020304" pitchFamily="18" charset="0"/>
+              </a:rPr>
+              <a:t>и другие алгоритмы парадигмы </a:t>
+            </a:r>
+            <a:r>
+              <a:rPr lang="en-US" sz="2000" dirty="0">
+                <a:latin typeface="Times New Roman" panose="02020603050405020304" pitchFamily="18" charset="0"/>
+                <a:cs typeface="Times New Roman" panose="02020603050405020304" pitchFamily="18" charset="0"/>
+              </a:rPr>
+              <a:t>“</a:t>
+            </a:r>
+            <a:r>
+              <a:rPr lang="ru-RU" sz="2000" dirty="0">
+                <a:latin typeface="Times New Roman" panose="02020603050405020304" pitchFamily="18" charset="0"/>
+                <a:cs typeface="Times New Roman" panose="02020603050405020304" pitchFamily="18" charset="0"/>
+              </a:rPr>
+              <a:t>разделяй и властвуй</a:t>
+            </a:r>
+            <a:r>
+              <a:rPr lang="en-US" sz="2000" dirty="0">
+                <a:latin typeface="Times New Roman" panose="02020603050405020304" pitchFamily="18" charset="0"/>
+                <a:cs typeface="Times New Roman" panose="02020603050405020304" pitchFamily="18" charset="0"/>
+              </a:rPr>
+              <a:t>”</a:t>
+            </a:r>
+            <a:endParaRPr lang="ru-RU" sz="2000" dirty="0">
+              <a:latin typeface="Times New Roman" panose="02020603050405020304" pitchFamily="18" charset="0"/>
+              <a:cs typeface="Times New Roman" panose="02020603050405020304" pitchFamily="18" charset="0"/>
+            </a:endParaRPr>
+          </a:p>
+          <a:p>
+            <a:pPr marL="0" indent="0" rtl="0">
+              <a:buNone/>
+            </a:pPr>
+            <a:r>
+              <a:rPr lang="ru-RU" sz="2000" b="1" dirty="0">
+                <a:effectLst/>
+                <a:latin typeface="Times New Roman" panose="02020603050405020304" pitchFamily="18" charset="0"/>
+                <a:cs typeface="Times New Roman" panose="02020603050405020304" pitchFamily="18" charset="0"/>
+              </a:rPr>
+              <a:t>Предмет исследования:</a:t>
+            </a:r>
+            <a:r>
+              <a:rPr lang="ru-RU" sz="2000" dirty="0">
+                <a:effectLst/>
+                <a:latin typeface="Times New Roman" panose="02020603050405020304" pitchFamily="18" charset="0"/>
+                <a:cs typeface="Times New Roman" panose="02020603050405020304" pitchFamily="18" charset="0"/>
+              </a:rPr>
+              <a:t> методы асимптотического анализа сложности алгоритмов сортировки на основе рекуррентных соотношений.</a:t>
+            </a:r>
+            <a:endParaRPr lang="ru-RU" sz="2000" dirty="0">
+              <a:latin typeface="Times New Roman" panose="02020603050405020304" pitchFamily="18" charset="0"/>
+              <a:cs typeface="Times New Roman" panose="02020603050405020304" pitchFamily="18" charset="0"/>
+            </a:endParaRPr>
+          </a:p>
+          <a:p>
+            <a:pPr marL="0" indent="0" rtl="0">
+              <a:buNone/>
+            </a:pPr>
+            <a:r>
+              <a:rPr lang="ru-RU" sz="2000" dirty="0">
+                <a:effectLst/>
+                <a:latin typeface="Times New Roman" panose="02020603050405020304" pitchFamily="18" charset="0"/>
+                <a:cs typeface="Times New Roman" panose="02020603050405020304" pitchFamily="18" charset="0"/>
+              </a:rPr>
+              <a:t>В работе рассматриваются:</a:t>
+            </a:r>
+            <a:endParaRPr lang="ru-RU" sz="2000" dirty="0">
+              <a:latin typeface="Times New Roman" panose="02020603050405020304" pitchFamily="18" charset="0"/>
+              <a:cs typeface="Times New Roman" panose="02020603050405020304" pitchFamily="18" charset="0"/>
+            </a:endParaRPr>
+          </a:p>
+          <a:p>
+            <a:pPr rtl="0">
+              <a:buFont typeface="Arial" panose="020B0604020202020204" pitchFamily="34" charset="0"/>
+              <a:buChar char="•"/>
+            </a:pPr>
+            <a:r>
+              <a:rPr lang="ru-RU" sz="2000" dirty="0">
+                <a:effectLst/>
+                <a:latin typeface="Times New Roman" panose="02020603050405020304" pitchFamily="18" charset="0"/>
+                <a:cs typeface="Times New Roman" panose="02020603050405020304" pitchFamily="18" charset="0"/>
+              </a:rPr>
+              <a:t>сортировка Бэтчера;</a:t>
+            </a:r>
+            <a:endParaRPr lang="ru-RU" sz="2000" dirty="0">
+              <a:latin typeface="Times New Roman" panose="02020603050405020304" pitchFamily="18" charset="0"/>
+              <a:cs typeface="Times New Roman" panose="02020603050405020304" pitchFamily="18" charset="0"/>
+            </a:endParaRPr>
+          </a:p>
+          <a:p>
+            <a:pPr rtl="0">
+              <a:buFont typeface="Arial" panose="020B0604020202020204" pitchFamily="34" charset="0"/>
+              <a:buChar char="•"/>
+            </a:pPr>
+            <a:r>
+              <a:rPr lang="ru-RU" sz="2000" dirty="0">
+                <a:effectLst/>
+                <a:latin typeface="Times New Roman" panose="02020603050405020304" pitchFamily="18" charset="0"/>
+                <a:cs typeface="Times New Roman" panose="02020603050405020304" pitchFamily="18" charset="0"/>
+              </a:rPr>
+              <a:t>классические алгоритмы сортировки;</a:t>
+            </a:r>
+            <a:endParaRPr lang="ru-RU" sz="2000" dirty="0">
+              <a:latin typeface="Times New Roman" panose="02020603050405020304" pitchFamily="18" charset="0"/>
+              <a:cs typeface="Times New Roman" panose="02020603050405020304" pitchFamily="18" charset="0"/>
+            </a:endParaRPr>
+          </a:p>
+          <a:p>
+            <a:pPr rtl="0">
+              <a:buFont typeface="Arial" panose="020B0604020202020204" pitchFamily="34" charset="0"/>
+              <a:buChar char="•"/>
+            </a:pPr>
+            <a:r>
+              <a:rPr lang="ru-RU" sz="2000" dirty="0">
+                <a:effectLst/>
+                <a:latin typeface="Times New Roman" panose="02020603050405020304" pitchFamily="18" charset="0"/>
+                <a:cs typeface="Times New Roman" panose="02020603050405020304" pitchFamily="18" charset="0"/>
+              </a:rPr>
+              <a:t>границы применимости метода рекуррентных соотношений;</a:t>
+            </a:r>
+            <a:endParaRPr lang="ru-RU" sz="2000" dirty="0">
+              <a:latin typeface="Times New Roman" panose="02020603050405020304" pitchFamily="18" charset="0"/>
+              <a:cs typeface="Times New Roman" panose="02020603050405020304" pitchFamily="18" charset="0"/>
+            </a:endParaRPr>
+          </a:p>
+          <a:p>
+            <a:pPr rtl="0">
+              <a:buFont typeface="Arial" panose="020B0604020202020204" pitchFamily="34" charset="0"/>
+              <a:buChar char="•"/>
+            </a:pPr>
+            <a:r>
+              <a:rPr lang="ru-RU" sz="2000" dirty="0">
+                <a:effectLst/>
+                <a:latin typeface="Times New Roman" panose="02020603050405020304" pitchFamily="18" charset="0"/>
+                <a:cs typeface="Times New Roman" panose="02020603050405020304" pitchFamily="18" charset="0"/>
+              </a:rPr>
+              <a:t>экспериментальная проверка теоретических оценок.</a:t>
+            </a:r>
+            <a:endParaRPr lang="ru-RU" sz="2000" dirty="0">
+              <a:latin typeface="Times New Roman" panose="02020603050405020304" pitchFamily="18" charset="0"/>
+              <a:cs typeface="Times New Roman" panose="02020603050405020304" pitchFamily="18" charset="0"/>
+            </a:endParaRPr>
+          </a:p>
+          <a:p>
+            <a:endParaRPr lang="ru-RU" dirty="0"/>
+          </a:p>
+        </p:txBody>
+      </p:sp>
+      <p:sp>
+        <p:nvSpPr>
+          <p:cNvPr id="4" name="Нижний колонтитул 3">
+            <a:extLst>
+              <a:ext uri="{FF2B5EF4-FFF2-40B4-BE49-F238E27FC236}">
+                <a16:creationId xmlns:a16="http://schemas.microsoft.com/office/drawing/2014/main" id="{7A9BB233-74DE-301B-A3CF-DFBEA9BE7D01}"/>
+              </a:ext>
+            </a:extLst>
+          </p:cNvPr>
+          <p:cNvSpPr>
+            <a:spLocks noGrp="1"/>
+          </p:cNvSpPr>
+          <p:nvPr>
+            <p:ph type="ftr" sz="quarter" idx="11"/>
+          </p:nvPr>
+        </p:nvSpPr>
+        <p:spPr/>
+        <p:txBody>
+          <a:bodyPr/>
+          <a:lstStyle/>
+          <a:p>
+            <a:r>
+              <a:rPr lang="ru-RU"/>
+              <a:t>ВКР (б) студента Фамилия Имя Отчетство</a:t>
+            </a:r>
+          </a:p>
+        </p:txBody>
+      </p:sp>
+      <p:sp>
+        <p:nvSpPr>
+          <p:cNvPr id="5" name="Номер слайда 4">
+            <a:extLst>
+              <a:ext uri="{FF2B5EF4-FFF2-40B4-BE49-F238E27FC236}">
+                <a16:creationId xmlns:a16="http://schemas.microsoft.com/office/drawing/2014/main" id="{3566B68E-E61F-85B6-6F68-96C791844579}"/>
+              </a:ext>
+            </a:extLst>
+          </p:cNvPr>
+          <p:cNvSpPr>
+            <a:spLocks noGrp="1"/>
+          </p:cNvSpPr>
+          <p:nvPr>
+            <p:ph type="sldNum" sz="quarter" idx="12"/>
+          </p:nvPr>
+        </p:nvSpPr>
+        <p:spPr/>
+        <p:txBody>
+          <a:bodyPr/>
+          <a:lstStyle/>
+          <a:p>
+            <a:fld id="{2E0151D6-1CE6-4546-836D-2A836D7A7EF2}" type="slidenum">
+              <a:rPr lang="ru-RU" smtClean="0"/>
+              <a:pPr/>
+              <a:t>4</a:t>
+            </a:fld>
+            <a:endParaRPr lang="ru-RU" dirty="0"/>
+          </a:p>
+        </p:txBody>
+      </p:sp>
+    </p:spTree>
+    <p:extLst>
+      <p:ext uri="{BB962C8B-B14F-4D97-AF65-F5344CB8AC3E}">
+        <p14:creationId xmlns:p14="http://schemas.microsoft.com/office/powerpoint/2010/main" val="902737532"/>
+      </p:ext>
+    </p:extLst>
+  </p:cSld>
+  <p:clrMapOvr>
+    <a:masterClrMapping/>
+  </p:clrMapOvr>
+</p:sld>
+</file>
+
+<file path=ppt/slides/slide5.xml><?xml version="1.0" encoding="utf-8"?>
 <p:sld xmlns:a="http://schemas.openxmlformats.org/drawingml/2006/main" xmlns:r="http://schemas.openxmlformats.org/officeDocument/2006/relationships" xmlns:p="http://schemas.openxmlformats.org/presentationml/2006/main">
   <p:cSld>
     <p:spTree>
@@ -12449,7 +12861,7 @@
             <a:fld id="{2E0151D6-1CE6-4546-836D-2A836D7A7EF2}" type="slidenum">
               <a:rPr lang="ru-RU" smtClean="0"/>
               <a:pPr/>
-              <a:t>4</a:t>
+              <a:t>5</a:t>
             </a:fld>
             <a:endParaRPr lang="ru-RU" dirty="0"/>
           </a:p>
@@ -12468,7 +12880,7 @@
 </p:sld>
 </file>
 
-<file path=ppt/slides/slide5.xml><?xml version="1.0" encoding="utf-8"?>
+<file path=ppt/slides/slide6.xml><?xml version="1.0" encoding="utf-8"?>
 <p:sld xmlns:a="http://schemas.openxmlformats.org/drawingml/2006/main" xmlns:r="http://schemas.openxmlformats.org/officeDocument/2006/relationships" xmlns:p="http://schemas.openxmlformats.org/presentationml/2006/main">
   <p:cSld>
     <p:spTree>
@@ -13751,7 +14163,7 @@
             <a:fld id="{2E0151D6-1CE6-4546-836D-2A836D7A7EF2}" type="slidenum">
               <a:rPr lang="ru-RU" smtClean="0"/>
               <a:pPr/>
-              <a:t>5</a:t>
+              <a:t>6</a:t>
             </a:fld>
             <a:endParaRPr lang="ru-RU" dirty="0"/>
           </a:p>
@@ -13770,7 +14182,7 @@
 </p:sld>
 </file>
 
-<file path=ppt/slides/slide6.xml><?xml version="1.0" encoding="utf-8"?>
+<file path=ppt/slides/slide7.xml><?xml version="1.0" encoding="utf-8"?>
 <p:sld xmlns:a="http://schemas.openxmlformats.org/drawingml/2006/main" xmlns:r="http://schemas.openxmlformats.org/officeDocument/2006/relationships" xmlns:p="http://schemas.openxmlformats.org/presentationml/2006/main">
   <p:cSld>
     <p:spTree>
@@ -14180,7 +14592,7 @@
             <a:fld id="{2E0151D6-1CE6-4546-836D-2A836D7A7EF2}" type="slidenum">
               <a:rPr lang="ru-RU" smtClean="0"/>
               <a:pPr/>
-              <a:t>6</a:t>
+              <a:t>7</a:t>
             </a:fld>
             <a:endParaRPr lang="ru-RU" dirty="0"/>
           </a:p>
@@ -14199,7 +14611,7 @@
 </p:sld>
 </file>
 
-<file path=ppt/slides/slide7.xml><?xml version="1.0" encoding="utf-8"?>
+<file path=ppt/slides/slide8.xml><?xml version="1.0" encoding="utf-8"?>
 <p:sld xmlns:a="http://schemas.openxmlformats.org/drawingml/2006/main" xmlns:r="http://schemas.openxmlformats.org/officeDocument/2006/relationships" xmlns:p="http://schemas.openxmlformats.org/presentationml/2006/main">
   <p:cSld>
     <p:spTree>
@@ -15673,7 +16085,7 @@
             <a:fld id="{2E0151D6-1CE6-4546-836D-2A836D7A7EF2}" type="slidenum">
               <a:rPr lang="ru-RU" smtClean="0"/>
               <a:pPr/>
-              <a:t>7</a:t>
+              <a:t>8</a:t>
             </a:fld>
             <a:endParaRPr lang="ru-RU" dirty="0"/>
           </a:p>
@@ -15692,7 +16104,7 @@
 </p:sld>
 </file>
 
-<file path=ppt/slides/slide8.xml><?xml version="1.0" encoding="utf-8"?>
+<file path=ppt/slides/slide9.xml><?xml version="1.0" encoding="utf-8"?>
 <p:sld xmlns:a="http://schemas.openxmlformats.org/drawingml/2006/main" xmlns:r="http://schemas.openxmlformats.org/officeDocument/2006/relationships" xmlns:p="http://schemas.openxmlformats.org/presentationml/2006/main">
   <p:cSld>
     <p:spTree>
@@ -15732,7 +16144,7 @@
           <a:p>
             <a:r>
               <a:rPr lang="ru-RU" dirty="0"/>
-              <a:t>Необходимые условия применимости (разд. 2.3.1 ВКР)</a:t>
+              <a:t>Необходимые условия применимости</a:t>
             </a:r>
           </a:p>
         </p:txBody>
@@ -16326,7 +16738,7 @@
             <a:fld id="{2E0151D6-1CE6-4546-836D-2A836D7A7EF2}" type="slidenum">
               <a:rPr lang="ru-RU" smtClean="0"/>
               <a:pPr/>
-              <a:t>8</a:t>
+              <a:t>9</a:t>
             </a:fld>
             <a:endParaRPr lang="ru-RU" dirty="0"/>
           </a:p>
@@ -16336,723 +16748,6 @@
     <p:extLst>
       <p:ext uri="{BB962C8B-B14F-4D97-AF65-F5344CB8AC3E}">
         <p14:creationId xmlns:p14="http://schemas.microsoft.com/office/powerpoint/2010/main" val="2560375117"/>
-      </p:ext>
-    </p:extLst>
-  </p:cSld>
-  <p:clrMapOvr>
-    <a:masterClrMapping/>
-  </p:clrMapOvr>
-</p:sld>
-</file>
-
-<file path=ppt/slides/slide9.xml><?xml version="1.0" encoding="utf-8"?>
-<p:sld xmlns:a="http://schemas.openxmlformats.org/drawingml/2006/main" xmlns:r="http://schemas.openxmlformats.org/officeDocument/2006/relationships" xmlns:p="http://schemas.openxmlformats.org/presentationml/2006/main">
-  <p:cSld>
-    <p:spTree>
-      <p:nvGrpSpPr>
-        <p:cNvPr id="1" name=""/>
-        <p:cNvGrpSpPr/>
-        <p:nvPr/>
-      </p:nvGrpSpPr>
-      <p:grpSpPr>
-        <a:xfrm>
-          <a:off x="0" y="0"/>
-          <a:ext cx="0" cy="0"/>
-          <a:chOff x="0" y="0"/>
-          <a:chExt cx="0" cy="0"/>
-        </a:xfrm>
-      </p:grpSpPr>
-      <p:sp>
-        <p:nvSpPr>
-          <p:cNvPr id="2" name="Заголовок 1">
-            <a:extLst>
-              <a:ext uri="{FF2B5EF4-FFF2-40B4-BE49-F238E27FC236}">
-                <a16:creationId xmlns:a16="http://schemas.microsoft.com/office/drawing/2014/main" id="{F550BDBA-10BF-9E23-929C-C568EAFDDA98}"/>
-              </a:ext>
-            </a:extLst>
-          </p:cNvPr>
-          <p:cNvSpPr>
-            <a:spLocks noGrp="1"/>
-          </p:cNvSpPr>
-          <p:nvPr>
-            <p:ph type="title"/>
-          </p:nvPr>
-        </p:nvSpPr>
-        <p:spPr>
-          <a:xfrm>
-            <a:off x="859746" y="365125"/>
-            <a:ext cx="10515600" cy="1325563"/>
-          </a:xfrm>
-        </p:spPr>
-        <p:txBody>
-          <a:bodyPr/>
-          <a:lstStyle/>
-          <a:p>
-            <a:r>
-              <a:rPr lang="ru-RU" dirty="0"/>
-              <a:t>Соответствие классических сортировок условиям A–C</a:t>
-            </a:r>
-          </a:p>
-        </p:txBody>
-      </p:sp>
-      <p:sp>
-        <p:nvSpPr>
-          <p:cNvPr id="4" name="Нижний колонтитул 3">
-            <a:extLst>
-              <a:ext uri="{FF2B5EF4-FFF2-40B4-BE49-F238E27FC236}">
-                <a16:creationId xmlns:a16="http://schemas.microsoft.com/office/drawing/2014/main" id="{5925DB78-19D7-65BE-0456-469E827F2B66}"/>
-              </a:ext>
-            </a:extLst>
-          </p:cNvPr>
-          <p:cNvSpPr>
-            <a:spLocks noGrp="1"/>
-          </p:cNvSpPr>
-          <p:nvPr>
-            <p:ph type="ftr" sz="quarter" idx="11"/>
-          </p:nvPr>
-        </p:nvSpPr>
-        <p:spPr/>
-        <p:txBody>
-          <a:bodyPr/>
-          <a:lstStyle/>
-          <a:p>
-            <a:r>
-              <a:rPr lang="ru-RU" dirty="0"/>
-              <a:t>ВКР (м) студента Муханова Дмитрия Ильича</a:t>
-            </a:r>
-          </a:p>
-        </p:txBody>
-      </p:sp>
-      <p:sp>
-        <p:nvSpPr>
-          <p:cNvPr id="5" name="Номер слайда 4">
-            <a:extLst>
-              <a:ext uri="{FF2B5EF4-FFF2-40B4-BE49-F238E27FC236}">
-                <a16:creationId xmlns:a16="http://schemas.microsoft.com/office/drawing/2014/main" id="{4F14D21B-6418-AB2B-D943-6DAD1BB04F34}"/>
-              </a:ext>
-            </a:extLst>
-          </p:cNvPr>
-          <p:cNvSpPr>
-            <a:spLocks noGrp="1"/>
-          </p:cNvSpPr>
-          <p:nvPr>
-            <p:ph type="sldNum" sz="quarter" idx="12"/>
-          </p:nvPr>
-        </p:nvSpPr>
-        <p:spPr/>
-        <p:txBody>
-          <a:bodyPr/>
-          <a:lstStyle/>
-          <a:p>
-            <a:fld id="{2E0151D6-1CE6-4546-836D-2A836D7A7EF2}" type="slidenum">
-              <a:rPr lang="ru-RU" smtClean="0"/>
-              <a:pPr/>
-              <a:t>9</a:t>
-            </a:fld>
-            <a:endParaRPr lang="ru-RU" dirty="0"/>
-          </a:p>
-        </p:txBody>
-      </p:sp>
-      <mc:AlternateContent xmlns:mc="http://schemas.openxmlformats.org/markup-compatibility/2006" xmlns:a14="http://schemas.microsoft.com/office/drawing/2010/main">
-        <mc:Choice Requires="a14">
-          <p:sp>
-            <p:nvSpPr>
-              <p:cNvPr id="6" name="Объект 5">
-                <a:extLst>
-                  <a:ext uri="{FF2B5EF4-FFF2-40B4-BE49-F238E27FC236}">
-                    <a16:creationId xmlns:a16="http://schemas.microsoft.com/office/drawing/2014/main" id="{F2447BDF-697A-A416-9F2A-D64868F46B68}"/>
-                  </a:ext>
-                </a:extLst>
-              </p:cNvPr>
-              <p:cNvSpPr>
-                <a:spLocks noGrp="1"/>
-              </p:cNvSpPr>
-              <p:nvPr>
-                <p:ph idx="1"/>
-              </p:nvPr>
-            </p:nvSpPr>
-            <p:spPr/>
-            <p:txBody>
-              <a:bodyPr>
-                <a:normAutofit fontScale="92500" lnSpcReduction="20000"/>
-              </a:bodyPr>
-              <a:lstStyle/>
-              <a:p>
-                <a:pPr marL="0" indent="0" rtl="0">
-                  <a:lnSpc>
-                    <a:spcPct val="150000"/>
-                  </a:lnSpc>
-                  <a:buNone/>
-                </a:pPr>
-                <a:r>
-                  <a:rPr lang="ru-RU" sz="1900" dirty="0">
-                    <a:effectLst/>
-                    <a:latin typeface="Times New Roman" panose="02020603050405020304" pitchFamily="18" charset="0"/>
-                    <a:cs typeface="Times New Roman" panose="02020603050405020304" pitchFamily="18" charset="0"/>
-                  </a:rPr>
-                  <a:t>Подходят напрямую</a:t>
-                </a:r>
-                <a:r>
-                  <a:rPr lang="en-US" sz="1900" dirty="0">
-                    <a:effectLst/>
-                    <a:latin typeface="Times New Roman" panose="02020603050405020304" pitchFamily="18" charset="0"/>
-                    <a:cs typeface="Times New Roman" panose="02020603050405020304" pitchFamily="18" charset="0"/>
-                  </a:rPr>
-                  <a:t>:</a:t>
-                </a:r>
-                <a:endParaRPr lang="ru-RU" sz="1900" dirty="0">
-                  <a:latin typeface="Times New Roman" panose="02020603050405020304" pitchFamily="18" charset="0"/>
-                  <a:cs typeface="Times New Roman" panose="02020603050405020304" pitchFamily="18" charset="0"/>
-                </a:endParaRPr>
-              </a:p>
-              <a:p>
-                <a:pPr rtl="0">
-                  <a:lnSpc>
-                    <a:spcPct val="150000"/>
-                  </a:lnSpc>
-                  <a:buFont typeface="Arial" panose="020B0604020202020204" pitchFamily="34" charset="0"/>
-                  <a:buChar char="•"/>
-                </a:pPr>
-                <a:r>
-                  <a:rPr lang="en-US" sz="1900" dirty="0">
-                    <a:effectLst/>
-                    <a:latin typeface="Times New Roman" panose="02020603050405020304" pitchFamily="18" charset="0"/>
-                    <a:cs typeface="Times New Roman" panose="02020603050405020304" pitchFamily="18" charset="0"/>
-                  </a:rPr>
-                  <a:t>C</a:t>
-                </a:r>
-                <a:r>
-                  <a:rPr lang="ru-RU" sz="1900" dirty="0" err="1">
-                    <a:latin typeface="Times New Roman" panose="02020603050405020304" pitchFamily="18" charset="0"/>
-                    <a:cs typeface="Times New Roman" panose="02020603050405020304" pitchFamily="18" charset="0"/>
-                  </a:rPr>
-                  <a:t>ортировка</a:t>
-                </a:r>
-                <a:r>
-                  <a:rPr lang="ru-RU" sz="1900" dirty="0">
-                    <a:latin typeface="Times New Roman" panose="02020603050405020304" pitchFamily="18" charset="0"/>
-                    <a:cs typeface="Times New Roman" panose="02020603050405020304" pitchFamily="18" charset="0"/>
-                  </a:rPr>
-                  <a:t> </a:t>
-                </a:r>
-                <a:r>
-                  <a:rPr lang="ru-RU" sz="1900" dirty="0">
-                    <a:effectLst/>
-                    <a:latin typeface="Times New Roman" panose="02020603050405020304" pitchFamily="18" charset="0"/>
-                    <a:cs typeface="Times New Roman" panose="02020603050405020304" pitchFamily="18" charset="0"/>
-                  </a:rPr>
-                  <a:t>Бэтчер</a:t>
-                </a:r>
-                <a:r>
-                  <a:rPr lang="ru-RU" sz="1900" dirty="0">
-                    <a:latin typeface="Times New Roman" panose="02020603050405020304" pitchFamily="18" charset="0"/>
-                    <a:cs typeface="Times New Roman" panose="02020603050405020304" pitchFamily="18" charset="0"/>
-                  </a:rPr>
-                  <a:t>а</a:t>
-                </a:r>
-                <a:r>
-                  <a:rPr lang="ru-RU" sz="1900" dirty="0">
-                    <a:effectLst/>
-                    <a:latin typeface="Times New Roman" panose="02020603050405020304" pitchFamily="18" charset="0"/>
-                    <a:cs typeface="Times New Roman" panose="02020603050405020304" pitchFamily="18" charset="0"/>
-                  </a:rPr>
-                  <a:t> — фиксированные подзадачи </a:t>
-                </a:r>
-                <a:r>
-                  <a:rPr lang="ru-RU" sz="1900" dirty="0">
-                    <a:latin typeface="Times New Roman" panose="02020603050405020304" pitchFamily="18" charset="0"/>
-                    <a:cs typeface="Times New Roman" panose="02020603050405020304" pitchFamily="18" charset="0"/>
-                  </a:rPr>
-                  <a:t>размера</a:t>
-                </a:r>
-                <a:r>
-                  <a:rPr lang="ru-RU" sz="1900" dirty="0">
-                    <a:effectLst/>
-                    <a:latin typeface="Times New Roman" panose="02020603050405020304" pitchFamily="18" charset="0"/>
-                    <a:cs typeface="Times New Roman" panose="02020603050405020304" pitchFamily="18" charset="0"/>
-                  </a:rPr>
-                  <a:t> </a:t>
-                </a:r>
-                <a14:m>
-                  <m:oMath xmlns:m="http://schemas.openxmlformats.org/officeDocument/2006/math">
-                    <m:f>
-                      <m:fPr>
-                        <m:ctrlPr>
-                          <a:rPr lang="en-US" sz="1900" i="1" dirty="0" smtClean="0">
-                            <a:latin typeface="Cambria Math" panose="02040503050406030204" pitchFamily="18" charset="0"/>
-                            <a:cs typeface="Times New Roman" panose="02020603050405020304" pitchFamily="18" charset="0"/>
-                          </a:rPr>
-                        </m:ctrlPr>
-                      </m:fPr>
-                      <m:num>
-                        <m:r>
-                          <a:rPr lang="en-US" sz="1900" i="1" dirty="0" smtClean="0">
-                            <a:latin typeface="Cambria Math" panose="02040503050406030204" pitchFamily="18" charset="0"/>
-                            <a:cs typeface="Times New Roman" panose="02020603050405020304" pitchFamily="18" charset="0"/>
-                          </a:rPr>
-                          <m:t>𝑛</m:t>
-                        </m:r>
-                      </m:num>
-                      <m:den>
-                        <m:r>
-                          <a:rPr lang="en-US" sz="1900" i="1" dirty="0" smtClean="0">
-                            <a:latin typeface="Cambria Math" panose="02040503050406030204" pitchFamily="18" charset="0"/>
-                            <a:cs typeface="Times New Roman" panose="02020603050405020304" pitchFamily="18" charset="0"/>
-                          </a:rPr>
-                          <m:t>2</m:t>
-                        </m:r>
-                      </m:den>
-                    </m:f>
-                  </m:oMath>
-                </a14:m>
-                <a:r>
-                  <a:rPr lang="en-US" sz="1900" dirty="0">
-                    <a:effectLst/>
-                    <a:latin typeface="Times New Roman" panose="02020603050405020304" pitchFamily="18" charset="0"/>
-                    <a:cs typeface="Times New Roman" panose="02020603050405020304" pitchFamily="18" charset="0"/>
-                  </a:rPr>
-                  <a:t>, </a:t>
-                </a:r>
-                <a:r>
-                  <a:rPr lang="ru-RU" sz="1900" dirty="0">
-                    <a:effectLst/>
-                    <a:latin typeface="Times New Roman" panose="02020603050405020304" pitchFamily="18" charset="0"/>
-                    <a:cs typeface="Times New Roman" panose="02020603050405020304" pitchFamily="18" charset="0"/>
-                  </a:rPr>
-                  <a:t>явное слияние.</a:t>
-                </a:r>
-                <a:endParaRPr lang="ru-RU" sz="1900" dirty="0">
-                  <a:latin typeface="Times New Roman" panose="02020603050405020304" pitchFamily="18" charset="0"/>
-                  <a:cs typeface="Times New Roman" panose="02020603050405020304" pitchFamily="18" charset="0"/>
-                </a:endParaRPr>
-              </a:p>
-              <a:p>
-                <a:pPr rtl="0">
-                  <a:lnSpc>
-                    <a:spcPct val="150000"/>
-                  </a:lnSpc>
-                  <a:buFont typeface="Arial" panose="020B0604020202020204" pitchFamily="34" charset="0"/>
-                  <a:buChar char="•"/>
-                </a:pPr>
-                <a:r>
-                  <a:rPr lang="en-US" sz="1900" dirty="0">
-                    <a:effectLst/>
-                    <a:latin typeface="Times New Roman" panose="02020603050405020304" pitchFamily="18" charset="0"/>
-                    <a:cs typeface="Times New Roman" panose="02020603050405020304" pitchFamily="18" charset="0"/>
-                  </a:rPr>
-                  <a:t>Merge Sort — </a:t>
-                </a:r>
-                <a:r>
-                  <a:rPr lang="ru-RU" sz="1900" dirty="0">
-                    <a:effectLst/>
-                    <a:latin typeface="Times New Roman" panose="02020603050405020304" pitchFamily="18" charset="0"/>
-                    <a:cs typeface="Times New Roman" panose="02020603050405020304" pitchFamily="18" charset="0"/>
-                  </a:rPr>
-                  <a:t>две половины </a:t>
-                </a:r>
-                <a14:m>
-                  <m:oMath xmlns:m="http://schemas.openxmlformats.org/officeDocument/2006/math">
-                    <m:f>
-                      <m:fPr>
-                        <m:ctrlPr>
-                          <a:rPr lang="en-US" sz="1900" i="1" dirty="0" smtClean="0">
-                            <a:latin typeface="Cambria Math" panose="02040503050406030204" pitchFamily="18" charset="0"/>
-                            <a:cs typeface="Times New Roman" panose="02020603050405020304" pitchFamily="18" charset="0"/>
-                          </a:rPr>
-                        </m:ctrlPr>
-                      </m:fPr>
-                      <m:num>
-                        <m:r>
-                          <a:rPr lang="en-US" sz="1900" i="1" dirty="0" smtClean="0">
-                            <a:latin typeface="Cambria Math" panose="02040503050406030204" pitchFamily="18" charset="0"/>
-                            <a:cs typeface="Times New Roman" panose="02020603050405020304" pitchFamily="18" charset="0"/>
-                          </a:rPr>
-                          <m:t>𝑛</m:t>
-                        </m:r>
-                      </m:num>
-                      <m:den>
-                        <m:r>
-                          <a:rPr lang="en-US" sz="1900" i="1" dirty="0" smtClean="0">
-                            <a:latin typeface="Cambria Math" panose="02040503050406030204" pitchFamily="18" charset="0"/>
-                            <a:cs typeface="Times New Roman" panose="02020603050405020304" pitchFamily="18" charset="0"/>
-                          </a:rPr>
-                          <m:t>2</m:t>
-                        </m:r>
-                      </m:den>
-                    </m:f>
-                  </m:oMath>
-                </a14:m>
-                <a:r>
-                  <a:rPr lang="en-US" sz="1900" dirty="0">
-                    <a:effectLst/>
-                    <a:latin typeface="Times New Roman" panose="02020603050405020304" pitchFamily="18" charset="0"/>
-                    <a:cs typeface="Times New Roman" panose="02020603050405020304" pitchFamily="18" charset="0"/>
-                  </a:rPr>
-                  <a:t>, </a:t>
-                </a:r>
-                <a:r>
-                  <a:rPr lang="ru-RU" sz="1900" dirty="0">
-                    <a:effectLst/>
-                    <a:latin typeface="Times New Roman" panose="02020603050405020304" pitchFamily="18" charset="0"/>
-                    <a:cs typeface="Times New Roman" panose="02020603050405020304" pitchFamily="18" charset="0"/>
-                  </a:rPr>
-                  <a:t>линейное слияние.</a:t>
-                </a:r>
-                <a:endParaRPr lang="ru-RU" sz="1900" dirty="0">
-                  <a:latin typeface="Times New Roman" panose="02020603050405020304" pitchFamily="18" charset="0"/>
-                  <a:cs typeface="Times New Roman" panose="02020603050405020304" pitchFamily="18" charset="0"/>
-                </a:endParaRPr>
-              </a:p>
-              <a:p>
-                <a:pPr rtl="0">
-                  <a:lnSpc>
-                    <a:spcPct val="150000"/>
-                  </a:lnSpc>
-                  <a:buFont typeface="Arial" panose="020B0604020202020204" pitchFamily="34" charset="0"/>
-                  <a:buChar char="•"/>
-                </a:pPr>
-                <a:r>
-                  <a:rPr lang="en-US" sz="1900" dirty="0" err="1">
-                    <a:effectLst/>
-                    <a:latin typeface="Times New Roman" panose="02020603050405020304" pitchFamily="18" charset="0"/>
-                    <a:cs typeface="Times New Roman" panose="02020603050405020304" pitchFamily="18" charset="0"/>
-                  </a:rPr>
-                  <a:t>Bitonic</a:t>
-                </a:r>
-                <a:r>
-                  <a:rPr lang="en-US" sz="1900" dirty="0">
-                    <a:effectLst/>
-                    <a:latin typeface="Times New Roman" panose="02020603050405020304" pitchFamily="18" charset="0"/>
-                    <a:cs typeface="Times New Roman" panose="02020603050405020304" pitchFamily="18" charset="0"/>
-                  </a:rPr>
-                  <a:t> Sort — </a:t>
-                </a:r>
-                <a:r>
-                  <a:rPr lang="ru-RU" sz="1900" dirty="0">
-                    <a:effectLst/>
-                    <a:latin typeface="Times New Roman" panose="02020603050405020304" pitchFamily="18" charset="0"/>
-                    <a:cs typeface="Times New Roman" panose="02020603050405020304" pitchFamily="18" charset="0"/>
-                  </a:rPr>
-                  <a:t>рекурсивная сортировочная сеть.</a:t>
-                </a:r>
-                <a:endParaRPr lang="ru-RU" sz="1900" dirty="0">
-                  <a:latin typeface="Times New Roman" panose="02020603050405020304" pitchFamily="18" charset="0"/>
-                  <a:cs typeface="Times New Roman" panose="02020603050405020304" pitchFamily="18" charset="0"/>
-                </a:endParaRPr>
-              </a:p>
-              <a:p>
-                <a:pPr rtl="0">
-                  <a:lnSpc>
-                    <a:spcPct val="150000"/>
-                  </a:lnSpc>
-                  <a:buFont typeface="Arial" panose="020B0604020202020204" pitchFamily="34" charset="0"/>
-                  <a:buChar char="•"/>
-                </a:pPr>
-                <a:r>
-                  <a:rPr lang="en-US" sz="1900" dirty="0">
-                    <a:effectLst/>
-                    <a:latin typeface="Times New Roman" panose="02020603050405020304" pitchFamily="18" charset="0"/>
-                    <a:cs typeface="Times New Roman" panose="02020603050405020304" pitchFamily="18" charset="0"/>
-                  </a:rPr>
-                  <a:t>Quick Sort, </a:t>
-                </a:r>
-                <a:r>
-                  <a:rPr lang="ru-RU" sz="1900" dirty="0">
-                    <a:effectLst/>
-                    <a:latin typeface="Times New Roman" panose="02020603050405020304" pitchFamily="18" charset="0"/>
-                    <a:cs typeface="Times New Roman" panose="02020603050405020304" pitchFamily="18" charset="0"/>
-                  </a:rPr>
-                  <a:t>лучший случай — разбиение пополам.</a:t>
-                </a:r>
-                <a:endParaRPr lang="ru-RU" sz="1900" dirty="0">
-                  <a:latin typeface="Times New Roman" panose="02020603050405020304" pitchFamily="18" charset="0"/>
-                  <a:cs typeface="Times New Roman" panose="02020603050405020304" pitchFamily="18" charset="0"/>
-                </a:endParaRPr>
-              </a:p>
-              <a:p>
-                <a:pPr rtl="0">
-                  <a:lnSpc>
-                    <a:spcPct val="150000"/>
-                  </a:lnSpc>
-                  <a:buFont typeface="Arial" panose="020B0604020202020204" pitchFamily="34" charset="0"/>
-                  <a:buChar char="•"/>
-                </a:pPr>
-                <a:r>
-                  <a:rPr lang="en-US" sz="1900" dirty="0">
-                    <a:effectLst/>
-                    <a:latin typeface="Times New Roman" panose="02020603050405020304" pitchFamily="18" charset="0"/>
-                    <a:cs typeface="Times New Roman" panose="02020603050405020304" pitchFamily="18" charset="0"/>
-                  </a:rPr>
-                  <a:t>Quick Sort, </a:t>
-                </a:r>
-                <a:r>
-                  <a:rPr lang="ru-RU" sz="1900" dirty="0">
-                    <a:effectLst/>
-                    <a:latin typeface="Times New Roman" panose="02020603050405020304" pitchFamily="18" charset="0"/>
-                    <a:cs typeface="Times New Roman" panose="02020603050405020304" pitchFamily="18" charset="0"/>
-                  </a:rPr>
-                  <a:t>худший случай — подзадача размера </a:t>
-                </a:r>
-                <a14:m>
-                  <m:oMath xmlns:m="http://schemas.openxmlformats.org/officeDocument/2006/math">
-                    <m:r>
-                      <a:rPr lang="en-US" sz="1900" i="1" dirty="0" smtClean="0">
-                        <a:latin typeface="Cambria Math" panose="02040503050406030204" pitchFamily="18" charset="0"/>
-                        <a:cs typeface="Times New Roman" panose="02020603050405020304" pitchFamily="18" charset="0"/>
-                      </a:rPr>
-                      <m:t>𝑛</m:t>
-                    </m:r>
-                    <m:r>
-                      <a:rPr lang="en-US" sz="1900" i="1" dirty="0" smtClean="0">
-                        <a:latin typeface="Cambria Math" panose="02040503050406030204" pitchFamily="18" charset="0"/>
-                        <a:cs typeface="Times New Roman" panose="02020603050405020304" pitchFamily="18" charset="0"/>
-                      </a:rPr>
-                      <m:t>−1</m:t>
-                    </m:r>
-                  </m:oMath>
-                </a14:m>
-                <a:r>
-                  <a:rPr lang="en-US" sz="1900" dirty="0">
-                    <a:effectLst/>
-                    <a:latin typeface="Times New Roman" panose="02020603050405020304" pitchFamily="18" charset="0"/>
-                    <a:cs typeface="Times New Roman" panose="02020603050405020304" pitchFamily="18" charset="0"/>
-                  </a:rPr>
-                  <a:t>.</a:t>
-                </a:r>
-                <a:endParaRPr lang="en-US" sz="1900" dirty="0">
-                  <a:latin typeface="Times New Roman" panose="02020603050405020304" pitchFamily="18" charset="0"/>
-                  <a:cs typeface="Times New Roman" panose="02020603050405020304" pitchFamily="18" charset="0"/>
-                </a:endParaRPr>
-              </a:p>
-              <a:p>
-                <a:pPr marL="0" indent="0">
-                  <a:lnSpc>
-                    <a:spcPct val="150000"/>
-                  </a:lnSpc>
-                  <a:buNone/>
-                </a:pPr>
-                <a:r>
-                  <a:rPr lang="ru-RU" sz="1900" dirty="0">
-                    <a:effectLst/>
-                    <a:latin typeface="Times New Roman" panose="02020603050405020304" pitchFamily="18" charset="0"/>
-                    <a:cs typeface="Times New Roman" panose="02020603050405020304" pitchFamily="18" charset="0"/>
-                  </a:rPr>
-                  <a:t>Формально подходит:</a:t>
-                </a:r>
-              </a:p>
-              <a:p>
-                <a:pPr>
-                  <a:lnSpc>
-                    <a:spcPct val="150000"/>
-                  </a:lnSpc>
-                </a:pPr>
-                <a:r>
-                  <a:rPr lang="ru-RU" sz="1900" dirty="0" err="1">
-                    <a:latin typeface="Times New Roman" panose="02020603050405020304" pitchFamily="18" charset="0"/>
-                    <a:cs typeface="Times New Roman" panose="02020603050405020304" pitchFamily="18" charset="0"/>
-                  </a:rPr>
-                  <a:t>Insertion</a:t>
-                </a:r>
-                <a:r>
-                  <a:rPr lang="ru-RU" sz="1900" dirty="0">
-                    <a:latin typeface="Times New Roman" panose="02020603050405020304" pitchFamily="18" charset="0"/>
-                    <a:cs typeface="Times New Roman" panose="02020603050405020304" pitchFamily="18" charset="0"/>
-                  </a:rPr>
-                  <a:t> </a:t>
-                </a:r>
-                <a:r>
-                  <a:rPr lang="ru-RU" sz="1900" dirty="0" err="1">
-                    <a:latin typeface="Times New Roman" panose="02020603050405020304" pitchFamily="18" charset="0"/>
-                    <a:cs typeface="Times New Roman" panose="02020603050405020304" pitchFamily="18" charset="0"/>
-                  </a:rPr>
-                  <a:t>Sort</a:t>
-                </a:r>
-                <a:r>
-                  <a:rPr lang="en-US" sz="1900" dirty="0">
-                    <a:latin typeface="Times New Roman" panose="02020603050405020304" pitchFamily="18" charset="0"/>
-                    <a:cs typeface="Times New Roman" panose="02020603050405020304" pitchFamily="18" charset="0"/>
-                  </a:rPr>
-                  <a:t>,</a:t>
-                </a:r>
-                <a:r>
-                  <a:rPr lang="ru-RU" sz="1900" dirty="0">
-                    <a:latin typeface="Times New Roman" panose="02020603050405020304" pitchFamily="18" charset="0"/>
-                    <a:cs typeface="Times New Roman" panose="02020603050405020304" pitchFamily="18" charset="0"/>
-                  </a:rPr>
-                  <a:t> так как можно представить рекуррентным соотношением</a:t>
-                </a:r>
-                <a:r>
-                  <a:rPr lang="en-US" sz="1900" dirty="0">
-                    <a:latin typeface="Times New Roman" panose="02020603050405020304" pitchFamily="18" charset="0"/>
-                    <a:cs typeface="Times New Roman" panose="02020603050405020304" pitchFamily="18" charset="0"/>
-                  </a:rPr>
-                  <a:t>:</a:t>
-                </a:r>
-                <a:r>
-                  <a:rPr lang="ru-RU" sz="1900" dirty="0">
-                    <a:latin typeface="Times New Roman" panose="02020603050405020304" pitchFamily="18" charset="0"/>
-                    <a:cs typeface="Times New Roman" panose="02020603050405020304" pitchFamily="18" charset="0"/>
-                  </a:rPr>
-                  <a:t> </a:t>
-                </a:r>
-                <a14:m>
-                  <m:oMath xmlns:m="http://schemas.openxmlformats.org/officeDocument/2006/math">
-                    <m:r>
-                      <a:rPr lang="ru-RU" sz="1900" i="1" dirty="0" smtClean="0">
-                        <a:latin typeface="Cambria Math" panose="02040503050406030204" pitchFamily="18" charset="0"/>
-                        <a:cs typeface="Times New Roman" panose="02020603050405020304" pitchFamily="18" charset="0"/>
-                      </a:rPr>
-                      <m:t>𝑇</m:t>
-                    </m:r>
-                    <m:d>
-                      <m:dPr>
-                        <m:ctrlPr>
-                          <a:rPr lang="ru-RU" sz="1900" i="1" dirty="0" smtClean="0">
-                            <a:latin typeface="Cambria Math" panose="02040503050406030204" pitchFamily="18" charset="0"/>
-                            <a:cs typeface="Times New Roman" panose="02020603050405020304" pitchFamily="18" charset="0"/>
-                          </a:rPr>
-                        </m:ctrlPr>
-                      </m:dPr>
-                      <m:e>
-                        <m:r>
-                          <a:rPr lang="ru-RU" sz="1900" i="1" dirty="0" smtClean="0">
-                            <a:latin typeface="Cambria Math" panose="02040503050406030204" pitchFamily="18" charset="0"/>
-                            <a:cs typeface="Times New Roman" panose="02020603050405020304" pitchFamily="18" charset="0"/>
-                          </a:rPr>
-                          <m:t>𝑛</m:t>
-                        </m:r>
-                      </m:e>
-                    </m:d>
-                    <m:r>
-                      <a:rPr lang="ru-RU" sz="1900" i="1" dirty="0" smtClean="0">
-                        <a:latin typeface="Cambria Math" panose="02040503050406030204" pitchFamily="18" charset="0"/>
-                        <a:cs typeface="Times New Roman" panose="02020603050405020304" pitchFamily="18" charset="0"/>
-                      </a:rPr>
-                      <m:t>=</m:t>
-                    </m:r>
-                    <m:r>
-                      <a:rPr lang="ru-RU" sz="1900" i="1" dirty="0" smtClean="0">
-                        <a:latin typeface="Cambria Math" panose="02040503050406030204" pitchFamily="18" charset="0"/>
-                        <a:cs typeface="Times New Roman" panose="02020603050405020304" pitchFamily="18" charset="0"/>
-                      </a:rPr>
-                      <m:t>𝑇</m:t>
-                    </m:r>
-                    <m:d>
-                      <m:dPr>
-                        <m:ctrlPr>
-                          <a:rPr lang="ru-RU" sz="1900" i="1" dirty="0" smtClean="0">
-                            <a:latin typeface="Cambria Math" panose="02040503050406030204" pitchFamily="18" charset="0"/>
-                            <a:cs typeface="Times New Roman" panose="02020603050405020304" pitchFamily="18" charset="0"/>
-                          </a:rPr>
-                        </m:ctrlPr>
-                      </m:dPr>
-                      <m:e>
-                        <m:r>
-                          <a:rPr lang="ru-RU" sz="1900" i="1" dirty="0" smtClean="0">
-                            <a:latin typeface="Cambria Math" panose="02040503050406030204" pitchFamily="18" charset="0"/>
-                            <a:cs typeface="Times New Roman" panose="02020603050405020304" pitchFamily="18" charset="0"/>
-                          </a:rPr>
-                          <m:t>𝑛</m:t>
-                        </m:r>
-                        <m:r>
-                          <a:rPr lang="ru-RU" sz="1900" i="1" dirty="0" smtClean="0">
-                            <a:latin typeface="Cambria Math" panose="02040503050406030204" pitchFamily="18" charset="0"/>
-                            <a:cs typeface="Times New Roman" panose="02020603050405020304" pitchFamily="18" charset="0"/>
-                          </a:rPr>
-                          <m:t>−1</m:t>
-                        </m:r>
-                      </m:e>
-                    </m:d>
-                    <m:r>
-                      <a:rPr lang="ru-RU" sz="1900" i="1" dirty="0" smtClean="0">
-                        <a:latin typeface="Cambria Math" panose="02040503050406030204" pitchFamily="18" charset="0"/>
-                        <a:cs typeface="Times New Roman" panose="02020603050405020304" pitchFamily="18" charset="0"/>
-                      </a:rPr>
-                      <m:t>+</m:t>
-                    </m:r>
-                    <m:r>
-                      <a:rPr lang="en-US" sz="1900" b="0" i="1" dirty="0" smtClean="0">
-                        <a:latin typeface="Cambria Math" panose="02040503050406030204" pitchFamily="18" charset="0"/>
-                        <a:cs typeface="Times New Roman" panose="02020603050405020304" pitchFamily="18" charset="0"/>
-                      </a:rPr>
-                      <m:t>𝑐</m:t>
-                    </m:r>
-                    <m:r>
-                      <a:rPr lang="en-US" sz="2000" i="1" dirty="0">
-                        <a:latin typeface="Cambria Math" panose="02040503050406030204" pitchFamily="18" charset="0"/>
-                      </a:rPr>
-                      <m:t>·</m:t>
-                    </m:r>
-                    <m:r>
-                      <a:rPr lang="en-US" sz="2000" b="0" i="1" dirty="0" smtClean="0">
-                        <a:latin typeface="Cambria Math" panose="02040503050406030204" pitchFamily="18" charset="0"/>
-                      </a:rPr>
-                      <m:t>𝑛</m:t>
-                    </m:r>
-                  </m:oMath>
-                </a14:m>
-                <a:r>
-                  <a:rPr lang="ru-RU" sz="1900" dirty="0">
-                    <a:latin typeface="Times New Roman" panose="02020603050405020304" pitchFamily="18" charset="0"/>
-                    <a:cs typeface="Times New Roman" panose="02020603050405020304" pitchFamily="18" charset="0"/>
-                  </a:rPr>
-                  <a:t> </a:t>
-                </a:r>
-                <a:r>
-                  <a:rPr lang="ru-RU" dirty="0">
-                    <a:latin typeface="Times New Roman" panose="02020603050405020304" pitchFamily="18" charset="0"/>
-                    <a:cs typeface="Times New Roman" panose="02020603050405020304" pitchFamily="18" charset="0"/>
-                  </a:rPr>
-                  <a:t>. </a:t>
-                </a:r>
-              </a:p>
-            </p:txBody>
-          </p:sp>
-        </mc:Choice>
-        <mc:Fallback xmlns="">
-          <p:sp>
-            <p:nvSpPr>
-              <p:cNvPr id="6" name="Объект 5">
-                <a:extLst>
-                  <a:ext uri="{FF2B5EF4-FFF2-40B4-BE49-F238E27FC236}">
-                    <a16:creationId xmlns:a16="http://schemas.microsoft.com/office/drawing/2014/main" id="{F2447BDF-697A-A416-9F2A-D64868F46B68}"/>
-                  </a:ext>
-                </a:extLst>
-              </p:cNvPr>
-              <p:cNvSpPr>
-                <a:spLocks noGrp="1" noRot="1" noChangeAspect="1" noMove="1" noResize="1" noEditPoints="1" noAdjustHandles="1" noChangeArrowheads="1" noChangeShapeType="1" noTextEdit="1"/>
-              </p:cNvSpPr>
-              <p:nvPr>
-                <p:ph idx="1"/>
-              </p:nvPr>
-            </p:nvSpPr>
-            <p:spPr>
-              <a:blipFill>
-                <a:blip r:embed="rId2"/>
-                <a:stretch>
-                  <a:fillRect l="-603"/>
-                </a:stretch>
-              </a:blipFill>
-            </p:spPr>
-            <p:txBody>
-              <a:bodyPr/>
-              <a:lstStyle/>
-              <a:p>
-                <a:r>
-                  <a:rPr lang="ru-RU">
-                    <a:noFill/>
-                  </a:rPr>
-                  <a:t> </a:t>
-                </a:r>
-              </a:p>
-            </p:txBody>
-          </p:sp>
-        </mc:Fallback>
-      </mc:AlternateContent>
-    </p:spTree>
-    <p:extLst>
-      <p:ext uri="{BB962C8B-B14F-4D97-AF65-F5344CB8AC3E}">
-        <p14:creationId xmlns:p14="http://schemas.microsoft.com/office/powerpoint/2010/main" val="2035317318"/>
       </p:ext>
     </p:extLst>
   </p:cSld>

--- a/ВКР.pptx
+++ b/ВКР.pptx
@@ -7593,8 +7593,8 @@
           </a:p>
         </p:txBody>
       </p:sp>
-      <mc:AlternateContent xmlns:mc="http://schemas.openxmlformats.org/markup-compatibility/2006">
-        <mc:Choice xmlns:a14="http://schemas.microsoft.com/office/drawing/2010/main" Requires="a14">
+      <mc:AlternateContent xmlns:mc="http://schemas.openxmlformats.org/markup-compatibility/2006" xmlns:a14="http://schemas.microsoft.com/office/drawing/2010/main">
+        <mc:Choice Requires="a14">
           <p:graphicFrame>
             <p:nvGraphicFramePr>
               <p:cNvPr id="9" name="Таблица 8">
@@ -8495,7 +8495,7 @@
                                       <a:schemeClr val="dk1"/>
                                     </a:solidFill>
                                     <a:effectLst/>
-                                    <a:latin typeface="+mn-lt"/>
+                                    <a:latin typeface="Cambria Math" panose="02040503050406030204" pitchFamily="18" charset="0"/>
                                     <a:ea typeface="+mn-ea"/>
                                     <a:cs typeface="+mn-cs"/>
                                   </a:rPr>
@@ -8513,7 +8513,7 @@
                                       <a:schemeClr val="dk1"/>
                                     </a:solidFill>
                                     <a:effectLst/>
-                                    <a:latin typeface="+mn-lt"/>
+                                    <a:latin typeface="Cambria Math" panose="02040503050406030204" pitchFamily="18" charset="0"/>
                                     <a:ea typeface="+mn-ea"/>
                                     <a:cs typeface="+mn-cs"/>
                                   </a:rPr>
@@ -8531,7 +8531,7 @@
                                       <a:schemeClr val="dk1"/>
                                     </a:solidFill>
                                     <a:effectLst/>
-                                    <a:latin typeface="+mn-lt"/>
+                                    <a:latin typeface="Cambria Math" panose="02040503050406030204" pitchFamily="18" charset="0"/>
                                     <a:ea typeface="+mn-ea"/>
                                     <a:cs typeface="+mn-cs"/>
                                   </a:rPr>
@@ -8545,7 +8545,7 @@
                                           <a:schemeClr val="dk1"/>
                                         </a:solidFill>
                                         <a:effectLst/>
-                                        <a:latin typeface="+mn-lt"/>
+                                        <a:latin typeface="Cambria Math" panose="02040503050406030204" pitchFamily="18" charset="0"/>
                                         <a:ea typeface="+mn-ea"/>
                                         <a:cs typeface="+mn-cs"/>
                                       </a:rPr>
@@ -8558,7 +8558,7 @@
                                           <a:schemeClr val="dk1"/>
                                         </a:solidFill>
                                         <a:effectLst/>
-                                        <a:latin typeface="+mn-lt"/>
+                                        <a:latin typeface="Cambria Math" panose="02040503050406030204" pitchFamily="18" charset="0"/>
                                         <a:ea typeface="+mn-ea"/>
                                         <a:cs typeface="+mn-cs"/>
                                       </a:rPr>
@@ -8572,7 +8572,7 @@
                                           <a:schemeClr val="dk1"/>
                                         </a:solidFill>
                                         <a:effectLst/>
-                                        <a:latin typeface="+mn-lt"/>
+                                        <a:latin typeface="Cambria Math" panose="02040503050406030204" pitchFamily="18" charset="0"/>
                                         <a:ea typeface="+mn-ea"/>
                                         <a:cs typeface="+mn-cs"/>
                                       </a:rPr>
@@ -8586,7 +8586,7 @@
                                       <a:schemeClr val="dk1"/>
                                     </a:solidFill>
                                     <a:effectLst/>
-                                    <a:latin typeface="+mn-lt"/>
+                                    <a:latin typeface="Cambria Math" panose="02040503050406030204" pitchFamily="18" charset="0"/>
                                     <a:ea typeface="+mn-ea"/>
                                     <a:cs typeface="+mn-cs"/>
                                   </a:rPr>
@@ -8618,7 +8618,7 @@
                                       <a:schemeClr val="dk1"/>
                                     </a:solidFill>
                                     <a:effectLst/>
-                                    <a:latin typeface="+mn-lt"/>
+                                    <a:latin typeface="Cambria Math" panose="02040503050406030204" pitchFamily="18" charset="0"/>
                                     <a:ea typeface="+mn-ea"/>
                                     <a:cs typeface="+mn-cs"/>
                                   </a:rPr>
@@ -8632,7 +8632,7 @@
                                           <a:schemeClr val="dk1"/>
                                         </a:solidFill>
                                         <a:effectLst/>
-                                        <a:latin typeface="+mn-lt"/>
+                                        <a:latin typeface="Cambria Math" panose="02040503050406030204" pitchFamily="18" charset="0"/>
                                         <a:ea typeface="+mn-ea"/>
                                         <a:cs typeface="+mn-cs"/>
                                       </a:rPr>
@@ -8645,7 +8645,7 @@
                                           <a:schemeClr val="dk1"/>
                                         </a:solidFill>
                                         <a:effectLst/>
-                                        <a:latin typeface="+mn-lt"/>
+                                        <a:latin typeface="Cambria Math" panose="02040503050406030204" pitchFamily="18" charset="0"/>
                                         <a:ea typeface="+mn-ea"/>
                                         <a:cs typeface="+mn-cs"/>
                                       </a:rPr>
@@ -8657,7 +8657,7 @@
                                           <a:schemeClr val="dk1"/>
                                         </a:solidFill>
                                         <a:effectLst/>
-                                        <a:latin typeface="+mn-lt"/>
+                                        <a:latin typeface="Cambria Math" panose="02040503050406030204" pitchFamily="18" charset="0"/>
                                         <a:ea typeface="+mn-ea"/>
                                         <a:cs typeface="+mn-cs"/>
                                       </a:rPr>
@@ -8669,7 +8669,7 @@
                                           <a:schemeClr val="dk1"/>
                                         </a:solidFill>
                                         <a:effectLst/>
-                                        <a:latin typeface="+mn-lt"/>
+                                        <a:latin typeface="Cambria Math" panose="02040503050406030204" pitchFamily="18" charset="0"/>
                                         <a:ea typeface="+mn-ea"/>
                                         <a:cs typeface="+mn-cs"/>
                                       </a:rPr>
@@ -8696,7 +8696,7 @@
             </a:graphic>
           </p:graphicFrame>
         </mc:Choice>
-        <mc:Fallback>
+        <mc:Fallback xmlns="">
           <p:graphicFrame>
             <p:nvGraphicFramePr>
               <p:cNvPr id="9" name="Таблица 8">
@@ -9456,8 +9456,8 @@
           </a:p>
         </p:txBody>
       </p:sp>
-      <mc:AlternateContent xmlns:mc="http://schemas.openxmlformats.org/markup-compatibility/2006">
-        <mc:Choice xmlns:a14="http://schemas.microsoft.com/office/drawing/2010/main" Requires="a14">
+      <mc:AlternateContent xmlns:mc="http://schemas.openxmlformats.org/markup-compatibility/2006" xmlns:a14="http://schemas.microsoft.com/office/drawing/2010/main">
+        <mc:Choice Requires="a14">
           <p:sp>
             <p:nvSpPr>
               <p:cNvPr id="3" name="Объект 2">
@@ -10007,7 +10007,7 @@
                     <m:sSub>
                       <m:sSubPr>
                         <m:ctrlPr>
-                          <a:rPr lang="ru-RU" sz="1600" smtClean="0">
+                          <a:rPr lang="ru-RU" sz="1600" i="1" smtClean="0">
                             <a:effectLst/>
                             <a:latin typeface="Cambria Math" panose="02040503050406030204" pitchFamily="18" charset="0"/>
                           </a:rPr>
@@ -10043,7 +10043,7 @@
                         <m:d>
                           <m:dPr>
                             <m:ctrlPr>
-                              <a:rPr lang="ru-RU" sz="1600">
+                              <a:rPr lang="ru-RU" sz="1600" i="1">
                                 <a:effectLst/>
                                 <a:latin typeface="Cambria Math" panose="02040503050406030204" pitchFamily="18" charset="0"/>
                               </a:rPr>
@@ -10381,7 +10381,7 @@
             </p:txBody>
           </p:sp>
         </mc:Choice>
-        <mc:Fallback>
+        <mc:Fallback xmlns="">
           <p:sp>
             <p:nvSpPr>
               <p:cNvPr id="3" name="Объект 2">
@@ -11635,7 +11635,7 @@
           <a:p>
             <a:r>
               <a:rPr lang="ru-RU" dirty="0"/>
-              <a:t>Объект исследования: сортировка Бэтчера</a:t>
+              <a:t>Устройство сортировки Бэтчера</a:t>
             </a:r>
           </a:p>
         </p:txBody>

--- a/ВКР.pptx
+++ b/ВКР.pptx
@@ -212,7 +212,7 @@
           <a:p>
             <a:fld id="{31713541-B05E-4552-95DD-0156478D5135}" type="datetimeFigureOut">
               <a:rPr lang="ru-RU" smtClean="0"/>
-              <a:t>13.06.2026</a:t>
+              <a:t>22.06.2026</a:t>
             </a:fld>
             <a:endParaRPr lang="ru-RU"/>
           </a:p>
@@ -519,7 +519,7 @@
           <a:p>
             <a:fld id="{ABD338A3-B5FA-4892-8782-04A8FAC2DE2D}" type="datetime1">
               <a:rPr lang="ru-RU" smtClean="0"/>
-              <a:t>13.06.2026</a:t>
+              <a:t>22.06.2026</a:t>
             </a:fld>
             <a:endParaRPr lang="ru-RU"/>
           </a:p>
@@ -940,7 +940,7 @@
           <a:p>
             <a:fld id="{E45DF212-0581-4804-9196-08E59AD85A60}" type="datetime1">
               <a:rPr lang="ru-RU" smtClean="0"/>
-              <a:t>13.06.2026</a:t>
+              <a:t>22.06.2026</a:t>
             </a:fld>
             <a:endParaRPr lang="ru-RU"/>
           </a:p>
@@ -1151,7 +1151,7 @@
           <a:p>
             <a:fld id="{85A33102-27BA-4101-BD19-C265B43D1861}" type="datetime1">
               <a:rPr lang="ru-RU" smtClean="0"/>
-              <a:t>13.06.2026</a:t>
+              <a:t>22.06.2026</a:t>
             </a:fld>
             <a:endParaRPr lang="ru-RU"/>
           </a:p>
@@ -1387,7 +1387,7 @@
           <a:p>
             <a:fld id="{FA39DC75-0073-477D-B85F-B87BD2D9AA66}" type="datetime1">
               <a:rPr lang="ru-RU" smtClean="0"/>
-              <a:t>13.06.2026</a:t>
+              <a:t>22.06.2026</a:t>
             </a:fld>
             <a:endParaRPr lang="ru-RU"/>
           </a:p>
@@ -1677,7 +1677,7 @@
           <a:p>
             <a:fld id="{3826988C-DC8F-439B-AB31-15A4297BC55F}" type="datetime1">
               <a:rPr lang="ru-RU" smtClean="0"/>
-              <a:t>13.06.2026</a:t>
+              <a:t>22.06.2026</a:t>
             </a:fld>
             <a:endParaRPr lang="ru-RU"/>
           </a:p>
@@ -1945,7 +1945,7 @@
           <a:p>
             <a:fld id="{1FA422C7-A0AF-4B73-A3E0-92773191928A}" type="datetime1">
               <a:rPr lang="ru-RU" smtClean="0"/>
-              <a:t>13.06.2026</a:t>
+              <a:t>22.06.2026</a:t>
             </a:fld>
             <a:endParaRPr lang="ru-RU"/>
           </a:p>
@@ -2360,7 +2360,7 @@
           <a:p>
             <a:fld id="{AE075EF7-06F9-47F2-ABB5-15A865F5A607}" type="datetime1">
               <a:rPr lang="ru-RU" smtClean="0"/>
-              <a:t>13.06.2026</a:t>
+              <a:t>22.06.2026</a:t>
             </a:fld>
             <a:endParaRPr lang="ru-RU"/>
           </a:p>
@@ -2504,7 +2504,7 @@
           <a:p>
             <a:fld id="{18133A35-A3AC-4FD5-9F62-E2E842F797D6}" type="datetime1">
               <a:rPr lang="ru-RU" smtClean="0"/>
-              <a:t>13.06.2026</a:t>
+              <a:t>22.06.2026</a:t>
             </a:fld>
             <a:endParaRPr lang="ru-RU"/>
           </a:p>
@@ -2620,7 +2620,7 @@
           <a:p>
             <a:fld id="{C75FB44B-5874-4EB6-914B-68491120A420}" type="datetime1">
               <a:rPr lang="ru-RU" smtClean="0"/>
-              <a:t>13.06.2026</a:t>
+              <a:t>22.06.2026</a:t>
             </a:fld>
             <a:endParaRPr lang="ru-RU"/>
           </a:p>
@@ -2934,7 +2934,7 @@
           <a:p>
             <a:fld id="{DC59103B-4E77-49D0-9E40-D0F96ACD7E42}" type="datetime1">
               <a:rPr lang="ru-RU" smtClean="0"/>
-              <a:t>13.06.2026</a:t>
+              <a:t>22.06.2026</a:t>
             </a:fld>
             <a:endParaRPr lang="ru-RU"/>
           </a:p>
@@ -3225,7 +3225,7 @@
           <a:p>
             <a:fld id="{7F0F4974-916B-4771-921F-D6B7309972A3}" type="datetime1">
               <a:rPr lang="ru-RU" smtClean="0"/>
-              <a:t>13.06.2026</a:t>
+              <a:t>22.06.2026</a:t>
             </a:fld>
             <a:endParaRPr lang="ru-RU"/>
           </a:p>
@@ -3501,7 +3501,7 @@
           <a:p>
             <a:fld id="{2732E4CB-F021-4DE4-87F8-062D97973001}" type="datetime1">
               <a:rPr lang="ru-RU" smtClean="0"/>
-              <a:t>13.06.2026</a:t>
+              <a:t>22.06.2026</a:t>
             </a:fld>
             <a:endParaRPr lang="ru-RU" dirty="0"/>
           </a:p>

--- a/ВКР.pptx
+++ b/ВКР.pptx
@@ -212,7 +212,7 @@
           <a:p>
             <a:fld id="{31713541-B05E-4552-95DD-0156478D5135}" type="datetimeFigureOut">
               <a:rPr lang="ru-RU" smtClean="0"/>
-              <a:t>22.06.2026</a:t>
+              <a:t>24.06.2026</a:t>
             </a:fld>
             <a:endParaRPr lang="ru-RU"/>
           </a:p>
@@ -519,7 +519,7 @@
           <a:p>
             <a:fld id="{ABD338A3-B5FA-4892-8782-04A8FAC2DE2D}" type="datetime1">
               <a:rPr lang="ru-RU" smtClean="0"/>
-              <a:t>22.06.2026</a:t>
+              <a:t>24.06.2026</a:t>
             </a:fld>
             <a:endParaRPr lang="ru-RU"/>
           </a:p>
@@ -940,7 +940,7 @@
           <a:p>
             <a:fld id="{E45DF212-0581-4804-9196-08E59AD85A60}" type="datetime1">
               <a:rPr lang="ru-RU" smtClean="0"/>
-              <a:t>22.06.2026</a:t>
+              <a:t>24.06.2026</a:t>
             </a:fld>
             <a:endParaRPr lang="ru-RU"/>
           </a:p>
@@ -1151,7 +1151,7 @@
           <a:p>
             <a:fld id="{85A33102-27BA-4101-BD19-C265B43D1861}" type="datetime1">
               <a:rPr lang="ru-RU" smtClean="0"/>
-              <a:t>22.06.2026</a:t>
+              <a:t>24.06.2026</a:t>
             </a:fld>
             <a:endParaRPr lang="ru-RU"/>
           </a:p>
@@ -1387,7 +1387,7 @@
           <a:p>
             <a:fld id="{FA39DC75-0073-477D-B85F-B87BD2D9AA66}" type="datetime1">
               <a:rPr lang="ru-RU" smtClean="0"/>
-              <a:t>22.06.2026</a:t>
+              <a:t>24.06.2026</a:t>
             </a:fld>
             <a:endParaRPr lang="ru-RU"/>
           </a:p>
@@ -1677,7 +1677,7 @@
           <a:p>
             <a:fld id="{3826988C-DC8F-439B-AB31-15A4297BC55F}" type="datetime1">
               <a:rPr lang="ru-RU" smtClean="0"/>
-              <a:t>22.06.2026</a:t>
+              <a:t>24.06.2026</a:t>
             </a:fld>
             <a:endParaRPr lang="ru-RU"/>
           </a:p>
@@ -1945,7 +1945,7 @@
           <a:p>
             <a:fld id="{1FA422C7-A0AF-4B73-A3E0-92773191928A}" type="datetime1">
               <a:rPr lang="ru-RU" smtClean="0"/>
-              <a:t>22.06.2026</a:t>
+              <a:t>24.06.2026</a:t>
             </a:fld>
             <a:endParaRPr lang="ru-RU"/>
           </a:p>
@@ -2360,7 +2360,7 @@
           <a:p>
             <a:fld id="{AE075EF7-06F9-47F2-ABB5-15A865F5A607}" type="datetime1">
               <a:rPr lang="ru-RU" smtClean="0"/>
-              <a:t>22.06.2026</a:t>
+              <a:t>24.06.2026</a:t>
             </a:fld>
             <a:endParaRPr lang="ru-RU"/>
           </a:p>
@@ -2504,7 +2504,7 @@
           <a:p>
             <a:fld id="{18133A35-A3AC-4FD5-9F62-E2E842F797D6}" type="datetime1">
               <a:rPr lang="ru-RU" smtClean="0"/>
-              <a:t>22.06.2026</a:t>
+              <a:t>24.06.2026</a:t>
             </a:fld>
             <a:endParaRPr lang="ru-RU"/>
           </a:p>
@@ -2620,7 +2620,7 @@
           <a:p>
             <a:fld id="{C75FB44B-5874-4EB6-914B-68491120A420}" type="datetime1">
               <a:rPr lang="ru-RU" smtClean="0"/>
-              <a:t>22.06.2026</a:t>
+              <a:t>24.06.2026</a:t>
             </a:fld>
             <a:endParaRPr lang="ru-RU"/>
           </a:p>
@@ -2934,7 +2934,7 @@
           <a:p>
             <a:fld id="{DC59103B-4E77-49D0-9E40-D0F96ACD7E42}" type="datetime1">
               <a:rPr lang="ru-RU" smtClean="0"/>
-              <a:t>22.06.2026</a:t>
+              <a:t>24.06.2026</a:t>
             </a:fld>
             <a:endParaRPr lang="ru-RU"/>
           </a:p>
@@ -3225,7 +3225,7 @@
           <a:p>
             <a:fld id="{7F0F4974-916B-4771-921F-D6B7309972A3}" type="datetime1">
               <a:rPr lang="ru-RU" smtClean="0"/>
-              <a:t>22.06.2026</a:t>
+              <a:t>24.06.2026</a:t>
             </a:fld>
             <a:endParaRPr lang="ru-RU"/>
           </a:p>
@@ -3501,7 +3501,7 @@
           <a:p>
             <a:fld id="{2732E4CB-F021-4DE4-87F8-062D97973001}" type="datetime1">
               <a:rPr lang="ru-RU" smtClean="0"/>
-              <a:t>22.06.2026</a:t>
+              <a:t>24.06.2026</a:t>
             </a:fld>
             <a:endParaRPr lang="ru-RU" dirty="0"/>
           </a:p>
@@ -12927,8 +12927,8 @@
           </a:p>
         </p:txBody>
       </p:sp>
-      <mc:AlternateContent xmlns:mc="http://schemas.openxmlformats.org/markup-compatibility/2006" xmlns:a14="http://schemas.microsoft.com/office/drawing/2010/main">
-        <mc:Choice Requires="a14">
+      <mc:AlternateContent xmlns:mc="http://schemas.openxmlformats.org/markup-compatibility/2006">
+        <mc:Choice xmlns:a14="http://schemas.microsoft.com/office/drawing/2010/main" Requires="a14">
           <p:sp>
             <p:nvSpPr>
               <p:cNvPr id="3" name="Объект 2">
@@ -12962,7 +12962,7 @@
                     <a:latin typeface="Times New Roman" panose="02020603050405020304" pitchFamily="18" charset="0"/>
                     <a:ea typeface="Times New Roman" panose="02020603050405020304" pitchFamily="18" charset="0"/>
                   </a:rPr>
-                  <a:t>О</a:t>
+                  <a:t>Асимптотическая сложность о</a:t>
                 </a:r>
                 <a:r>
                   <a:rPr lang="ru-RU" sz="1800" dirty="0">
@@ -13735,7 +13735,7 @@
                     <a:latin typeface="Times New Roman" panose="02020603050405020304" pitchFamily="18" charset="0"/>
                     <a:ea typeface="Times New Roman" panose="02020603050405020304" pitchFamily="18" charset="0"/>
                   </a:rPr>
-                  <a:t>Глубина сортировочной сети Бэтчера формула</a:t>
+                  <a:t>Глубина сортировочной сети Бэтчера</a:t>
                 </a:r>
                 <a:r>
                   <a:rPr lang="en-US" sz="1800" dirty="0">
@@ -14071,7 +14071,7 @@
             </p:txBody>
           </p:sp>
         </mc:Choice>
-        <mc:Fallback xmlns="">
+        <mc:Fallback>
           <p:sp>
             <p:nvSpPr>
               <p:cNvPr id="3" name="Объект 2">
